--- a/submission/Presentation.pptx
+++ b/submission/Presentation.pptx
@@ -13451,6 +13451,13 @@
   <p:clrMapOvr>
     <a:masterClrMapping/>
   </p:clrMapOvr>
+  <p:timing>
+    <p:tnLst>
+      <p:par>
+        <p:cTn id="1" dur="indefinite" restart="never" nodeType="tmRoot"/>
+      </p:par>
+    </p:tnLst>
+  </p:timing>
 </p:sld>
 </file>
 
@@ -13546,32 +13553,6 @@
               <a:t>Team Introduction</a:t>
             </a:r>
             <a:endParaRPr lang="en-IN" sz="3000" b="1" dirty="0"/>
-          </a:p>
-        </p:txBody>
-      </p:sp>
-      <p:sp>
-        <p:nvSpPr>
-          <p:cNvPr id="3" name="Content Placeholder 2"/>
-          <p:cNvSpPr>
-            <a:spLocks noGrp="1"/>
-          </p:cNvSpPr>
-          <p:nvPr>
-            <p:ph idx="1"/>
-          </p:nvPr>
-        </p:nvSpPr>
-        <p:spPr>
-          <a:xfrm>
-            <a:off x="646544" y="5434149"/>
-            <a:ext cx="11139055" cy="742814"/>
-          </a:xfrm>
-        </p:spPr>
-        <p:txBody>
-          <a:bodyPr>
-            <a:normAutofit/>
-          </a:bodyPr>
-          <a:lstStyle/>
-          <a:p>
-            <a:endParaRPr lang="en-IN" sz="1400" dirty="0"/>
           </a:p>
         </p:txBody>
       </p:sp>
@@ -14236,7 +14217,7 @@
         </p:nvSpPr>
         <p:spPr>
           <a:xfrm>
-            <a:off x="3784832" y="3666345"/>
+            <a:off x="4226560" y="3657110"/>
             <a:ext cx="2295237" cy="307777"/>
           </a:xfrm>
           <a:prstGeom prst="rect">
@@ -14256,7 +14237,7 @@
                   <a:schemeClr val="bg1"/>
                 </a:solidFill>
               </a:rPr>
-              <a:t>Freelancing Consultant</a:t>
+              <a:t>Consultant</a:t>
             </a:r>
           </a:p>
         </p:txBody>
@@ -14332,6 +14313,126 @@
           </a:p>
         </p:txBody>
       </p:sp>
+      <p:pic>
+        <p:nvPicPr>
+          <p:cNvPr id="32" name="Picture 31"/>
+          <p:cNvPicPr>
+            <a:picLocks noChangeAspect="1"/>
+          </p:cNvPicPr>
+          <p:nvPr/>
+        </p:nvPicPr>
+        <p:blipFill>
+          <a:blip r:embed="rId3" cstate="print">
+            <a:extLst>
+              <a:ext uri="{28A0092B-C50C-407E-A947-70E740481C1C}">
+                <a14:useLocalDpi xmlns:a14="http://schemas.microsoft.com/office/drawing/2010/main" val="0"/>
+              </a:ext>
+            </a:extLst>
+          </a:blip>
+          <a:stretch>
+            <a:fillRect/>
+          </a:stretch>
+        </p:blipFill>
+        <p:spPr>
+          <a:xfrm>
+            <a:off x="3954635" y="1890537"/>
+            <a:ext cx="1440000" cy="1440000"/>
+          </a:xfrm>
+          <a:prstGeom prst="rect">
+            <a:avLst/>
+          </a:prstGeom>
+        </p:spPr>
+      </p:pic>
+      <p:pic>
+        <p:nvPicPr>
+          <p:cNvPr id="34" name="Picture 33"/>
+          <p:cNvPicPr>
+            <a:picLocks noChangeAspect="1"/>
+          </p:cNvPicPr>
+          <p:nvPr/>
+        </p:nvPicPr>
+        <p:blipFill>
+          <a:blip r:embed="rId4" cstate="print">
+            <a:extLst>
+              <a:ext uri="{28A0092B-C50C-407E-A947-70E740481C1C}">
+                <a14:useLocalDpi xmlns:a14="http://schemas.microsoft.com/office/drawing/2010/main" val="0"/>
+              </a:ext>
+            </a:extLst>
+          </a:blip>
+          <a:stretch>
+            <a:fillRect/>
+          </a:stretch>
+        </p:blipFill>
+        <p:spPr>
+          <a:xfrm>
+            <a:off x="1439138" y="1885334"/>
+            <a:ext cx="1440000" cy="1440000"/>
+          </a:xfrm>
+          <a:prstGeom prst="rect">
+            <a:avLst/>
+          </a:prstGeom>
+        </p:spPr>
+      </p:pic>
+      <p:pic>
+        <p:nvPicPr>
+          <p:cNvPr id="35" name="Picture 34"/>
+          <p:cNvPicPr>
+            <a:picLocks noChangeAspect="1"/>
+          </p:cNvPicPr>
+          <p:nvPr/>
+        </p:nvPicPr>
+        <p:blipFill>
+          <a:blip r:embed="rId5" cstate="print">
+            <a:extLst>
+              <a:ext uri="{28A0092B-C50C-407E-A947-70E740481C1C}">
+                <a14:useLocalDpi xmlns:a14="http://schemas.microsoft.com/office/drawing/2010/main" val="0"/>
+              </a:ext>
+            </a:extLst>
+          </a:blip>
+          <a:stretch>
+            <a:fillRect/>
+          </a:stretch>
+        </p:blipFill>
+        <p:spPr>
+          <a:xfrm>
+            <a:off x="6559178" y="1880436"/>
+            <a:ext cx="1440000" cy="1440000"/>
+          </a:xfrm>
+          <a:prstGeom prst="rect">
+            <a:avLst/>
+          </a:prstGeom>
+        </p:spPr>
+      </p:pic>
+      <p:pic>
+        <p:nvPicPr>
+          <p:cNvPr id="36" name="Picture 35"/>
+          <p:cNvPicPr>
+            <a:picLocks noChangeAspect="1"/>
+          </p:cNvPicPr>
+          <p:nvPr/>
+        </p:nvPicPr>
+        <p:blipFill>
+          <a:blip r:embed="rId6" cstate="print">
+            <a:extLst>
+              <a:ext uri="{28A0092B-C50C-407E-A947-70E740481C1C}">
+                <a14:useLocalDpi xmlns:a14="http://schemas.microsoft.com/office/drawing/2010/main" val="0"/>
+              </a:ext>
+            </a:extLst>
+          </a:blip>
+          <a:stretch>
+            <a:fillRect/>
+          </a:stretch>
+        </p:blipFill>
+        <p:spPr>
+          <a:xfrm>
+            <a:off x="8982800" y="1890521"/>
+            <a:ext cx="1440000" cy="1440000"/>
+          </a:xfrm>
+          <a:prstGeom prst="rect">
+            <a:avLst/>
+          </a:prstGeom>
+        </p:spPr>
+      </p:pic>
     </p:spTree>
     <p:extLst>
       <p:ext uri="{BB962C8B-B14F-4D97-AF65-F5344CB8AC3E}">

--- a/submission/Presentation.pptx
+++ b/submission/Presentation.pptx
@@ -5,7 +5,7 @@
     <p:sldMasterId id="2147483648" r:id="rId1"/>
   </p:sldMasterIdLst>
   <p:notesMasterIdLst>
-    <p:notesMasterId r:id="rId21"/>
+    <p:notesMasterId r:id="rId22"/>
   </p:notesMasterIdLst>
   <p:sldIdLst>
     <p:sldId id="256" r:id="rId2"/>
@@ -22,11 +22,12 @@
     <p:sldId id="274" r:id="rId13"/>
     <p:sldId id="268" r:id="rId14"/>
     <p:sldId id="265" r:id="rId15"/>
-    <p:sldId id="266" r:id="rId16"/>
-    <p:sldId id="273" r:id="rId17"/>
-    <p:sldId id="267" r:id="rId18"/>
-    <p:sldId id="269" r:id="rId19"/>
-    <p:sldId id="270" r:id="rId20"/>
+    <p:sldId id="267" r:id="rId16"/>
+    <p:sldId id="266" r:id="rId17"/>
+    <p:sldId id="273" r:id="rId18"/>
+    <p:sldId id="275" r:id="rId19"/>
+    <p:sldId id="269" r:id="rId20"/>
+    <p:sldId id="270" r:id="rId21"/>
   </p:sldIdLst>
   <p:sldSz cx="12192000" cy="6858000"/>
   <p:notesSz cx="6858000" cy="9144000"/>
@@ -134,7 +135,1073 @@
 </file>
 
 <file path=ppt/charts/chart1.xml><?xml version="1.0" encoding="utf-8"?>
-<c:chartSpace xmlns:c="http://schemas.openxmlformats.org/drawingml/2006/chart" xmlns:a="http://schemas.openxmlformats.org/drawingml/2006/main" xmlns:r="http://schemas.openxmlformats.org/officeDocument/2006/relationships">
+<c:chartSpace xmlns:c="http://schemas.openxmlformats.org/drawingml/2006/chart" xmlns:a="http://schemas.openxmlformats.org/drawingml/2006/main" xmlns:r="http://schemas.openxmlformats.org/officeDocument/2006/relationships" xmlns:c16r2="http://schemas.microsoft.com/office/drawing/2015/06/chart">
+  <c:date1904 val="0"/>
+  <c:lang val="en-US"/>
+  <c:roundedCorners val="0"/>
+  <mc:AlternateContent xmlns:mc="http://schemas.openxmlformats.org/markup-compatibility/2006">
+    <mc:Choice xmlns:c14="http://schemas.microsoft.com/office/drawing/2007/8/2/chart" Requires="c14">
+      <c14:style val="102"/>
+    </mc:Choice>
+    <mc:Fallback>
+      <c:style val="2"/>
+    </mc:Fallback>
+  </mc:AlternateContent>
+  <c:chart>
+    <c:autoTitleDeleted val="1"/>
+    <c:plotArea>
+      <c:layout/>
+      <c:scatterChart>
+        <c:scatterStyle val="smoothMarker"/>
+        <c:varyColors val="0"/>
+        <c:ser>
+          <c:idx val="0"/>
+          <c:order val="0"/>
+          <c:tx>
+            <c:strRef>
+              <c:f>yolotrainingresults!$C$1</c:f>
+              <c:strCache>
+                <c:ptCount val="1"/>
+                <c:pt idx="0">
+                  <c:v>train/box_loss</c:v>
+                </c:pt>
+              </c:strCache>
+            </c:strRef>
+          </c:tx>
+          <c:spPr>
+            <a:ln w="19050" cap="rnd">
+              <a:solidFill>
+                <a:schemeClr val="accent1"/>
+              </a:solidFill>
+              <a:round/>
+            </a:ln>
+            <a:effectLst/>
+          </c:spPr>
+          <c:marker>
+            <c:symbol val="circle"/>
+            <c:size val="5"/>
+            <c:spPr>
+              <a:solidFill>
+                <a:schemeClr val="accent1"/>
+              </a:solidFill>
+              <a:ln w="9525">
+                <a:solidFill>
+                  <a:schemeClr val="accent1"/>
+                </a:solidFill>
+              </a:ln>
+              <a:effectLst/>
+            </c:spPr>
+          </c:marker>
+          <c:xVal>
+            <c:numRef>
+              <c:f>yolotrainingresults!$A$2:$A$51</c:f>
+              <c:numCache>
+                <c:formatCode>General</c:formatCode>
+                <c:ptCount val="50"/>
+                <c:pt idx="0">
+                  <c:v>1</c:v>
+                </c:pt>
+                <c:pt idx="1">
+                  <c:v>2</c:v>
+                </c:pt>
+                <c:pt idx="2">
+                  <c:v>3</c:v>
+                </c:pt>
+                <c:pt idx="3">
+                  <c:v>4</c:v>
+                </c:pt>
+                <c:pt idx="4">
+                  <c:v>5</c:v>
+                </c:pt>
+                <c:pt idx="5">
+                  <c:v>6</c:v>
+                </c:pt>
+                <c:pt idx="6">
+                  <c:v>7</c:v>
+                </c:pt>
+                <c:pt idx="7">
+                  <c:v>8</c:v>
+                </c:pt>
+                <c:pt idx="8">
+                  <c:v>9</c:v>
+                </c:pt>
+                <c:pt idx="9">
+                  <c:v>10</c:v>
+                </c:pt>
+                <c:pt idx="10">
+                  <c:v>11</c:v>
+                </c:pt>
+                <c:pt idx="11">
+                  <c:v>12</c:v>
+                </c:pt>
+                <c:pt idx="12">
+                  <c:v>13</c:v>
+                </c:pt>
+                <c:pt idx="13">
+                  <c:v>14</c:v>
+                </c:pt>
+                <c:pt idx="14">
+                  <c:v>15</c:v>
+                </c:pt>
+                <c:pt idx="15">
+                  <c:v>16</c:v>
+                </c:pt>
+                <c:pt idx="16">
+                  <c:v>17</c:v>
+                </c:pt>
+                <c:pt idx="17">
+                  <c:v>18</c:v>
+                </c:pt>
+                <c:pt idx="18">
+                  <c:v>19</c:v>
+                </c:pt>
+                <c:pt idx="19">
+                  <c:v>20</c:v>
+                </c:pt>
+                <c:pt idx="20">
+                  <c:v>21</c:v>
+                </c:pt>
+                <c:pt idx="21">
+                  <c:v>22</c:v>
+                </c:pt>
+                <c:pt idx="22">
+                  <c:v>23</c:v>
+                </c:pt>
+                <c:pt idx="23">
+                  <c:v>24</c:v>
+                </c:pt>
+                <c:pt idx="24">
+                  <c:v>25</c:v>
+                </c:pt>
+                <c:pt idx="25">
+                  <c:v>26</c:v>
+                </c:pt>
+                <c:pt idx="26">
+                  <c:v>27</c:v>
+                </c:pt>
+                <c:pt idx="27">
+                  <c:v>28</c:v>
+                </c:pt>
+                <c:pt idx="28">
+                  <c:v>29</c:v>
+                </c:pt>
+                <c:pt idx="29">
+                  <c:v>30</c:v>
+                </c:pt>
+                <c:pt idx="30">
+                  <c:v>31</c:v>
+                </c:pt>
+                <c:pt idx="31">
+                  <c:v>32</c:v>
+                </c:pt>
+                <c:pt idx="32">
+                  <c:v>33</c:v>
+                </c:pt>
+                <c:pt idx="33">
+                  <c:v>34</c:v>
+                </c:pt>
+                <c:pt idx="34">
+                  <c:v>35</c:v>
+                </c:pt>
+                <c:pt idx="35">
+                  <c:v>36</c:v>
+                </c:pt>
+                <c:pt idx="36">
+                  <c:v>37</c:v>
+                </c:pt>
+                <c:pt idx="37">
+                  <c:v>38</c:v>
+                </c:pt>
+                <c:pt idx="38">
+                  <c:v>39</c:v>
+                </c:pt>
+                <c:pt idx="39">
+                  <c:v>40</c:v>
+                </c:pt>
+                <c:pt idx="40">
+                  <c:v>41</c:v>
+                </c:pt>
+                <c:pt idx="41">
+                  <c:v>42</c:v>
+                </c:pt>
+                <c:pt idx="42">
+                  <c:v>43</c:v>
+                </c:pt>
+                <c:pt idx="43">
+                  <c:v>44</c:v>
+                </c:pt>
+                <c:pt idx="44">
+                  <c:v>45</c:v>
+                </c:pt>
+                <c:pt idx="45">
+                  <c:v>46</c:v>
+                </c:pt>
+                <c:pt idx="46">
+                  <c:v>47</c:v>
+                </c:pt>
+                <c:pt idx="47">
+                  <c:v>48</c:v>
+                </c:pt>
+                <c:pt idx="48">
+                  <c:v>49</c:v>
+                </c:pt>
+                <c:pt idx="49">
+                  <c:v>50</c:v>
+                </c:pt>
+              </c:numCache>
+            </c:numRef>
+          </c:xVal>
+          <c:yVal>
+            <c:numRef>
+              <c:f>yolotrainingresults!$C$2:$C$51</c:f>
+              <c:numCache>
+                <c:formatCode>General</c:formatCode>
+                <c:ptCount val="50"/>
+                <c:pt idx="0">
+                  <c:v>2.1082399999999999</c:v>
+                </c:pt>
+                <c:pt idx="1">
+                  <c:v>1.60215</c:v>
+                </c:pt>
+                <c:pt idx="2">
+                  <c:v>1.56382</c:v>
+                </c:pt>
+                <c:pt idx="3">
+                  <c:v>1.5727599999999999</c:v>
+                </c:pt>
+                <c:pt idx="4">
+                  <c:v>1.53806</c:v>
+                </c:pt>
+                <c:pt idx="5">
+                  <c:v>1.5072700000000001</c:v>
+                </c:pt>
+                <c:pt idx="6">
+                  <c:v>1.48868</c:v>
+                </c:pt>
+                <c:pt idx="7">
+                  <c:v>1.4878899999999999</c:v>
+                </c:pt>
+                <c:pt idx="8">
+                  <c:v>1.46665</c:v>
+                </c:pt>
+                <c:pt idx="9">
+                  <c:v>1.4710099999999999</c:v>
+                </c:pt>
+                <c:pt idx="10">
+                  <c:v>1.45428</c:v>
+                </c:pt>
+                <c:pt idx="11">
+                  <c:v>1.4535899999999999</c:v>
+                </c:pt>
+                <c:pt idx="12">
+                  <c:v>1.4295899999999999</c:v>
+                </c:pt>
+                <c:pt idx="13">
+                  <c:v>1.4459299999999999</c:v>
+                </c:pt>
+                <c:pt idx="14">
+                  <c:v>1.41774</c:v>
+                </c:pt>
+                <c:pt idx="15">
+                  <c:v>1.4288000000000001</c:v>
+                </c:pt>
+                <c:pt idx="16">
+                  <c:v>1.4165399999999999</c:v>
+                </c:pt>
+                <c:pt idx="17">
+                  <c:v>1.4129100000000001</c:v>
+                </c:pt>
+                <c:pt idx="18">
+                  <c:v>1.40038</c:v>
+                </c:pt>
+                <c:pt idx="19">
+                  <c:v>1.3912800000000001</c:v>
+                </c:pt>
+                <c:pt idx="20">
+                  <c:v>1.38252</c:v>
+                </c:pt>
+                <c:pt idx="21">
+                  <c:v>1.3787</c:v>
+                </c:pt>
+                <c:pt idx="22">
+                  <c:v>1.37015</c:v>
+                </c:pt>
+                <c:pt idx="23">
+                  <c:v>1.3652899999999999</c:v>
+                </c:pt>
+                <c:pt idx="24">
+                  <c:v>1.3683799999999999</c:v>
+                </c:pt>
+                <c:pt idx="25">
+                  <c:v>1.33378</c:v>
+                </c:pt>
+                <c:pt idx="26">
+                  <c:v>1.3346899999999999</c:v>
+                </c:pt>
+                <c:pt idx="27">
+                  <c:v>1.34182</c:v>
+                </c:pt>
+                <c:pt idx="28">
+                  <c:v>1.33175</c:v>
+                </c:pt>
+                <c:pt idx="29">
+                  <c:v>1.3166</c:v>
+                </c:pt>
+                <c:pt idx="30">
+                  <c:v>1.32233</c:v>
+                </c:pt>
+                <c:pt idx="31">
+                  <c:v>1.30199</c:v>
+                </c:pt>
+                <c:pt idx="32">
+                  <c:v>1.3028</c:v>
+                </c:pt>
+                <c:pt idx="33">
+                  <c:v>1.2779199999999999</c:v>
+                </c:pt>
+                <c:pt idx="34">
+                  <c:v>1.2829600000000001</c:v>
+                </c:pt>
+                <c:pt idx="35">
+                  <c:v>1.2846</c:v>
+                </c:pt>
+                <c:pt idx="36">
+                  <c:v>1.28308</c:v>
+                </c:pt>
+                <c:pt idx="37">
+                  <c:v>1.28183</c:v>
+                </c:pt>
+                <c:pt idx="38">
+                  <c:v>1.2729600000000001</c:v>
+                </c:pt>
+                <c:pt idx="39">
+                  <c:v>1.2579899999999999</c:v>
+                </c:pt>
+                <c:pt idx="40">
+                  <c:v>1.2523899999999999</c:v>
+                </c:pt>
+                <c:pt idx="41">
+                  <c:v>1.24048</c:v>
+                </c:pt>
+                <c:pt idx="42">
+                  <c:v>1.2247399999999999</c:v>
+                </c:pt>
+                <c:pt idx="43">
+                  <c:v>1.2168300000000001</c:v>
+                </c:pt>
+                <c:pt idx="44">
+                  <c:v>1.2045300000000001</c:v>
+                </c:pt>
+                <c:pt idx="45">
+                  <c:v>1.2090799999999999</c:v>
+                </c:pt>
+                <c:pt idx="46">
+                  <c:v>1.2029700000000001</c:v>
+                </c:pt>
+                <c:pt idx="47">
+                  <c:v>1.1883300000000001</c:v>
+                </c:pt>
+                <c:pt idx="48">
+                  <c:v>1.1802999999999999</c:v>
+                </c:pt>
+                <c:pt idx="49">
+                  <c:v>1.16517</c:v>
+                </c:pt>
+              </c:numCache>
+            </c:numRef>
+          </c:yVal>
+          <c:smooth val="1"/>
+          <c:extLst>
+            <c:ext xmlns:c16="http://schemas.microsoft.com/office/drawing/2014/chart" uri="{C3380CC4-5D6E-409C-BE32-E72D297353CC}">
+              <c16:uniqueId val="{00000000-3740-4406-9F3E-727CF1020690}"/>
+            </c:ext>
+          </c:extLst>
+        </c:ser>
+        <c:ser>
+          <c:idx val="1"/>
+          <c:order val="1"/>
+          <c:tx>
+            <c:strRef>
+              <c:f>yolotrainingresults!$J$1</c:f>
+              <c:strCache>
+                <c:ptCount val="1"/>
+                <c:pt idx="0">
+                  <c:v>val/box_loss</c:v>
+                </c:pt>
+              </c:strCache>
+            </c:strRef>
+          </c:tx>
+          <c:spPr>
+            <a:ln w="19050" cap="rnd">
+              <a:solidFill>
+                <a:schemeClr val="accent2"/>
+              </a:solidFill>
+              <a:round/>
+            </a:ln>
+            <a:effectLst/>
+          </c:spPr>
+          <c:marker>
+            <c:symbol val="circle"/>
+            <c:size val="5"/>
+            <c:spPr>
+              <a:solidFill>
+                <a:schemeClr val="accent2"/>
+              </a:solidFill>
+              <a:ln w="9525">
+                <a:solidFill>
+                  <a:schemeClr val="accent2"/>
+                </a:solidFill>
+              </a:ln>
+              <a:effectLst/>
+            </c:spPr>
+          </c:marker>
+          <c:xVal>
+            <c:numRef>
+              <c:f>yolotrainingresults!$A$2:$A$51</c:f>
+              <c:numCache>
+                <c:formatCode>General</c:formatCode>
+                <c:ptCount val="50"/>
+                <c:pt idx="0">
+                  <c:v>1</c:v>
+                </c:pt>
+                <c:pt idx="1">
+                  <c:v>2</c:v>
+                </c:pt>
+                <c:pt idx="2">
+                  <c:v>3</c:v>
+                </c:pt>
+                <c:pt idx="3">
+                  <c:v>4</c:v>
+                </c:pt>
+                <c:pt idx="4">
+                  <c:v>5</c:v>
+                </c:pt>
+                <c:pt idx="5">
+                  <c:v>6</c:v>
+                </c:pt>
+                <c:pt idx="6">
+                  <c:v>7</c:v>
+                </c:pt>
+                <c:pt idx="7">
+                  <c:v>8</c:v>
+                </c:pt>
+                <c:pt idx="8">
+                  <c:v>9</c:v>
+                </c:pt>
+                <c:pt idx="9">
+                  <c:v>10</c:v>
+                </c:pt>
+                <c:pt idx="10">
+                  <c:v>11</c:v>
+                </c:pt>
+                <c:pt idx="11">
+                  <c:v>12</c:v>
+                </c:pt>
+                <c:pt idx="12">
+                  <c:v>13</c:v>
+                </c:pt>
+                <c:pt idx="13">
+                  <c:v>14</c:v>
+                </c:pt>
+                <c:pt idx="14">
+                  <c:v>15</c:v>
+                </c:pt>
+                <c:pt idx="15">
+                  <c:v>16</c:v>
+                </c:pt>
+                <c:pt idx="16">
+                  <c:v>17</c:v>
+                </c:pt>
+                <c:pt idx="17">
+                  <c:v>18</c:v>
+                </c:pt>
+                <c:pt idx="18">
+                  <c:v>19</c:v>
+                </c:pt>
+                <c:pt idx="19">
+                  <c:v>20</c:v>
+                </c:pt>
+                <c:pt idx="20">
+                  <c:v>21</c:v>
+                </c:pt>
+                <c:pt idx="21">
+                  <c:v>22</c:v>
+                </c:pt>
+                <c:pt idx="22">
+                  <c:v>23</c:v>
+                </c:pt>
+                <c:pt idx="23">
+                  <c:v>24</c:v>
+                </c:pt>
+                <c:pt idx="24">
+                  <c:v>25</c:v>
+                </c:pt>
+                <c:pt idx="25">
+                  <c:v>26</c:v>
+                </c:pt>
+                <c:pt idx="26">
+                  <c:v>27</c:v>
+                </c:pt>
+                <c:pt idx="27">
+                  <c:v>28</c:v>
+                </c:pt>
+                <c:pt idx="28">
+                  <c:v>29</c:v>
+                </c:pt>
+                <c:pt idx="29">
+                  <c:v>30</c:v>
+                </c:pt>
+                <c:pt idx="30">
+                  <c:v>31</c:v>
+                </c:pt>
+                <c:pt idx="31">
+                  <c:v>32</c:v>
+                </c:pt>
+                <c:pt idx="32">
+                  <c:v>33</c:v>
+                </c:pt>
+                <c:pt idx="33">
+                  <c:v>34</c:v>
+                </c:pt>
+                <c:pt idx="34">
+                  <c:v>35</c:v>
+                </c:pt>
+                <c:pt idx="35">
+                  <c:v>36</c:v>
+                </c:pt>
+                <c:pt idx="36">
+                  <c:v>37</c:v>
+                </c:pt>
+                <c:pt idx="37">
+                  <c:v>38</c:v>
+                </c:pt>
+                <c:pt idx="38">
+                  <c:v>39</c:v>
+                </c:pt>
+                <c:pt idx="39">
+                  <c:v>40</c:v>
+                </c:pt>
+                <c:pt idx="40">
+                  <c:v>41</c:v>
+                </c:pt>
+                <c:pt idx="41">
+                  <c:v>42</c:v>
+                </c:pt>
+                <c:pt idx="42">
+                  <c:v>43</c:v>
+                </c:pt>
+                <c:pt idx="43">
+                  <c:v>44</c:v>
+                </c:pt>
+                <c:pt idx="44">
+                  <c:v>45</c:v>
+                </c:pt>
+                <c:pt idx="45">
+                  <c:v>46</c:v>
+                </c:pt>
+                <c:pt idx="46">
+                  <c:v>47</c:v>
+                </c:pt>
+                <c:pt idx="47">
+                  <c:v>48</c:v>
+                </c:pt>
+                <c:pt idx="48">
+                  <c:v>49</c:v>
+                </c:pt>
+                <c:pt idx="49">
+                  <c:v>50</c:v>
+                </c:pt>
+              </c:numCache>
+            </c:numRef>
+          </c:xVal>
+          <c:yVal>
+            <c:numRef>
+              <c:f>yolotrainingresults!$J$2:$J$51</c:f>
+              <c:numCache>
+                <c:formatCode>General</c:formatCode>
+                <c:ptCount val="50"/>
+                <c:pt idx="0">
+                  <c:v>1.68133</c:v>
+                </c:pt>
+                <c:pt idx="1">
+                  <c:v>1.58388</c:v>
+                </c:pt>
+                <c:pt idx="2">
+                  <c:v>1.5939099999999999</c:v>
+                </c:pt>
+                <c:pt idx="3">
+                  <c:v>1.5428500000000001</c:v>
+                </c:pt>
+                <c:pt idx="4">
+                  <c:v>1.53803</c:v>
+                </c:pt>
+                <c:pt idx="5">
+                  <c:v>1.55088</c:v>
+                </c:pt>
+                <c:pt idx="6">
+                  <c:v>1.5863700000000001</c:v>
+                </c:pt>
+                <c:pt idx="7">
+                  <c:v>1.4911700000000001</c:v>
+                </c:pt>
+                <c:pt idx="8">
+                  <c:v>1.5194700000000001</c:v>
+                </c:pt>
+                <c:pt idx="9">
+                  <c:v>1.49881</c:v>
+                </c:pt>
+                <c:pt idx="10">
+                  <c:v>1.4906699999999999</c:v>
+                </c:pt>
+                <c:pt idx="11">
+                  <c:v>1.4835700000000001</c:v>
+                </c:pt>
+                <c:pt idx="12">
+                  <c:v>1.48377</c:v>
+                </c:pt>
+                <c:pt idx="13">
+                  <c:v>1.4596</c:v>
+                </c:pt>
+                <c:pt idx="14">
+                  <c:v>1.4465300000000001</c:v>
+                </c:pt>
+                <c:pt idx="15">
+                  <c:v>1.4879100000000001</c:v>
+                </c:pt>
+                <c:pt idx="16">
+                  <c:v>1.4590399999999999</c:v>
+                </c:pt>
+                <c:pt idx="17">
+                  <c:v>1.42903</c:v>
+                </c:pt>
+                <c:pt idx="18">
+                  <c:v>1.4976400000000001</c:v>
+                </c:pt>
+                <c:pt idx="19">
+                  <c:v>1.4438</c:v>
+                </c:pt>
+                <c:pt idx="20">
+                  <c:v>1.5338799999999999</c:v>
+                </c:pt>
+                <c:pt idx="21">
+                  <c:v>1.4656400000000001</c:v>
+                </c:pt>
+                <c:pt idx="22">
+                  <c:v>1.38087</c:v>
+                </c:pt>
+                <c:pt idx="23">
+                  <c:v>1.3513299999999999</c:v>
+                </c:pt>
+                <c:pt idx="24">
+                  <c:v>1.4383300000000001</c:v>
+                </c:pt>
+                <c:pt idx="25">
+                  <c:v>1.3952199999999999</c:v>
+                </c:pt>
+                <c:pt idx="26">
+                  <c:v>1.35511</c:v>
+                </c:pt>
+                <c:pt idx="27">
+                  <c:v>1.36788</c:v>
+                </c:pt>
+                <c:pt idx="28">
+                  <c:v>1.3248800000000001</c:v>
+                </c:pt>
+                <c:pt idx="29">
+                  <c:v>1.3258700000000001</c:v>
+                </c:pt>
+                <c:pt idx="30">
+                  <c:v>1.3969499999999999</c:v>
+                </c:pt>
+                <c:pt idx="31">
+                  <c:v>1.42374</c:v>
+                </c:pt>
+                <c:pt idx="32">
+                  <c:v>1.3292600000000001</c:v>
+                </c:pt>
+                <c:pt idx="33">
+                  <c:v>1.2728299999999999</c:v>
+                </c:pt>
+                <c:pt idx="34">
+                  <c:v>1.3034600000000001</c:v>
+                </c:pt>
+                <c:pt idx="35">
+                  <c:v>1.2952900000000001</c:v>
+                </c:pt>
+                <c:pt idx="36">
+                  <c:v>1.2951299999999999</c:v>
+                </c:pt>
+                <c:pt idx="37">
+                  <c:v>1.3090200000000001</c:v>
+                </c:pt>
+                <c:pt idx="38">
+                  <c:v>1.2557</c:v>
+                </c:pt>
+                <c:pt idx="39">
+                  <c:v>1.2522200000000001</c:v>
+                </c:pt>
+                <c:pt idx="40">
+                  <c:v>1.27755</c:v>
+                </c:pt>
+                <c:pt idx="41">
+                  <c:v>1.2944500000000001</c:v>
+                </c:pt>
+                <c:pt idx="42">
+                  <c:v>1.2551000000000001</c:v>
+                </c:pt>
+                <c:pt idx="43">
+                  <c:v>1.2549399999999999</c:v>
+                </c:pt>
+                <c:pt idx="44">
+                  <c:v>1.23926</c:v>
+                </c:pt>
+                <c:pt idx="45">
+                  <c:v>1.27369</c:v>
+                </c:pt>
+                <c:pt idx="46">
+                  <c:v>1.2475700000000001</c:v>
+                </c:pt>
+                <c:pt idx="47">
+                  <c:v>1.2301899999999999</c:v>
+                </c:pt>
+                <c:pt idx="48">
+                  <c:v>1.21662</c:v>
+                </c:pt>
+                <c:pt idx="49">
+                  <c:v>1.21305</c:v>
+                </c:pt>
+              </c:numCache>
+            </c:numRef>
+          </c:yVal>
+          <c:smooth val="1"/>
+          <c:extLst>
+            <c:ext xmlns:c16="http://schemas.microsoft.com/office/drawing/2014/chart" uri="{C3380CC4-5D6E-409C-BE32-E72D297353CC}">
+              <c16:uniqueId val="{00000001-3740-4406-9F3E-727CF1020690}"/>
+            </c:ext>
+          </c:extLst>
+        </c:ser>
+        <c:dLbls>
+          <c:showLegendKey val="0"/>
+          <c:showVal val="0"/>
+          <c:showCatName val="0"/>
+          <c:showSerName val="0"/>
+          <c:showPercent val="0"/>
+          <c:showBubbleSize val="0"/>
+        </c:dLbls>
+        <c:axId val="1001796752"/>
+        <c:axId val="1001823152"/>
+      </c:scatterChart>
+      <c:valAx>
+        <c:axId val="1001796752"/>
+        <c:scaling>
+          <c:orientation val="minMax"/>
+          <c:max val="50"/>
+        </c:scaling>
+        <c:delete val="0"/>
+        <c:axPos val="b"/>
+        <c:majorGridlines>
+          <c:spPr>
+            <a:ln w="9525" cap="flat" cmpd="sng" algn="ctr">
+              <a:solidFill>
+                <a:schemeClr val="tx1">
+                  <a:lumMod val="15000"/>
+                  <a:lumOff val="85000"/>
+                </a:schemeClr>
+              </a:solidFill>
+              <a:round/>
+            </a:ln>
+            <a:effectLst/>
+          </c:spPr>
+        </c:majorGridlines>
+        <c:title>
+          <c:tx>
+            <c:rich>
+              <a:bodyPr rot="0" spcFirstLastPara="1" vertOverflow="ellipsis" vert="horz" wrap="square" anchor="ctr" anchorCtr="1"/>
+              <a:lstStyle/>
+              <a:p>
+                <a:pPr>
+                  <a:defRPr sz="1400" b="0" i="0" u="none" strike="noStrike" kern="1200" baseline="0">
+                    <a:solidFill>
+                      <a:schemeClr val="tx1">
+                        <a:lumMod val="65000"/>
+                        <a:lumOff val="35000"/>
+                      </a:schemeClr>
+                    </a:solidFill>
+                    <a:latin typeface="+mn-lt"/>
+                    <a:ea typeface="+mn-ea"/>
+                    <a:cs typeface="+mn-cs"/>
+                  </a:defRPr>
+                </a:pPr>
+                <a:r>
+                  <a:rPr lang="en-IN" sz="1400"/>
+                  <a:t>Epochs</a:t>
+                </a:r>
+              </a:p>
+            </c:rich>
+          </c:tx>
+          <c:overlay val="0"/>
+          <c:spPr>
+            <a:noFill/>
+            <a:ln>
+              <a:noFill/>
+            </a:ln>
+            <a:effectLst/>
+          </c:spPr>
+          <c:txPr>
+            <a:bodyPr rot="0" spcFirstLastPara="1" vertOverflow="ellipsis" vert="horz" wrap="square" anchor="ctr" anchorCtr="1"/>
+            <a:lstStyle/>
+            <a:p>
+              <a:pPr>
+                <a:defRPr sz="1400" b="0" i="0" u="none" strike="noStrike" kern="1200" baseline="0">
+                  <a:solidFill>
+                    <a:schemeClr val="tx1">
+                      <a:lumMod val="65000"/>
+                      <a:lumOff val="35000"/>
+                    </a:schemeClr>
+                  </a:solidFill>
+                  <a:latin typeface="+mn-lt"/>
+                  <a:ea typeface="+mn-ea"/>
+                  <a:cs typeface="+mn-cs"/>
+                </a:defRPr>
+              </a:pPr>
+              <a:endParaRPr lang="en-US"/>
+            </a:p>
+          </c:txPr>
+        </c:title>
+        <c:numFmt formatCode="General" sourceLinked="1"/>
+        <c:majorTickMark val="none"/>
+        <c:minorTickMark val="none"/>
+        <c:tickLblPos val="nextTo"/>
+        <c:spPr>
+          <a:noFill/>
+          <a:ln w="9525" cap="flat" cmpd="sng" algn="ctr">
+            <a:solidFill>
+              <a:schemeClr val="tx1">
+                <a:lumMod val="25000"/>
+                <a:lumOff val="75000"/>
+              </a:schemeClr>
+            </a:solidFill>
+            <a:round/>
+          </a:ln>
+          <a:effectLst/>
+        </c:spPr>
+        <c:txPr>
+          <a:bodyPr rot="-60000000" spcFirstLastPara="1" vertOverflow="ellipsis" vert="horz" wrap="square" anchor="ctr" anchorCtr="1"/>
+          <a:lstStyle/>
+          <a:p>
+            <a:pPr>
+              <a:defRPr sz="900" b="0" i="0" u="none" strike="noStrike" kern="1200" baseline="0">
+                <a:solidFill>
+                  <a:schemeClr val="tx1">
+                    <a:lumMod val="65000"/>
+                    <a:lumOff val="35000"/>
+                  </a:schemeClr>
+                </a:solidFill>
+                <a:latin typeface="+mn-lt"/>
+                <a:ea typeface="+mn-ea"/>
+                <a:cs typeface="+mn-cs"/>
+              </a:defRPr>
+            </a:pPr>
+            <a:endParaRPr lang="en-US"/>
+          </a:p>
+        </c:txPr>
+        <c:crossAx val="1001823152"/>
+        <c:crosses val="autoZero"/>
+        <c:crossBetween val="midCat"/>
+      </c:valAx>
+      <c:valAx>
+        <c:axId val="1001823152"/>
+        <c:scaling>
+          <c:orientation val="minMax"/>
+          <c:min val="1"/>
+        </c:scaling>
+        <c:delete val="0"/>
+        <c:axPos val="l"/>
+        <c:majorGridlines>
+          <c:spPr>
+            <a:ln w="9525" cap="flat" cmpd="sng" algn="ctr">
+              <a:solidFill>
+                <a:schemeClr val="tx1">
+                  <a:lumMod val="15000"/>
+                  <a:lumOff val="85000"/>
+                </a:schemeClr>
+              </a:solidFill>
+              <a:round/>
+            </a:ln>
+            <a:effectLst/>
+          </c:spPr>
+        </c:majorGridlines>
+        <c:title>
+          <c:tx>
+            <c:rich>
+              <a:bodyPr rot="-5400000" spcFirstLastPara="1" vertOverflow="ellipsis" vert="horz" wrap="square" anchor="ctr" anchorCtr="1"/>
+              <a:lstStyle/>
+              <a:p>
+                <a:pPr>
+                  <a:defRPr sz="1400" b="0" i="0" u="none" strike="noStrike" kern="1200" baseline="0">
+                    <a:solidFill>
+                      <a:schemeClr val="tx1">
+                        <a:lumMod val="65000"/>
+                        <a:lumOff val="35000"/>
+                      </a:schemeClr>
+                    </a:solidFill>
+                    <a:latin typeface="+mn-lt"/>
+                    <a:ea typeface="+mn-ea"/>
+                    <a:cs typeface="+mn-cs"/>
+                  </a:defRPr>
+                </a:pPr>
+                <a:r>
+                  <a:rPr lang="en-IN" sz="1400"/>
+                  <a:t>Loss</a:t>
+                </a:r>
+              </a:p>
+            </c:rich>
+          </c:tx>
+          <c:overlay val="0"/>
+          <c:spPr>
+            <a:noFill/>
+            <a:ln>
+              <a:noFill/>
+            </a:ln>
+            <a:effectLst/>
+          </c:spPr>
+          <c:txPr>
+            <a:bodyPr rot="-5400000" spcFirstLastPara="1" vertOverflow="ellipsis" vert="horz" wrap="square" anchor="ctr" anchorCtr="1"/>
+            <a:lstStyle/>
+            <a:p>
+              <a:pPr>
+                <a:defRPr sz="1400" b="0" i="0" u="none" strike="noStrike" kern="1200" baseline="0">
+                  <a:solidFill>
+                    <a:schemeClr val="tx1">
+                      <a:lumMod val="65000"/>
+                      <a:lumOff val="35000"/>
+                    </a:schemeClr>
+                  </a:solidFill>
+                  <a:latin typeface="+mn-lt"/>
+                  <a:ea typeface="+mn-ea"/>
+                  <a:cs typeface="+mn-cs"/>
+                </a:defRPr>
+              </a:pPr>
+              <a:endParaRPr lang="en-US"/>
+            </a:p>
+          </c:txPr>
+        </c:title>
+        <c:numFmt formatCode="General" sourceLinked="1"/>
+        <c:majorTickMark val="none"/>
+        <c:minorTickMark val="none"/>
+        <c:tickLblPos val="nextTo"/>
+        <c:spPr>
+          <a:noFill/>
+          <a:ln w="9525" cap="flat" cmpd="sng" algn="ctr">
+            <a:solidFill>
+              <a:schemeClr val="tx1">
+                <a:lumMod val="25000"/>
+                <a:lumOff val="75000"/>
+              </a:schemeClr>
+            </a:solidFill>
+            <a:round/>
+          </a:ln>
+          <a:effectLst/>
+        </c:spPr>
+        <c:txPr>
+          <a:bodyPr rot="-60000000" spcFirstLastPara="1" vertOverflow="ellipsis" vert="horz" wrap="square" anchor="ctr" anchorCtr="1"/>
+          <a:lstStyle/>
+          <a:p>
+            <a:pPr>
+              <a:defRPr sz="900" b="0" i="0" u="none" strike="noStrike" kern="1200" baseline="0">
+                <a:solidFill>
+                  <a:schemeClr val="tx1">
+                    <a:lumMod val="65000"/>
+                    <a:lumOff val="35000"/>
+                  </a:schemeClr>
+                </a:solidFill>
+                <a:latin typeface="+mn-lt"/>
+                <a:ea typeface="+mn-ea"/>
+                <a:cs typeface="+mn-cs"/>
+              </a:defRPr>
+            </a:pPr>
+            <a:endParaRPr lang="en-US"/>
+          </a:p>
+        </c:txPr>
+        <c:crossAx val="1001796752"/>
+        <c:crosses val="autoZero"/>
+        <c:crossBetween val="midCat"/>
+      </c:valAx>
+      <c:spPr>
+        <a:noFill/>
+        <a:ln>
+          <a:noFill/>
+        </a:ln>
+        <a:effectLst/>
+      </c:spPr>
+    </c:plotArea>
+    <c:legend>
+      <c:legendPos val="b"/>
+      <c:overlay val="0"/>
+      <c:spPr>
+        <a:noFill/>
+        <a:ln>
+          <a:noFill/>
+        </a:ln>
+        <a:effectLst/>
+      </c:spPr>
+      <c:txPr>
+        <a:bodyPr rot="0" spcFirstLastPara="1" vertOverflow="ellipsis" vert="horz" wrap="square" anchor="ctr" anchorCtr="1"/>
+        <a:lstStyle/>
+        <a:p>
+          <a:pPr>
+            <a:defRPr sz="1400" b="0" i="0" u="none" strike="noStrike" kern="1200" baseline="0">
+              <a:solidFill>
+                <a:schemeClr val="tx1">
+                  <a:lumMod val="65000"/>
+                  <a:lumOff val="35000"/>
+                </a:schemeClr>
+              </a:solidFill>
+              <a:latin typeface="+mn-lt"/>
+              <a:ea typeface="+mn-ea"/>
+              <a:cs typeface="+mn-cs"/>
+            </a:defRPr>
+          </a:pPr>
+          <a:endParaRPr lang="en-US"/>
+        </a:p>
+      </c:txPr>
+    </c:legend>
+    <c:plotVisOnly val="1"/>
+    <c:dispBlanksAs val="gap"/>
+    <c:extLst>
+      <c:ext xmlns:c16r3="http://schemas.microsoft.com/office/drawing/2017/03/chart" uri="{56B9EC1D-385E-4148-901F-78D8002777C0}">
+        <c16r3:dataDisplayOptions16>
+          <c16r3:dispNaAsBlank val="1"/>
+        </c16r3:dataDisplayOptions16>
+      </c:ext>
+    </c:extLst>
+    <c:showDLblsOverMax val="0"/>
+  </c:chart>
+  <c:spPr>
+    <a:noFill/>
+    <a:ln>
+      <a:noFill/>
+    </a:ln>
+    <a:effectLst/>
+  </c:spPr>
+  <c:txPr>
+    <a:bodyPr/>
+    <a:lstStyle/>
+    <a:p>
+      <a:pPr>
+        <a:defRPr/>
+      </a:pPr>
+      <a:endParaRPr lang="en-US"/>
+    </a:p>
+  </c:txPr>
+  <c:externalData r:id="rId3">
+    <c:autoUpdate val="0"/>
+  </c:externalData>
+</c:chartSpace>
+</file>
+
+<file path=ppt/charts/chart2.xml><?xml version="1.0" encoding="utf-8"?>
+<c:chartSpace xmlns:c="http://schemas.openxmlformats.org/drawingml/2006/chart" xmlns:a="http://schemas.openxmlformats.org/drawingml/2006/main" xmlns:r="http://schemas.openxmlformats.org/officeDocument/2006/relationships" xmlns:c16r2="http://schemas.microsoft.com/office/drawing/2015/06/chart">
   <c:date1904 val="0"/>
   <c:lang val="en-US"/>
   <c:roundedCorners val="0"/>
@@ -219,7 +1286,7 @@
               </c:numCache>
             </c:numRef>
           </c:val>
-          <c:extLst xmlns:c16r2="http://schemas.microsoft.com/office/drawing/2015/06/chart">
+          <c:extLst>
             <c:ext xmlns:c16="http://schemas.microsoft.com/office/drawing/2014/chart" uri="{C3380CC4-5D6E-409C-BE32-E72D297353CC}">
               <c16:uniqueId val="{00000000-EA43-4032-93DE-8D90180C3211}"/>
             </c:ext>
@@ -290,7 +1357,7 @@
               </c:numCache>
             </c:numRef>
           </c:val>
-          <c:extLst xmlns:c16r2="http://schemas.microsoft.com/office/drawing/2015/06/chart">
+          <c:extLst>
             <c:ext xmlns:c16="http://schemas.microsoft.com/office/drawing/2014/chart" uri="{C3380CC4-5D6E-409C-BE32-E72D297353CC}">
               <c16:uniqueId val="{00000001-EA43-4032-93DE-8D90180C3211}"/>
             </c:ext>
@@ -426,7 +1493,6 @@
     </c:plotArea>
     <c:legend>
       <c:legendPos val="b"/>
-      <c:layout/>
       <c:overlay val="0"/>
       <c:spPr>
         <a:noFill/>
@@ -483,8 +1549,8 @@
 </c:chartSpace>
 </file>
 
-<file path=ppt/charts/chart2.xml><?xml version="1.0" encoding="utf-8"?>
-<c:chartSpace xmlns:c="http://schemas.openxmlformats.org/drawingml/2006/chart" xmlns:a="http://schemas.openxmlformats.org/drawingml/2006/main" xmlns:r="http://schemas.openxmlformats.org/officeDocument/2006/relationships">
+<file path=ppt/charts/chart3.xml><?xml version="1.0" encoding="utf-8"?>
+<c:chartSpace xmlns:c="http://schemas.openxmlformats.org/drawingml/2006/chart" xmlns:a="http://schemas.openxmlformats.org/drawingml/2006/main" xmlns:r="http://schemas.openxmlformats.org/officeDocument/2006/relationships" xmlns:c16r2="http://schemas.microsoft.com/office/drawing/2015/06/chart">
   <c:date1904 val="0"/>
   <c:lang val="en-US"/>
   <c:roundedCorners val="0"/>
@@ -498,7 +1564,6 @@
   </mc:AlternateContent>
   <c:chart>
     <c:title>
-      <c:layout/>
       <c:overlay val="0"/>
       <c:spPr>
         <a:noFill/>
@@ -702,7 +1767,7 @@
               </c:numCache>
             </c:numRef>
           </c:val>
-          <c:extLst xmlns:c16r2="http://schemas.microsoft.com/office/drawing/2015/06/chart">
+          <c:extLst>
             <c:ext xmlns:c16="http://schemas.microsoft.com/office/drawing/2014/chart" uri="{C3380CC4-5D6E-409C-BE32-E72D297353CC}">
               <c16:uniqueId val="{00000000-1030-493C-AD1F-E53095F66DDF}"/>
             </c:ext>
@@ -865,8 +1930,8 @@
 </c:chartSpace>
 </file>
 
-<file path=ppt/charts/chart3.xml><?xml version="1.0" encoding="utf-8"?>
-<c:chartSpace xmlns:c="http://schemas.openxmlformats.org/drawingml/2006/chart" xmlns:a="http://schemas.openxmlformats.org/drawingml/2006/main" xmlns:r="http://schemas.openxmlformats.org/officeDocument/2006/relationships">
+<file path=ppt/charts/chart4.xml><?xml version="1.0" encoding="utf-8"?>
+<c:chartSpace xmlns:c="http://schemas.openxmlformats.org/drawingml/2006/chart" xmlns:a="http://schemas.openxmlformats.org/drawingml/2006/main" xmlns:r="http://schemas.openxmlformats.org/officeDocument/2006/relationships" xmlns:c16r2="http://schemas.microsoft.com/office/drawing/2015/06/chart">
   <c:date1904 val="0"/>
   <c:lang val="en-US"/>
   <c:roundedCorners val="0"/>
@@ -880,7 +1945,6 @@
   </mc:AlternateContent>
   <c:chart>
     <c:title>
-      <c:layout/>
       <c:overlay val="0"/>
       <c:spPr>
         <a:noFill/>
@@ -1084,7 +2148,7 @@
               </c:numCache>
             </c:numRef>
           </c:val>
-          <c:extLst xmlns:c16r2="http://schemas.microsoft.com/office/drawing/2015/06/chart">
+          <c:extLst>
             <c:ext xmlns:c16="http://schemas.microsoft.com/office/drawing/2014/chart" uri="{C3380CC4-5D6E-409C-BE32-E72D297353CC}">
               <c16:uniqueId val="{00000000-D351-4183-9891-75D167625B4B}"/>
             </c:ext>
@@ -1367,8 +2431,48 @@
 </cs:colorStyle>
 </file>
 
+<file path=ppt/charts/colors4.xml><?xml version="1.0" encoding="utf-8"?>
+<cs:colorStyle xmlns:cs="http://schemas.microsoft.com/office/drawing/2012/chartStyle" xmlns:a="http://schemas.openxmlformats.org/drawingml/2006/main" meth="cycle" id="10">
+  <a:schemeClr val="accent1"/>
+  <a:schemeClr val="accent2"/>
+  <a:schemeClr val="accent3"/>
+  <a:schemeClr val="accent4"/>
+  <a:schemeClr val="accent5"/>
+  <a:schemeClr val="accent6"/>
+  <cs:variation/>
+  <cs:variation>
+    <a:lumMod val="60000"/>
+  </cs:variation>
+  <cs:variation>
+    <a:lumMod val="80000"/>
+    <a:lumOff val="20000"/>
+  </cs:variation>
+  <cs:variation>
+    <a:lumMod val="80000"/>
+  </cs:variation>
+  <cs:variation>
+    <a:lumMod val="60000"/>
+    <a:lumOff val="40000"/>
+  </cs:variation>
+  <cs:variation>
+    <a:lumMod val="50000"/>
+  </cs:variation>
+  <cs:variation>
+    <a:lumMod val="70000"/>
+    <a:lumOff val="30000"/>
+  </cs:variation>
+  <cs:variation>
+    <a:lumMod val="70000"/>
+  </cs:variation>
+  <cs:variation>
+    <a:lumMod val="50000"/>
+    <a:lumOff val="50000"/>
+  </cs:variation>
+</cs:colorStyle>
+</file>
+
 <file path=ppt/charts/style1.xml><?xml version="1.0" encoding="utf-8"?>
-<cs:chartStyle xmlns:cs="http://schemas.microsoft.com/office/drawing/2012/chartStyle" xmlns:a="http://schemas.openxmlformats.org/drawingml/2006/main" id="201">
+<cs:chartStyle xmlns:cs="http://schemas.microsoft.com/office/drawing/2012/chartStyle" xmlns:a="http://schemas.openxmlformats.org/drawingml/2006/main" id="240">
   <cs:axisTitle>
     <cs:lnRef idx="0"/>
     <cs:fillRef idx="0"/>
@@ -1395,8 +2499,8 @@
       <a:ln w="9525" cap="flat" cmpd="sng" algn="ctr">
         <a:solidFill>
           <a:schemeClr val="tx1">
-            <a:lumMod val="15000"/>
-            <a:lumOff val="85000"/>
+            <a:lumMod val="25000"/>
+            <a:lumOff val="75000"/>
           </a:schemeClr>
         </a:solidFill>
         <a:round/>
@@ -1497,7 +2601,7 @@
       <a:schemeClr val="tx1"/>
     </cs:fontRef>
     <cs:spPr>
-      <a:ln w="28575" cap="rnd">
+      <a:ln w="19050" cap="rnd">
         <a:solidFill>
           <a:schemeClr val="phClr"/>
         </a:solidFill>
@@ -1529,10 +2633,10 @@
     <cs:lnRef idx="0">
       <cs:styleClr val="auto"/>
     </cs:lnRef>
-    <cs:fillRef idx="1"/>
+    <cs:fillRef idx="0"/>
     <cs:effectRef idx="0"/>
     <cs:fontRef idx="minor">
-      <a:schemeClr val="tx1"/>
+      <a:schemeClr val="dk1"/>
     </cs:fontRef>
     <cs:spPr>
       <a:ln w="9525" cap="rnd">
@@ -1572,22 +2676,23 @@
     <cs:fillRef idx="0"/>
     <cs:effectRef idx="0"/>
     <cs:fontRef idx="minor">
-      <a:schemeClr val="dk1"/>
+      <a:schemeClr val="tx1"/>
     </cs:fontRef>
     <cs:spPr>
       <a:solidFill>
         <a:schemeClr val="dk1">
-          <a:lumMod val="65000"/>
-          <a:lumOff val="35000"/>
+          <a:lumMod val="75000"/>
+          <a:lumOff val="25000"/>
         </a:schemeClr>
       </a:solidFill>
-      <a:ln w="9525">
+      <a:ln w="9525" cap="flat" cmpd="sng" algn="ctr">
         <a:solidFill>
           <a:schemeClr val="tx1">
             <a:lumMod val="65000"/>
             <a:lumOff val="35000"/>
           </a:schemeClr>
         </a:solidFill>
+        <a:round/>
       </a:ln>
     </cs:spPr>
   </cs:downBar>
@@ -1692,8 +2797,8 @@
       <a:ln w="9525" cap="flat" cmpd="sng" algn="ctr">
         <a:solidFill>
           <a:schemeClr val="tx1">
-            <a:lumMod val="75000"/>
-            <a:lumOff val="25000"/>
+            <a:lumMod val="50000"/>
+            <a:lumOff val="50000"/>
           </a:schemeClr>
         </a:solidFill>
         <a:round/>
@@ -1825,19 +2930,20 @@
     <cs:fillRef idx="0"/>
     <cs:effectRef idx="0"/>
     <cs:fontRef idx="minor">
-      <a:schemeClr val="dk1"/>
+      <a:schemeClr val="tx1"/>
     </cs:fontRef>
     <cs:spPr>
       <a:solidFill>
         <a:schemeClr val="lt1"/>
       </a:solidFill>
-      <a:ln w="9525">
+      <a:ln w="9525" cap="flat" cmpd="sng" algn="ctr">
         <a:solidFill>
           <a:schemeClr val="tx1">
-            <a:lumMod val="15000"/>
-            <a:lumOff val="85000"/>
+            <a:lumMod val="65000"/>
+            <a:lumOff val="35000"/>
           </a:schemeClr>
         </a:solidFill>
+        <a:round/>
       </a:ln>
     </cs:spPr>
   </cs:upBar>
@@ -1851,6 +2957,17 @@
         <a:lumOff val="35000"/>
       </a:schemeClr>
     </cs:fontRef>
+    <cs:spPr>
+      <a:ln w="9525" cap="flat" cmpd="sng" algn="ctr">
+        <a:solidFill>
+          <a:schemeClr val="tx1">
+            <a:lumMod val="25000"/>
+            <a:lumOff val="75000"/>
+          </a:schemeClr>
+        </a:solidFill>
+        <a:round/>
+      </a:ln>
+    </cs:spPr>
     <cs:defRPr sz="900" kern="1200"/>
   </cs:valueAxis>
   <cs:wall>
@@ -2876,6 +3993,509 @@
 </cs:chartStyle>
 </file>
 
+<file path=ppt/charts/style4.xml><?xml version="1.0" encoding="utf-8"?>
+<cs:chartStyle xmlns:cs="http://schemas.microsoft.com/office/drawing/2012/chartStyle" xmlns:a="http://schemas.openxmlformats.org/drawingml/2006/main" id="201">
+  <cs:axisTitle>
+    <cs:lnRef idx="0"/>
+    <cs:fillRef idx="0"/>
+    <cs:effectRef idx="0"/>
+    <cs:fontRef idx="minor">
+      <a:schemeClr val="tx1">
+        <a:lumMod val="65000"/>
+        <a:lumOff val="35000"/>
+      </a:schemeClr>
+    </cs:fontRef>
+    <cs:defRPr sz="1000" kern="1200"/>
+  </cs:axisTitle>
+  <cs:categoryAxis>
+    <cs:lnRef idx="0"/>
+    <cs:fillRef idx="0"/>
+    <cs:effectRef idx="0"/>
+    <cs:fontRef idx="minor">
+      <a:schemeClr val="tx1">
+        <a:lumMod val="65000"/>
+        <a:lumOff val="35000"/>
+      </a:schemeClr>
+    </cs:fontRef>
+    <cs:spPr>
+      <a:ln w="9525" cap="flat" cmpd="sng" algn="ctr">
+        <a:solidFill>
+          <a:schemeClr val="tx1">
+            <a:lumMod val="15000"/>
+            <a:lumOff val="85000"/>
+          </a:schemeClr>
+        </a:solidFill>
+        <a:round/>
+      </a:ln>
+    </cs:spPr>
+    <cs:defRPr sz="900" kern="1200"/>
+  </cs:categoryAxis>
+  <cs:chartArea mods="allowNoFillOverride allowNoLineOverride">
+    <cs:lnRef idx="0"/>
+    <cs:fillRef idx="0"/>
+    <cs:effectRef idx="0"/>
+    <cs:fontRef idx="minor">
+      <a:schemeClr val="tx1"/>
+    </cs:fontRef>
+    <cs:spPr>
+      <a:solidFill>
+        <a:schemeClr val="bg1"/>
+      </a:solidFill>
+      <a:ln w="9525" cap="flat" cmpd="sng" algn="ctr">
+        <a:solidFill>
+          <a:schemeClr val="tx1">
+            <a:lumMod val="15000"/>
+            <a:lumOff val="85000"/>
+          </a:schemeClr>
+        </a:solidFill>
+        <a:round/>
+      </a:ln>
+    </cs:spPr>
+    <cs:defRPr sz="1000" kern="1200"/>
+  </cs:chartArea>
+  <cs:dataLabel>
+    <cs:lnRef idx="0"/>
+    <cs:fillRef idx="0"/>
+    <cs:effectRef idx="0"/>
+    <cs:fontRef idx="minor">
+      <a:schemeClr val="tx1">
+        <a:lumMod val="75000"/>
+        <a:lumOff val="25000"/>
+      </a:schemeClr>
+    </cs:fontRef>
+    <cs:defRPr sz="900" kern="1200"/>
+  </cs:dataLabel>
+  <cs:dataLabelCallout>
+    <cs:lnRef idx="0"/>
+    <cs:fillRef idx="0"/>
+    <cs:effectRef idx="0"/>
+    <cs:fontRef idx="minor">
+      <a:schemeClr val="dk1">
+        <a:lumMod val="65000"/>
+        <a:lumOff val="35000"/>
+      </a:schemeClr>
+    </cs:fontRef>
+    <cs:spPr>
+      <a:solidFill>
+        <a:schemeClr val="lt1"/>
+      </a:solidFill>
+      <a:ln>
+        <a:solidFill>
+          <a:schemeClr val="dk1">
+            <a:lumMod val="25000"/>
+            <a:lumOff val="75000"/>
+          </a:schemeClr>
+        </a:solidFill>
+      </a:ln>
+    </cs:spPr>
+    <cs:defRPr sz="900" kern="1200"/>
+    <cs:bodyPr rot="0" spcFirstLastPara="1" vertOverflow="clip" horzOverflow="clip" vert="horz" wrap="square" lIns="36576" tIns="18288" rIns="36576" bIns="18288" anchor="ctr" anchorCtr="1">
+      <a:spAutoFit/>
+    </cs:bodyPr>
+  </cs:dataLabelCallout>
+  <cs:dataPoint>
+    <cs:lnRef idx="0"/>
+    <cs:fillRef idx="1">
+      <cs:styleClr val="auto"/>
+    </cs:fillRef>
+    <cs:effectRef idx="0"/>
+    <cs:fontRef idx="minor">
+      <a:schemeClr val="tx1"/>
+    </cs:fontRef>
+  </cs:dataPoint>
+  <cs:dataPoint3D>
+    <cs:lnRef idx="0"/>
+    <cs:fillRef idx="1">
+      <cs:styleClr val="auto"/>
+    </cs:fillRef>
+    <cs:effectRef idx="0"/>
+    <cs:fontRef idx="minor">
+      <a:schemeClr val="tx1"/>
+    </cs:fontRef>
+  </cs:dataPoint3D>
+  <cs:dataPointLine>
+    <cs:lnRef idx="0">
+      <cs:styleClr val="auto"/>
+    </cs:lnRef>
+    <cs:fillRef idx="1"/>
+    <cs:effectRef idx="0"/>
+    <cs:fontRef idx="minor">
+      <a:schemeClr val="tx1"/>
+    </cs:fontRef>
+    <cs:spPr>
+      <a:ln w="28575" cap="rnd">
+        <a:solidFill>
+          <a:schemeClr val="phClr"/>
+        </a:solidFill>
+        <a:round/>
+      </a:ln>
+    </cs:spPr>
+  </cs:dataPointLine>
+  <cs:dataPointMarker>
+    <cs:lnRef idx="0">
+      <cs:styleClr val="auto"/>
+    </cs:lnRef>
+    <cs:fillRef idx="1">
+      <cs:styleClr val="auto"/>
+    </cs:fillRef>
+    <cs:effectRef idx="0"/>
+    <cs:fontRef idx="minor">
+      <a:schemeClr val="tx1"/>
+    </cs:fontRef>
+    <cs:spPr>
+      <a:ln w="9525">
+        <a:solidFill>
+          <a:schemeClr val="phClr"/>
+        </a:solidFill>
+      </a:ln>
+    </cs:spPr>
+  </cs:dataPointMarker>
+  <cs:dataPointMarkerLayout symbol="circle" size="5"/>
+  <cs:dataPointWireframe>
+    <cs:lnRef idx="0">
+      <cs:styleClr val="auto"/>
+    </cs:lnRef>
+    <cs:fillRef idx="1"/>
+    <cs:effectRef idx="0"/>
+    <cs:fontRef idx="minor">
+      <a:schemeClr val="tx1"/>
+    </cs:fontRef>
+    <cs:spPr>
+      <a:ln w="9525" cap="rnd">
+        <a:solidFill>
+          <a:schemeClr val="phClr"/>
+        </a:solidFill>
+        <a:round/>
+      </a:ln>
+    </cs:spPr>
+  </cs:dataPointWireframe>
+  <cs:dataTable>
+    <cs:lnRef idx="0"/>
+    <cs:fillRef idx="0"/>
+    <cs:effectRef idx="0"/>
+    <cs:fontRef idx="minor">
+      <a:schemeClr val="tx1">
+        <a:lumMod val="65000"/>
+        <a:lumOff val="35000"/>
+      </a:schemeClr>
+    </cs:fontRef>
+    <cs:spPr>
+      <a:noFill/>
+      <a:ln w="9525" cap="flat" cmpd="sng" algn="ctr">
+        <a:solidFill>
+          <a:schemeClr val="tx1">
+            <a:lumMod val="15000"/>
+            <a:lumOff val="85000"/>
+          </a:schemeClr>
+        </a:solidFill>
+        <a:round/>
+      </a:ln>
+    </cs:spPr>
+    <cs:defRPr sz="900" kern="1200"/>
+  </cs:dataTable>
+  <cs:downBar>
+    <cs:lnRef idx="0"/>
+    <cs:fillRef idx="0"/>
+    <cs:effectRef idx="0"/>
+    <cs:fontRef idx="minor">
+      <a:schemeClr val="dk1"/>
+    </cs:fontRef>
+    <cs:spPr>
+      <a:solidFill>
+        <a:schemeClr val="dk1">
+          <a:lumMod val="65000"/>
+          <a:lumOff val="35000"/>
+        </a:schemeClr>
+      </a:solidFill>
+      <a:ln w="9525">
+        <a:solidFill>
+          <a:schemeClr val="tx1">
+            <a:lumMod val="65000"/>
+            <a:lumOff val="35000"/>
+          </a:schemeClr>
+        </a:solidFill>
+      </a:ln>
+    </cs:spPr>
+  </cs:downBar>
+  <cs:dropLine>
+    <cs:lnRef idx="0"/>
+    <cs:fillRef idx="0"/>
+    <cs:effectRef idx="0"/>
+    <cs:fontRef idx="minor">
+      <a:schemeClr val="tx1"/>
+    </cs:fontRef>
+    <cs:spPr>
+      <a:ln w="9525" cap="flat" cmpd="sng" algn="ctr">
+        <a:solidFill>
+          <a:schemeClr val="tx1">
+            <a:lumMod val="35000"/>
+            <a:lumOff val="65000"/>
+          </a:schemeClr>
+        </a:solidFill>
+        <a:round/>
+      </a:ln>
+    </cs:spPr>
+  </cs:dropLine>
+  <cs:errorBar>
+    <cs:lnRef idx="0"/>
+    <cs:fillRef idx="0"/>
+    <cs:effectRef idx="0"/>
+    <cs:fontRef idx="minor">
+      <a:schemeClr val="tx1"/>
+    </cs:fontRef>
+    <cs:spPr>
+      <a:ln w="9525" cap="flat" cmpd="sng" algn="ctr">
+        <a:solidFill>
+          <a:schemeClr val="tx1">
+            <a:lumMod val="65000"/>
+            <a:lumOff val="35000"/>
+          </a:schemeClr>
+        </a:solidFill>
+        <a:round/>
+      </a:ln>
+    </cs:spPr>
+  </cs:errorBar>
+  <cs:floor>
+    <cs:lnRef idx="0"/>
+    <cs:fillRef idx="0"/>
+    <cs:effectRef idx="0"/>
+    <cs:fontRef idx="minor">
+      <a:schemeClr val="tx1"/>
+    </cs:fontRef>
+    <cs:spPr>
+      <a:noFill/>
+      <a:ln>
+        <a:noFill/>
+      </a:ln>
+    </cs:spPr>
+  </cs:floor>
+  <cs:gridlineMajor>
+    <cs:lnRef idx="0"/>
+    <cs:fillRef idx="0"/>
+    <cs:effectRef idx="0"/>
+    <cs:fontRef idx="minor">
+      <a:schemeClr val="tx1"/>
+    </cs:fontRef>
+    <cs:spPr>
+      <a:ln w="9525" cap="flat" cmpd="sng" algn="ctr">
+        <a:solidFill>
+          <a:schemeClr val="tx1">
+            <a:lumMod val="15000"/>
+            <a:lumOff val="85000"/>
+          </a:schemeClr>
+        </a:solidFill>
+        <a:round/>
+      </a:ln>
+    </cs:spPr>
+  </cs:gridlineMajor>
+  <cs:gridlineMinor>
+    <cs:lnRef idx="0"/>
+    <cs:fillRef idx="0"/>
+    <cs:effectRef idx="0"/>
+    <cs:fontRef idx="minor">
+      <a:schemeClr val="tx1"/>
+    </cs:fontRef>
+    <cs:spPr>
+      <a:ln w="9525" cap="flat" cmpd="sng" algn="ctr">
+        <a:solidFill>
+          <a:schemeClr val="tx1">
+            <a:lumMod val="5000"/>
+            <a:lumOff val="95000"/>
+          </a:schemeClr>
+        </a:solidFill>
+        <a:round/>
+      </a:ln>
+    </cs:spPr>
+  </cs:gridlineMinor>
+  <cs:hiLoLine>
+    <cs:lnRef idx="0"/>
+    <cs:fillRef idx="0"/>
+    <cs:effectRef idx="0"/>
+    <cs:fontRef idx="minor">
+      <a:schemeClr val="tx1"/>
+    </cs:fontRef>
+    <cs:spPr>
+      <a:ln w="9525" cap="flat" cmpd="sng" algn="ctr">
+        <a:solidFill>
+          <a:schemeClr val="tx1">
+            <a:lumMod val="75000"/>
+            <a:lumOff val="25000"/>
+          </a:schemeClr>
+        </a:solidFill>
+        <a:round/>
+      </a:ln>
+    </cs:spPr>
+  </cs:hiLoLine>
+  <cs:leaderLine>
+    <cs:lnRef idx="0"/>
+    <cs:fillRef idx="0"/>
+    <cs:effectRef idx="0"/>
+    <cs:fontRef idx="minor">
+      <a:schemeClr val="tx1"/>
+    </cs:fontRef>
+    <cs:spPr>
+      <a:ln w="9525" cap="flat" cmpd="sng" algn="ctr">
+        <a:solidFill>
+          <a:schemeClr val="tx1">
+            <a:lumMod val="35000"/>
+            <a:lumOff val="65000"/>
+          </a:schemeClr>
+        </a:solidFill>
+        <a:round/>
+      </a:ln>
+    </cs:spPr>
+  </cs:leaderLine>
+  <cs:legend>
+    <cs:lnRef idx="0"/>
+    <cs:fillRef idx="0"/>
+    <cs:effectRef idx="0"/>
+    <cs:fontRef idx="minor">
+      <a:schemeClr val="tx1">
+        <a:lumMod val="65000"/>
+        <a:lumOff val="35000"/>
+      </a:schemeClr>
+    </cs:fontRef>
+    <cs:defRPr sz="900" kern="1200"/>
+  </cs:legend>
+  <cs:plotArea mods="allowNoFillOverride allowNoLineOverride">
+    <cs:lnRef idx="0"/>
+    <cs:fillRef idx="0"/>
+    <cs:effectRef idx="0"/>
+    <cs:fontRef idx="minor">
+      <a:schemeClr val="tx1"/>
+    </cs:fontRef>
+  </cs:plotArea>
+  <cs:plotArea3D mods="allowNoFillOverride allowNoLineOverride">
+    <cs:lnRef idx="0"/>
+    <cs:fillRef idx="0"/>
+    <cs:effectRef idx="0"/>
+    <cs:fontRef idx="minor">
+      <a:schemeClr val="tx1"/>
+    </cs:fontRef>
+  </cs:plotArea3D>
+  <cs:seriesAxis>
+    <cs:lnRef idx="0"/>
+    <cs:fillRef idx="0"/>
+    <cs:effectRef idx="0"/>
+    <cs:fontRef idx="minor">
+      <a:schemeClr val="tx1">
+        <a:lumMod val="65000"/>
+        <a:lumOff val="35000"/>
+      </a:schemeClr>
+    </cs:fontRef>
+    <cs:defRPr sz="900" kern="1200"/>
+  </cs:seriesAxis>
+  <cs:seriesLine>
+    <cs:lnRef idx="0"/>
+    <cs:fillRef idx="0"/>
+    <cs:effectRef idx="0"/>
+    <cs:fontRef idx="minor">
+      <a:schemeClr val="tx1"/>
+    </cs:fontRef>
+    <cs:spPr>
+      <a:ln w="9525" cap="flat" cmpd="sng" algn="ctr">
+        <a:solidFill>
+          <a:schemeClr val="tx1">
+            <a:lumMod val="35000"/>
+            <a:lumOff val="65000"/>
+          </a:schemeClr>
+        </a:solidFill>
+        <a:round/>
+      </a:ln>
+    </cs:spPr>
+  </cs:seriesLine>
+  <cs:title>
+    <cs:lnRef idx="0"/>
+    <cs:fillRef idx="0"/>
+    <cs:effectRef idx="0"/>
+    <cs:fontRef idx="minor">
+      <a:schemeClr val="tx1">
+        <a:lumMod val="65000"/>
+        <a:lumOff val="35000"/>
+      </a:schemeClr>
+    </cs:fontRef>
+    <cs:defRPr sz="1400" b="0" kern="1200" spc="0" baseline="0"/>
+  </cs:title>
+  <cs:trendline>
+    <cs:lnRef idx="0">
+      <cs:styleClr val="auto"/>
+    </cs:lnRef>
+    <cs:fillRef idx="0"/>
+    <cs:effectRef idx="0"/>
+    <cs:fontRef idx="minor">
+      <a:schemeClr val="tx1"/>
+    </cs:fontRef>
+    <cs:spPr>
+      <a:ln w="19050" cap="rnd">
+        <a:solidFill>
+          <a:schemeClr val="phClr"/>
+        </a:solidFill>
+        <a:prstDash val="sysDot"/>
+      </a:ln>
+    </cs:spPr>
+  </cs:trendline>
+  <cs:trendlineLabel>
+    <cs:lnRef idx="0"/>
+    <cs:fillRef idx="0"/>
+    <cs:effectRef idx="0"/>
+    <cs:fontRef idx="minor">
+      <a:schemeClr val="tx1">
+        <a:lumMod val="65000"/>
+        <a:lumOff val="35000"/>
+      </a:schemeClr>
+    </cs:fontRef>
+    <cs:defRPr sz="900" kern="1200"/>
+  </cs:trendlineLabel>
+  <cs:upBar>
+    <cs:lnRef idx="0"/>
+    <cs:fillRef idx="0"/>
+    <cs:effectRef idx="0"/>
+    <cs:fontRef idx="minor">
+      <a:schemeClr val="dk1"/>
+    </cs:fontRef>
+    <cs:spPr>
+      <a:solidFill>
+        <a:schemeClr val="lt1"/>
+      </a:solidFill>
+      <a:ln w="9525">
+        <a:solidFill>
+          <a:schemeClr val="tx1">
+            <a:lumMod val="15000"/>
+            <a:lumOff val="85000"/>
+          </a:schemeClr>
+        </a:solidFill>
+      </a:ln>
+    </cs:spPr>
+  </cs:upBar>
+  <cs:valueAxis>
+    <cs:lnRef idx="0"/>
+    <cs:fillRef idx="0"/>
+    <cs:effectRef idx="0"/>
+    <cs:fontRef idx="minor">
+      <a:schemeClr val="tx1">
+        <a:lumMod val="65000"/>
+        <a:lumOff val="35000"/>
+      </a:schemeClr>
+    </cs:fontRef>
+    <cs:defRPr sz="900" kern="1200"/>
+  </cs:valueAxis>
+  <cs:wall>
+    <cs:lnRef idx="0"/>
+    <cs:fillRef idx="0"/>
+    <cs:effectRef idx="0"/>
+    <cs:fontRef idx="minor">
+      <a:schemeClr val="tx1"/>
+    </cs:fontRef>
+    <cs:spPr>
+      <a:noFill/>
+      <a:ln>
+        <a:noFill/>
+      </a:ln>
+    </cs:spPr>
+  </cs:wall>
+</cs:chartStyle>
+</file>
+
 <file path=ppt/notesMasters/notesMaster1.xml><?xml version="1.0" encoding="utf-8"?>
 <p:notesMaster xmlns:a="http://schemas.openxmlformats.org/drawingml/2006/main" xmlns:r="http://schemas.openxmlformats.org/officeDocument/2006/relationships" xmlns:p="http://schemas.openxmlformats.org/presentationml/2006/main">
   <p:cSld>
@@ -2958,7 +4578,7 @@
           <a:p>
             <a:fld id="{5EB2940D-9C20-4E88-B6DA-1821C75C2316}" type="datetimeFigureOut">
               <a:rPr lang="en-IN" smtClean="0"/>
-              <a:t>15-07-2025</a:t>
+              <a:t>17-07-2025</a:t>
             </a:fld>
             <a:endParaRPr lang="en-IN"/>
           </a:p>
@@ -3720,7 +5340,7 @@
     </p:spTree>
     <p:extLst>
       <p:ext uri="{BB962C8B-B14F-4D97-AF65-F5344CB8AC3E}">
-        <p14:creationId xmlns:p14="http://schemas.microsoft.com/office/powerpoint/2010/main" val="308619585"/>
+        <p14:creationId xmlns:p14="http://schemas.microsoft.com/office/powerpoint/2010/main" val="1106090605"/>
       </p:ext>
     </p:extLst>
   </p:cSld>
@@ -3804,7 +5424,7 @@
     </p:spTree>
     <p:extLst>
       <p:ext uri="{BB962C8B-B14F-4D97-AF65-F5344CB8AC3E}">
-        <p14:creationId xmlns:p14="http://schemas.microsoft.com/office/powerpoint/2010/main" val="2620684929"/>
+        <p14:creationId xmlns:p14="http://schemas.microsoft.com/office/powerpoint/2010/main" val="308619585"/>
       </p:ext>
     </p:extLst>
   </p:cSld>
@@ -3888,7 +5508,7 @@
     </p:spTree>
     <p:extLst>
       <p:ext uri="{BB962C8B-B14F-4D97-AF65-F5344CB8AC3E}">
-        <p14:creationId xmlns:p14="http://schemas.microsoft.com/office/powerpoint/2010/main" val="1106090605"/>
+        <p14:creationId xmlns:p14="http://schemas.microsoft.com/office/powerpoint/2010/main" val="2620684929"/>
       </p:ext>
     </p:extLst>
   </p:cSld>
@@ -3903,7 +5523,13 @@
   <p:cSld>
     <p:spTree>
       <p:nvGrpSpPr>
-        <p:cNvPr id="1" name=""/>
+        <p:cNvPr id="1" name="">
+          <a:extLst>
+            <a:ext uri="{FF2B5EF4-FFF2-40B4-BE49-F238E27FC236}">
+              <a16:creationId xmlns:a16="http://schemas.microsoft.com/office/drawing/2014/main" id="{D4A45B38-1126-0418-5676-4679E07CCFDE}"/>
+            </a:ext>
+          </a:extLst>
+        </p:cNvPr>
         <p:cNvGrpSpPr/>
         <p:nvPr/>
       </p:nvGrpSpPr>
@@ -3917,7 +5543,13 @@
       </p:grpSpPr>
       <p:sp>
         <p:nvSpPr>
-          <p:cNvPr id="2" name="Slide Image Placeholder 1"/>
+          <p:cNvPr id="2" name="Slide Image Placeholder 1">
+            <a:extLst>
+              <a:ext uri="{FF2B5EF4-FFF2-40B4-BE49-F238E27FC236}">
+                <a16:creationId xmlns:a16="http://schemas.microsoft.com/office/drawing/2014/main" id="{21C79498-A657-D194-E8AB-DCA361DDE2B4}"/>
+              </a:ext>
+            </a:extLst>
+          </p:cNvPr>
           <p:cNvSpPr>
             <a:spLocks noGrp="1" noRot="1" noChangeAspect="1"/>
           </p:cNvSpPr>
@@ -3929,7 +5561,13 @@
       </p:sp>
       <p:sp>
         <p:nvSpPr>
-          <p:cNvPr id="3" name="Notes Placeholder 2"/>
+          <p:cNvPr id="3" name="Notes Placeholder 2">
+            <a:extLst>
+              <a:ext uri="{FF2B5EF4-FFF2-40B4-BE49-F238E27FC236}">
+                <a16:creationId xmlns:a16="http://schemas.microsoft.com/office/drawing/2014/main" id="{420E63A4-4D7C-00DF-95B0-A3A5DA13BD35}"/>
+              </a:ext>
+            </a:extLst>
+          </p:cNvPr>
           <p:cNvSpPr>
             <a:spLocks noGrp="1"/>
           </p:cNvSpPr>
@@ -3948,7 +5586,13 @@
       </p:sp>
       <p:sp>
         <p:nvSpPr>
-          <p:cNvPr id="4" name="Slide Number Placeholder 3"/>
+          <p:cNvPr id="4" name="Slide Number Placeholder 3">
+            <a:extLst>
+              <a:ext uri="{FF2B5EF4-FFF2-40B4-BE49-F238E27FC236}">
+                <a16:creationId xmlns:a16="http://schemas.microsoft.com/office/drawing/2014/main" id="{EFE0E2F1-2EAF-0CD0-C8F5-99945F273222}"/>
+              </a:ext>
+            </a:extLst>
+          </p:cNvPr>
           <p:cNvSpPr>
             <a:spLocks noGrp="1"/>
           </p:cNvSpPr>
@@ -3972,7 +5616,7 @@
     </p:spTree>
     <p:extLst>
       <p:ext uri="{BB962C8B-B14F-4D97-AF65-F5344CB8AC3E}">
-        <p14:creationId xmlns:p14="http://schemas.microsoft.com/office/powerpoint/2010/main" val="348100118"/>
+        <p14:creationId xmlns:p14="http://schemas.microsoft.com/office/powerpoint/2010/main" val="4287247406"/>
       </p:ext>
     </p:extLst>
   </p:cSld>
@@ -4048,6 +5692,90 @@
             <a:fld id="{0AD53BEA-5E52-4666-A8DD-6A0310A59CA8}" type="slidenum">
               <a:rPr lang="en-IN" smtClean="0"/>
               <a:t>19</a:t>
+            </a:fld>
+            <a:endParaRPr lang="en-IN"/>
+          </a:p>
+        </p:txBody>
+      </p:sp>
+    </p:spTree>
+    <p:extLst>
+      <p:ext uri="{BB962C8B-B14F-4D97-AF65-F5344CB8AC3E}">
+        <p14:creationId xmlns:p14="http://schemas.microsoft.com/office/powerpoint/2010/main" val="348100118"/>
+      </p:ext>
+    </p:extLst>
+  </p:cSld>
+  <p:clrMapOvr>
+    <a:masterClrMapping/>
+  </p:clrMapOvr>
+</p:notes>
+</file>
+
+<file path=ppt/notesSlides/notesSlide19.xml><?xml version="1.0" encoding="utf-8"?>
+<p:notes xmlns:a="http://schemas.openxmlformats.org/drawingml/2006/main" xmlns:r="http://schemas.openxmlformats.org/officeDocument/2006/relationships" xmlns:p="http://schemas.openxmlformats.org/presentationml/2006/main">
+  <p:cSld>
+    <p:spTree>
+      <p:nvGrpSpPr>
+        <p:cNvPr id="1" name=""/>
+        <p:cNvGrpSpPr/>
+        <p:nvPr/>
+      </p:nvGrpSpPr>
+      <p:grpSpPr>
+        <a:xfrm>
+          <a:off x="0" y="0"/>
+          <a:ext cx="0" cy="0"/>
+          <a:chOff x="0" y="0"/>
+          <a:chExt cx="0" cy="0"/>
+        </a:xfrm>
+      </p:grpSpPr>
+      <p:sp>
+        <p:nvSpPr>
+          <p:cNvPr id="2" name="Slide Image Placeholder 1"/>
+          <p:cNvSpPr>
+            <a:spLocks noGrp="1" noRot="1" noChangeAspect="1"/>
+          </p:cNvSpPr>
+          <p:nvPr>
+            <p:ph type="sldImg"/>
+          </p:nvPr>
+        </p:nvSpPr>
+        <p:spPr/>
+      </p:sp>
+      <p:sp>
+        <p:nvSpPr>
+          <p:cNvPr id="3" name="Notes Placeholder 2"/>
+          <p:cNvSpPr>
+            <a:spLocks noGrp="1"/>
+          </p:cNvSpPr>
+          <p:nvPr>
+            <p:ph type="body" idx="1"/>
+          </p:nvPr>
+        </p:nvSpPr>
+        <p:spPr/>
+        <p:txBody>
+          <a:bodyPr/>
+          <a:lstStyle/>
+          <a:p>
+            <a:endParaRPr lang="en-IN" dirty="0"/>
+          </a:p>
+        </p:txBody>
+      </p:sp>
+      <p:sp>
+        <p:nvSpPr>
+          <p:cNvPr id="4" name="Slide Number Placeholder 3"/>
+          <p:cNvSpPr>
+            <a:spLocks noGrp="1"/>
+          </p:cNvSpPr>
+          <p:nvPr>
+            <p:ph type="sldNum" sz="quarter" idx="10"/>
+          </p:nvPr>
+        </p:nvSpPr>
+        <p:spPr/>
+        <p:txBody>
+          <a:bodyPr/>
+          <a:lstStyle/>
+          <a:p>
+            <a:fld id="{0AD53BEA-5E52-4666-A8DD-6A0310A59CA8}" type="slidenum">
+              <a:rPr lang="en-IN" smtClean="0"/>
+              <a:t>20</a:t>
             </a:fld>
             <a:endParaRPr lang="en-IN"/>
           </a:p>
@@ -4869,7 +6597,7 @@
           <a:p>
             <a:fld id="{D737C1D5-1EA4-4B24-B76E-91AF016E39DE}" type="datetimeFigureOut">
               <a:rPr lang="en-IN" smtClean="0"/>
-              <a:t>15-07-2025</a:t>
+              <a:t>17-07-2025</a:t>
             </a:fld>
             <a:endParaRPr lang="en-IN"/>
           </a:p>
@@ -5039,7 +6767,7 @@
           <a:p>
             <a:fld id="{D737C1D5-1EA4-4B24-B76E-91AF016E39DE}" type="datetimeFigureOut">
               <a:rPr lang="en-IN" smtClean="0"/>
-              <a:t>15-07-2025</a:t>
+              <a:t>17-07-2025</a:t>
             </a:fld>
             <a:endParaRPr lang="en-IN"/>
           </a:p>
@@ -5219,7 +6947,7 @@
           <a:p>
             <a:fld id="{D737C1D5-1EA4-4B24-B76E-91AF016E39DE}" type="datetimeFigureOut">
               <a:rPr lang="en-IN" smtClean="0"/>
-              <a:t>15-07-2025</a:t>
+              <a:t>17-07-2025</a:t>
             </a:fld>
             <a:endParaRPr lang="en-IN"/>
           </a:p>
@@ -5389,7 +7117,7 @@
           <a:p>
             <a:fld id="{D737C1D5-1EA4-4B24-B76E-91AF016E39DE}" type="datetimeFigureOut">
               <a:rPr lang="en-IN" smtClean="0"/>
-              <a:t>15-07-2025</a:t>
+              <a:t>17-07-2025</a:t>
             </a:fld>
             <a:endParaRPr lang="en-IN"/>
           </a:p>
@@ -5635,7 +7363,7 @@
           <a:p>
             <a:fld id="{D737C1D5-1EA4-4B24-B76E-91AF016E39DE}" type="datetimeFigureOut">
               <a:rPr lang="en-IN" smtClean="0"/>
-              <a:t>15-07-2025</a:t>
+              <a:t>17-07-2025</a:t>
             </a:fld>
             <a:endParaRPr lang="en-IN"/>
           </a:p>
@@ -5867,7 +7595,7 @@
           <a:p>
             <a:fld id="{D737C1D5-1EA4-4B24-B76E-91AF016E39DE}" type="datetimeFigureOut">
               <a:rPr lang="en-IN" smtClean="0"/>
-              <a:t>15-07-2025</a:t>
+              <a:t>17-07-2025</a:t>
             </a:fld>
             <a:endParaRPr lang="en-IN"/>
           </a:p>
@@ -6234,7 +7962,7 @@
           <a:p>
             <a:fld id="{D737C1D5-1EA4-4B24-B76E-91AF016E39DE}" type="datetimeFigureOut">
               <a:rPr lang="en-IN" smtClean="0"/>
-              <a:t>15-07-2025</a:t>
+              <a:t>17-07-2025</a:t>
             </a:fld>
             <a:endParaRPr lang="en-IN"/>
           </a:p>
@@ -6352,7 +8080,7 @@
           <a:p>
             <a:fld id="{D737C1D5-1EA4-4B24-B76E-91AF016E39DE}" type="datetimeFigureOut">
               <a:rPr lang="en-IN" smtClean="0"/>
-              <a:t>15-07-2025</a:t>
+              <a:t>17-07-2025</a:t>
             </a:fld>
             <a:endParaRPr lang="en-IN"/>
           </a:p>
@@ -6447,7 +8175,7 @@
           <a:p>
             <a:fld id="{D737C1D5-1EA4-4B24-B76E-91AF016E39DE}" type="datetimeFigureOut">
               <a:rPr lang="en-IN" smtClean="0"/>
-              <a:t>15-07-2025</a:t>
+              <a:t>17-07-2025</a:t>
             </a:fld>
             <a:endParaRPr lang="en-IN"/>
           </a:p>
@@ -6724,7 +8452,7 @@
           <a:p>
             <a:fld id="{D737C1D5-1EA4-4B24-B76E-91AF016E39DE}" type="datetimeFigureOut">
               <a:rPr lang="en-IN" smtClean="0"/>
-              <a:t>15-07-2025</a:t>
+              <a:t>17-07-2025</a:t>
             </a:fld>
             <a:endParaRPr lang="en-IN"/>
           </a:p>
@@ -6977,7 +8705,7 @@
           <a:p>
             <a:fld id="{D737C1D5-1EA4-4B24-B76E-91AF016E39DE}" type="datetimeFigureOut">
               <a:rPr lang="en-IN" smtClean="0"/>
-              <a:t>15-07-2025</a:t>
+              <a:t>17-07-2025</a:t>
             </a:fld>
             <a:endParaRPr lang="en-IN"/>
           </a:p>
@@ -7190,7 +8918,7 @@
           <a:p>
             <a:fld id="{D737C1D5-1EA4-4B24-B76E-91AF016E39DE}" type="datetimeFigureOut">
               <a:rPr lang="en-IN" smtClean="0"/>
-              <a:t>15-07-2025</a:t>
+              <a:t>17-07-2025</a:t>
             </a:fld>
             <a:endParaRPr lang="en-IN"/>
           </a:p>
@@ -7822,10 +9550,9 @@
           <a:lstStyle/>
           <a:p>
             <a:r>
-              <a:rPr lang="en-IN" sz="3000" b="1" dirty="0" smtClean="0"/>
+              <a:rPr lang="en-IN" sz="3000" b="1" dirty="0"/>
               <a:t>Field Detection Model: YOLO Results</a:t>
             </a:r>
-            <a:endParaRPr lang="en-IN" sz="3000" b="1" dirty="0"/>
           </a:p>
         </p:txBody>
       </p:sp>
@@ -7887,7 +9614,7 @@
           <a:lstStyle/>
           <a:p>
             <a:r>
-              <a:rPr lang="en-IN" sz="1200" dirty="0" err="1" smtClean="0">
+              <a:rPr lang="en-IN" sz="1200" dirty="0" err="1">
                 <a:solidFill>
                   <a:schemeClr val="bg1"/>
                 </a:solidFill>
@@ -7896,7 +9623,7 @@
               <a:t>DeHaDo</a:t>
             </a:r>
             <a:r>
-              <a:rPr lang="en-IN" sz="1200" dirty="0" smtClean="0">
+              <a:rPr lang="en-IN" sz="1200" dirty="0">
                 <a:solidFill>
                   <a:schemeClr val="bg1"/>
                 </a:solidFill>
@@ -7904,12 +9631,6 @@
               </a:rPr>
               <a:t>-AI Challenge</a:t>
             </a:r>
-            <a:endParaRPr lang="en-IN" sz="1200" dirty="0">
-              <a:solidFill>
-                <a:schemeClr val="bg1"/>
-              </a:solidFill>
-              <a:cs typeface="Times New Roman" panose="02020603050405020304" pitchFamily="18" charset="0"/>
-            </a:endParaRPr>
           </a:p>
         </p:txBody>
       </p:sp>
@@ -7936,7 +9657,7 @@
           <a:lstStyle/>
           <a:p>
             <a:r>
-              <a:rPr lang="en-IN" sz="1200" dirty="0" smtClean="0">
+              <a:rPr lang="en-IN" sz="1200" dirty="0">
                 <a:solidFill>
                   <a:schemeClr val="bg1"/>
                 </a:solidFill>
@@ -7944,12 +9665,6 @@
               </a:rPr>
               <a:t>NCVPRIPG 2025, IIT Jammu</a:t>
             </a:r>
-            <a:endParaRPr lang="en-IN" sz="1200" dirty="0">
-              <a:solidFill>
-                <a:schemeClr val="bg1"/>
-              </a:solidFill>
-              <a:cs typeface="Times New Roman" panose="02020603050405020304" pitchFamily="18" charset="0"/>
-            </a:endParaRPr>
           </a:p>
         </p:txBody>
       </p:sp>
@@ -8117,16 +9832,22 @@
       </p:sp>
       <p:grpSp>
         <p:nvGrpSpPr>
-          <p:cNvPr id="15" name="Group 14"/>
+          <p:cNvPr id="18" name="Group 17">
+            <a:extLst>
+              <a:ext uri="{FF2B5EF4-FFF2-40B4-BE49-F238E27FC236}">
+                <a16:creationId xmlns:a16="http://schemas.microsoft.com/office/drawing/2014/main" id="{1F1BD5A4-6CB2-FE99-30D8-5F9CAFD604BF}"/>
+              </a:ext>
+            </a:extLst>
+          </p:cNvPr>
           <p:cNvGrpSpPr/>
           <p:nvPr/>
         </p:nvGrpSpPr>
         <p:grpSpPr>
           <a:xfrm>
-            <a:off x="8087465" y="2183201"/>
-            <a:ext cx="2885334" cy="1980023"/>
-            <a:chOff x="3709429" y="1607493"/>
-            <a:chExt cx="2885334" cy="1980023"/>
+            <a:off x="7452827" y="1058024"/>
+            <a:ext cx="2778747" cy="2082957"/>
+            <a:chOff x="8194052" y="2197203"/>
+            <a:chExt cx="2778747" cy="2082957"/>
           </a:xfrm>
         </p:grpSpPr>
         <p:sp>
@@ -8137,12 +9858,18 @@
           </p:nvSpPr>
           <p:spPr>
             <a:xfrm>
-              <a:off x="4498109" y="2235200"/>
+              <a:off x="8876145" y="2810908"/>
               <a:ext cx="997527" cy="637309"/>
             </a:xfrm>
             <a:prstGeom prst="rect">
               <a:avLst/>
             </a:prstGeom>
+            <a:solidFill>
+              <a:srgbClr val="92D050"/>
+            </a:solidFill>
+            <a:ln>
+              <a:noFill/>
+            </a:ln>
           </p:spPr>
           <p:style>
             <a:lnRef idx="2">
@@ -8165,7 +9892,19 @@
             <a:lstStyle/>
             <a:p>
               <a:pPr algn="ctr"/>
-              <a:endParaRPr lang="en-IN"/>
+              <a:r>
+                <a:rPr lang="en-US" dirty="0">
+                  <a:solidFill>
+                    <a:schemeClr val="tx1"/>
+                  </a:solidFill>
+                </a:rPr>
+                <a:t>20382</a:t>
+              </a:r>
+              <a:endParaRPr lang="en-IN" dirty="0">
+                <a:solidFill>
+                  <a:schemeClr val="tx1"/>
+                </a:solidFill>
+              </a:endParaRPr>
             </a:p>
           </p:txBody>
         </p:sp>
@@ -8177,12 +9916,18 @@
           </p:nvSpPr>
           <p:spPr>
             <a:xfrm>
-              <a:off x="5597236" y="2235200"/>
+              <a:off x="9975272" y="2810908"/>
               <a:ext cx="997527" cy="637309"/>
             </a:xfrm>
             <a:prstGeom prst="rect">
               <a:avLst/>
             </a:prstGeom>
+            <a:solidFill>
+              <a:srgbClr val="FF0000"/>
+            </a:solidFill>
+            <a:ln>
+              <a:noFill/>
+            </a:ln>
           </p:spPr>
           <p:style>
             <a:lnRef idx="2">
@@ -8205,7 +9950,11 @@
             <a:lstStyle/>
             <a:p>
               <a:pPr algn="ctr"/>
-              <a:endParaRPr lang="en-IN"/>
+              <a:r>
+                <a:rPr lang="en-US" dirty="0"/>
+                <a:t>209</a:t>
+              </a:r>
+              <a:endParaRPr lang="en-IN" dirty="0"/>
             </a:p>
           </p:txBody>
         </p:sp>
@@ -8217,12 +9966,18 @@
           </p:nvSpPr>
           <p:spPr>
             <a:xfrm>
-              <a:off x="4498108" y="2949685"/>
+              <a:off x="8876144" y="3525393"/>
               <a:ext cx="997527" cy="637309"/>
             </a:xfrm>
             <a:prstGeom prst="rect">
               <a:avLst/>
             </a:prstGeom>
+            <a:solidFill>
+              <a:srgbClr val="FF0000"/>
+            </a:solidFill>
+            <a:ln>
+              <a:noFill/>
+            </a:ln>
           </p:spPr>
           <p:style>
             <a:lnRef idx="2">
@@ -8245,7 +10000,11 @@
             <a:lstStyle/>
             <a:p>
               <a:pPr algn="ctr"/>
-              <a:endParaRPr lang="en-IN"/>
+              <a:r>
+                <a:rPr lang="en-US" dirty="0"/>
+                <a:t>254</a:t>
+              </a:r>
+              <a:endParaRPr lang="en-IN" dirty="0"/>
             </a:p>
           </p:txBody>
         </p:sp>
@@ -8257,12 +10016,18 @@
           </p:nvSpPr>
           <p:spPr>
             <a:xfrm>
-              <a:off x="5597236" y="2950207"/>
+              <a:off x="9975272" y="3525915"/>
               <a:ext cx="997527" cy="637309"/>
             </a:xfrm>
             <a:prstGeom prst="rect">
               <a:avLst/>
             </a:prstGeom>
+            <a:solidFill>
+              <a:srgbClr val="92D050"/>
+            </a:solidFill>
+            <a:ln>
+              <a:noFill/>
+            </a:ln>
           </p:spPr>
           <p:style>
             <a:lnRef idx="2">
@@ -8285,7 +10050,19 @@
             <a:lstStyle/>
             <a:p>
               <a:pPr algn="ctr"/>
-              <a:endParaRPr lang="en-IN"/>
+              <a:r>
+                <a:rPr lang="en-US" dirty="0">
+                  <a:solidFill>
+                    <a:schemeClr val="tx1"/>
+                  </a:solidFill>
+                </a:rPr>
+                <a:t>NA</a:t>
+              </a:r>
+              <a:endParaRPr lang="en-IN" dirty="0">
+                <a:solidFill>
+                  <a:schemeClr val="tx1"/>
+                </a:solidFill>
+              </a:endParaRPr>
             </a:p>
           </p:txBody>
         </p:sp>
@@ -8297,7 +10074,7 @@
           </p:nvSpPr>
           <p:spPr>
             <a:xfrm>
-              <a:off x="5208347" y="1607493"/>
+              <a:off x="9489767" y="2197203"/>
               <a:ext cx="777777" cy="369332"/>
             </a:xfrm>
             <a:prstGeom prst="rect">
@@ -8312,10 +10089,9 @@
             <a:lstStyle/>
             <a:p>
               <a:r>
-                <a:rPr lang="en-IN" dirty="0" smtClean="0"/>
+                <a:rPr lang="en-IN" dirty="0"/>
                 <a:t>Actual</a:t>
               </a:r>
-              <a:endParaRPr lang="en-IN" dirty="0"/>
             </a:p>
           </p:txBody>
         </p:sp>
@@ -8327,7 +10103,7 @@
           </p:nvSpPr>
           <p:spPr>
             <a:xfrm rot="16200000">
-              <a:off x="3323169" y="2665747"/>
+              <a:off x="7807792" y="3263550"/>
               <a:ext cx="1141851" cy="369332"/>
             </a:xfrm>
             <a:prstGeom prst="rect">
@@ -8342,14 +10118,256 @@
             <a:lstStyle/>
             <a:p>
               <a:r>
-                <a:rPr lang="en-IN" dirty="0" smtClean="0"/>
+                <a:rPr lang="en-IN" dirty="0"/>
                 <a:t>Prediction</a:t>
               </a:r>
-              <a:endParaRPr lang="en-IN" dirty="0"/>
+            </a:p>
+          </p:txBody>
+        </p:sp>
+        <p:sp>
+          <p:nvSpPr>
+            <p:cNvPr id="11" name="TextBox 10">
+              <a:extLst>
+                <a:ext uri="{FF2B5EF4-FFF2-40B4-BE49-F238E27FC236}">
+                  <a16:creationId xmlns:a16="http://schemas.microsoft.com/office/drawing/2014/main" id="{BDFFC97F-664C-0B97-927F-A27E6C43E732}"/>
+                </a:ext>
+              </a:extLst>
+            </p:cNvPr>
+            <p:cNvSpPr txBox="1"/>
+            <p:nvPr/>
+          </p:nvSpPr>
+          <p:spPr>
+            <a:xfrm rot="16200000">
+              <a:off x="8307881" y="3711895"/>
+              <a:ext cx="828753" cy="307777"/>
+            </a:xfrm>
+            <a:prstGeom prst="rect">
+              <a:avLst/>
+            </a:prstGeom>
+            <a:noFill/>
+          </p:spPr>
+          <p:txBody>
+            <a:bodyPr wrap="none" rtlCol="0">
+              <a:spAutoFit/>
+            </a:bodyPr>
+            <a:lstStyle/>
+            <a:p>
+              <a:r>
+                <a:rPr lang="en-IN" sz="1400" dirty="0"/>
+                <a:t>Negative</a:t>
+              </a:r>
+            </a:p>
+          </p:txBody>
+        </p:sp>
+        <p:sp>
+          <p:nvSpPr>
+            <p:cNvPr id="12" name="TextBox 11">
+              <a:extLst>
+                <a:ext uri="{FF2B5EF4-FFF2-40B4-BE49-F238E27FC236}">
+                  <a16:creationId xmlns:a16="http://schemas.microsoft.com/office/drawing/2014/main" id="{201D0678-58F3-64BD-7B91-6312C39E2EEF}"/>
+                </a:ext>
+              </a:extLst>
+            </p:cNvPr>
+            <p:cNvSpPr txBox="1"/>
+            <p:nvPr/>
+          </p:nvSpPr>
+          <p:spPr>
+            <a:xfrm rot="16200000">
+              <a:off x="8335676" y="2965621"/>
+              <a:ext cx="753220" cy="307777"/>
+            </a:xfrm>
+            <a:prstGeom prst="rect">
+              <a:avLst/>
+            </a:prstGeom>
+            <a:noFill/>
+          </p:spPr>
+          <p:txBody>
+            <a:bodyPr wrap="none" rtlCol="0">
+              <a:spAutoFit/>
+            </a:bodyPr>
+            <a:lstStyle/>
+            <a:p>
+              <a:r>
+                <a:rPr lang="en-IN" sz="1400" dirty="0"/>
+                <a:t>Positive</a:t>
+              </a:r>
+            </a:p>
+          </p:txBody>
+        </p:sp>
+        <p:sp>
+          <p:nvSpPr>
+            <p:cNvPr id="13" name="TextBox 12">
+              <a:extLst>
+                <a:ext uri="{FF2B5EF4-FFF2-40B4-BE49-F238E27FC236}">
+                  <a16:creationId xmlns:a16="http://schemas.microsoft.com/office/drawing/2014/main" id="{63AFC102-3840-5C30-29AB-E8FB837B12DF}"/>
+                </a:ext>
+              </a:extLst>
+            </p:cNvPr>
+            <p:cNvSpPr txBox="1"/>
+            <p:nvPr/>
+          </p:nvSpPr>
+          <p:spPr>
+            <a:xfrm>
+              <a:off x="8998297" y="2517220"/>
+              <a:ext cx="753220" cy="307777"/>
+            </a:xfrm>
+            <a:prstGeom prst="rect">
+              <a:avLst/>
+            </a:prstGeom>
+            <a:noFill/>
+          </p:spPr>
+          <p:txBody>
+            <a:bodyPr wrap="none" rtlCol="0">
+              <a:spAutoFit/>
+            </a:bodyPr>
+            <a:lstStyle/>
+            <a:p>
+              <a:r>
+                <a:rPr lang="en-IN" sz="1400" dirty="0"/>
+                <a:t>Positive</a:t>
+              </a:r>
+            </a:p>
+          </p:txBody>
+        </p:sp>
+        <p:sp>
+          <p:nvSpPr>
+            <p:cNvPr id="17" name="TextBox 16">
+              <a:extLst>
+                <a:ext uri="{FF2B5EF4-FFF2-40B4-BE49-F238E27FC236}">
+                  <a16:creationId xmlns:a16="http://schemas.microsoft.com/office/drawing/2014/main" id="{6BA7F922-F784-34F1-AE41-A1B86A60D549}"/>
+                </a:ext>
+              </a:extLst>
+            </p:cNvPr>
+            <p:cNvSpPr txBox="1"/>
+            <p:nvPr/>
+          </p:nvSpPr>
+          <p:spPr>
+            <a:xfrm>
+              <a:off x="10005794" y="2517220"/>
+              <a:ext cx="828753" cy="307777"/>
+            </a:xfrm>
+            <a:prstGeom prst="rect">
+              <a:avLst/>
+            </a:prstGeom>
+            <a:noFill/>
+          </p:spPr>
+          <p:txBody>
+            <a:bodyPr wrap="none" rtlCol="0">
+              <a:spAutoFit/>
+            </a:bodyPr>
+            <a:lstStyle/>
+            <a:p>
+              <a:r>
+                <a:rPr lang="en-IN" sz="1400" dirty="0"/>
+                <a:t>Negative</a:t>
+              </a:r>
             </a:p>
           </p:txBody>
         </p:sp>
       </p:grpSp>
+      <p:graphicFrame>
+        <p:nvGraphicFramePr>
+          <p:cNvPr id="23" name="Chart 22">
+            <a:extLst>
+              <a:ext uri="{FF2B5EF4-FFF2-40B4-BE49-F238E27FC236}">
+                <a16:creationId xmlns:a16="http://schemas.microsoft.com/office/drawing/2014/main" id="{FE2E1160-8E2D-6C23-22CF-039A4EE90B97}"/>
+              </a:ext>
+            </a:extLst>
+          </p:cNvPr>
+          <p:cNvGraphicFramePr>
+            <a:graphicFrameLocks/>
+          </p:cNvGraphicFramePr>
+          <p:nvPr>
+            <p:extLst>
+              <p:ext uri="{D42A27DB-BD31-4B8C-83A1-F6EECF244321}">
+                <p14:modId xmlns:p14="http://schemas.microsoft.com/office/powerpoint/2010/main" val="3407626531"/>
+              </p:ext>
+            </p:extLst>
+          </p:nvPr>
+        </p:nvGraphicFramePr>
+        <p:xfrm>
+          <a:off x="1049290" y="1125332"/>
+          <a:ext cx="5456429" cy="4786708"/>
+        </p:xfrm>
+        <a:graphic>
+          <a:graphicData uri="http://schemas.openxmlformats.org/drawingml/2006/chart">
+            <c:chart xmlns:c="http://schemas.openxmlformats.org/drawingml/2006/chart" xmlns:r="http://schemas.openxmlformats.org/officeDocument/2006/relationships" r:id="rId3"/>
+          </a:graphicData>
+        </a:graphic>
+      </p:graphicFrame>
+      <p:sp>
+        <p:nvSpPr>
+          <p:cNvPr id="25" name="TextBox 24">
+            <a:extLst>
+              <a:ext uri="{FF2B5EF4-FFF2-40B4-BE49-F238E27FC236}">
+                <a16:creationId xmlns:a16="http://schemas.microsoft.com/office/drawing/2014/main" id="{FA5D52F2-7B54-9E48-2C75-24D92CEEBBFB}"/>
+              </a:ext>
+            </a:extLst>
+          </p:cNvPr>
+          <p:cNvSpPr txBox="1"/>
+          <p:nvPr/>
+        </p:nvSpPr>
+        <p:spPr>
+          <a:xfrm>
+            <a:off x="7383742" y="3397925"/>
+            <a:ext cx="3295898" cy="2248629"/>
+          </a:xfrm>
+          <a:prstGeom prst="rect">
+            <a:avLst/>
+          </a:prstGeom>
+          <a:noFill/>
+        </p:spPr>
+        <p:txBody>
+          <a:bodyPr wrap="square">
+            <a:spAutoFit/>
+          </a:bodyPr>
+          <a:lstStyle/>
+          <a:p>
+            <a:pPr>
+              <a:lnSpc>
+                <a:spcPct val="150000"/>
+              </a:lnSpc>
+            </a:pPr>
+            <a:r>
+              <a:rPr lang="en-IN" sz="2400" dirty="0"/>
+              <a:t>📦 mAP@0.5  : 92.6%</a:t>
+            </a:r>
+          </a:p>
+          <a:p>
+            <a:pPr>
+              <a:lnSpc>
+                <a:spcPct val="150000"/>
+              </a:lnSpc>
+            </a:pPr>
+            <a:r>
+              <a:rPr lang="en-IN" sz="2400" dirty="0"/>
+              <a:t>🎯 Precision    : 98.9%</a:t>
+            </a:r>
+          </a:p>
+          <a:p>
+            <a:pPr>
+              <a:lnSpc>
+                <a:spcPct val="150000"/>
+              </a:lnSpc>
+            </a:pPr>
+            <a:r>
+              <a:rPr lang="en-IN" sz="2400" dirty="0"/>
+              <a:t>🔍 Recall          : 98.7%</a:t>
+            </a:r>
+          </a:p>
+          <a:p>
+            <a:pPr>
+              <a:lnSpc>
+                <a:spcPct val="150000"/>
+              </a:lnSpc>
+            </a:pPr>
+            <a:r>
+              <a:rPr lang="en-IN" sz="2400" dirty="0"/>
+              <a:t>⚖️ F1 Score     : 98.8%</a:t>
+            </a:r>
+          </a:p>
+        </p:txBody>
+      </p:sp>
     </p:spTree>
     <p:extLst>
       <p:ext uri="{BB962C8B-B14F-4D97-AF65-F5344CB8AC3E}">
@@ -8363,9 +10381,173 @@
   <p:timing>
     <p:tnLst>
       <p:par>
-        <p:cTn id="1" dur="indefinite" restart="never" nodeType="tmRoot"/>
+        <p:cTn id="1" dur="indefinite" restart="never" nodeType="tmRoot">
+          <p:childTnLst>
+            <p:seq concurrent="1" nextAc="seek">
+              <p:cTn id="2" dur="indefinite" nodeType="mainSeq">
+                <p:childTnLst>
+                  <p:par>
+                    <p:cTn id="3" fill="hold">
+                      <p:stCondLst>
+                        <p:cond delay="indefinite"/>
+                      </p:stCondLst>
+                      <p:childTnLst>
+                        <p:par>
+                          <p:cTn id="4" fill="hold">
+                            <p:stCondLst>
+                              <p:cond delay="0"/>
+                            </p:stCondLst>
+                            <p:childTnLst>
+                              <p:par>
+                                <p:cTn id="5" presetID="1" presetClass="entr" presetSubtype="0" fill="hold" grpId="0" nodeType="clickEffect">
+                                  <p:stCondLst>
+                                    <p:cond delay="0"/>
+                                  </p:stCondLst>
+                                  <p:childTnLst>
+                                    <p:set>
+                                      <p:cBhvr>
+                                        <p:cTn id="6" dur="1" fill="hold">
+                                          <p:stCondLst>
+                                            <p:cond delay="0"/>
+                                          </p:stCondLst>
+                                        </p:cTn>
+                                        <p:tgtEl>
+                                          <p:spTgt spid="23"/>
+                                        </p:tgtEl>
+                                        <p:attrNameLst>
+                                          <p:attrName>style.visibility</p:attrName>
+                                        </p:attrNameLst>
+                                      </p:cBhvr>
+                                      <p:to>
+                                        <p:strVal val="visible"/>
+                                      </p:to>
+                                    </p:set>
+                                  </p:childTnLst>
+                                </p:cTn>
+                              </p:par>
+                            </p:childTnLst>
+                          </p:cTn>
+                        </p:par>
+                      </p:childTnLst>
+                    </p:cTn>
+                  </p:par>
+                  <p:par>
+                    <p:cTn id="7" fill="hold">
+                      <p:stCondLst>
+                        <p:cond delay="indefinite"/>
+                      </p:stCondLst>
+                      <p:childTnLst>
+                        <p:par>
+                          <p:cTn id="8" fill="hold">
+                            <p:stCondLst>
+                              <p:cond delay="0"/>
+                            </p:stCondLst>
+                            <p:childTnLst>
+                              <p:par>
+                                <p:cTn id="9" presetID="1" presetClass="entr" presetSubtype="0" fill="hold" nodeType="clickEffect">
+                                  <p:stCondLst>
+                                    <p:cond delay="0"/>
+                                  </p:stCondLst>
+                                  <p:childTnLst>
+                                    <p:set>
+                                      <p:cBhvr>
+                                        <p:cTn id="10" dur="1" fill="hold">
+                                          <p:stCondLst>
+                                            <p:cond delay="0"/>
+                                          </p:stCondLst>
+                                        </p:cTn>
+                                        <p:tgtEl>
+                                          <p:spTgt spid="18"/>
+                                        </p:tgtEl>
+                                        <p:attrNameLst>
+                                          <p:attrName>style.visibility</p:attrName>
+                                        </p:attrNameLst>
+                                      </p:cBhvr>
+                                      <p:to>
+                                        <p:strVal val="visible"/>
+                                      </p:to>
+                                    </p:set>
+                                  </p:childTnLst>
+                                </p:cTn>
+                              </p:par>
+                            </p:childTnLst>
+                          </p:cTn>
+                        </p:par>
+                      </p:childTnLst>
+                    </p:cTn>
+                  </p:par>
+                  <p:par>
+                    <p:cTn id="11" fill="hold">
+                      <p:stCondLst>
+                        <p:cond delay="indefinite"/>
+                      </p:stCondLst>
+                      <p:childTnLst>
+                        <p:par>
+                          <p:cTn id="12" fill="hold">
+                            <p:stCondLst>
+                              <p:cond delay="0"/>
+                            </p:stCondLst>
+                            <p:childTnLst>
+                              <p:par>
+                                <p:cTn id="13" presetID="1" presetClass="entr" presetSubtype="0" fill="hold" grpId="0" nodeType="clickEffect">
+                                  <p:stCondLst>
+                                    <p:cond delay="0"/>
+                                  </p:stCondLst>
+                                  <p:childTnLst>
+                                    <p:set>
+                                      <p:cBhvr>
+                                        <p:cTn id="14" dur="1" fill="hold">
+                                          <p:stCondLst>
+                                            <p:cond delay="0"/>
+                                          </p:stCondLst>
+                                        </p:cTn>
+                                        <p:tgtEl>
+                                          <p:spTgt spid="25"/>
+                                        </p:tgtEl>
+                                        <p:attrNameLst>
+                                          <p:attrName>style.visibility</p:attrName>
+                                        </p:attrNameLst>
+                                      </p:cBhvr>
+                                      <p:to>
+                                        <p:strVal val="visible"/>
+                                      </p:to>
+                                    </p:set>
+                                  </p:childTnLst>
+                                </p:cTn>
+                              </p:par>
+                            </p:childTnLst>
+                          </p:cTn>
+                        </p:par>
+                      </p:childTnLst>
+                    </p:cTn>
+                  </p:par>
+                </p:childTnLst>
+              </p:cTn>
+              <p:prevCondLst>
+                <p:cond evt="onPrev" delay="0">
+                  <p:tgtEl>
+                    <p:sldTgt/>
+                  </p:tgtEl>
+                </p:cond>
+              </p:prevCondLst>
+              <p:nextCondLst>
+                <p:cond evt="onNext" delay="0">
+                  <p:tgtEl>
+                    <p:sldTgt/>
+                  </p:tgtEl>
+                </p:cond>
+              </p:nextCondLst>
+            </p:seq>
+          </p:childTnLst>
+        </p:cTn>
       </p:par>
     </p:tnLst>
+    <p:bldLst>
+      <p:bldGraphic spid="23" grpId="0">
+        <p:bldAsOne/>
+      </p:bldGraphic>
+      <p:bldP spid="25" grpId="0"/>
+    </p:bldLst>
   </p:timing>
 </p:sld>
 </file>
@@ -8458,10 +10640,9 @@
           <a:lstStyle/>
           <a:p>
             <a:r>
-              <a:rPr lang="en-IN" sz="3000" b="1" dirty="0" smtClean="0"/>
+              <a:rPr lang="en-IN" sz="3000" b="1" dirty="0"/>
               <a:t>Field Matching</a:t>
             </a:r>
-            <a:endParaRPr lang="en-IN" sz="3000" b="1" dirty="0"/>
           </a:p>
         </p:txBody>
       </p:sp>
@@ -8523,7 +10704,7 @@
           <a:lstStyle/>
           <a:p>
             <a:r>
-              <a:rPr lang="en-IN" sz="1200" dirty="0" err="1" smtClean="0">
+              <a:rPr lang="en-IN" sz="1200" dirty="0" err="1">
                 <a:solidFill>
                   <a:schemeClr val="bg1"/>
                 </a:solidFill>
@@ -8532,7 +10713,7 @@
               <a:t>DeHaDo</a:t>
             </a:r>
             <a:r>
-              <a:rPr lang="en-IN" sz="1200" dirty="0" smtClean="0">
+              <a:rPr lang="en-IN" sz="1200" dirty="0">
                 <a:solidFill>
                   <a:schemeClr val="bg1"/>
                 </a:solidFill>
@@ -8540,12 +10721,6 @@
               </a:rPr>
               <a:t>-AI Challenge</a:t>
             </a:r>
-            <a:endParaRPr lang="en-IN" sz="1200" dirty="0">
-              <a:solidFill>
-                <a:schemeClr val="bg1"/>
-              </a:solidFill>
-              <a:cs typeface="Times New Roman" panose="02020603050405020304" pitchFamily="18" charset="0"/>
-            </a:endParaRPr>
           </a:p>
         </p:txBody>
       </p:sp>
@@ -8572,7 +10747,7 @@
           <a:lstStyle/>
           <a:p>
             <a:r>
-              <a:rPr lang="en-IN" sz="1200" dirty="0" smtClean="0">
+              <a:rPr lang="en-IN" sz="1200" dirty="0">
                 <a:solidFill>
                   <a:schemeClr val="bg1"/>
                 </a:solidFill>
@@ -8580,12 +10755,6 @@
               </a:rPr>
               <a:t>NCVPRIPG 2025, IIT Jammu</a:t>
             </a:r>
-            <a:endParaRPr lang="en-IN" sz="1200" dirty="0">
-              <a:solidFill>
-                <a:schemeClr val="bg1"/>
-              </a:solidFill>
-              <a:cs typeface="Times New Roman" panose="02020603050405020304" pitchFamily="18" charset="0"/>
-            </a:endParaRPr>
           </a:p>
         </p:txBody>
       </p:sp>
@@ -8751,6 +10920,218 @@
           </a:p>
         </p:txBody>
       </p:sp>
+      <p:pic>
+        <p:nvPicPr>
+          <p:cNvPr id="4" name="Picture 3">
+            <a:extLst>
+              <a:ext uri="{FF2B5EF4-FFF2-40B4-BE49-F238E27FC236}">
+                <a16:creationId xmlns:a16="http://schemas.microsoft.com/office/drawing/2014/main" id="{C3A5317A-2FA1-2D4B-2387-4AB40B17E0AE}"/>
+              </a:ext>
+            </a:extLst>
+          </p:cNvPr>
+          <p:cNvPicPr>
+            <a:picLocks noChangeAspect="1"/>
+          </p:cNvPicPr>
+          <p:nvPr/>
+        </p:nvPicPr>
+        <p:blipFill>
+          <a:blip r:embed="rId3" cstate="print">
+            <a:extLst>
+              <a:ext uri="{28A0092B-C50C-407E-A947-70E740481C1C}">
+                <a14:useLocalDpi xmlns:a14="http://schemas.microsoft.com/office/drawing/2010/main" val="0"/>
+              </a:ext>
+            </a:extLst>
+          </a:blip>
+          <a:srcRect t="1135" b="22128"/>
+          <a:stretch>
+            <a:fillRect/>
+          </a:stretch>
+        </p:blipFill>
+        <p:spPr>
+          <a:xfrm>
+            <a:off x="508000" y="827101"/>
+            <a:ext cx="4943548" cy="5262661"/>
+          </a:xfrm>
+          <a:prstGeom prst="rect">
+            <a:avLst/>
+          </a:prstGeom>
+        </p:spPr>
+      </p:pic>
+      <p:sp>
+        <p:nvSpPr>
+          <p:cNvPr id="11" name="Rectangle 10">
+            <a:extLst>
+              <a:ext uri="{FF2B5EF4-FFF2-40B4-BE49-F238E27FC236}">
+                <a16:creationId xmlns:a16="http://schemas.microsoft.com/office/drawing/2014/main" id="{9CE822E9-D06D-E49B-B6F1-5F19BFFA8C42}"/>
+              </a:ext>
+            </a:extLst>
+          </p:cNvPr>
+          <p:cNvSpPr/>
+          <p:nvPr/>
+        </p:nvSpPr>
+        <p:spPr>
+          <a:xfrm>
+            <a:off x="739302" y="1322961"/>
+            <a:ext cx="4426085" cy="4513627"/>
+          </a:xfrm>
+          <a:custGeom>
+            <a:avLst/>
+            <a:gdLst>
+              <a:gd name="connsiteX0" fmla="*/ 0 w 4396902"/>
+              <a:gd name="connsiteY0" fmla="*/ 0 h 4533082"/>
+              <a:gd name="connsiteX1" fmla="*/ 4396902 w 4396902"/>
+              <a:gd name="connsiteY1" fmla="*/ 0 h 4533082"/>
+              <a:gd name="connsiteX2" fmla="*/ 4396902 w 4396902"/>
+              <a:gd name="connsiteY2" fmla="*/ 4533082 h 4533082"/>
+              <a:gd name="connsiteX3" fmla="*/ 0 w 4396902"/>
+              <a:gd name="connsiteY3" fmla="*/ 4533082 h 4533082"/>
+              <a:gd name="connsiteX4" fmla="*/ 0 w 4396902"/>
+              <a:gd name="connsiteY4" fmla="*/ 0 h 4533082"/>
+              <a:gd name="connsiteX0" fmla="*/ 0 w 4426085"/>
+              <a:gd name="connsiteY0" fmla="*/ 0 h 4533082"/>
+              <a:gd name="connsiteX1" fmla="*/ 4396902 w 4426085"/>
+              <a:gd name="connsiteY1" fmla="*/ 0 h 4533082"/>
+              <a:gd name="connsiteX2" fmla="*/ 4426085 w 4426085"/>
+              <a:gd name="connsiteY2" fmla="*/ 4513627 h 4533082"/>
+              <a:gd name="connsiteX3" fmla="*/ 0 w 4426085"/>
+              <a:gd name="connsiteY3" fmla="*/ 4533082 h 4533082"/>
+              <a:gd name="connsiteX4" fmla="*/ 0 w 4426085"/>
+              <a:gd name="connsiteY4" fmla="*/ 0 h 4533082"/>
+              <a:gd name="connsiteX0" fmla="*/ 0 w 4426085"/>
+              <a:gd name="connsiteY0" fmla="*/ 0 h 4513627"/>
+              <a:gd name="connsiteX1" fmla="*/ 4396902 w 4426085"/>
+              <a:gd name="connsiteY1" fmla="*/ 0 h 4513627"/>
+              <a:gd name="connsiteX2" fmla="*/ 4426085 w 4426085"/>
+              <a:gd name="connsiteY2" fmla="*/ 4513627 h 4513627"/>
+              <a:gd name="connsiteX3" fmla="*/ 29183 w 4426085"/>
+              <a:gd name="connsiteY3" fmla="*/ 4503899 h 4513627"/>
+              <a:gd name="connsiteX4" fmla="*/ 0 w 4426085"/>
+              <a:gd name="connsiteY4" fmla="*/ 0 h 4513627"/>
+            </a:gdLst>
+            <a:ahLst/>
+            <a:cxnLst>
+              <a:cxn ang="0">
+                <a:pos x="connsiteX0" y="connsiteY0"/>
+              </a:cxn>
+              <a:cxn ang="0">
+                <a:pos x="connsiteX1" y="connsiteY1"/>
+              </a:cxn>
+              <a:cxn ang="0">
+                <a:pos x="connsiteX2" y="connsiteY2"/>
+              </a:cxn>
+              <a:cxn ang="0">
+                <a:pos x="connsiteX3" y="connsiteY3"/>
+              </a:cxn>
+              <a:cxn ang="0">
+                <a:pos x="connsiteX4" y="connsiteY4"/>
+              </a:cxn>
+            </a:cxnLst>
+            <a:rect l="l" t="t" r="r" b="b"/>
+            <a:pathLst>
+              <a:path w="4426085" h="4513627">
+                <a:moveTo>
+                  <a:pt x="0" y="0"/>
+                </a:moveTo>
+                <a:lnTo>
+                  <a:pt x="4396902" y="0"/>
+                </a:lnTo>
+                <a:lnTo>
+                  <a:pt x="4426085" y="4513627"/>
+                </a:lnTo>
+                <a:lnTo>
+                  <a:pt x="29183" y="4503899"/>
+                </a:lnTo>
+                <a:lnTo>
+                  <a:pt x="0" y="0"/>
+                </a:lnTo>
+                <a:close/>
+              </a:path>
+            </a:pathLst>
+          </a:custGeom>
+          <a:noFill/>
+          <a:ln>
+            <a:solidFill>
+              <a:srgbClr val="FF0000"/>
+            </a:solidFill>
+          </a:ln>
+        </p:spPr>
+        <p:style>
+          <a:lnRef idx="2">
+            <a:schemeClr val="accent1">
+              <a:shade val="15000"/>
+            </a:schemeClr>
+          </a:lnRef>
+          <a:fillRef idx="1">
+            <a:schemeClr val="accent1"/>
+          </a:fillRef>
+          <a:effectRef idx="0">
+            <a:schemeClr val="accent1"/>
+          </a:effectRef>
+          <a:fontRef idx="minor">
+            <a:schemeClr val="lt1"/>
+          </a:fontRef>
+        </p:style>
+        <p:txBody>
+          <a:bodyPr rtlCol="0" anchor="ctr"/>
+          <a:lstStyle/>
+          <a:p>
+            <a:pPr algn="ctr"/>
+            <a:endParaRPr lang="en-IN"/>
+          </a:p>
+        </p:txBody>
+      </p:sp>
+      <p:sp>
+        <p:nvSpPr>
+          <p:cNvPr id="12" name="Rectangle 11">
+            <a:extLst>
+              <a:ext uri="{FF2B5EF4-FFF2-40B4-BE49-F238E27FC236}">
+                <a16:creationId xmlns:a16="http://schemas.microsoft.com/office/drawing/2014/main" id="{0643A088-93D7-1502-128B-DF9F441EA95C}"/>
+              </a:ext>
+            </a:extLst>
+          </p:cNvPr>
+          <p:cNvSpPr/>
+          <p:nvPr/>
+        </p:nvSpPr>
+        <p:spPr>
+          <a:xfrm>
+            <a:off x="2295728" y="1478604"/>
+            <a:ext cx="1274323" cy="223736"/>
+          </a:xfrm>
+          <a:prstGeom prst="rect">
+            <a:avLst/>
+          </a:prstGeom>
+          <a:noFill/>
+          <a:ln>
+            <a:solidFill>
+              <a:schemeClr val="accent2"/>
+            </a:solidFill>
+          </a:ln>
+        </p:spPr>
+        <p:style>
+          <a:lnRef idx="2">
+            <a:schemeClr val="accent1">
+              <a:shade val="15000"/>
+            </a:schemeClr>
+          </a:lnRef>
+          <a:fillRef idx="1">
+            <a:schemeClr val="accent1"/>
+          </a:fillRef>
+          <a:effectRef idx="0">
+            <a:schemeClr val="accent1"/>
+          </a:effectRef>
+          <a:fontRef idx="minor">
+            <a:schemeClr val="lt1"/>
+          </a:fontRef>
+        </p:style>
+        <p:txBody>
+          <a:bodyPr rtlCol="0" anchor="ctr"/>
+          <a:lstStyle/>
+          <a:p>
+            <a:pPr algn="ctr"/>
+            <a:endParaRPr lang="en-IN"/>
+          </a:p>
+        </p:txBody>
+      </p:sp>
     </p:spTree>
     <p:extLst>
       <p:ext uri="{BB962C8B-B14F-4D97-AF65-F5344CB8AC3E}">
@@ -8761,13 +11142,6 @@
   <p:clrMapOvr>
     <a:masterClrMapping/>
   </p:clrMapOvr>
-  <p:timing>
-    <p:tnLst>
-      <p:par>
-        <p:cTn id="1" dur="indefinite" restart="never" nodeType="tmRoot"/>
-      </p:par>
-    </p:tnLst>
-  </p:timing>
 </p:sld>
 </file>
 
@@ -8859,10 +11233,9 @@
           <a:lstStyle/>
           <a:p>
             <a:r>
-              <a:rPr lang="en-IN" sz="3000" b="1" dirty="0" smtClean="0"/>
+              <a:rPr lang="en-IN" sz="3000" b="1" dirty="0"/>
               <a:t>OCR Model</a:t>
             </a:r>
-            <a:endParaRPr lang="en-IN" sz="3000" b="1" dirty="0"/>
           </a:p>
         </p:txBody>
       </p:sp>
@@ -8924,7 +11297,7 @@
           <a:lstStyle/>
           <a:p>
             <a:r>
-              <a:rPr lang="en-IN" sz="1200" dirty="0" err="1" smtClean="0">
+              <a:rPr lang="en-IN" sz="1200" dirty="0" err="1">
                 <a:solidFill>
                   <a:schemeClr val="bg1"/>
                 </a:solidFill>
@@ -8933,7 +11306,7 @@
               <a:t>DeHaDo</a:t>
             </a:r>
             <a:r>
-              <a:rPr lang="en-IN" sz="1200" dirty="0" smtClean="0">
+              <a:rPr lang="en-IN" sz="1200" dirty="0">
                 <a:solidFill>
                   <a:schemeClr val="bg1"/>
                 </a:solidFill>
@@ -8941,12 +11314,6 @@
               </a:rPr>
               <a:t>-AI Challenge</a:t>
             </a:r>
-            <a:endParaRPr lang="en-IN" sz="1200" dirty="0">
-              <a:solidFill>
-                <a:schemeClr val="bg1"/>
-              </a:solidFill>
-              <a:cs typeface="Times New Roman" panose="02020603050405020304" pitchFamily="18" charset="0"/>
-            </a:endParaRPr>
           </a:p>
         </p:txBody>
       </p:sp>
@@ -8973,7 +11340,7 @@
           <a:lstStyle/>
           <a:p>
             <a:r>
-              <a:rPr lang="en-IN" sz="1200" dirty="0" smtClean="0">
+              <a:rPr lang="en-IN" sz="1200" dirty="0">
                 <a:solidFill>
                   <a:schemeClr val="bg1"/>
                 </a:solidFill>
@@ -8981,12 +11348,6 @@
               </a:rPr>
               <a:t>NCVPRIPG 2025, IIT Jammu</a:t>
             </a:r>
-            <a:endParaRPr lang="en-IN" sz="1200" dirty="0">
-              <a:solidFill>
-                <a:schemeClr val="bg1"/>
-              </a:solidFill>
-              <a:cs typeface="Times New Roman" panose="02020603050405020304" pitchFamily="18" charset="0"/>
-            </a:endParaRPr>
           </a:p>
         </p:txBody>
       </p:sp>
@@ -9162,13 +11523,6 @@
   <p:clrMapOvr>
     <a:masterClrMapping/>
   </p:clrMapOvr>
-  <p:timing>
-    <p:tnLst>
-      <p:par>
-        <p:cTn id="1" dur="indefinite" restart="never" nodeType="tmRoot"/>
-      </p:par>
-    </p:tnLst>
-  </p:timing>
 </p:sld>
 </file>
 
@@ -9260,10 +11614,9 @@
           <a:lstStyle/>
           <a:p>
             <a:r>
-              <a:rPr lang="en-IN" sz="3000" b="1" dirty="0" smtClean="0"/>
+              <a:rPr lang="en-IN" sz="3000" b="1" dirty="0"/>
               <a:t>OCR Results</a:t>
             </a:r>
-            <a:endParaRPr lang="en-IN" sz="3000" b="1" dirty="0"/>
           </a:p>
         </p:txBody>
       </p:sp>
@@ -9325,7 +11678,7 @@
           <a:lstStyle/>
           <a:p>
             <a:r>
-              <a:rPr lang="en-IN" sz="1200" dirty="0" err="1" smtClean="0">
+              <a:rPr lang="en-IN" sz="1200" dirty="0" err="1">
                 <a:solidFill>
                   <a:schemeClr val="bg1"/>
                 </a:solidFill>
@@ -9334,7 +11687,7 @@
               <a:t>DeHaDo</a:t>
             </a:r>
             <a:r>
-              <a:rPr lang="en-IN" sz="1200" dirty="0" smtClean="0">
+              <a:rPr lang="en-IN" sz="1200" dirty="0">
                 <a:solidFill>
                   <a:schemeClr val="bg1"/>
                 </a:solidFill>
@@ -9342,12 +11695,6 @@
               </a:rPr>
               <a:t>-AI Challenge</a:t>
             </a:r>
-            <a:endParaRPr lang="en-IN" sz="1200" dirty="0">
-              <a:solidFill>
-                <a:schemeClr val="bg1"/>
-              </a:solidFill>
-              <a:cs typeface="Times New Roman" panose="02020603050405020304" pitchFamily="18" charset="0"/>
-            </a:endParaRPr>
           </a:p>
         </p:txBody>
       </p:sp>
@@ -9374,7 +11721,7 @@
           <a:lstStyle/>
           <a:p>
             <a:r>
-              <a:rPr lang="en-IN" sz="1200" dirty="0" smtClean="0">
+              <a:rPr lang="en-IN" sz="1200" dirty="0">
                 <a:solidFill>
                   <a:schemeClr val="bg1"/>
                 </a:solidFill>
@@ -9382,12 +11729,6 @@
               </a:rPr>
               <a:t>NCVPRIPG 2025, IIT Jammu</a:t>
             </a:r>
-            <a:endParaRPr lang="en-IN" sz="1200" dirty="0">
-              <a:solidFill>
-                <a:schemeClr val="bg1"/>
-              </a:solidFill>
-              <a:cs typeface="Times New Roman" panose="02020603050405020304" pitchFamily="18" charset="0"/>
-            </a:endParaRPr>
           </a:p>
         </p:txBody>
       </p:sp>
@@ -9563,13 +11904,6 @@
   <p:clrMapOvr>
     <a:masterClrMapping/>
   </p:clrMapOvr>
-  <p:timing>
-    <p:tnLst>
-      <p:par>
-        <p:cTn id="1" dur="indefinite" restart="never" nodeType="tmRoot"/>
-      </p:par>
-    </p:tnLst>
-  </p:timing>
 </p:sld>
 </file>
 
@@ -9661,10 +11995,9 @@
           <a:lstStyle/>
           <a:p>
             <a:r>
-              <a:rPr lang="en-IN" sz="3000" b="1" dirty="0" smtClean="0"/>
+              <a:rPr lang="en-IN" sz="3000" b="1" dirty="0"/>
               <a:t>Layout Aware Error Correction</a:t>
             </a:r>
-            <a:endParaRPr lang="en-IN" sz="3000" b="1" dirty="0"/>
           </a:p>
         </p:txBody>
       </p:sp>
@@ -9726,7 +12059,7 @@
           <a:lstStyle/>
           <a:p>
             <a:r>
-              <a:rPr lang="en-IN" sz="1200" dirty="0" err="1" smtClean="0">
+              <a:rPr lang="en-IN" sz="1200" dirty="0" err="1">
                 <a:solidFill>
                   <a:schemeClr val="bg1"/>
                 </a:solidFill>
@@ -9735,7 +12068,7 @@
               <a:t>DeHaDo</a:t>
             </a:r>
             <a:r>
-              <a:rPr lang="en-IN" sz="1200" dirty="0" smtClean="0">
+              <a:rPr lang="en-IN" sz="1200" dirty="0">
                 <a:solidFill>
                   <a:schemeClr val="bg1"/>
                 </a:solidFill>
@@ -9743,12 +12076,6 @@
               </a:rPr>
               <a:t>-AI Challenge</a:t>
             </a:r>
-            <a:endParaRPr lang="en-IN" sz="1200" dirty="0">
-              <a:solidFill>
-                <a:schemeClr val="bg1"/>
-              </a:solidFill>
-              <a:cs typeface="Times New Roman" panose="02020603050405020304" pitchFamily="18" charset="0"/>
-            </a:endParaRPr>
           </a:p>
         </p:txBody>
       </p:sp>
@@ -9775,7 +12102,7 @@
           <a:lstStyle/>
           <a:p>
             <a:r>
-              <a:rPr lang="en-IN" sz="1200" dirty="0" smtClean="0">
+              <a:rPr lang="en-IN" sz="1200" dirty="0">
                 <a:solidFill>
                   <a:schemeClr val="bg1"/>
                 </a:solidFill>
@@ -9783,12 +12110,6 @@
               </a:rPr>
               <a:t>NCVPRIPG 2025, IIT Jammu</a:t>
             </a:r>
-            <a:endParaRPr lang="en-IN" sz="1200" dirty="0">
-              <a:solidFill>
-                <a:schemeClr val="bg1"/>
-              </a:solidFill>
-              <a:cs typeface="Times New Roman" panose="02020603050405020304" pitchFamily="18" charset="0"/>
-            </a:endParaRPr>
           </a:p>
         </p:txBody>
       </p:sp>
@@ -9964,13 +12285,6 @@
   <p:clrMapOvr>
     <a:masterClrMapping/>
   </p:clrMapOvr>
-  <p:timing>
-    <p:tnLst>
-      <p:par>
-        <p:cTn id="1" dur="indefinite" restart="never" nodeType="tmRoot"/>
-      </p:par>
-    </p:tnLst>
-  </p:timing>
 </p:sld>
 </file>
 
@@ -10062,10 +12376,39 @@
           <a:lstStyle/>
           <a:p>
             <a:r>
-              <a:rPr lang="en-IN" sz="3000" b="1" dirty="0" smtClean="0"/>
-              <a:t>Final Results</a:t>
+              <a:rPr lang="en-IN" sz="3000" b="1" dirty="0"/>
+              <a:t>Benchmarks</a:t>
             </a:r>
-            <a:endParaRPr lang="en-IN" sz="3000" b="1" dirty="0"/>
+          </a:p>
+        </p:txBody>
+      </p:sp>
+      <p:sp>
+        <p:nvSpPr>
+          <p:cNvPr id="3" name="Content Placeholder 2"/>
+          <p:cNvSpPr>
+            <a:spLocks noGrp="1"/>
+          </p:cNvSpPr>
+          <p:nvPr>
+            <p:ph idx="1"/>
+          </p:nvPr>
+        </p:nvSpPr>
+        <p:spPr>
+          <a:xfrm>
+            <a:off x="646544" y="954800"/>
+            <a:ext cx="11139055" cy="5222163"/>
+          </a:xfrm>
+        </p:spPr>
+        <p:txBody>
+          <a:bodyPr>
+            <a:normAutofit/>
+          </a:bodyPr>
+          <a:lstStyle/>
+          <a:p>
+            <a:r>
+              <a:rPr lang="en-IN" sz="1800" dirty="0"/>
+              <a:t>Problem Statement</a:t>
+            </a:r>
+            <a:endParaRPr lang="en-IN" sz="1400" dirty="0"/>
           </a:p>
         </p:txBody>
       </p:sp>
@@ -10127,7 +12470,7 @@
           <a:lstStyle/>
           <a:p>
             <a:r>
-              <a:rPr lang="en-IN" sz="1200" dirty="0" err="1" smtClean="0">
+              <a:rPr lang="en-IN" sz="1200" dirty="0" err="1">
                 <a:solidFill>
                   <a:schemeClr val="bg1"/>
                 </a:solidFill>
@@ -10136,7 +12479,7 @@
               <a:t>DeHaDo</a:t>
             </a:r>
             <a:r>
-              <a:rPr lang="en-IN" sz="1200" dirty="0" smtClean="0">
+              <a:rPr lang="en-IN" sz="1200" dirty="0">
                 <a:solidFill>
                   <a:schemeClr val="bg1"/>
                 </a:solidFill>
@@ -10144,12 +12487,6 @@
               </a:rPr>
               <a:t>-AI Challenge</a:t>
             </a:r>
-            <a:endParaRPr lang="en-IN" sz="1200" dirty="0">
-              <a:solidFill>
-                <a:schemeClr val="bg1"/>
-              </a:solidFill>
-              <a:cs typeface="Times New Roman" panose="02020603050405020304" pitchFamily="18" charset="0"/>
-            </a:endParaRPr>
           </a:p>
         </p:txBody>
       </p:sp>
@@ -10176,7 +12513,7 @@
           <a:lstStyle/>
           <a:p>
             <a:r>
-              <a:rPr lang="en-IN" sz="1200" dirty="0" smtClean="0">
+              <a:rPr lang="en-IN" sz="1200" dirty="0">
                 <a:solidFill>
                   <a:schemeClr val="bg1"/>
                 </a:solidFill>
@@ -10184,12 +12521,6 @@
               </a:rPr>
               <a:t>NCVPRIPG 2025, IIT Jammu</a:t>
             </a:r>
-            <a:endParaRPr lang="en-IN" sz="1200" dirty="0">
-              <a:solidFill>
-                <a:schemeClr val="bg1"/>
-              </a:solidFill>
-              <a:cs typeface="Times New Roman" panose="02020603050405020304" pitchFamily="18" charset="0"/>
-            </a:endParaRPr>
           </a:p>
         </p:txBody>
       </p:sp>
@@ -10355,12 +12686,393 @@
           </a:p>
         </p:txBody>
       </p:sp>
+    </p:spTree>
+    <p:extLst>
+      <p:ext uri="{BB962C8B-B14F-4D97-AF65-F5344CB8AC3E}">
+        <p14:creationId xmlns:p14="http://schemas.microsoft.com/office/powerpoint/2010/main" val="990430255"/>
+      </p:ext>
+    </p:extLst>
+  </p:cSld>
+  <p:clrMapOvr>
+    <a:masterClrMapping/>
+  </p:clrMapOvr>
+</p:sld>
+</file>
+
+<file path=ppt/slides/slide16.xml><?xml version="1.0" encoding="utf-8"?>
+<p:sld xmlns:a="http://schemas.openxmlformats.org/drawingml/2006/main" xmlns:r="http://schemas.openxmlformats.org/officeDocument/2006/relationships" xmlns:p="http://schemas.openxmlformats.org/presentationml/2006/main">
+  <p:cSld>
+    <p:spTree>
+      <p:nvGrpSpPr>
+        <p:cNvPr id="1" name=""/>
+        <p:cNvGrpSpPr/>
+        <p:nvPr/>
+      </p:nvGrpSpPr>
+      <p:grpSpPr>
+        <a:xfrm>
+          <a:off x="0" y="0"/>
+          <a:ext cx="0" cy="0"/>
+          <a:chOff x="0" y="0"/>
+          <a:chExt cx="0" cy="0"/>
+        </a:xfrm>
+      </p:grpSpPr>
+      <p:sp>
+        <p:nvSpPr>
+          <p:cNvPr id="9" name="Rectangle 8"/>
+          <p:cNvSpPr/>
+          <p:nvPr/>
+        </p:nvSpPr>
+        <p:spPr>
+          <a:xfrm>
+            <a:off x="0" y="6561590"/>
+            <a:ext cx="12192000" cy="296410"/>
+          </a:xfrm>
+          <a:prstGeom prst="rect">
+            <a:avLst/>
+          </a:prstGeom>
+          <a:solidFill>
+            <a:schemeClr val="accent1">
+              <a:lumMod val="50000"/>
+            </a:schemeClr>
+          </a:solidFill>
+          <a:ln>
+            <a:noFill/>
+          </a:ln>
+        </p:spPr>
+        <p:style>
+          <a:lnRef idx="2">
+            <a:schemeClr val="accent1">
+              <a:shade val="50000"/>
+            </a:schemeClr>
+          </a:lnRef>
+          <a:fillRef idx="1">
+            <a:schemeClr val="accent1"/>
+          </a:fillRef>
+          <a:effectRef idx="0">
+            <a:schemeClr val="accent1"/>
+          </a:effectRef>
+          <a:fontRef idx="minor">
+            <a:schemeClr val="lt1"/>
+          </a:fontRef>
+        </p:style>
+        <p:txBody>
+          <a:bodyPr rtlCol="0" anchor="ctr"/>
+          <a:lstStyle/>
+          <a:p>
+            <a:pPr algn="ctr"/>
+            <a:endParaRPr lang="en-IN" dirty="0"/>
+          </a:p>
+        </p:txBody>
+      </p:sp>
+      <p:sp>
+        <p:nvSpPr>
+          <p:cNvPr id="2" name="Title 1"/>
+          <p:cNvSpPr>
+            <a:spLocks noGrp="1"/>
+          </p:cNvSpPr>
+          <p:nvPr>
+            <p:ph type="title"/>
+          </p:nvPr>
+        </p:nvSpPr>
+        <p:spPr>
+          <a:xfrm>
+            <a:off x="508000" y="365126"/>
+            <a:ext cx="10845800" cy="503263"/>
+          </a:xfrm>
+        </p:spPr>
+        <p:txBody>
+          <a:bodyPr>
+            <a:normAutofit/>
+          </a:bodyPr>
+          <a:lstStyle/>
+          <a:p>
+            <a:r>
+              <a:rPr lang="en-IN" sz="3000" b="1" dirty="0"/>
+              <a:t>Final Results</a:t>
+            </a:r>
+          </a:p>
+        </p:txBody>
+      </p:sp>
+      <p:cxnSp>
+        <p:nvCxnSpPr>
+          <p:cNvPr id="5" name="Straight Connector 4"/>
+          <p:cNvCxnSpPr/>
+          <p:nvPr/>
+        </p:nvCxnSpPr>
+        <p:spPr>
+          <a:xfrm>
+            <a:off x="426720" y="6475178"/>
+            <a:ext cx="11765280" cy="0"/>
+          </a:xfrm>
+          <a:prstGeom prst="line">
+            <a:avLst/>
+          </a:prstGeom>
+          <a:ln w="15875">
+            <a:solidFill>
+              <a:schemeClr val="tx1"/>
+            </a:solidFill>
+          </a:ln>
+        </p:spPr>
+        <p:style>
+          <a:lnRef idx="1">
+            <a:schemeClr val="accent1"/>
+          </a:lnRef>
+          <a:fillRef idx="0">
+            <a:schemeClr val="accent1"/>
+          </a:fillRef>
+          <a:effectRef idx="0">
+            <a:schemeClr val="accent1"/>
+          </a:effectRef>
+          <a:fontRef idx="minor">
+            <a:schemeClr val="tx1"/>
+          </a:fontRef>
+        </p:style>
+      </p:cxnSp>
+      <p:sp>
+        <p:nvSpPr>
+          <p:cNvPr id="6" name="TextBox 5"/>
+          <p:cNvSpPr txBox="1"/>
+          <p:nvPr/>
+        </p:nvSpPr>
+        <p:spPr>
+          <a:xfrm>
+            <a:off x="318068" y="6561590"/>
+            <a:ext cx="1523494" cy="276999"/>
+          </a:xfrm>
+          <a:prstGeom prst="rect">
+            <a:avLst/>
+          </a:prstGeom>
+          <a:noFill/>
+        </p:spPr>
+        <p:txBody>
+          <a:bodyPr wrap="none" rtlCol="0">
+            <a:spAutoFit/>
+          </a:bodyPr>
+          <a:lstStyle/>
+          <a:p>
+            <a:r>
+              <a:rPr lang="en-IN" sz="1200" dirty="0" err="1">
+                <a:solidFill>
+                  <a:schemeClr val="bg1"/>
+                </a:solidFill>
+                <a:cs typeface="Times New Roman" panose="02020603050405020304" pitchFamily="18" charset="0"/>
+              </a:rPr>
+              <a:t>DeHaDo</a:t>
+            </a:r>
+            <a:r>
+              <a:rPr lang="en-IN" sz="1200" dirty="0">
+                <a:solidFill>
+                  <a:schemeClr val="bg1"/>
+                </a:solidFill>
+                <a:cs typeface="Times New Roman" panose="02020603050405020304" pitchFamily="18" charset="0"/>
+              </a:rPr>
+              <a:t>-AI Challenge</a:t>
+            </a:r>
+          </a:p>
+        </p:txBody>
+      </p:sp>
+      <p:sp>
+        <p:nvSpPr>
+          <p:cNvPr id="7" name="TextBox 6"/>
+          <p:cNvSpPr txBox="1"/>
+          <p:nvPr/>
+        </p:nvSpPr>
+        <p:spPr>
+          <a:xfrm>
+            <a:off x="10231574" y="6571295"/>
+            <a:ext cx="1893467" cy="276999"/>
+          </a:xfrm>
+          <a:prstGeom prst="rect">
+            <a:avLst/>
+          </a:prstGeom>
+          <a:noFill/>
+        </p:spPr>
+        <p:txBody>
+          <a:bodyPr wrap="none" rtlCol="0">
+            <a:spAutoFit/>
+          </a:bodyPr>
+          <a:lstStyle/>
+          <a:p>
+            <a:r>
+              <a:rPr lang="en-IN" sz="1200" dirty="0">
+                <a:solidFill>
+                  <a:schemeClr val="bg1"/>
+                </a:solidFill>
+                <a:cs typeface="Times New Roman" panose="02020603050405020304" pitchFamily="18" charset="0"/>
+              </a:rPr>
+              <a:t>NCVPRIPG 2025, IIT Jammu</a:t>
+            </a:r>
+          </a:p>
+        </p:txBody>
+      </p:sp>
+      <p:sp>
+        <p:nvSpPr>
+          <p:cNvPr id="8" name="Rectangle 7"/>
+          <p:cNvSpPr/>
+          <p:nvPr/>
+        </p:nvSpPr>
+        <p:spPr>
+          <a:xfrm>
+            <a:off x="0" y="0"/>
+            <a:ext cx="12192000" cy="175491"/>
+          </a:xfrm>
+          <a:prstGeom prst="rect">
+            <a:avLst/>
+          </a:prstGeom>
+          <a:solidFill>
+            <a:schemeClr val="accent1">
+              <a:lumMod val="50000"/>
+            </a:schemeClr>
+          </a:solidFill>
+          <a:ln>
+            <a:noFill/>
+          </a:ln>
+        </p:spPr>
+        <p:style>
+          <a:lnRef idx="2">
+            <a:schemeClr val="accent1">
+              <a:shade val="50000"/>
+            </a:schemeClr>
+          </a:lnRef>
+          <a:fillRef idx="1">
+            <a:schemeClr val="accent1"/>
+          </a:fillRef>
+          <a:effectRef idx="0">
+            <a:schemeClr val="accent1"/>
+          </a:effectRef>
+          <a:fontRef idx="minor">
+            <a:schemeClr val="lt1"/>
+          </a:fontRef>
+        </p:style>
+        <p:txBody>
+          <a:bodyPr rtlCol="0" anchor="ctr"/>
+          <a:lstStyle/>
+          <a:p>
+            <a:pPr algn="ctr"/>
+            <a:endParaRPr lang="en-IN"/>
+          </a:p>
+        </p:txBody>
+      </p:sp>
+      <p:sp>
+        <p:nvSpPr>
+          <p:cNvPr id="10" name="Isosceles Triangle 9"/>
+          <p:cNvSpPr/>
+          <p:nvPr/>
+        </p:nvSpPr>
+        <p:spPr>
+          <a:xfrm rot="5400000">
+            <a:off x="-726" y="6171660"/>
+            <a:ext cx="428171" cy="426720"/>
+          </a:xfrm>
+          <a:prstGeom prst="triangle">
+            <a:avLst>
+              <a:gd name="adj" fmla="val 100000"/>
+            </a:avLst>
+          </a:prstGeom>
+          <a:solidFill>
+            <a:schemeClr val="accent1">
+              <a:lumMod val="50000"/>
+            </a:schemeClr>
+          </a:solidFill>
+          <a:ln>
+            <a:noFill/>
+          </a:ln>
+        </p:spPr>
+        <p:style>
+          <a:lnRef idx="2">
+            <a:schemeClr val="accent1">
+              <a:shade val="50000"/>
+            </a:schemeClr>
+          </a:lnRef>
+          <a:fillRef idx="1">
+            <a:schemeClr val="accent1"/>
+          </a:fillRef>
+          <a:effectRef idx="0">
+            <a:schemeClr val="accent1"/>
+          </a:effectRef>
+          <a:fontRef idx="minor">
+            <a:schemeClr val="lt1"/>
+          </a:fontRef>
+        </p:style>
+        <p:txBody>
+          <a:bodyPr rtlCol="0" anchor="ctr"/>
+          <a:lstStyle/>
+          <a:p>
+            <a:pPr algn="ctr"/>
+            <a:endParaRPr lang="en-IN"/>
+          </a:p>
+        </p:txBody>
+      </p:sp>
+      <p:cxnSp>
+        <p:nvCxnSpPr>
+          <p:cNvPr id="14" name="Straight Connector 13"/>
+          <p:cNvCxnSpPr/>
+          <p:nvPr/>
+        </p:nvCxnSpPr>
+        <p:spPr>
+          <a:xfrm>
+            <a:off x="1218" y="6052414"/>
+            <a:ext cx="432000" cy="432000"/>
+          </a:xfrm>
+          <a:prstGeom prst="line">
+            <a:avLst/>
+          </a:prstGeom>
+          <a:ln w="15875">
+            <a:solidFill>
+              <a:schemeClr val="tx1"/>
+            </a:solidFill>
+          </a:ln>
+        </p:spPr>
+        <p:style>
+          <a:lnRef idx="1">
+            <a:schemeClr val="accent1"/>
+          </a:lnRef>
+          <a:fillRef idx="0">
+            <a:schemeClr val="accent1"/>
+          </a:fillRef>
+          <a:effectRef idx="0">
+            <a:schemeClr val="accent1"/>
+          </a:effectRef>
+          <a:fontRef idx="minor">
+            <a:schemeClr val="tx1"/>
+          </a:fontRef>
+        </p:style>
+      </p:cxnSp>
+      <p:sp>
+        <p:nvSpPr>
+          <p:cNvPr id="16" name="TextBox 15"/>
+          <p:cNvSpPr txBox="1"/>
+          <p:nvPr/>
+        </p:nvSpPr>
+        <p:spPr>
+          <a:xfrm>
+            <a:off x="387925" y="6218234"/>
+            <a:ext cx="258619" cy="276999"/>
+          </a:xfrm>
+          <a:prstGeom prst="rect">
+            <a:avLst/>
+          </a:prstGeom>
+          <a:noFill/>
+        </p:spPr>
+        <p:txBody>
+          <a:bodyPr wrap="square" rtlCol="0">
+            <a:spAutoFit/>
+          </a:bodyPr>
+          <a:lstStyle/>
+          <a:p>
+            <a:r>
+              <a:rPr lang="en-IN" sz="1200" dirty="0"/>
+              <a:t>1</a:t>
+            </a:r>
+          </a:p>
+        </p:txBody>
+      </p:sp>
       <p:graphicFrame>
         <p:nvGraphicFramePr>
           <p:cNvPr id="13" name="Chart 12">
             <a:extLst>
               <a:ext uri="{FF2B5EF4-FFF2-40B4-BE49-F238E27FC236}">
-                <a16:creationId xmlns="" xmlns:xdr="http://schemas.openxmlformats.org/drawingml/2006/spreadsheetDrawing" xmlns:a16="http://schemas.microsoft.com/office/drawing/2014/main" xmlns:lc="http://schemas.openxmlformats.org/drawingml/2006/lockedCanvas" id="{9042CB20-ED86-6031-CCD0-AC67A9435568}"/>
+                <a16:creationId xmlns:a16="http://schemas.microsoft.com/office/drawing/2014/main" id="{9042CB20-ED86-6031-CCD0-AC67A9435568}"/>
               </a:ext>
             </a:extLst>
           </p:cNvPr>
@@ -10410,11 +13122,41 @@
                 <a:tableStyleId>{5C22544A-7EE6-4342-B048-85BDC9FD1C3A}</a:tableStyleId>
               </a:tblPr>
               <a:tblGrid>
-                <a:gridCol w="1624326"/>
-                <a:gridCol w="703426"/>
-                <a:gridCol w="714051"/>
-                <a:gridCol w="1193628"/>
-                <a:gridCol w="1003781"/>
+                <a:gridCol w="1624326">
+                  <a:extLst>
+                    <a:ext uri="{9D8B030D-6E8A-4147-A177-3AD203B41FA5}">
+                      <a16:colId xmlns:a16="http://schemas.microsoft.com/office/drawing/2014/main" val="20000"/>
+                    </a:ext>
+                  </a:extLst>
+                </a:gridCol>
+                <a:gridCol w="703426">
+                  <a:extLst>
+                    <a:ext uri="{9D8B030D-6E8A-4147-A177-3AD203B41FA5}">
+                      <a16:colId xmlns:a16="http://schemas.microsoft.com/office/drawing/2014/main" val="20001"/>
+                    </a:ext>
+                  </a:extLst>
+                </a:gridCol>
+                <a:gridCol w="714051">
+                  <a:extLst>
+                    <a:ext uri="{9D8B030D-6E8A-4147-A177-3AD203B41FA5}">
+                      <a16:colId xmlns:a16="http://schemas.microsoft.com/office/drawing/2014/main" val="20002"/>
+                    </a:ext>
+                  </a:extLst>
+                </a:gridCol>
+                <a:gridCol w="1193628">
+                  <a:extLst>
+                    <a:ext uri="{9D8B030D-6E8A-4147-A177-3AD203B41FA5}">
+                      <a16:colId xmlns:a16="http://schemas.microsoft.com/office/drawing/2014/main" val="20003"/>
+                    </a:ext>
+                  </a:extLst>
+                </a:gridCol>
+                <a:gridCol w="1003781">
+                  <a:extLst>
+                    <a:ext uri="{9D8B030D-6E8A-4147-A177-3AD203B41FA5}">
+                      <a16:colId xmlns:a16="http://schemas.microsoft.com/office/drawing/2014/main" val="20004"/>
+                    </a:ext>
+                  </a:extLst>
+                </a:gridCol>
               </a:tblGrid>
               <a:tr h="492006">
                 <a:tc>
@@ -10577,6 +13319,11 @@
                   </a:txBody>
                   <a:tcPr marL="68580" marR="68580" marT="0" marB="0" anchor="ctr"/>
                 </a:tc>
+                <a:extLst>
+                  <a:ext uri="{0D108BD9-81ED-4DB2-BD59-A6C34878D82A}">
+                    <a16:rowId xmlns:a16="http://schemas.microsoft.com/office/drawing/2014/main" val="10000"/>
+                  </a:ext>
+                </a:extLst>
               </a:tr>
               <a:tr h="492006">
                 <a:tc>
@@ -10739,6 +13486,11 @@
                   </a:txBody>
                   <a:tcPr marL="68580" marR="68580" marT="0" marB="0" anchor="ctr"/>
                 </a:tc>
+                <a:extLst>
+                  <a:ext uri="{0D108BD9-81ED-4DB2-BD59-A6C34878D82A}">
+                    <a16:rowId xmlns:a16="http://schemas.microsoft.com/office/drawing/2014/main" val="10001"/>
+                  </a:ext>
+                </a:extLst>
               </a:tr>
               <a:tr h="492006">
                 <a:tc>
@@ -10901,6 +13653,11 @@
                   </a:txBody>
                   <a:tcPr marL="68580" marR="68580" marT="0" marB="0" anchor="ctr"/>
                 </a:tc>
+                <a:extLst>
+                  <a:ext uri="{0D108BD9-81ED-4DB2-BD59-A6C34878D82A}">
+                    <a16:rowId xmlns:a16="http://schemas.microsoft.com/office/drawing/2014/main" val="10002"/>
+                  </a:ext>
+                </a:extLst>
               </a:tr>
               <a:tr h="492006">
                 <a:tc>
@@ -11063,6 +13820,11 @@
                   </a:txBody>
                   <a:tcPr marL="68580" marR="68580" marT="0" marB="0" anchor="ctr"/>
                 </a:tc>
+                <a:extLst>
+                  <a:ext uri="{0D108BD9-81ED-4DB2-BD59-A6C34878D82A}">
+                    <a16:rowId xmlns:a16="http://schemas.microsoft.com/office/drawing/2014/main" val="10003"/>
+                  </a:ext>
+                </a:extLst>
               </a:tr>
               <a:tr h="1043217">
                 <a:tc>
@@ -11237,6 +13999,11 @@
                   </a:txBody>
                   <a:tcPr marL="68580" marR="68580" marT="0" marB="0" anchor="ctr"/>
                 </a:tc>
+                <a:extLst>
+                  <a:ext uri="{0D108BD9-81ED-4DB2-BD59-A6C34878D82A}">
+                    <a16:rowId xmlns:a16="http://schemas.microsoft.com/office/drawing/2014/main" val="10004"/>
+                  </a:ext>
+                </a:extLst>
               </a:tr>
             </a:tbl>
           </a:graphicData>
@@ -11252,17 +14019,10 @@
   <p:clrMapOvr>
     <a:masterClrMapping/>
   </p:clrMapOvr>
-  <p:timing>
-    <p:tnLst>
-      <p:par>
-        <p:cTn id="1" dur="indefinite" restart="never" nodeType="tmRoot"/>
-      </p:par>
-    </p:tnLst>
-  </p:timing>
 </p:sld>
 </file>
 
-<file path=ppt/slides/slide16.xml><?xml version="1.0" encoding="utf-8"?>
+<file path=ppt/slides/slide17.xml><?xml version="1.0" encoding="utf-8"?>
 <p:sld xmlns:a="http://schemas.openxmlformats.org/drawingml/2006/main" xmlns:r="http://schemas.openxmlformats.org/officeDocument/2006/relationships" xmlns:p="http://schemas.openxmlformats.org/presentationml/2006/main">
   <p:cSld>
     <p:spTree>
@@ -11350,10 +14110,9 @@
           <a:lstStyle/>
           <a:p>
             <a:r>
-              <a:rPr lang="en-IN" sz="3000" b="1" dirty="0" smtClean="0"/>
+              <a:rPr lang="en-IN" sz="3000" b="1" dirty="0"/>
               <a:t>Final Results</a:t>
             </a:r>
-            <a:endParaRPr lang="en-IN" sz="3000" b="1" dirty="0"/>
           </a:p>
         </p:txBody>
       </p:sp>
@@ -11415,7 +14174,7 @@
           <a:lstStyle/>
           <a:p>
             <a:r>
-              <a:rPr lang="en-IN" sz="1200" dirty="0" err="1" smtClean="0">
+              <a:rPr lang="en-IN" sz="1200" dirty="0" err="1">
                 <a:solidFill>
                   <a:schemeClr val="bg1"/>
                 </a:solidFill>
@@ -11424,7 +14183,7 @@
               <a:t>DeHaDo</a:t>
             </a:r>
             <a:r>
-              <a:rPr lang="en-IN" sz="1200" dirty="0" smtClean="0">
+              <a:rPr lang="en-IN" sz="1200" dirty="0">
                 <a:solidFill>
                   <a:schemeClr val="bg1"/>
                 </a:solidFill>
@@ -11432,12 +14191,6 @@
               </a:rPr>
               <a:t>-AI Challenge</a:t>
             </a:r>
-            <a:endParaRPr lang="en-IN" sz="1200" dirty="0">
-              <a:solidFill>
-                <a:schemeClr val="bg1"/>
-              </a:solidFill>
-              <a:cs typeface="Times New Roman" panose="02020603050405020304" pitchFamily="18" charset="0"/>
-            </a:endParaRPr>
           </a:p>
         </p:txBody>
       </p:sp>
@@ -11464,7 +14217,7 @@
           <a:lstStyle/>
           <a:p>
             <a:r>
-              <a:rPr lang="en-IN" sz="1200" dirty="0" smtClean="0">
+              <a:rPr lang="en-IN" sz="1200" dirty="0">
                 <a:solidFill>
                   <a:schemeClr val="bg1"/>
                 </a:solidFill>
@@ -11472,12 +14225,6 @@
               </a:rPr>
               <a:t>NCVPRIPG 2025, IIT Jammu</a:t>
             </a:r>
-            <a:endParaRPr lang="en-IN" sz="1200" dirty="0">
-              <a:solidFill>
-                <a:schemeClr val="bg1"/>
-              </a:solidFill>
-              <a:cs typeface="Times New Roman" panose="02020603050405020304" pitchFamily="18" charset="0"/>
-            </a:endParaRPr>
           </a:p>
         </p:txBody>
       </p:sp>
@@ -11648,7 +14395,7 @@
           <p:cNvPr id="12" name="Chart 11">
             <a:extLst>
               <a:ext uri="{FF2B5EF4-FFF2-40B4-BE49-F238E27FC236}">
-                <a16:creationId xmlns="" xmlns:xdr="http://schemas.openxmlformats.org/drawingml/2006/spreadsheetDrawing" xmlns:a16="http://schemas.microsoft.com/office/drawing/2014/main" xmlns:lc="http://schemas.openxmlformats.org/drawingml/2006/lockedCanvas" id="{6BBF3BAB-B971-ED80-9613-D3B88494038A}"/>
+                <a16:creationId xmlns:a16="http://schemas.microsoft.com/office/drawing/2014/main" id="{6BBF3BAB-B971-ED80-9613-D3B88494038A}"/>
               </a:ext>
             </a:extLst>
           </p:cNvPr>
@@ -11678,7 +14425,7 @@
           <p:cNvPr id="15" name="Chart 14">
             <a:extLst>
               <a:ext uri="{FF2B5EF4-FFF2-40B4-BE49-F238E27FC236}">
-                <a16:creationId xmlns="" xmlns:xdr="http://schemas.openxmlformats.org/drawingml/2006/spreadsheetDrawing" xmlns:a16="http://schemas.microsoft.com/office/drawing/2014/main" xmlns:lc="http://schemas.openxmlformats.org/drawingml/2006/lockedCanvas" id="{83EC7115-C3EB-A3C4-7D04-8EC148A0C8F1}"/>
+                <a16:creationId xmlns:a16="http://schemas.microsoft.com/office/drawing/2014/main" id="{83EC7115-C3EB-A3C4-7D04-8EC148A0C8F1}"/>
               </a:ext>
             </a:extLst>
           </p:cNvPr>
@@ -11713,22 +14460,21 @@
   <p:clrMapOvr>
     <a:masterClrMapping/>
   </p:clrMapOvr>
-  <p:timing>
-    <p:tnLst>
-      <p:par>
-        <p:cTn id="1" dur="indefinite" restart="never" nodeType="tmRoot"/>
-      </p:par>
-    </p:tnLst>
-  </p:timing>
 </p:sld>
 </file>
 
-<file path=ppt/slides/slide17.xml><?xml version="1.0" encoding="utf-8"?>
+<file path=ppt/slides/slide18.xml><?xml version="1.0" encoding="utf-8"?>
 <p:sld xmlns:a="http://schemas.openxmlformats.org/drawingml/2006/main" xmlns:r="http://schemas.openxmlformats.org/officeDocument/2006/relationships" xmlns:p="http://schemas.openxmlformats.org/presentationml/2006/main">
   <p:cSld>
     <p:spTree>
       <p:nvGrpSpPr>
-        <p:cNvPr id="1" name=""/>
+        <p:cNvPr id="1" name="">
+          <a:extLst>
+            <a:ext uri="{FF2B5EF4-FFF2-40B4-BE49-F238E27FC236}">
+              <a16:creationId xmlns:a16="http://schemas.microsoft.com/office/drawing/2014/main" id="{5538F36C-C174-3DD7-2982-101F54D0D9DD}"/>
+            </a:ext>
+          </a:extLst>
+        </p:cNvPr>
         <p:cNvGrpSpPr/>
         <p:nvPr/>
       </p:nvGrpSpPr>
@@ -11742,7 +14488,13 @@
       </p:grpSpPr>
       <p:sp>
         <p:nvSpPr>
-          <p:cNvPr id="9" name="Rectangle 8"/>
+          <p:cNvPr id="9" name="Rectangle 8">
+            <a:extLst>
+              <a:ext uri="{FF2B5EF4-FFF2-40B4-BE49-F238E27FC236}">
+                <a16:creationId xmlns:a16="http://schemas.microsoft.com/office/drawing/2014/main" id="{769A2C73-CFA3-41DE-5168-A2A6C647DEAD}"/>
+              </a:ext>
+            </a:extLst>
+          </p:cNvPr>
           <p:cNvSpPr/>
           <p:nvPr/>
         </p:nvSpPr>
@@ -11790,7 +14542,13 @@
       </p:sp>
       <p:sp>
         <p:nvSpPr>
-          <p:cNvPr id="2" name="Title 1"/>
+          <p:cNvPr id="2" name="Title 1">
+            <a:extLst>
+              <a:ext uri="{FF2B5EF4-FFF2-40B4-BE49-F238E27FC236}">
+                <a16:creationId xmlns:a16="http://schemas.microsoft.com/office/drawing/2014/main" id="{663C2AE1-A44E-5914-D4F4-6E36292BBF02}"/>
+              </a:ext>
+            </a:extLst>
+          </p:cNvPr>
           <p:cNvSpPr>
             <a:spLocks noGrp="1"/>
           </p:cNvSpPr>
@@ -11811,16 +14569,21 @@
           <a:lstStyle/>
           <a:p>
             <a:r>
-              <a:rPr lang="en-IN" sz="3000" b="1" dirty="0" smtClean="0"/>
+              <a:rPr lang="en-IN" sz="3000" b="1" dirty="0"/>
               <a:t>Challenges and Learnings</a:t>
             </a:r>
-            <a:endParaRPr lang="en-IN" sz="3000" b="1" dirty="0"/>
-          </a:p>
-        </p:txBody>
-      </p:sp>
-      <p:sp>
-        <p:nvSpPr>
-          <p:cNvPr id="3" name="Content Placeholder 2"/>
+          </a:p>
+        </p:txBody>
+      </p:sp>
+      <p:sp>
+        <p:nvSpPr>
+          <p:cNvPr id="3" name="Content Placeholder 2">
+            <a:extLst>
+              <a:ext uri="{FF2B5EF4-FFF2-40B4-BE49-F238E27FC236}">
+                <a16:creationId xmlns:a16="http://schemas.microsoft.com/office/drawing/2014/main" id="{946BB96A-D0E1-08E9-EDE7-DF9A371DFFB9}"/>
+              </a:ext>
+            </a:extLst>
+          </p:cNvPr>
           <p:cNvSpPr>
             <a:spLocks noGrp="1"/>
           </p:cNvSpPr>
@@ -11842,11 +14605,7 @@
           <a:p>
             <a:r>
               <a:rPr lang="en-IN" sz="1800" dirty="0"/>
-              <a:t>Problem </a:t>
-            </a:r>
-            <a:r>
-              <a:rPr lang="en-IN" sz="1800" dirty="0" smtClean="0"/>
-              <a:t>Statement</a:t>
+              <a:t>Problem Statement</a:t>
             </a:r>
             <a:endParaRPr lang="en-IN" sz="1400" dirty="0"/>
           </a:p>
@@ -11854,7 +14613,13 @@
       </p:sp>
       <p:cxnSp>
         <p:nvCxnSpPr>
-          <p:cNvPr id="5" name="Straight Connector 4"/>
+          <p:cNvPr id="5" name="Straight Connector 4">
+            <a:extLst>
+              <a:ext uri="{FF2B5EF4-FFF2-40B4-BE49-F238E27FC236}">
+                <a16:creationId xmlns:a16="http://schemas.microsoft.com/office/drawing/2014/main" id="{2D19FF27-F64A-CF0B-91CB-C13021FE972A}"/>
+              </a:ext>
+            </a:extLst>
+          </p:cNvPr>
           <p:cNvCxnSpPr/>
           <p:nvPr/>
         </p:nvCxnSpPr>
@@ -11889,7 +14654,13 @@
       </p:cxnSp>
       <p:sp>
         <p:nvSpPr>
-          <p:cNvPr id="6" name="TextBox 5"/>
+          <p:cNvPr id="6" name="TextBox 5">
+            <a:extLst>
+              <a:ext uri="{FF2B5EF4-FFF2-40B4-BE49-F238E27FC236}">
+                <a16:creationId xmlns:a16="http://schemas.microsoft.com/office/drawing/2014/main" id="{AF72EF21-4C2A-2620-22E1-E5A640ED9D9F}"/>
+              </a:ext>
+            </a:extLst>
+          </p:cNvPr>
           <p:cNvSpPr txBox="1"/>
           <p:nvPr/>
         </p:nvSpPr>
@@ -11910,7 +14681,7 @@
           <a:lstStyle/>
           <a:p>
             <a:r>
-              <a:rPr lang="en-IN" sz="1200" dirty="0" err="1" smtClean="0">
+              <a:rPr lang="en-IN" sz="1200" dirty="0" err="1">
                 <a:solidFill>
                   <a:schemeClr val="bg1"/>
                 </a:solidFill>
@@ -11919,7 +14690,7 @@
               <a:t>DeHaDo</a:t>
             </a:r>
             <a:r>
-              <a:rPr lang="en-IN" sz="1200" dirty="0" smtClean="0">
+              <a:rPr lang="en-IN" sz="1200" dirty="0">
                 <a:solidFill>
                   <a:schemeClr val="bg1"/>
                 </a:solidFill>
@@ -11927,18 +14698,18 @@
               </a:rPr>
               <a:t>-AI Challenge</a:t>
             </a:r>
-            <a:endParaRPr lang="en-IN" sz="1200" dirty="0">
-              <a:solidFill>
-                <a:schemeClr val="bg1"/>
-              </a:solidFill>
-              <a:cs typeface="Times New Roman" panose="02020603050405020304" pitchFamily="18" charset="0"/>
-            </a:endParaRPr>
-          </a:p>
-        </p:txBody>
-      </p:sp>
-      <p:sp>
-        <p:nvSpPr>
-          <p:cNvPr id="7" name="TextBox 6"/>
+          </a:p>
+        </p:txBody>
+      </p:sp>
+      <p:sp>
+        <p:nvSpPr>
+          <p:cNvPr id="7" name="TextBox 6">
+            <a:extLst>
+              <a:ext uri="{FF2B5EF4-FFF2-40B4-BE49-F238E27FC236}">
+                <a16:creationId xmlns:a16="http://schemas.microsoft.com/office/drawing/2014/main" id="{3A1C16D0-D201-BB8B-3102-DF2941AC1B79}"/>
+              </a:ext>
+            </a:extLst>
+          </p:cNvPr>
           <p:cNvSpPr txBox="1"/>
           <p:nvPr/>
         </p:nvSpPr>
@@ -11959,7 +14730,7 @@
           <a:lstStyle/>
           <a:p>
             <a:r>
-              <a:rPr lang="en-IN" sz="1200" dirty="0" smtClean="0">
+              <a:rPr lang="en-IN" sz="1200" dirty="0">
                 <a:solidFill>
                   <a:schemeClr val="bg1"/>
                 </a:solidFill>
@@ -11967,18 +14738,18 @@
               </a:rPr>
               <a:t>NCVPRIPG 2025, IIT Jammu</a:t>
             </a:r>
-            <a:endParaRPr lang="en-IN" sz="1200" dirty="0">
-              <a:solidFill>
-                <a:schemeClr val="bg1"/>
-              </a:solidFill>
-              <a:cs typeface="Times New Roman" panose="02020603050405020304" pitchFamily="18" charset="0"/>
-            </a:endParaRPr>
-          </a:p>
-        </p:txBody>
-      </p:sp>
-      <p:sp>
-        <p:nvSpPr>
-          <p:cNvPr id="8" name="Rectangle 7"/>
+          </a:p>
+        </p:txBody>
+      </p:sp>
+      <p:sp>
+        <p:nvSpPr>
+          <p:cNvPr id="8" name="Rectangle 7">
+            <a:extLst>
+              <a:ext uri="{FF2B5EF4-FFF2-40B4-BE49-F238E27FC236}">
+                <a16:creationId xmlns:a16="http://schemas.microsoft.com/office/drawing/2014/main" id="{F72694A4-31A0-8726-B890-3C87A815E37D}"/>
+              </a:ext>
+            </a:extLst>
+          </p:cNvPr>
           <p:cNvSpPr/>
           <p:nvPr/>
         </p:nvSpPr>
@@ -12026,7 +14797,13 @@
       </p:sp>
       <p:sp>
         <p:nvSpPr>
-          <p:cNvPr id="10" name="Isosceles Triangle 9"/>
+          <p:cNvPr id="10" name="Isosceles Triangle 9">
+            <a:extLst>
+              <a:ext uri="{FF2B5EF4-FFF2-40B4-BE49-F238E27FC236}">
+                <a16:creationId xmlns:a16="http://schemas.microsoft.com/office/drawing/2014/main" id="{658A8C5A-03E0-A69C-7952-458D1B7C4F35}"/>
+              </a:ext>
+            </a:extLst>
+          </p:cNvPr>
           <p:cNvSpPr/>
           <p:nvPr/>
         </p:nvSpPr>
@@ -12076,7 +14853,13 @@
       </p:sp>
       <p:cxnSp>
         <p:nvCxnSpPr>
-          <p:cNvPr id="14" name="Straight Connector 13"/>
+          <p:cNvPr id="14" name="Straight Connector 13">
+            <a:extLst>
+              <a:ext uri="{FF2B5EF4-FFF2-40B4-BE49-F238E27FC236}">
+                <a16:creationId xmlns:a16="http://schemas.microsoft.com/office/drawing/2014/main" id="{9E3CCA8E-00DC-4573-B193-E5662698E46C}"/>
+              </a:ext>
+            </a:extLst>
+          </p:cNvPr>
           <p:cNvCxnSpPr/>
           <p:nvPr/>
         </p:nvCxnSpPr>
@@ -12111,7 +14894,13 @@
       </p:cxnSp>
       <p:sp>
         <p:nvSpPr>
-          <p:cNvPr id="16" name="TextBox 15"/>
+          <p:cNvPr id="16" name="TextBox 15">
+            <a:extLst>
+              <a:ext uri="{FF2B5EF4-FFF2-40B4-BE49-F238E27FC236}">
+                <a16:creationId xmlns:a16="http://schemas.microsoft.com/office/drawing/2014/main" id="{ABE20197-01FC-20ED-C603-BA5F555E0C88}"/>
+              </a:ext>
+            </a:extLst>
+          </p:cNvPr>
           <p:cNvSpPr txBox="1"/>
           <p:nvPr/>
         </p:nvSpPr>
@@ -12141,455 +14930,13 @@
     </p:spTree>
     <p:extLst>
       <p:ext uri="{BB962C8B-B14F-4D97-AF65-F5344CB8AC3E}">
-        <p14:creationId xmlns:p14="http://schemas.microsoft.com/office/powerpoint/2010/main" val="990430255"/>
+        <p14:creationId xmlns:p14="http://schemas.microsoft.com/office/powerpoint/2010/main" val="1912777849"/>
       </p:ext>
     </p:extLst>
   </p:cSld>
   <p:clrMapOvr>
     <a:masterClrMapping/>
   </p:clrMapOvr>
-  <p:timing>
-    <p:tnLst>
-      <p:par>
-        <p:cTn id="1" dur="indefinite" restart="never" nodeType="tmRoot"/>
-      </p:par>
-    </p:tnLst>
-  </p:timing>
-</p:sld>
-</file>
-
-<file path=ppt/slides/slide18.xml><?xml version="1.0" encoding="utf-8"?>
-<p:sld xmlns:a="http://schemas.openxmlformats.org/drawingml/2006/main" xmlns:r="http://schemas.openxmlformats.org/officeDocument/2006/relationships" xmlns:p="http://schemas.openxmlformats.org/presentationml/2006/main">
-  <p:cSld>
-    <p:spTree>
-      <p:nvGrpSpPr>
-        <p:cNvPr id="1" name=""/>
-        <p:cNvGrpSpPr/>
-        <p:nvPr/>
-      </p:nvGrpSpPr>
-      <p:grpSpPr>
-        <a:xfrm>
-          <a:off x="0" y="0"/>
-          <a:ext cx="0" cy="0"/>
-          <a:chOff x="0" y="0"/>
-          <a:chExt cx="0" cy="0"/>
-        </a:xfrm>
-      </p:grpSpPr>
-      <p:sp>
-        <p:nvSpPr>
-          <p:cNvPr id="9" name="Rectangle 8"/>
-          <p:cNvSpPr/>
-          <p:nvPr/>
-        </p:nvSpPr>
-        <p:spPr>
-          <a:xfrm>
-            <a:off x="0" y="6561590"/>
-            <a:ext cx="12192000" cy="296410"/>
-          </a:xfrm>
-          <a:prstGeom prst="rect">
-            <a:avLst/>
-          </a:prstGeom>
-          <a:solidFill>
-            <a:schemeClr val="accent1">
-              <a:lumMod val="50000"/>
-            </a:schemeClr>
-          </a:solidFill>
-          <a:ln>
-            <a:noFill/>
-          </a:ln>
-        </p:spPr>
-        <p:style>
-          <a:lnRef idx="2">
-            <a:schemeClr val="accent1">
-              <a:shade val="50000"/>
-            </a:schemeClr>
-          </a:lnRef>
-          <a:fillRef idx="1">
-            <a:schemeClr val="accent1"/>
-          </a:fillRef>
-          <a:effectRef idx="0">
-            <a:schemeClr val="accent1"/>
-          </a:effectRef>
-          <a:fontRef idx="minor">
-            <a:schemeClr val="lt1"/>
-          </a:fontRef>
-        </p:style>
-        <p:txBody>
-          <a:bodyPr rtlCol="0" anchor="ctr"/>
-          <a:lstStyle/>
-          <a:p>
-            <a:pPr algn="ctr"/>
-            <a:endParaRPr lang="en-IN" dirty="0"/>
-          </a:p>
-        </p:txBody>
-      </p:sp>
-      <p:sp>
-        <p:nvSpPr>
-          <p:cNvPr id="2" name="Title 1"/>
-          <p:cNvSpPr>
-            <a:spLocks noGrp="1"/>
-          </p:cNvSpPr>
-          <p:nvPr>
-            <p:ph type="title"/>
-          </p:nvPr>
-        </p:nvSpPr>
-        <p:spPr>
-          <a:xfrm>
-            <a:off x="508000" y="365126"/>
-            <a:ext cx="10845800" cy="503263"/>
-          </a:xfrm>
-        </p:spPr>
-        <p:txBody>
-          <a:bodyPr>
-            <a:normAutofit/>
-          </a:bodyPr>
-          <a:lstStyle/>
-          <a:p>
-            <a:r>
-              <a:rPr lang="en-IN" sz="3000" b="1" dirty="0" smtClean="0"/>
-              <a:t>Future Work</a:t>
-            </a:r>
-            <a:endParaRPr lang="en-IN" sz="3000" b="1" dirty="0"/>
-          </a:p>
-        </p:txBody>
-      </p:sp>
-      <p:sp>
-        <p:nvSpPr>
-          <p:cNvPr id="3" name="Content Placeholder 2"/>
-          <p:cNvSpPr>
-            <a:spLocks noGrp="1"/>
-          </p:cNvSpPr>
-          <p:nvPr>
-            <p:ph idx="1"/>
-          </p:nvPr>
-        </p:nvSpPr>
-        <p:spPr>
-          <a:xfrm>
-            <a:off x="646544" y="954800"/>
-            <a:ext cx="11139055" cy="5222163"/>
-          </a:xfrm>
-        </p:spPr>
-        <p:txBody>
-          <a:bodyPr>
-            <a:normAutofit/>
-          </a:bodyPr>
-          <a:lstStyle/>
-          <a:p>
-            <a:r>
-              <a:rPr lang="en-IN" sz="1800" dirty="0"/>
-              <a:t>Problem </a:t>
-            </a:r>
-            <a:r>
-              <a:rPr lang="en-IN" sz="1800" dirty="0" smtClean="0"/>
-              <a:t>Statement</a:t>
-            </a:r>
-            <a:endParaRPr lang="en-IN" sz="1400" dirty="0"/>
-          </a:p>
-        </p:txBody>
-      </p:sp>
-      <p:cxnSp>
-        <p:nvCxnSpPr>
-          <p:cNvPr id="5" name="Straight Connector 4"/>
-          <p:cNvCxnSpPr/>
-          <p:nvPr/>
-        </p:nvCxnSpPr>
-        <p:spPr>
-          <a:xfrm>
-            <a:off x="426720" y="6475178"/>
-            <a:ext cx="11765280" cy="0"/>
-          </a:xfrm>
-          <a:prstGeom prst="line">
-            <a:avLst/>
-          </a:prstGeom>
-          <a:ln w="15875">
-            <a:solidFill>
-              <a:schemeClr val="tx1"/>
-            </a:solidFill>
-          </a:ln>
-        </p:spPr>
-        <p:style>
-          <a:lnRef idx="1">
-            <a:schemeClr val="accent1"/>
-          </a:lnRef>
-          <a:fillRef idx="0">
-            <a:schemeClr val="accent1"/>
-          </a:fillRef>
-          <a:effectRef idx="0">
-            <a:schemeClr val="accent1"/>
-          </a:effectRef>
-          <a:fontRef idx="minor">
-            <a:schemeClr val="tx1"/>
-          </a:fontRef>
-        </p:style>
-      </p:cxnSp>
-      <p:sp>
-        <p:nvSpPr>
-          <p:cNvPr id="6" name="TextBox 5"/>
-          <p:cNvSpPr txBox="1"/>
-          <p:nvPr/>
-        </p:nvSpPr>
-        <p:spPr>
-          <a:xfrm>
-            <a:off x="318068" y="6561590"/>
-            <a:ext cx="1523494" cy="276999"/>
-          </a:xfrm>
-          <a:prstGeom prst="rect">
-            <a:avLst/>
-          </a:prstGeom>
-          <a:noFill/>
-        </p:spPr>
-        <p:txBody>
-          <a:bodyPr wrap="none" rtlCol="0">
-            <a:spAutoFit/>
-          </a:bodyPr>
-          <a:lstStyle/>
-          <a:p>
-            <a:r>
-              <a:rPr lang="en-IN" sz="1200" dirty="0" err="1" smtClean="0">
-                <a:solidFill>
-                  <a:schemeClr val="bg1"/>
-                </a:solidFill>
-                <a:cs typeface="Times New Roman" panose="02020603050405020304" pitchFamily="18" charset="0"/>
-              </a:rPr>
-              <a:t>DeHaDo</a:t>
-            </a:r>
-            <a:r>
-              <a:rPr lang="en-IN" sz="1200" dirty="0" smtClean="0">
-                <a:solidFill>
-                  <a:schemeClr val="bg1"/>
-                </a:solidFill>
-                <a:cs typeface="Times New Roman" panose="02020603050405020304" pitchFamily="18" charset="0"/>
-              </a:rPr>
-              <a:t>-AI Challenge</a:t>
-            </a:r>
-            <a:endParaRPr lang="en-IN" sz="1200" dirty="0">
-              <a:solidFill>
-                <a:schemeClr val="bg1"/>
-              </a:solidFill>
-              <a:cs typeface="Times New Roman" panose="02020603050405020304" pitchFamily="18" charset="0"/>
-            </a:endParaRPr>
-          </a:p>
-        </p:txBody>
-      </p:sp>
-      <p:sp>
-        <p:nvSpPr>
-          <p:cNvPr id="7" name="TextBox 6"/>
-          <p:cNvSpPr txBox="1"/>
-          <p:nvPr/>
-        </p:nvSpPr>
-        <p:spPr>
-          <a:xfrm>
-            <a:off x="10231574" y="6571295"/>
-            <a:ext cx="1893467" cy="276999"/>
-          </a:xfrm>
-          <a:prstGeom prst="rect">
-            <a:avLst/>
-          </a:prstGeom>
-          <a:noFill/>
-        </p:spPr>
-        <p:txBody>
-          <a:bodyPr wrap="none" rtlCol="0">
-            <a:spAutoFit/>
-          </a:bodyPr>
-          <a:lstStyle/>
-          <a:p>
-            <a:r>
-              <a:rPr lang="en-IN" sz="1200" dirty="0" smtClean="0">
-                <a:solidFill>
-                  <a:schemeClr val="bg1"/>
-                </a:solidFill>
-                <a:cs typeface="Times New Roman" panose="02020603050405020304" pitchFamily="18" charset="0"/>
-              </a:rPr>
-              <a:t>NCVPRIPG 2025, IIT Jammu</a:t>
-            </a:r>
-            <a:endParaRPr lang="en-IN" sz="1200" dirty="0">
-              <a:solidFill>
-                <a:schemeClr val="bg1"/>
-              </a:solidFill>
-              <a:cs typeface="Times New Roman" panose="02020603050405020304" pitchFamily="18" charset="0"/>
-            </a:endParaRPr>
-          </a:p>
-        </p:txBody>
-      </p:sp>
-      <p:sp>
-        <p:nvSpPr>
-          <p:cNvPr id="8" name="Rectangle 7"/>
-          <p:cNvSpPr/>
-          <p:nvPr/>
-        </p:nvSpPr>
-        <p:spPr>
-          <a:xfrm>
-            <a:off x="0" y="0"/>
-            <a:ext cx="12192000" cy="175491"/>
-          </a:xfrm>
-          <a:prstGeom prst="rect">
-            <a:avLst/>
-          </a:prstGeom>
-          <a:solidFill>
-            <a:schemeClr val="accent1">
-              <a:lumMod val="50000"/>
-            </a:schemeClr>
-          </a:solidFill>
-          <a:ln>
-            <a:noFill/>
-          </a:ln>
-        </p:spPr>
-        <p:style>
-          <a:lnRef idx="2">
-            <a:schemeClr val="accent1">
-              <a:shade val="50000"/>
-            </a:schemeClr>
-          </a:lnRef>
-          <a:fillRef idx="1">
-            <a:schemeClr val="accent1"/>
-          </a:fillRef>
-          <a:effectRef idx="0">
-            <a:schemeClr val="accent1"/>
-          </a:effectRef>
-          <a:fontRef idx="minor">
-            <a:schemeClr val="lt1"/>
-          </a:fontRef>
-        </p:style>
-        <p:txBody>
-          <a:bodyPr rtlCol="0" anchor="ctr"/>
-          <a:lstStyle/>
-          <a:p>
-            <a:pPr algn="ctr"/>
-            <a:endParaRPr lang="en-IN"/>
-          </a:p>
-        </p:txBody>
-      </p:sp>
-      <p:sp>
-        <p:nvSpPr>
-          <p:cNvPr id="10" name="Isosceles Triangle 9"/>
-          <p:cNvSpPr/>
-          <p:nvPr/>
-        </p:nvSpPr>
-        <p:spPr>
-          <a:xfrm rot="5400000">
-            <a:off x="-726" y="6171660"/>
-            <a:ext cx="428171" cy="426720"/>
-          </a:xfrm>
-          <a:prstGeom prst="triangle">
-            <a:avLst>
-              <a:gd name="adj" fmla="val 100000"/>
-            </a:avLst>
-          </a:prstGeom>
-          <a:solidFill>
-            <a:schemeClr val="accent1">
-              <a:lumMod val="50000"/>
-            </a:schemeClr>
-          </a:solidFill>
-          <a:ln>
-            <a:noFill/>
-          </a:ln>
-        </p:spPr>
-        <p:style>
-          <a:lnRef idx="2">
-            <a:schemeClr val="accent1">
-              <a:shade val="50000"/>
-            </a:schemeClr>
-          </a:lnRef>
-          <a:fillRef idx="1">
-            <a:schemeClr val="accent1"/>
-          </a:fillRef>
-          <a:effectRef idx="0">
-            <a:schemeClr val="accent1"/>
-          </a:effectRef>
-          <a:fontRef idx="minor">
-            <a:schemeClr val="lt1"/>
-          </a:fontRef>
-        </p:style>
-        <p:txBody>
-          <a:bodyPr rtlCol="0" anchor="ctr"/>
-          <a:lstStyle/>
-          <a:p>
-            <a:pPr algn="ctr"/>
-            <a:endParaRPr lang="en-IN"/>
-          </a:p>
-        </p:txBody>
-      </p:sp>
-      <p:cxnSp>
-        <p:nvCxnSpPr>
-          <p:cNvPr id="14" name="Straight Connector 13"/>
-          <p:cNvCxnSpPr/>
-          <p:nvPr/>
-        </p:nvCxnSpPr>
-        <p:spPr>
-          <a:xfrm>
-            <a:off x="1218" y="6052414"/>
-            <a:ext cx="432000" cy="432000"/>
-          </a:xfrm>
-          <a:prstGeom prst="line">
-            <a:avLst/>
-          </a:prstGeom>
-          <a:ln w="15875">
-            <a:solidFill>
-              <a:schemeClr val="tx1"/>
-            </a:solidFill>
-          </a:ln>
-        </p:spPr>
-        <p:style>
-          <a:lnRef idx="1">
-            <a:schemeClr val="accent1"/>
-          </a:lnRef>
-          <a:fillRef idx="0">
-            <a:schemeClr val="accent1"/>
-          </a:fillRef>
-          <a:effectRef idx="0">
-            <a:schemeClr val="accent1"/>
-          </a:effectRef>
-          <a:fontRef idx="minor">
-            <a:schemeClr val="tx1"/>
-          </a:fontRef>
-        </p:style>
-      </p:cxnSp>
-      <p:sp>
-        <p:nvSpPr>
-          <p:cNvPr id="16" name="TextBox 15"/>
-          <p:cNvSpPr txBox="1"/>
-          <p:nvPr/>
-        </p:nvSpPr>
-        <p:spPr>
-          <a:xfrm>
-            <a:off x="387925" y="6218234"/>
-            <a:ext cx="258619" cy="276999"/>
-          </a:xfrm>
-          <a:prstGeom prst="rect">
-            <a:avLst/>
-          </a:prstGeom>
-          <a:noFill/>
-        </p:spPr>
-        <p:txBody>
-          <a:bodyPr wrap="square" rtlCol="0">
-            <a:spAutoFit/>
-          </a:bodyPr>
-          <a:lstStyle/>
-          <a:p>
-            <a:r>
-              <a:rPr lang="en-IN" sz="1200" dirty="0"/>
-              <a:t>1</a:t>
-            </a:r>
-          </a:p>
-        </p:txBody>
-      </p:sp>
-    </p:spTree>
-    <p:extLst>
-      <p:ext uri="{BB962C8B-B14F-4D97-AF65-F5344CB8AC3E}">
-        <p14:creationId xmlns:p14="http://schemas.microsoft.com/office/powerpoint/2010/main" val="1714433366"/>
-      </p:ext>
-    </p:extLst>
-  </p:cSld>
-  <p:clrMapOvr>
-    <a:masterClrMapping/>
-  </p:clrMapOvr>
-  <p:timing>
-    <p:tnLst>
-      <p:par>
-        <p:cTn id="1" dur="indefinite" restart="never" nodeType="tmRoot"/>
-      </p:par>
-    </p:tnLst>
-  </p:timing>
 </p:sld>
 </file>
 
@@ -12682,7 +15029,7 @@
           <a:p>
             <a:r>
               <a:rPr lang="en-IN" sz="3000" b="1" dirty="0"/>
-              <a:t>Agenda</a:t>
+              <a:t>Future Work</a:t>
             </a:r>
           </a:p>
         </p:txBody>
@@ -12711,11 +15058,7 @@
           <a:p>
             <a:r>
               <a:rPr lang="en-IN" sz="1800" dirty="0"/>
-              <a:t>Problem </a:t>
-            </a:r>
-            <a:r>
-              <a:rPr lang="en-IN" sz="1800" dirty="0" smtClean="0"/>
-              <a:t>Statement</a:t>
+              <a:t>Problem Statement</a:t>
             </a:r>
             <a:endParaRPr lang="en-IN" sz="1400" dirty="0"/>
           </a:p>
@@ -12779,7 +15122,7 @@
           <a:lstStyle/>
           <a:p>
             <a:r>
-              <a:rPr lang="en-IN" sz="1200" dirty="0" err="1" smtClean="0">
+              <a:rPr lang="en-IN" sz="1200" dirty="0" err="1">
                 <a:solidFill>
                   <a:schemeClr val="bg1"/>
                 </a:solidFill>
@@ -12788,7 +15131,7 @@
               <a:t>DeHaDo</a:t>
             </a:r>
             <a:r>
-              <a:rPr lang="en-IN" sz="1200" dirty="0" smtClean="0">
+              <a:rPr lang="en-IN" sz="1200" dirty="0">
                 <a:solidFill>
                   <a:schemeClr val="bg1"/>
                 </a:solidFill>
@@ -12796,12 +15139,6 @@
               </a:rPr>
               <a:t>-AI Challenge</a:t>
             </a:r>
-            <a:endParaRPr lang="en-IN" sz="1200" dirty="0">
-              <a:solidFill>
-                <a:schemeClr val="bg1"/>
-              </a:solidFill>
-              <a:cs typeface="Times New Roman" panose="02020603050405020304" pitchFamily="18" charset="0"/>
-            </a:endParaRPr>
           </a:p>
         </p:txBody>
       </p:sp>
@@ -12828,7 +15165,7 @@
           <a:lstStyle/>
           <a:p>
             <a:r>
-              <a:rPr lang="en-IN" sz="1200" dirty="0" smtClean="0">
+              <a:rPr lang="en-IN" sz="1200" dirty="0">
                 <a:solidFill>
                   <a:schemeClr val="bg1"/>
                 </a:solidFill>
@@ -12836,12 +15173,6 @@
               </a:rPr>
               <a:t>NCVPRIPG 2025, IIT Jammu</a:t>
             </a:r>
-            <a:endParaRPr lang="en-IN" sz="1200" dirty="0">
-              <a:solidFill>
-                <a:schemeClr val="bg1"/>
-              </a:solidFill>
-              <a:cs typeface="Times New Roman" panose="02020603050405020304" pitchFamily="18" charset="0"/>
-            </a:endParaRPr>
           </a:p>
         </p:txBody>
       </p:sp>
@@ -13010,20 +15341,13 @@
     </p:spTree>
     <p:extLst>
       <p:ext uri="{BB962C8B-B14F-4D97-AF65-F5344CB8AC3E}">
-        <p14:creationId xmlns:p14="http://schemas.microsoft.com/office/powerpoint/2010/main" val="2776276982"/>
+        <p14:creationId xmlns:p14="http://schemas.microsoft.com/office/powerpoint/2010/main" val="1714433366"/>
       </p:ext>
     </p:extLst>
   </p:cSld>
   <p:clrMapOvr>
     <a:masterClrMapping/>
   </p:clrMapOvr>
-  <p:timing>
-    <p:tnLst>
-      <p:par>
-        <p:cTn id="1" dur="indefinite" restart="never" nodeType="tmRoot"/>
-      </p:par>
-    </p:tnLst>
-  </p:timing>
 </p:sld>
 </file>
 
@@ -13145,11 +15469,7 @@
           <a:p>
             <a:r>
               <a:rPr lang="en-IN" sz="1800" dirty="0"/>
-              <a:t>Problem </a:t>
-            </a:r>
-            <a:r>
-              <a:rPr lang="en-IN" sz="1800" dirty="0" smtClean="0"/>
-              <a:t>Statement</a:t>
+              <a:t>Problem Statement</a:t>
             </a:r>
             <a:endParaRPr lang="en-IN" sz="1400" dirty="0"/>
           </a:p>
@@ -13213,7 +15533,7 @@
           <a:lstStyle/>
           <a:p>
             <a:r>
-              <a:rPr lang="en-IN" sz="1200" dirty="0" err="1" smtClean="0">
+              <a:rPr lang="en-IN" sz="1200" dirty="0" err="1">
                 <a:solidFill>
                   <a:schemeClr val="bg1"/>
                 </a:solidFill>
@@ -13222,7 +15542,7 @@
               <a:t>DeHaDo</a:t>
             </a:r>
             <a:r>
-              <a:rPr lang="en-IN" sz="1200" dirty="0" smtClean="0">
+              <a:rPr lang="en-IN" sz="1200" dirty="0">
                 <a:solidFill>
                   <a:schemeClr val="bg1"/>
                 </a:solidFill>
@@ -13230,12 +15550,6 @@
               </a:rPr>
               <a:t>-AI Challenge</a:t>
             </a:r>
-            <a:endParaRPr lang="en-IN" sz="1200" dirty="0">
-              <a:solidFill>
-                <a:schemeClr val="bg1"/>
-              </a:solidFill>
-              <a:cs typeface="Times New Roman" panose="02020603050405020304" pitchFamily="18" charset="0"/>
-            </a:endParaRPr>
           </a:p>
         </p:txBody>
       </p:sp>
@@ -13262,7 +15576,7 @@
           <a:lstStyle/>
           <a:p>
             <a:r>
-              <a:rPr lang="en-IN" sz="1200" dirty="0" smtClean="0">
+              <a:rPr lang="en-IN" sz="1200" dirty="0">
                 <a:solidFill>
                   <a:schemeClr val="bg1"/>
                 </a:solidFill>
@@ -13270,12 +15584,6 @@
               </a:rPr>
               <a:t>NCVPRIPG 2025, IIT Jammu</a:t>
             </a:r>
-            <a:endParaRPr lang="en-IN" sz="1200" dirty="0">
-              <a:solidFill>
-                <a:schemeClr val="bg1"/>
-              </a:solidFill>
-              <a:cs typeface="Times New Roman" panose="02020603050405020304" pitchFamily="18" charset="0"/>
-            </a:endParaRPr>
           </a:p>
         </p:txBody>
       </p:sp>
@@ -13451,13 +15759,417 @@
   <p:clrMapOvr>
     <a:masterClrMapping/>
   </p:clrMapOvr>
-  <p:timing>
-    <p:tnLst>
-      <p:par>
-        <p:cTn id="1" dur="indefinite" restart="never" nodeType="tmRoot"/>
-      </p:par>
-    </p:tnLst>
-  </p:timing>
+</p:sld>
+</file>
+
+<file path=ppt/slides/slide20.xml><?xml version="1.0" encoding="utf-8"?>
+<p:sld xmlns:a="http://schemas.openxmlformats.org/drawingml/2006/main" xmlns:r="http://schemas.openxmlformats.org/officeDocument/2006/relationships" xmlns:p="http://schemas.openxmlformats.org/presentationml/2006/main">
+  <p:cSld>
+    <p:spTree>
+      <p:nvGrpSpPr>
+        <p:cNvPr id="1" name=""/>
+        <p:cNvGrpSpPr/>
+        <p:nvPr/>
+      </p:nvGrpSpPr>
+      <p:grpSpPr>
+        <a:xfrm>
+          <a:off x="0" y="0"/>
+          <a:ext cx="0" cy="0"/>
+          <a:chOff x="0" y="0"/>
+          <a:chExt cx="0" cy="0"/>
+        </a:xfrm>
+      </p:grpSpPr>
+      <p:sp>
+        <p:nvSpPr>
+          <p:cNvPr id="9" name="Rectangle 8"/>
+          <p:cNvSpPr/>
+          <p:nvPr/>
+        </p:nvSpPr>
+        <p:spPr>
+          <a:xfrm>
+            <a:off x="0" y="6561590"/>
+            <a:ext cx="12192000" cy="296410"/>
+          </a:xfrm>
+          <a:prstGeom prst="rect">
+            <a:avLst/>
+          </a:prstGeom>
+          <a:solidFill>
+            <a:schemeClr val="accent1">
+              <a:lumMod val="50000"/>
+            </a:schemeClr>
+          </a:solidFill>
+          <a:ln>
+            <a:noFill/>
+          </a:ln>
+        </p:spPr>
+        <p:style>
+          <a:lnRef idx="2">
+            <a:schemeClr val="accent1">
+              <a:shade val="50000"/>
+            </a:schemeClr>
+          </a:lnRef>
+          <a:fillRef idx="1">
+            <a:schemeClr val="accent1"/>
+          </a:fillRef>
+          <a:effectRef idx="0">
+            <a:schemeClr val="accent1"/>
+          </a:effectRef>
+          <a:fontRef idx="minor">
+            <a:schemeClr val="lt1"/>
+          </a:fontRef>
+        </p:style>
+        <p:txBody>
+          <a:bodyPr rtlCol="0" anchor="ctr"/>
+          <a:lstStyle/>
+          <a:p>
+            <a:pPr algn="ctr"/>
+            <a:endParaRPr lang="en-IN" dirty="0"/>
+          </a:p>
+        </p:txBody>
+      </p:sp>
+      <p:sp>
+        <p:nvSpPr>
+          <p:cNvPr id="2" name="Title 1"/>
+          <p:cNvSpPr>
+            <a:spLocks noGrp="1"/>
+          </p:cNvSpPr>
+          <p:nvPr>
+            <p:ph type="title"/>
+          </p:nvPr>
+        </p:nvSpPr>
+        <p:spPr>
+          <a:xfrm>
+            <a:off x="508000" y="365126"/>
+            <a:ext cx="10845800" cy="503263"/>
+          </a:xfrm>
+        </p:spPr>
+        <p:txBody>
+          <a:bodyPr>
+            <a:normAutofit/>
+          </a:bodyPr>
+          <a:lstStyle/>
+          <a:p>
+            <a:r>
+              <a:rPr lang="en-IN" sz="3000" b="1" dirty="0"/>
+              <a:t>Agenda</a:t>
+            </a:r>
+          </a:p>
+        </p:txBody>
+      </p:sp>
+      <p:sp>
+        <p:nvSpPr>
+          <p:cNvPr id="3" name="Content Placeholder 2"/>
+          <p:cNvSpPr>
+            <a:spLocks noGrp="1"/>
+          </p:cNvSpPr>
+          <p:nvPr>
+            <p:ph idx="1"/>
+          </p:nvPr>
+        </p:nvSpPr>
+        <p:spPr>
+          <a:xfrm>
+            <a:off x="646544" y="954800"/>
+            <a:ext cx="11139055" cy="5222163"/>
+          </a:xfrm>
+        </p:spPr>
+        <p:txBody>
+          <a:bodyPr>
+            <a:normAutofit/>
+          </a:bodyPr>
+          <a:lstStyle/>
+          <a:p>
+            <a:r>
+              <a:rPr lang="en-IN" sz="1800" dirty="0"/>
+              <a:t>Problem Statement</a:t>
+            </a:r>
+            <a:endParaRPr lang="en-IN" sz="1400" dirty="0"/>
+          </a:p>
+        </p:txBody>
+      </p:sp>
+      <p:cxnSp>
+        <p:nvCxnSpPr>
+          <p:cNvPr id="5" name="Straight Connector 4"/>
+          <p:cNvCxnSpPr/>
+          <p:nvPr/>
+        </p:nvCxnSpPr>
+        <p:spPr>
+          <a:xfrm>
+            <a:off x="426720" y="6475178"/>
+            <a:ext cx="11765280" cy="0"/>
+          </a:xfrm>
+          <a:prstGeom prst="line">
+            <a:avLst/>
+          </a:prstGeom>
+          <a:ln w="15875">
+            <a:solidFill>
+              <a:schemeClr val="tx1"/>
+            </a:solidFill>
+          </a:ln>
+        </p:spPr>
+        <p:style>
+          <a:lnRef idx="1">
+            <a:schemeClr val="accent1"/>
+          </a:lnRef>
+          <a:fillRef idx="0">
+            <a:schemeClr val="accent1"/>
+          </a:fillRef>
+          <a:effectRef idx="0">
+            <a:schemeClr val="accent1"/>
+          </a:effectRef>
+          <a:fontRef idx="minor">
+            <a:schemeClr val="tx1"/>
+          </a:fontRef>
+        </p:style>
+      </p:cxnSp>
+      <p:sp>
+        <p:nvSpPr>
+          <p:cNvPr id="6" name="TextBox 5"/>
+          <p:cNvSpPr txBox="1"/>
+          <p:nvPr/>
+        </p:nvSpPr>
+        <p:spPr>
+          <a:xfrm>
+            <a:off x="318068" y="6561590"/>
+            <a:ext cx="1523494" cy="276999"/>
+          </a:xfrm>
+          <a:prstGeom prst="rect">
+            <a:avLst/>
+          </a:prstGeom>
+          <a:noFill/>
+        </p:spPr>
+        <p:txBody>
+          <a:bodyPr wrap="none" rtlCol="0">
+            <a:spAutoFit/>
+          </a:bodyPr>
+          <a:lstStyle/>
+          <a:p>
+            <a:r>
+              <a:rPr lang="en-IN" sz="1200" dirty="0" err="1">
+                <a:solidFill>
+                  <a:schemeClr val="bg1"/>
+                </a:solidFill>
+                <a:cs typeface="Times New Roman" panose="02020603050405020304" pitchFamily="18" charset="0"/>
+              </a:rPr>
+              <a:t>DeHaDo</a:t>
+            </a:r>
+            <a:r>
+              <a:rPr lang="en-IN" sz="1200" dirty="0">
+                <a:solidFill>
+                  <a:schemeClr val="bg1"/>
+                </a:solidFill>
+                <a:cs typeface="Times New Roman" panose="02020603050405020304" pitchFamily="18" charset="0"/>
+              </a:rPr>
+              <a:t>-AI Challenge</a:t>
+            </a:r>
+          </a:p>
+        </p:txBody>
+      </p:sp>
+      <p:sp>
+        <p:nvSpPr>
+          <p:cNvPr id="7" name="TextBox 6"/>
+          <p:cNvSpPr txBox="1"/>
+          <p:nvPr/>
+        </p:nvSpPr>
+        <p:spPr>
+          <a:xfrm>
+            <a:off x="10231574" y="6571295"/>
+            <a:ext cx="1893467" cy="276999"/>
+          </a:xfrm>
+          <a:prstGeom prst="rect">
+            <a:avLst/>
+          </a:prstGeom>
+          <a:noFill/>
+        </p:spPr>
+        <p:txBody>
+          <a:bodyPr wrap="none" rtlCol="0">
+            <a:spAutoFit/>
+          </a:bodyPr>
+          <a:lstStyle/>
+          <a:p>
+            <a:r>
+              <a:rPr lang="en-IN" sz="1200" dirty="0">
+                <a:solidFill>
+                  <a:schemeClr val="bg1"/>
+                </a:solidFill>
+                <a:cs typeface="Times New Roman" panose="02020603050405020304" pitchFamily="18" charset="0"/>
+              </a:rPr>
+              <a:t>NCVPRIPG 2025, IIT Jammu</a:t>
+            </a:r>
+          </a:p>
+        </p:txBody>
+      </p:sp>
+      <p:sp>
+        <p:nvSpPr>
+          <p:cNvPr id="8" name="Rectangle 7"/>
+          <p:cNvSpPr/>
+          <p:nvPr/>
+        </p:nvSpPr>
+        <p:spPr>
+          <a:xfrm>
+            <a:off x="0" y="0"/>
+            <a:ext cx="12192000" cy="175491"/>
+          </a:xfrm>
+          <a:prstGeom prst="rect">
+            <a:avLst/>
+          </a:prstGeom>
+          <a:solidFill>
+            <a:schemeClr val="accent1">
+              <a:lumMod val="50000"/>
+            </a:schemeClr>
+          </a:solidFill>
+          <a:ln>
+            <a:noFill/>
+          </a:ln>
+        </p:spPr>
+        <p:style>
+          <a:lnRef idx="2">
+            <a:schemeClr val="accent1">
+              <a:shade val="50000"/>
+            </a:schemeClr>
+          </a:lnRef>
+          <a:fillRef idx="1">
+            <a:schemeClr val="accent1"/>
+          </a:fillRef>
+          <a:effectRef idx="0">
+            <a:schemeClr val="accent1"/>
+          </a:effectRef>
+          <a:fontRef idx="minor">
+            <a:schemeClr val="lt1"/>
+          </a:fontRef>
+        </p:style>
+        <p:txBody>
+          <a:bodyPr rtlCol="0" anchor="ctr"/>
+          <a:lstStyle/>
+          <a:p>
+            <a:pPr algn="ctr"/>
+            <a:endParaRPr lang="en-IN"/>
+          </a:p>
+        </p:txBody>
+      </p:sp>
+      <p:sp>
+        <p:nvSpPr>
+          <p:cNvPr id="10" name="Isosceles Triangle 9"/>
+          <p:cNvSpPr/>
+          <p:nvPr/>
+        </p:nvSpPr>
+        <p:spPr>
+          <a:xfrm rot="5400000">
+            <a:off x="-726" y="6171660"/>
+            <a:ext cx="428171" cy="426720"/>
+          </a:xfrm>
+          <a:prstGeom prst="triangle">
+            <a:avLst>
+              <a:gd name="adj" fmla="val 100000"/>
+            </a:avLst>
+          </a:prstGeom>
+          <a:solidFill>
+            <a:schemeClr val="accent1">
+              <a:lumMod val="50000"/>
+            </a:schemeClr>
+          </a:solidFill>
+          <a:ln>
+            <a:noFill/>
+          </a:ln>
+        </p:spPr>
+        <p:style>
+          <a:lnRef idx="2">
+            <a:schemeClr val="accent1">
+              <a:shade val="50000"/>
+            </a:schemeClr>
+          </a:lnRef>
+          <a:fillRef idx="1">
+            <a:schemeClr val="accent1"/>
+          </a:fillRef>
+          <a:effectRef idx="0">
+            <a:schemeClr val="accent1"/>
+          </a:effectRef>
+          <a:fontRef idx="minor">
+            <a:schemeClr val="lt1"/>
+          </a:fontRef>
+        </p:style>
+        <p:txBody>
+          <a:bodyPr rtlCol="0" anchor="ctr"/>
+          <a:lstStyle/>
+          <a:p>
+            <a:pPr algn="ctr"/>
+            <a:endParaRPr lang="en-IN"/>
+          </a:p>
+        </p:txBody>
+      </p:sp>
+      <p:cxnSp>
+        <p:nvCxnSpPr>
+          <p:cNvPr id="14" name="Straight Connector 13"/>
+          <p:cNvCxnSpPr/>
+          <p:nvPr/>
+        </p:nvCxnSpPr>
+        <p:spPr>
+          <a:xfrm>
+            <a:off x="1218" y="6052414"/>
+            <a:ext cx="432000" cy="432000"/>
+          </a:xfrm>
+          <a:prstGeom prst="line">
+            <a:avLst/>
+          </a:prstGeom>
+          <a:ln w="15875">
+            <a:solidFill>
+              <a:schemeClr val="tx1"/>
+            </a:solidFill>
+          </a:ln>
+        </p:spPr>
+        <p:style>
+          <a:lnRef idx="1">
+            <a:schemeClr val="accent1"/>
+          </a:lnRef>
+          <a:fillRef idx="0">
+            <a:schemeClr val="accent1"/>
+          </a:fillRef>
+          <a:effectRef idx="0">
+            <a:schemeClr val="accent1"/>
+          </a:effectRef>
+          <a:fontRef idx="minor">
+            <a:schemeClr val="tx1"/>
+          </a:fontRef>
+        </p:style>
+      </p:cxnSp>
+      <p:sp>
+        <p:nvSpPr>
+          <p:cNvPr id="16" name="TextBox 15"/>
+          <p:cNvSpPr txBox="1"/>
+          <p:nvPr/>
+        </p:nvSpPr>
+        <p:spPr>
+          <a:xfrm>
+            <a:off x="387925" y="6218234"/>
+            <a:ext cx="258619" cy="276999"/>
+          </a:xfrm>
+          <a:prstGeom prst="rect">
+            <a:avLst/>
+          </a:prstGeom>
+          <a:noFill/>
+        </p:spPr>
+        <p:txBody>
+          <a:bodyPr wrap="square" rtlCol="0">
+            <a:spAutoFit/>
+          </a:bodyPr>
+          <a:lstStyle/>
+          <a:p>
+            <a:r>
+              <a:rPr lang="en-IN" sz="1200" dirty="0"/>
+              <a:t>1</a:t>
+            </a:r>
+          </a:p>
+        </p:txBody>
+      </p:sp>
+    </p:spTree>
+    <p:extLst>
+      <p:ext uri="{BB962C8B-B14F-4D97-AF65-F5344CB8AC3E}">
+        <p14:creationId xmlns:p14="http://schemas.microsoft.com/office/powerpoint/2010/main" val="2776276982"/>
+      </p:ext>
+    </p:extLst>
+  </p:cSld>
+  <p:clrMapOvr>
+    <a:masterClrMapping/>
+  </p:clrMapOvr>
 </p:sld>
 </file>
 
@@ -13549,10 +16261,9 @@
           <a:lstStyle/>
           <a:p>
             <a:r>
-              <a:rPr lang="en-IN" sz="3000" b="1" dirty="0" smtClean="0"/>
+              <a:rPr lang="en-IN" sz="3000" b="1" dirty="0"/>
               <a:t>Team Introduction</a:t>
             </a:r>
-            <a:endParaRPr lang="en-IN" sz="3000" b="1" dirty="0"/>
           </a:p>
         </p:txBody>
       </p:sp>
@@ -13614,7 +16325,7 @@
           <a:lstStyle/>
           <a:p>
             <a:r>
-              <a:rPr lang="en-IN" sz="1200" dirty="0" err="1" smtClean="0">
+              <a:rPr lang="en-IN" sz="1200" dirty="0" err="1">
                 <a:solidFill>
                   <a:schemeClr val="bg1"/>
                 </a:solidFill>
@@ -13623,7 +16334,7 @@
               <a:t>DeHaDo</a:t>
             </a:r>
             <a:r>
-              <a:rPr lang="en-IN" sz="1200" dirty="0" smtClean="0">
+              <a:rPr lang="en-IN" sz="1200" dirty="0">
                 <a:solidFill>
                   <a:schemeClr val="bg1"/>
                 </a:solidFill>
@@ -13631,12 +16342,6 @@
               </a:rPr>
               <a:t>-AI Challenge</a:t>
             </a:r>
-            <a:endParaRPr lang="en-IN" sz="1200" dirty="0">
-              <a:solidFill>
-                <a:schemeClr val="bg1"/>
-              </a:solidFill>
-              <a:cs typeface="Times New Roman" panose="02020603050405020304" pitchFamily="18" charset="0"/>
-            </a:endParaRPr>
           </a:p>
         </p:txBody>
       </p:sp>
@@ -13663,7 +16368,7 @@
           <a:lstStyle/>
           <a:p>
             <a:r>
-              <a:rPr lang="en-IN" sz="1200" dirty="0" smtClean="0">
+              <a:rPr lang="en-IN" sz="1200" dirty="0">
                 <a:solidFill>
                   <a:schemeClr val="bg1"/>
                 </a:solidFill>
@@ -13671,12 +16376,6 @@
               </a:rPr>
               <a:t>NCVPRIPG 2025, IIT Jammu</a:t>
             </a:r>
-            <a:endParaRPr lang="en-IN" sz="1200" dirty="0">
-              <a:solidFill>
-                <a:schemeClr val="bg1"/>
-              </a:solidFill>
-              <a:cs typeface="Times New Roman" panose="02020603050405020304" pitchFamily="18" charset="0"/>
-            </a:endParaRPr>
           </a:p>
         </p:txBody>
       </p:sp>
@@ -14049,7 +16748,7 @@
           <a:lstStyle/>
           <a:p>
             <a:r>
-              <a:rPr lang="en-IN" dirty="0" smtClean="0">
+              <a:rPr lang="en-IN" dirty="0">
                 <a:solidFill>
                   <a:schemeClr val="bg1"/>
                 </a:solidFill>
@@ -14082,7 +16781,7 @@
           <a:lstStyle/>
           <a:p>
             <a:r>
-              <a:rPr lang="en-IN" sz="1400" dirty="0" smtClean="0">
+              <a:rPr lang="en-IN" sz="1400" dirty="0">
                 <a:solidFill>
                   <a:schemeClr val="bg1"/>
                 </a:solidFill>
@@ -14115,14 +16814,14 @@
           <a:lstStyle/>
           <a:p>
             <a:r>
-              <a:rPr lang="en-IN" dirty="0" err="1" smtClean="0">
+              <a:rPr lang="en-IN" dirty="0" err="1">
                 <a:solidFill>
                   <a:schemeClr val="bg1"/>
                 </a:solidFill>
               </a:rPr>
               <a:t>Iniya</a:t>
             </a:r>
-            <a:endParaRPr lang="en-IN" dirty="0" smtClean="0">
+            <a:endParaRPr lang="en-IN" dirty="0">
               <a:solidFill>
                 <a:schemeClr val="bg1"/>
               </a:solidFill>
@@ -14138,8 +16837,8 @@
         </p:nvSpPr>
         <p:spPr>
           <a:xfrm>
-            <a:off x="6437744" y="3666345"/>
-            <a:ext cx="2295237" cy="307777"/>
+            <a:off x="6611850" y="3649377"/>
+            <a:ext cx="1334656" cy="523220"/>
           </a:xfrm>
           <a:prstGeom prst="rect">
             <a:avLst/>
@@ -14152,22 +16851,31 @@
           </a:bodyPr>
           <a:lstStyle/>
           <a:p>
+            <a:pPr algn="ctr"/>
             <a:r>
-              <a:rPr lang="en-IN" sz="1400" dirty="0" smtClean="0">
+              <a:rPr lang="en-IN" sz="1400" dirty="0">
                 <a:solidFill>
                   <a:schemeClr val="bg1"/>
                 </a:solidFill>
               </a:rPr>
-              <a:t>Data Scientist, </a:t>
+              <a:t>Data Scientist</a:t>
             </a:r>
+          </a:p>
+          <a:p>
+            <a:pPr algn="ctr"/>
             <a:r>
-              <a:rPr lang="en-IN" sz="1400" dirty="0" smtClean="0">
+              <a:rPr lang="en-IN" sz="1400" dirty="0">
                 <a:solidFill>
-                  <a:srgbClr val="FF0000"/>
+                  <a:schemeClr val="bg1"/>
                 </a:solidFill>
               </a:rPr>
-              <a:t>IGCAR</a:t>
+              <a:t>Secure Traces</a:t>
             </a:r>
+            <a:endParaRPr lang="en-IN" sz="1400" dirty="0">
+              <a:solidFill>
+                <a:srgbClr val="FF0000"/>
+              </a:solidFill>
+            </a:endParaRPr>
           </a:p>
         </p:txBody>
       </p:sp>
@@ -14194,14 +16902,14 @@
           <a:lstStyle/>
           <a:p>
             <a:r>
-              <a:rPr lang="en-IN" dirty="0" err="1" smtClean="0">
+              <a:rPr lang="en-IN" dirty="0" err="1">
                 <a:solidFill>
                   <a:schemeClr val="bg1"/>
                 </a:solidFill>
               </a:rPr>
               <a:t>Anand</a:t>
             </a:r>
-            <a:endParaRPr lang="en-IN" dirty="0" smtClean="0">
+            <a:endParaRPr lang="en-IN" dirty="0">
               <a:solidFill>
                 <a:schemeClr val="bg1"/>
               </a:solidFill>
@@ -14217,8 +16925,8 @@
         </p:nvSpPr>
         <p:spPr>
           <a:xfrm>
-            <a:off x="4226560" y="3657110"/>
-            <a:ext cx="2295237" cy="307777"/>
+            <a:off x="4085245" y="3677972"/>
+            <a:ext cx="1204420" cy="307777"/>
           </a:xfrm>
           <a:prstGeom prst="rect">
             <a:avLst/>
@@ -14232,12 +16940,12 @@
           <a:lstStyle/>
           <a:p>
             <a:r>
-              <a:rPr lang="en-IN" sz="1400" dirty="0" smtClean="0">
+              <a:rPr lang="en-IN" sz="1400" dirty="0">
                 <a:solidFill>
                   <a:schemeClr val="bg1"/>
                 </a:solidFill>
               </a:rPr>
-              <a:t>Consultant</a:t>
+              <a:t>Sr. Consultant</a:t>
             </a:r>
           </a:p>
         </p:txBody>
@@ -14265,14 +16973,14 @@
           <a:lstStyle/>
           <a:p>
             <a:r>
-              <a:rPr lang="en-IN" dirty="0" err="1" smtClean="0">
+              <a:rPr lang="en-IN" dirty="0" err="1">
                 <a:solidFill>
                   <a:schemeClr val="bg1"/>
                 </a:solidFill>
               </a:rPr>
               <a:t>Satishkumar</a:t>
             </a:r>
-            <a:endParaRPr lang="en-IN" dirty="0" smtClean="0">
+            <a:endParaRPr lang="en-IN" dirty="0">
               <a:solidFill>
                 <a:schemeClr val="bg1"/>
               </a:solidFill>
@@ -14288,8 +16996,8 @@
         </p:nvSpPr>
         <p:spPr>
           <a:xfrm>
-            <a:off x="1476893" y="3666345"/>
-            <a:ext cx="2295237" cy="307777"/>
+            <a:off x="1649167" y="3642345"/>
+            <a:ext cx="1019942" cy="307777"/>
           </a:xfrm>
           <a:prstGeom prst="rect">
             <a:avLst/>
@@ -14302,13 +17010,14 @@
           </a:bodyPr>
           <a:lstStyle/>
           <a:p>
+            <a:pPr algn="ctr"/>
             <a:r>
-              <a:rPr lang="en-IN" sz="1400" dirty="0" smtClean="0">
+              <a:rPr lang="en-IN" sz="1400" dirty="0">
                 <a:solidFill>
                   <a:schemeClr val="bg1"/>
                 </a:solidFill>
               </a:rPr>
-              <a:t>Scientist, IGCAR</a:t>
+              <a:t>Sr. Scientist</a:t>
             </a:r>
           </a:p>
         </p:txBody>
@@ -14433,6 +17142,46 @@
           </a:prstGeom>
         </p:spPr>
       </p:pic>
+      <p:sp>
+        <p:nvSpPr>
+          <p:cNvPr id="3" name="TextBox 2">
+            <a:extLst>
+              <a:ext uri="{FF2B5EF4-FFF2-40B4-BE49-F238E27FC236}">
+                <a16:creationId xmlns:a16="http://schemas.microsoft.com/office/drawing/2014/main" id="{B13A8581-63FD-D68F-716D-219CF6189B9B}"/>
+              </a:ext>
+            </a:extLst>
+          </p:cNvPr>
+          <p:cNvSpPr txBox="1"/>
+          <p:nvPr/>
+        </p:nvSpPr>
+        <p:spPr>
+          <a:xfrm>
+            <a:off x="1733418" y="3866851"/>
+            <a:ext cx="851440" cy="307777"/>
+          </a:xfrm>
+          <a:prstGeom prst="rect">
+            <a:avLst/>
+          </a:prstGeom>
+          <a:noFill/>
+        </p:spPr>
+        <p:txBody>
+          <a:bodyPr wrap="square" rtlCol="0">
+            <a:spAutoFit/>
+          </a:bodyPr>
+          <a:lstStyle/>
+          <a:p>
+            <a:pPr algn="ctr"/>
+            <a:r>
+              <a:rPr lang="en-IN" sz="1400" dirty="0">
+                <a:solidFill>
+                  <a:schemeClr val="bg1"/>
+                </a:solidFill>
+              </a:rPr>
+              <a:t>IGCAR</a:t>
+            </a:r>
+          </a:p>
+        </p:txBody>
+      </p:sp>
     </p:spTree>
     <p:extLst>
       <p:ext uri="{BB962C8B-B14F-4D97-AF65-F5344CB8AC3E}">
@@ -14443,13 +17192,6 @@
   <p:clrMapOvr>
     <a:masterClrMapping/>
   </p:clrMapOvr>
-  <p:timing>
-    <p:tnLst>
-      <p:par>
-        <p:cTn id="1" dur="indefinite" restart="never" nodeType="tmRoot"/>
-      </p:par>
-    </p:tnLst>
-  </p:timing>
 </p:sld>
 </file>
 
@@ -14541,10 +17283,9 @@
           <a:lstStyle/>
           <a:p>
             <a:r>
-              <a:rPr lang="en-IN" sz="3000" b="1" dirty="0" smtClean="0"/>
+              <a:rPr lang="en-IN" sz="3000" b="1" dirty="0"/>
               <a:t>Problem Statement</a:t>
             </a:r>
-            <a:endParaRPr lang="en-IN" sz="3000" b="1" dirty="0"/>
           </a:p>
         </p:txBody>
       </p:sp>
@@ -14606,7 +17347,7 @@
           <a:lstStyle/>
           <a:p>
             <a:r>
-              <a:rPr lang="en-IN" sz="1200" dirty="0" err="1" smtClean="0">
+              <a:rPr lang="en-IN" sz="1200" dirty="0" err="1">
                 <a:solidFill>
                   <a:schemeClr val="bg1"/>
                 </a:solidFill>
@@ -14615,7 +17356,7 @@
               <a:t>DeHaDo</a:t>
             </a:r>
             <a:r>
-              <a:rPr lang="en-IN" sz="1200" dirty="0" smtClean="0">
+              <a:rPr lang="en-IN" sz="1200" dirty="0">
                 <a:solidFill>
                   <a:schemeClr val="bg1"/>
                 </a:solidFill>
@@ -14623,12 +17364,6 @@
               </a:rPr>
               <a:t>-AI Challenge</a:t>
             </a:r>
-            <a:endParaRPr lang="en-IN" sz="1200" dirty="0">
-              <a:solidFill>
-                <a:schemeClr val="bg1"/>
-              </a:solidFill>
-              <a:cs typeface="Times New Roman" panose="02020603050405020304" pitchFamily="18" charset="0"/>
-            </a:endParaRPr>
           </a:p>
         </p:txBody>
       </p:sp>
@@ -14655,7 +17390,7 @@
           <a:lstStyle/>
           <a:p>
             <a:r>
-              <a:rPr lang="en-IN" sz="1200" dirty="0" smtClean="0">
+              <a:rPr lang="en-IN" sz="1200" dirty="0">
                 <a:solidFill>
                   <a:schemeClr val="bg1"/>
                 </a:solidFill>
@@ -14663,12 +17398,6 @@
               </a:rPr>
               <a:t>NCVPRIPG 2025, IIT Jammu</a:t>
             </a:r>
-            <a:endParaRPr lang="en-IN" sz="1200" dirty="0">
-              <a:solidFill>
-                <a:schemeClr val="bg1"/>
-              </a:solidFill>
-              <a:cs typeface="Times New Roman" panose="02020603050405020304" pitchFamily="18" charset="0"/>
-            </a:endParaRPr>
           </a:p>
         </p:txBody>
       </p:sp>
@@ -15603,10 +18332,9 @@
           <a:lstStyle/>
           <a:p>
             <a:r>
-              <a:rPr lang="en-IN" sz="3000" b="1" dirty="0" smtClean="0"/>
+              <a:rPr lang="en-IN" sz="3000" b="1" dirty="0"/>
               <a:t>Related Work</a:t>
             </a:r>
-            <a:endParaRPr lang="en-IN" sz="3000" b="1" dirty="0"/>
           </a:p>
         </p:txBody>
       </p:sp>
@@ -15668,7 +18396,7 @@
           <a:lstStyle/>
           <a:p>
             <a:r>
-              <a:rPr lang="en-IN" sz="1200" dirty="0" err="1" smtClean="0">
+              <a:rPr lang="en-IN" sz="1200" dirty="0" err="1">
                 <a:solidFill>
                   <a:schemeClr val="bg1"/>
                 </a:solidFill>
@@ -15677,7 +18405,7 @@
               <a:t>DeHaDo</a:t>
             </a:r>
             <a:r>
-              <a:rPr lang="en-IN" sz="1200" dirty="0" smtClean="0">
+              <a:rPr lang="en-IN" sz="1200" dirty="0">
                 <a:solidFill>
                   <a:schemeClr val="bg1"/>
                 </a:solidFill>
@@ -15685,12 +18413,6 @@
               </a:rPr>
               <a:t>-AI Challenge</a:t>
             </a:r>
-            <a:endParaRPr lang="en-IN" sz="1200" dirty="0">
-              <a:solidFill>
-                <a:schemeClr val="bg1"/>
-              </a:solidFill>
-              <a:cs typeface="Times New Roman" panose="02020603050405020304" pitchFamily="18" charset="0"/>
-            </a:endParaRPr>
           </a:p>
         </p:txBody>
       </p:sp>
@@ -15717,7 +18439,7 @@
           <a:lstStyle/>
           <a:p>
             <a:r>
-              <a:rPr lang="en-IN" sz="1200" dirty="0" smtClean="0">
+              <a:rPr lang="en-IN" sz="1200" dirty="0">
                 <a:solidFill>
                   <a:schemeClr val="bg1"/>
                 </a:solidFill>
@@ -15725,12 +18447,6 @@
               </a:rPr>
               <a:t>NCVPRIPG 2025, IIT Jammu</a:t>
             </a:r>
-            <a:endParaRPr lang="en-IN" sz="1200" dirty="0">
-              <a:solidFill>
-                <a:schemeClr val="bg1"/>
-              </a:solidFill>
-              <a:cs typeface="Times New Roman" panose="02020603050405020304" pitchFamily="18" charset="0"/>
-            </a:endParaRPr>
           </a:p>
         </p:txBody>
       </p:sp>
@@ -16080,7 +18796,7 @@
               <a:lstStyle/>
               <a:p>
                 <a:r>
-                  <a:rPr lang="en-IN" sz="3200" dirty="0" smtClean="0">
+                  <a:rPr lang="en-IN" sz="3200" dirty="0">
                     <a:solidFill>
                       <a:srgbClr val="2C466B"/>
                     </a:solidFill>
@@ -16223,7 +18939,7 @@
               <a:lstStyle/>
               <a:p>
                 <a:r>
-                  <a:rPr lang="en-IN" sz="3200" dirty="0" smtClean="0">
+                  <a:rPr lang="en-IN" sz="3200" dirty="0">
                     <a:solidFill>
                       <a:srgbClr val="2C466B"/>
                     </a:solidFill>
@@ -16366,7 +19082,7 @@
               <a:lstStyle/>
               <a:p>
                 <a:r>
-                  <a:rPr lang="en-IN" sz="3200" dirty="0" smtClean="0">
+                  <a:rPr lang="en-IN" sz="3200" dirty="0">
                     <a:solidFill>
                       <a:srgbClr val="2C466B"/>
                     </a:solidFill>
@@ -16509,7 +19225,7 @@
               <a:lstStyle/>
               <a:p>
                 <a:r>
-                  <a:rPr lang="en-IN" sz="3200" dirty="0" smtClean="0">
+                  <a:rPr lang="en-IN" sz="3200" dirty="0">
                     <a:solidFill>
                       <a:srgbClr val="2C466B"/>
                     </a:solidFill>
@@ -16549,7 +19265,7 @@
             <a:lstStyle/>
             <a:p>
               <a:r>
-                <a:rPr lang="en-IN" sz="1600" dirty="0" smtClean="0">
+                <a:rPr lang="en-IN" sz="1600" dirty="0">
                   <a:solidFill>
                     <a:schemeClr val="bg1"/>
                   </a:solidFill>
@@ -16560,18 +19276,13 @@
             <a:p>
               <a:pPr algn="just"/>
               <a:r>
-                <a:rPr lang="en-IN" sz="1600" dirty="0" smtClean="0">
+                <a:rPr lang="en-IN" sz="1600" dirty="0">
                   <a:solidFill>
                     <a:schemeClr val="bg1"/>
                   </a:solidFill>
                 </a:rPr>
                 <a:t>images with handwritten text</a:t>
               </a:r>
-              <a:endParaRPr lang="en-IN" sz="1600" dirty="0">
-                <a:solidFill>
-                  <a:schemeClr val="bg1"/>
-                </a:solidFill>
-              </a:endParaRPr>
             </a:p>
           </p:txBody>
         </p:sp>
@@ -16598,7 +19309,7 @@
             <a:lstStyle/>
             <a:p>
               <a:r>
-                <a:rPr lang="en-IN" sz="1600" dirty="0" smtClean="0">
+                <a:rPr lang="en-IN" sz="1600" dirty="0">
                   <a:solidFill>
                     <a:schemeClr val="bg1"/>
                   </a:solidFill>
@@ -16608,7 +19319,7 @@
             </a:p>
             <a:p>
               <a:r>
-                <a:rPr lang="en-IN" sz="1600" dirty="0" smtClean="0">
+                <a:rPr lang="en-IN" sz="1600" dirty="0">
                   <a:solidFill>
                     <a:schemeClr val="bg1"/>
                   </a:solidFill>
@@ -16641,7 +19352,7 @@
             <a:lstStyle/>
             <a:p>
               <a:r>
-                <a:rPr lang="en-IN" sz="1600" dirty="0" smtClean="0">
+                <a:rPr lang="en-IN" sz="1600" dirty="0">
                   <a:solidFill>
                     <a:schemeClr val="bg1"/>
                   </a:solidFill>
@@ -16651,7 +19362,7 @@
             </a:p>
             <a:p>
               <a:r>
-                <a:rPr lang="en-IN" sz="1600" dirty="0" smtClean="0">
+                <a:rPr lang="en-IN" sz="1600" dirty="0">
                   <a:solidFill>
                     <a:schemeClr val="bg1"/>
                   </a:solidFill>
@@ -16684,10 +19395,9 @@
             <a:lstStyle/>
             <a:p>
               <a:r>
-                <a:rPr lang="en-IN" sz="2800" dirty="0" smtClean="0"/>
+                <a:rPr lang="en-IN" sz="2800" dirty="0"/>
                 <a:t>Layout LM</a:t>
               </a:r>
-              <a:endParaRPr lang="en-IN" sz="2800" dirty="0"/>
             </a:p>
           </p:txBody>
         </p:sp>
@@ -16714,7 +19424,7 @@
             <a:lstStyle/>
             <a:p>
               <a:r>
-                <a:rPr lang="en-IN" sz="1600" dirty="0" smtClean="0">
+                <a:rPr lang="en-IN" sz="1600" dirty="0">
                   <a:solidFill>
                     <a:schemeClr val="bg1"/>
                   </a:solidFill>
@@ -16724,7 +19434,7 @@
             </a:p>
             <a:p>
               <a:r>
-                <a:rPr lang="en-IN" sz="1600" dirty="0" smtClean="0">
+                <a:rPr lang="en-IN" sz="1600" dirty="0">
                   <a:solidFill>
                     <a:schemeClr val="bg1"/>
                   </a:solidFill>
@@ -16919,7 +19629,7 @@
               <a:lstStyle/>
               <a:p>
                 <a:r>
-                  <a:rPr lang="en-IN" sz="3200" dirty="0" smtClean="0">
+                  <a:rPr lang="en-IN" sz="3200" dirty="0">
                     <a:solidFill>
                       <a:srgbClr val="2C466B"/>
                     </a:solidFill>
@@ -17062,7 +19772,7 @@
               <a:lstStyle/>
               <a:p>
                 <a:r>
-                  <a:rPr lang="en-IN" sz="3200" dirty="0" smtClean="0">
+                  <a:rPr lang="en-IN" sz="3200" dirty="0">
                     <a:solidFill>
                       <a:srgbClr val="2C466B"/>
                     </a:solidFill>
@@ -17205,7 +19915,7 @@
               <a:lstStyle/>
               <a:p>
                 <a:r>
-                  <a:rPr lang="en-IN" sz="3200" dirty="0" smtClean="0">
+                  <a:rPr lang="en-IN" sz="3200" dirty="0">
                     <a:solidFill>
                       <a:srgbClr val="2C466B"/>
                     </a:solidFill>
@@ -17348,7 +20058,7 @@
               <a:lstStyle/>
               <a:p>
                 <a:r>
-                  <a:rPr lang="en-IN" sz="3200" dirty="0" smtClean="0">
+                  <a:rPr lang="en-IN" sz="3200" dirty="0">
                     <a:solidFill>
                       <a:srgbClr val="2C466B"/>
                     </a:solidFill>
@@ -17388,7 +20098,7 @@
             <a:lstStyle/>
             <a:p>
               <a:r>
-                <a:rPr lang="en-IN" sz="1600" dirty="0" smtClean="0">
+                <a:rPr lang="en-IN" sz="1600" dirty="0">
                   <a:solidFill>
                     <a:schemeClr val="bg1"/>
                   </a:solidFill>
@@ -17399,18 +20109,13 @@
             <a:p>
               <a:pPr algn="just"/>
               <a:r>
-                <a:rPr lang="en-IN" sz="1600" dirty="0" smtClean="0">
+                <a:rPr lang="en-IN" sz="1600" dirty="0">
                   <a:solidFill>
                     <a:schemeClr val="bg1"/>
                   </a:solidFill>
                 </a:rPr>
                 <a:t>images with handwritten text</a:t>
               </a:r>
-              <a:endParaRPr lang="en-IN" sz="1600" dirty="0">
-                <a:solidFill>
-                  <a:schemeClr val="bg1"/>
-                </a:solidFill>
-              </a:endParaRPr>
             </a:p>
           </p:txBody>
         </p:sp>
@@ -17423,7 +20128,7 @@
           <p:spPr>
             <a:xfrm>
               <a:off x="1229593" y="5246012"/>
-              <a:ext cx="2431628" cy="584775"/>
+              <a:ext cx="2364878" cy="584775"/>
             </a:xfrm>
             <a:prstGeom prst="rect">
               <a:avLst/>
@@ -17437,22 +20142,22 @@
             <a:lstStyle/>
             <a:p>
               <a:r>
-                <a:rPr lang="en-IN" sz="1600" dirty="0" smtClean="0">
+                <a:rPr lang="en-IN" sz="1600" dirty="0">
                   <a:solidFill>
                     <a:schemeClr val="bg1"/>
                   </a:solidFill>
                 </a:rPr>
-                <a:t>Training requires Compute </a:t>
+                <a:t>Training requires complex </a:t>
               </a:r>
             </a:p>
             <a:p>
               <a:r>
-                <a:rPr lang="en-IN" sz="1600" dirty="0" smtClean="0">
+                <a:rPr lang="en-IN" sz="1600" dirty="0">
                   <a:solidFill>
                     <a:schemeClr val="bg1"/>
                   </a:solidFill>
                 </a:rPr>
-                <a:t>heavy hardware</a:t>
+                <a:t>hardware</a:t>
               </a:r>
             </a:p>
           </p:txBody>
@@ -17480,7 +20185,7 @@
             <a:lstStyle/>
             <a:p>
               <a:r>
-                <a:rPr lang="en-IN" sz="1600" dirty="0" smtClean="0">
+                <a:rPr lang="en-IN" sz="1600" dirty="0">
                   <a:solidFill>
                     <a:schemeClr val="bg1"/>
                   </a:solidFill>
@@ -17490,7 +20195,7 @@
             </a:p>
             <a:p>
               <a:r>
-                <a:rPr lang="en-IN" sz="1600" dirty="0" smtClean="0">
+                <a:rPr lang="en-IN" sz="1600" dirty="0">
                   <a:solidFill>
                     <a:schemeClr val="bg1"/>
                   </a:solidFill>
@@ -17523,10 +20228,9 @@
             <a:lstStyle/>
             <a:p>
               <a:r>
-                <a:rPr lang="en-IN" sz="2800" dirty="0" smtClean="0"/>
+                <a:rPr lang="en-IN" sz="2800" dirty="0"/>
                 <a:t>Donut Model</a:t>
               </a:r>
-              <a:endParaRPr lang="en-IN" sz="2800" dirty="0"/>
             </a:p>
           </p:txBody>
         </p:sp>
@@ -17553,7 +20257,7 @@
             <a:lstStyle/>
             <a:p>
               <a:r>
-                <a:rPr lang="en-IN" sz="1600" dirty="0" smtClean="0">
+                <a:rPr lang="en-IN" sz="1600" dirty="0">
                   <a:solidFill>
                     <a:schemeClr val="bg1"/>
                   </a:solidFill>
@@ -17563,7 +20267,7 @@
             </a:p>
             <a:p>
               <a:r>
-                <a:rPr lang="en-IN" sz="1600" dirty="0" smtClean="0">
+                <a:rPr lang="en-IN" sz="1600" dirty="0">
                   <a:solidFill>
                     <a:schemeClr val="bg1"/>
                   </a:solidFill>
@@ -17758,7 +20462,7 @@
               <a:lstStyle/>
               <a:p>
                 <a:r>
-                  <a:rPr lang="en-IN" sz="3200" dirty="0" smtClean="0">
+                  <a:rPr lang="en-IN" sz="3200" dirty="0">
                     <a:solidFill>
                       <a:srgbClr val="2C466B"/>
                     </a:solidFill>
@@ -17901,7 +20605,7 @@
               <a:lstStyle/>
               <a:p>
                 <a:r>
-                  <a:rPr lang="en-IN" sz="3200" dirty="0" smtClean="0">
+                  <a:rPr lang="en-IN" sz="3200" dirty="0">
                     <a:solidFill>
                       <a:srgbClr val="2C466B"/>
                     </a:solidFill>
@@ -18044,7 +20748,7 @@
               <a:lstStyle/>
               <a:p>
                 <a:r>
-                  <a:rPr lang="en-IN" sz="3200" dirty="0" smtClean="0">
+                  <a:rPr lang="en-IN" sz="3200" dirty="0">
                     <a:solidFill>
                       <a:srgbClr val="2C466B"/>
                     </a:solidFill>
@@ -18187,7 +20891,7 @@
               <a:lstStyle/>
               <a:p>
                 <a:r>
-                  <a:rPr lang="en-IN" sz="3200" dirty="0" smtClean="0">
+                  <a:rPr lang="en-IN" sz="3200" dirty="0">
                     <a:solidFill>
                       <a:srgbClr val="2C466B"/>
                     </a:solidFill>
@@ -18227,7 +20931,7 @@
             <a:lstStyle/>
             <a:p>
               <a:r>
-                <a:rPr lang="en-IN" sz="1600" dirty="0" smtClean="0">
+                <a:rPr lang="en-IN" sz="1600" dirty="0">
                   <a:solidFill>
                     <a:schemeClr val="bg1"/>
                   </a:solidFill>
@@ -18238,18 +20942,13 @@
             <a:p>
               <a:pPr algn="just"/>
               <a:r>
-                <a:rPr lang="en-IN" sz="1600" dirty="0" smtClean="0">
+                <a:rPr lang="en-IN" sz="1600" dirty="0">
                   <a:solidFill>
                     <a:schemeClr val="bg1"/>
                   </a:solidFill>
                 </a:rPr>
                 <a:t>images with handwritten text</a:t>
               </a:r>
-              <a:endParaRPr lang="en-IN" sz="1600" dirty="0">
-                <a:solidFill>
-                  <a:schemeClr val="bg1"/>
-                </a:solidFill>
-              </a:endParaRPr>
             </a:p>
           </p:txBody>
         </p:sp>
@@ -18276,7 +20975,7 @@
             <a:lstStyle/>
             <a:p>
               <a:r>
-                <a:rPr lang="en-IN" sz="1600" dirty="0" smtClean="0">
+                <a:rPr lang="en-IN" sz="1600" dirty="0">
                   <a:solidFill>
                     <a:schemeClr val="bg1"/>
                   </a:solidFill>
@@ -18286,7 +20985,7 @@
             </a:p>
             <a:p>
               <a:r>
-                <a:rPr lang="en-IN" sz="1600" dirty="0" smtClean="0">
+                <a:rPr lang="en-IN" sz="1600" dirty="0">
                   <a:solidFill>
                     <a:schemeClr val="bg1"/>
                   </a:solidFill>
@@ -18319,7 +21018,7 @@
             <a:lstStyle/>
             <a:p>
               <a:r>
-                <a:rPr lang="en-IN" sz="1600" dirty="0" smtClean="0">
+                <a:rPr lang="en-IN" sz="1600" dirty="0">
                   <a:solidFill>
                     <a:schemeClr val="bg1"/>
                   </a:solidFill>
@@ -18329,7 +21028,7 @@
             </a:p>
             <a:p>
               <a:r>
-                <a:rPr lang="en-IN" sz="1600" dirty="0" smtClean="0">
+                <a:rPr lang="en-IN" sz="1600" dirty="0">
                   <a:solidFill>
                     <a:schemeClr val="bg1"/>
                   </a:solidFill>
@@ -18362,10 +21061,9 @@
             <a:lstStyle/>
             <a:p>
               <a:r>
-                <a:rPr lang="en-IN" sz="2800" dirty="0" smtClean="0"/>
+                <a:rPr lang="en-IN" sz="2800" dirty="0"/>
                 <a:t>Detection + OCR</a:t>
               </a:r>
-              <a:endParaRPr lang="en-IN" sz="2800" dirty="0"/>
             </a:p>
           </p:txBody>
         </p:sp>
@@ -18392,7 +21090,7 @@
             <a:lstStyle/>
             <a:p>
               <a:r>
-                <a:rPr lang="en-IN" sz="1600" dirty="0" smtClean="0">
+                <a:rPr lang="en-IN" sz="1600" dirty="0">
                   <a:solidFill>
                     <a:schemeClr val="bg1"/>
                   </a:solidFill>
@@ -18402,7 +21100,7 @@
             </a:p>
             <a:p>
               <a:r>
-                <a:rPr lang="en-IN" sz="1600" dirty="0" smtClean="0">
+                <a:rPr lang="en-IN" sz="1600" dirty="0">
                   <a:solidFill>
                     <a:schemeClr val="bg1"/>
                   </a:solidFill>
@@ -18423,13 +21121,6 @@
   <p:clrMapOvr>
     <a:masterClrMapping/>
   </p:clrMapOvr>
-  <p:timing>
-    <p:tnLst>
-      <p:par>
-        <p:cTn id="1" dur="indefinite" restart="never" nodeType="tmRoot"/>
-      </p:par>
-    </p:tnLst>
-  </p:timing>
 </p:sld>
 </file>
 
@@ -18521,10 +21212,9 @@
           <a:lstStyle/>
           <a:p>
             <a:r>
-              <a:rPr lang="en-IN" sz="3000" b="1" dirty="0" smtClean="0"/>
+              <a:rPr lang="en-IN" sz="3000" b="1" dirty="0"/>
               <a:t>Dataset Overview</a:t>
             </a:r>
-            <a:endParaRPr lang="en-IN" sz="3000" b="1" dirty="0"/>
           </a:p>
         </p:txBody>
       </p:sp>
@@ -18552,11 +21242,7 @@
           <a:p>
             <a:r>
               <a:rPr lang="en-IN" sz="1800" dirty="0"/>
-              <a:t>Problem </a:t>
-            </a:r>
-            <a:r>
-              <a:rPr lang="en-IN" sz="1800" dirty="0" smtClean="0"/>
-              <a:t>Statement</a:t>
+              <a:t>Problem Statement</a:t>
             </a:r>
             <a:endParaRPr lang="en-IN" sz="1400" dirty="0"/>
           </a:p>
@@ -18620,7 +21306,7 @@
           <a:lstStyle/>
           <a:p>
             <a:r>
-              <a:rPr lang="en-IN" sz="1200" dirty="0" err="1" smtClean="0">
+              <a:rPr lang="en-IN" sz="1200" dirty="0" err="1">
                 <a:solidFill>
                   <a:schemeClr val="bg1"/>
                 </a:solidFill>
@@ -18629,7 +21315,7 @@
               <a:t>DeHaDo</a:t>
             </a:r>
             <a:r>
-              <a:rPr lang="en-IN" sz="1200" dirty="0" smtClean="0">
+              <a:rPr lang="en-IN" sz="1200" dirty="0">
                 <a:solidFill>
                   <a:schemeClr val="bg1"/>
                 </a:solidFill>
@@ -18637,12 +21323,6 @@
               </a:rPr>
               <a:t>-AI Challenge</a:t>
             </a:r>
-            <a:endParaRPr lang="en-IN" sz="1200" dirty="0">
-              <a:solidFill>
-                <a:schemeClr val="bg1"/>
-              </a:solidFill>
-              <a:cs typeface="Times New Roman" panose="02020603050405020304" pitchFamily="18" charset="0"/>
-            </a:endParaRPr>
           </a:p>
         </p:txBody>
       </p:sp>
@@ -18669,7 +21349,7 @@
           <a:lstStyle/>
           <a:p>
             <a:r>
-              <a:rPr lang="en-IN" sz="1200" dirty="0" smtClean="0">
+              <a:rPr lang="en-IN" sz="1200" dirty="0">
                 <a:solidFill>
                   <a:schemeClr val="bg1"/>
                 </a:solidFill>
@@ -18677,12 +21357,6 @@
               </a:rPr>
               <a:t>NCVPRIPG 2025, IIT Jammu</a:t>
             </a:r>
-            <a:endParaRPr lang="en-IN" sz="1200" dirty="0">
-              <a:solidFill>
-                <a:schemeClr val="bg1"/>
-              </a:solidFill>
-              <a:cs typeface="Times New Roman" panose="02020603050405020304" pitchFamily="18" charset="0"/>
-            </a:endParaRPr>
           </a:p>
         </p:txBody>
       </p:sp>
@@ -18858,13 +21532,6 @@
   <p:clrMapOvr>
     <a:masterClrMapping/>
   </p:clrMapOvr>
-  <p:timing>
-    <p:tnLst>
-      <p:par>
-        <p:cTn id="1" dur="indefinite" restart="never" nodeType="tmRoot"/>
-      </p:par>
-    </p:tnLst>
-  </p:timing>
 </p:sld>
 </file>
 
@@ -18956,10 +21623,9 @@
           <a:lstStyle/>
           <a:p>
             <a:r>
-              <a:rPr lang="en-IN" sz="3000" b="1" dirty="0" smtClean="0"/>
+              <a:rPr lang="en-IN" sz="3000" b="1" dirty="0"/>
               <a:t>Model Architecture</a:t>
             </a:r>
-            <a:endParaRPr lang="en-IN" sz="3000" b="1" dirty="0"/>
           </a:p>
         </p:txBody>
       </p:sp>
@@ -19021,7 +21687,7 @@
           <a:lstStyle/>
           <a:p>
             <a:r>
-              <a:rPr lang="en-IN" sz="1200" dirty="0" err="1" smtClean="0">
+              <a:rPr lang="en-IN" sz="1200" dirty="0" err="1">
                 <a:solidFill>
                   <a:schemeClr val="bg1"/>
                 </a:solidFill>
@@ -19030,7 +21696,7 @@
               <a:t>DeHaDo</a:t>
             </a:r>
             <a:r>
-              <a:rPr lang="en-IN" sz="1200" dirty="0" smtClean="0">
+              <a:rPr lang="en-IN" sz="1200" dirty="0">
                 <a:solidFill>
                   <a:schemeClr val="bg1"/>
                 </a:solidFill>
@@ -19038,12 +21704,6 @@
               </a:rPr>
               <a:t>-AI Challenge</a:t>
             </a:r>
-            <a:endParaRPr lang="en-IN" sz="1200" dirty="0">
-              <a:solidFill>
-                <a:schemeClr val="bg1"/>
-              </a:solidFill>
-              <a:cs typeface="Times New Roman" panose="02020603050405020304" pitchFamily="18" charset="0"/>
-            </a:endParaRPr>
           </a:p>
         </p:txBody>
       </p:sp>
@@ -19070,7 +21730,7 @@
           <a:lstStyle/>
           <a:p>
             <a:r>
-              <a:rPr lang="en-IN" sz="1200" dirty="0" smtClean="0">
+              <a:rPr lang="en-IN" sz="1200" dirty="0">
                 <a:solidFill>
                   <a:schemeClr val="bg1"/>
                 </a:solidFill>
@@ -19078,12 +21738,6 @@
               </a:rPr>
               <a:t>NCVPRIPG 2025, IIT Jammu</a:t>
             </a:r>
-            <a:endParaRPr lang="en-IN" sz="1200" dirty="0">
-              <a:solidFill>
-                <a:schemeClr val="bg1"/>
-              </a:solidFill>
-              <a:cs typeface="Times New Roman" panose="02020603050405020304" pitchFamily="18" charset="0"/>
-            </a:endParaRPr>
           </a:p>
         </p:txBody>
       </p:sp>
@@ -19254,7 +21908,7 @@
           <p:cNvPr id="15" name="Rectangle: Rounded Corners 955755312">
             <a:extLst>
               <a:ext uri="{FF2B5EF4-FFF2-40B4-BE49-F238E27FC236}">
-                <a16:creationId xmlns:lc="http://schemas.openxmlformats.org/drawingml/2006/lockedCanvas" xmlns:a16="http://schemas.microsoft.com/office/drawing/2014/main" xmlns:wps="http://schemas.microsoft.com/office/word/2010/wordprocessingShape" xmlns:wne="http://schemas.microsoft.com/office/word/2006/wordml" xmlns:wpi="http://schemas.microsoft.com/office/word/2010/wordprocessingInk" xmlns:wpg="http://schemas.microsoft.com/office/word/2010/wordprocessingGroup" xmlns:w16se="http://schemas.microsoft.com/office/word/2015/wordml/symex" xmlns:w16sdtfl="http://schemas.microsoft.com/office/word/2024/wordml/sdtformatlock" xmlns:w16sdtdh="http://schemas.microsoft.com/office/word/2020/wordml/sdtdatahash" xmlns:w16du="http://schemas.microsoft.com/office/word/2023/wordml/word16du" xmlns:w16="http://schemas.microsoft.com/office/word/2018/wordml" xmlns:w16cid="http://schemas.microsoft.com/office/word/2016/wordml/cid" xmlns:w16cex="http://schemas.microsoft.com/office/word/2018/wordml/cex" xmlns:w15="http://schemas.microsoft.com/office/word/2012/wordml" xmlns:w14="http://schemas.microsoft.com/office/word/2010/wordml" xmlns:w="http://schemas.openxmlformats.org/wordprocessingml/2006/main" xmlns:w10="urn:schemas-microsoft-com:office:word" xmlns:wp="http://schemas.openxmlformats.org/drawingml/2006/wordprocessingDrawing" xmlns:wp14="http://schemas.microsoft.com/office/word/2010/wordprocessingDrawing" xmlns:v="urn:schemas-microsoft-com:vml" xmlns:m="http://schemas.openxmlformats.org/officeDocument/2006/math" xmlns:oel="http://schemas.microsoft.com/office/2019/extlst" xmlns:o="urn:schemas-microsoft-com:office:office" xmlns:am3d="http://schemas.microsoft.com/office/drawing/2017/model3d" xmlns:aink="http://schemas.microsoft.com/office/drawing/2016/ink" xmlns:mc="http://schemas.openxmlformats.org/markup-compatibility/2006" xmlns:cx8="http://schemas.microsoft.com/office/drawing/2016/5/14/chartex" xmlns:cx7="http://schemas.microsoft.com/office/drawing/2016/5/13/chartex" xmlns:cx6="http://schemas.microsoft.com/office/drawing/2016/5/12/chartex" xmlns:cx5="http://schemas.microsoft.com/office/drawing/2016/5/11/chartex" xmlns:cx4="http://schemas.microsoft.com/office/drawing/2016/5/10/chartex" xmlns:cx3="http://schemas.microsoft.com/office/drawing/2016/5/9/chartex" xmlns:cx2="http://schemas.microsoft.com/office/drawing/2015/10/21/chartex" xmlns:cx1="http://schemas.microsoft.com/office/drawing/2015/9/8/chartex" xmlns:cx="http://schemas.microsoft.com/office/drawing/2014/chartex" xmlns:wpc="http://schemas.microsoft.com/office/word/2010/wordprocessingCanvas" xmlns="" id="{6DAEFD3C-0155-2402-A87F-BC07F5FFF7CE}"/>
+                <a16:creationId xmlns:a16="http://schemas.microsoft.com/office/drawing/2014/main" id="{6DAEFD3C-0155-2402-A87F-BC07F5FFF7CE}"/>
               </a:ext>
             </a:extLst>
           </p:cNvPr>
@@ -19305,7 +21959,7 @@
               </a:spcAft>
             </a:pPr>
             <a:r>
-              <a:rPr lang="en-US" sz="1600" kern="1200" dirty="0" smtClean="0">
+              <a:rPr lang="en-US" sz="1600" kern="1200" dirty="0">
                 <a:solidFill>
                   <a:srgbClr val="FFFFFF"/>
                 </a:solidFill>
@@ -19328,7 +21982,7 @@
           <p:cNvPr id="17" name="Rectangle: Rounded Corners 337800328">
             <a:extLst>
               <a:ext uri="{FF2B5EF4-FFF2-40B4-BE49-F238E27FC236}">
-                <a16:creationId xmlns:lc="http://schemas.openxmlformats.org/drawingml/2006/lockedCanvas" xmlns:a16="http://schemas.microsoft.com/office/drawing/2014/main" xmlns:wps="http://schemas.microsoft.com/office/word/2010/wordprocessingShape" xmlns:wne="http://schemas.microsoft.com/office/word/2006/wordml" xmlns:wpi="http://schemas.microsoft.com/office/word/2010/wordprocessingInk" xmlns:wpg="http://schemas.microsoft.com/office/word/2010/wordprocessingGroup" xmlns:w16se="http://schemas.microsoft.com/office/word/2015/wordml/symex" xmlns:w16sdtfl="http://schemas.microsoft.com/office/word/2024/wordml/sdtformatlock" xmlns:w16sdtdh="http://schemas.microsoft.com/office/word/2020/wordml/sdtdatahash" xmlns:w16du="http://schemas.microsoft.com/office/word/2023/wordml/word16du" xmlns:w16="http://schemas.microsoft.com/office/word/2018/wordml" xmlns:w16cid="http://schemas.microsoft.com/office/word/2016/wordml/cid" xmlns:w16cex="http://schemas.microsoft.com/office/word/2018/wordml/cex" xmlns:w15="http://schemas.microsoft.com/office/word/2012/wordml" xmlns:w14="http://schemas.microsoft.com/office/word/2010/wordml" xmlns:w="http://schemas.openxmlformats.org/wordprocessingml/2006/main" xmlns:w10="urn:schemas-microsoft-com:office:word" xmlns:wp="http://schemas.openxmlformats.org/drawingml/2006/wordprocessingDrawing" xmlns:wp14="http://schemas.microsoft.com/office/word/2010/wordprocessingDrawing" xmlns:v="urn:schemas-microsoft-com:vml" xmlns:m="http://schemas.openxmlformats.org/officeDocument/2006/math" xmlns:oel="http://schemas.microsoft.com/office/2019/extlst" xmlns:o="urn:schemas-microsoft-com:office:office" xmlns:am3d="http://schemas.microsoft.com/office/drawing/2017/model3d" xmlns:aink="http://schemas.microsoft.com/office/drawing/2016/ink" xmlns:mc="http://schemas.openxmlformats.org/markup-compatibility/2006" xmlns:cx8="http://schemas.microsoft.com/office/drawing/2016/5/14/chartex" xmlns:cx7="http://schemas.microsoft.com/office/drawing/2016/5/13/chartex" xmlns:cx6="http://schemas.microsoft.com/office/drawing/2016/5/12/chartex" xmlns:cx5="http://schemas.microsoft.com/office/drawing/2016/5/11/chartex" xmlns:cx4="http://schemas.microsoft.com/office/drawing/2016/5/10/chartex" xmlns:cx3="http://schemas.microsoft.com/office/drawing/2016/5/9/chartex" xmlns:cx2="http://schemas.microsoft.com/office/drawing/2015/10/21/chartex" xmlns:cx1="http://schemas.microsoft.com/office/drawing/2015/9/8/chartex" xmlns:cx="http://schemas.microsoft.com/office/drawing/2014/chartex" xmlns:wpc="http://schemas.microsoft.com/office/word/2010/wordprocessingCanvas" xmlns="" id="{47FFFF1B-FB6A-6132-DA82-C5F4ADFE6EA1}"/>
+                <a16:creationId xmlns:a16="http://schemas.microsoft.com/office/drawing/2014/main" id="{47FFFF1B-FB6A-6132-DA82-C5F4ADFE6EA1}"/>
               </a:ext>
             </a:extLst>
           </p:cNvPr>
@@ -19400,7 +22054,7 @@
           <p:cNvPr id="18" name="Rectangle: Rounded Corners 1452009881">
             <a:extLst>
               <a:ext uri="{FF2B5EF4-FFF2-40B4-BE49-F238E27FC236}">
-                <a16:creationId xmlns:lc="http://schemas.openxmlformats.org/drawingml/2006/lockedCanvas" xmlns:a16="http://schemas.microsoft.com/office/drawing/2014/main" xmlns:wps="http://schemas.microsoft.com/office/word/2010/wordprocessingShape" xmlns:wne="http://schemas.microsoft.com/office/word/2006/wordml" xmlns:wpi="http://schemas.microsoft.com/office/word/2010/wordprocessingInk" xmlns:wpg="http://schemas.microsoft.com/office/word/2010/wordprocessingGroup" xmlns:w16se="http://schemas.microsoft.com/office/word/2015/wordml/symex" xmlns:w16sdtfl="http://schemas.microsoft.com/office/word/2024/wordml/sdtformatlock" xmlns:w16sdtdh="http://schemas.microsoft.com/office/word/2020/wordml/sdtdatahash" xmlns:w16du="http://schemas.microsoft.com/office/word/2023/wordml/word16du" xmlns:w16="http://schemas.microsoft.com/office/word/2018/wordml" xmlns:w16cid="http://schemas.microsoft.com/office/word/2016/wordml/cid" xmlns:w16cex="http://schemas.microsoft.com/office/word/2018/wordml/cex" xmlns:w15="http://schemas.microsoft.com/office/word/2012/wordml" xmlns:w14="http://schemas.microsoft.com/office/word/2010/wordml" xmlns:w="http://schemas.openxmlformats.org/wordprocessingml/2006/main" xmlns:w10="urn:schemas-microsoft-com:office:word" xmlns:wp="http://schemas.openxmlformats.org/drawingml/2006/wordprocessingDrawing" xmlns:wp14="http://schemas.microsoft.com/office/word/2010/wordprocessingDrawing" xmlns:v="urn:schemas-microsoft-com:vml" xmlns:m="http://schemas.openxmlformats.org/officeDocument/2006/math" xmlns:oel="http://schemas.microsoft.com/office/2019/extlst" xmlns:o="urn:schemas-microsoft-com:office:office" xmlns:am3d="http://schemas.microsoft.com/office/drawing/2017/model3d" xmlns:aink="http://schemas.microsoft.com/office/drawing/2016/ink" xmlns:mc="http://schemas.openxmlformats.org/markup-compatibility/2006" xmlns:cx8="http://schemas.microsoft.com/office/drawing/2016/5/14/chartex" xmlns:cx7="http://schemas.microsoft.com/office/drawing/2016/5/13/chartex" xmlns:cx6="http://schemas.microsoft.com/office/drawing/2016/5/12/chartex" xmlns:cx5="http://schemas.microsoft.com/office/drawing/2016/5/11/chartex" xmlns:cx4="http://schemas.microsoft.com/office/drawing/2016/5/10/chartex" xmlns:cx3="http://schemas.microsoft.com/office/drawing/2016/5/9/chartex" xmlns:cx2="http://schemas.microsoft.com/office/drawing/2015/10/21/chartex" xmlns:cx1="http://schemas.microsoft.com/office/drawing/2015/9/8/chartex" xmlns:cx="http://schemas.microsoft.com/office/drawing/2014/chartex" xmlns:wpc="http://schemas.microsoft.com/office/word/2010/wordprocessingCanvas" xmlns="" id="{95CFF6B9-9BD3-9470-8619-F307E94B5EBF}"/>
+                <a16:creationId xmlns:a16="http://schemas.microsoft.com/office/drawing/2014/main" id="{95CFF6B9-9BD3-9470-8619-F307E94B5EBF}"/>
               </a:ext>
             </a:extLst>
           </p:cNvPr>
@@ -19472,7 +22126,7 @@
           <p:cNvPr id="19" name="Rectangle: Rounded Corners 643149211">
             <a:extLst>
               <a:ext uri="{FF2B5EF4-FFF2-40B4-BE49-F238E27FC236}">
-                <a16:creationId xmlns:lc="http://schemas.openxmlformats.org/drawingml/2006/lockedCanvas" xmlns:a16="http://schemas.microsoft.com/office/drawing/2014/main" xmlns:wps="http://schemas.microsoft.com/office/word/2010/wordprocessingShape" xmlns:wne="http://schemas.microsoft.com/office/word/2006/wordml" xmlns:wpi="http://schemas.microsoft.com/office/word/2010/wordprocessingInk" xmlns:wpg="http://schemas.microsoft.com/office/word/2010/wordprocessingGroup" xmlns:w16se="http://schemas.microsoft.com/office/word/2015/wordml/symex" xmlns:w16sdtfl="http://schemas.microsoft.com/office/word/2024/wordml/sdtformatlock" xmlns:w16sdtdh="http://schemas.microsoft.com/office/word/2020/wordml/sdtdatahash" xmlns:w16du="http://schemas.microsoft.com/office/word/2023/wordml/word16du" xmlns:w16="http://schemas.microsoft.com/office/word/2018/wordml" xmlns:w16cid="http://schemas.microsoft.com/office/word/2016/wordml/cid" xmlns:w16cex="http://schemas.microsoft.com/office/word/2018/wordml/cex" xmlns:w15="http://schemas.microsoft.com/office/word/2012/wordml" xmlns:w14="http://schemas.microsoft.com/office/word/2010/wordml" xmlns:w="http://schemas.openxmlformats.org/wordprocessingml/2006/main" xmlns:w10="urn:schemas-microsoft-com:office:word" xmlns:wp="http://schemas.openxmlformats.org/drawingml/2006/wordprocessingDrawing" xmlns:wp14="http://schemas.microsoft.com/office/word/2010/wordprocessingDrawing" xmlns:v="urn:schemas-microsoft-com:vml" xmlns:m="http://schemas.openxmlformats.org/officeDocument/2006/math" xmlns:oel="http://schemas.microsoft.com/office/2019/extlst" xmlns:o="urn:schemas-microsoft-com:office:office" xmlns:am3d="http://schemas.microsoft.com/office/drawing/2017/model3d" xmlns:aink="http://schemas.microsoft.com/office/drawing/2016/ink" xmlns:mc="http://schemas.openxmlformats.org/markup-compatibility/2006" xmlns:cx8="http://schemas.microsoft.com/office/drawing/2016/5/14/chartex" xmlns:cx7="http://schemas.microsoft.com/office/drawing/2016/5/13/chartex" xmlns:cx6="http://schemas.microsoft.com/office/drawing/2016/5/12/chartex" xmlns:cx5="http://schemas.microsoft.com/office/drawing/2016/5/11/chartex" xmlns:cx4="http://schemas.microsoft.com/office/drawing/2016/5/10/chartex" xmlns:cx3="http://schemas.microsoft.com/office/drawing/2016/5/9/chartex" xmlns:cx2="http://schemas.microsoft.com/office/drawing/2015/10/21/chartex" xmlns:cx1="http://schemas.microsoft.com/office/drawing/2015/9/8/chartex" xmlns:cx="http://schemas.microsoft.com/office/drawing/2014/chartex" xmlns:wpc="http://schemas.microsoft.com/office/word/2010/wordprocessingCanvas" xmlns="" id="{B19715AB-4AA8-8F4A-1BA0-23611D4095E1}"/>
+                <a16:creationId xmlns:a16="http://schemas.microsoft.com/office/drawing/2014/main" id="{B19715AB-4AA8-8F4A-1BA0-23611D4095E1}"/>
               </a:ext>
             </a:extLst>
           </p:cNvPr>
@@ -19544,7 +22198,7 @@
           <p:cNvPr id="20" name="Straight Arrow Connector 19">
             <a:extLst>
               <a:ext uri="{FF2B5EF4-FFF2-40B4-BE49-F238E27FC236}">
-                <a16:creationId xmlns:lc="http://schemas.openxmlformats.org/drawingml/2006/lockedCanvas" xmlns:a16="http://schemas.microsoft.com/office/drawing/2014/main" xmlns:wps="http://schemas.microsoft.com/office/word/2010/wordprocessingShape" xmlns:wne="http://schemas.microsoft.com/office/word/2006/wordml" xmlns:wpi="http://schemas.microsoft.com/office/word/2010/wordprocessingInk" xmlns:wpg="http://schemas.microsoft.com/office/word/2010/wordprocessingGroup" xmlns:w16se="http://schemas.microsoft.com/office/word/2015/wordml/symex" xmlns:w16sdtfl="http://schemas.microsoft.com/office/word/2024/wordml/sdtformatlock" xmlns:w16sdtdh="http://schemas.microsoft.com/office/word/2020/wordml/sdtdatahash" xmlns:w16du="http://schemas.microsoft.com/office/word/2023/wordml/word16du" xmlns:w16="http://schemas.microsoft.com/office/word/2018/wordml" xmlns:w16cid="http://schemas.microsoft.com/office/word/2016/wordml/cid" xmlns:w16cex="http://schemas.microsoft.com/office/word/2018/wordml/cex" xmlns:w15="http://schemas.microsoft.com/office/word/2012/wordml" xmlns:w14="http://schemas.microsoft.com/office/word/2010/wordml" xmlns:w="http://schemas.openxmlformats.org/wordprocessingml/2006/main" xmlns:w10="urn:schemas-microsoft-com:office:word" xmlns:wp="http://schemas.openxmlformats.org/drawingml/2006/wordprocessingDrawing" xmlns:wp14="http://schemas.microsoft.com/office/word/2010/wordprocessingDrawing" xmlns:v="urn:schemas-microsoft-com:vml" xmlns:m="http://schemas.openxmlformats.org/officeDocument/2006/math" xmlns:oel="http://schemas.microsoft.com/office/2019/extlst" xmlns:o="urn:schemas-microsoft-com:office:office" xmlns:am3d="http://schemas.microsoft.com/office/drawing/2017/model3d" xmlns:aink="http://schemas.microsoft.com/office/drawing/2016/ink" xmlns:mc="http://schemas.openxmlformats.org/markup-compatibility/2006" xmlns:cx8="http://schemas.microsoft.com/office/drawing/2016/5/14/chartex" xmlns:cx7="http://schemas.microsoft.com/office/drawing/2016/5/13/chartex" xmlns:cx6="http://schemas.microsoft.com/office/drawing/2016/5/12/chartex" xmlns:cx5="http://schemas.microsoft.com/office/drawing/2016/5/11/chartex" xmlns:cx4="http://schemas.microsoft.com/office/drawing/2016/5/10/chartex" xmlns:cx3="http://schemas.microsoft.com/office/drawing/2016/5/9/chartex" xmlns:cx2="http://schemas.microsoft.com/office/drawing/2015/10/21/chartex" xmlns:cx1="http://schemas.microsoft.com/office/drawing/2015/9/8/chartex" xmlns:cx="http://schemas.microsoft.com/office/drawing/2014/chartex" xmlns:wpc="http://schemas.microsoft.com/office/word/2010/wordprocessingCanvas" xmlns="" id="{FAC668D8-5355-96EF-6C76-040115E13ABA}"/>
+                <a16:creationId xmlns:a16="http://schemas.microsoft.com/office/drawing/2014/main" id="{FAC668D8-5355-96EF-6C76-040115E13ABA}"/>
               </a:ext>
             </a:extLst>
           </p:cNvPr>
@@ -19586,7 +22240,7 @@
           <p:cNvPr id="21" name="Straight Arrow Connector 20">
             <a:extLst>
               <a:ext uri="{FF2B5EF4-FFF2-40B4-BE49-F238E27FC236}">
-                <a16:creationId xmlns:lc="http://schemas.openxmlformats.org/drawingml/2006/lockedCanvas" xmlns:a16="http://schemas.microsoft.com/office/drawing/2014/main" xmlns:wps="http://schemas.microsoft.com/office/word/2010/wordprocessingShape" xmlns:wne="http://schemas.microsoft.com/office/word/2006/wordml" xmlns:wpi="http://schemas.microsoft.com/office/word/2010/wordprocessingInk" xmlns:wpg="http://schemas.microsoft.com/office/word/2010/wordprocessingGroup" xmlns:w16se="http://schemas.microsoft.com/office/word/2015/wordml/symex" xmlns:w16sdtfl="http://schemas.microsoft.com/office/word/2024/wordml/sdtformatlock" xmlns:w16sdtdh="http://schemas.microsoft.com/office/word/2020/wordml/sdtdatahash" xmlns:w16du="http://schemas.microsoft.com/office/word/2023/wordml/word16du" xmlns:w16="http://schemas.microsoft.com/office/word/2018/wordml" xmlns:w16cid="http://schemas.microsoft.com/office/word/2016/wordml/cid" xmlns:w16cex="http://schemas.microsoft.com/office/word/2018/wordml/cex" xmlns:w15="http://schemas.microsoft.com/office/word/2012/wordml" xmlns:w14="http://schemas.microsoft.com/office/word/2010/wordml" xmlns:w="http://schemas.openxmlformats.org/wordprocessingml/2006/main" xmlns:w10="urn:schemas-microsoft-com:office:word" xmlns:wp="http://schemas.openxmlformats.org/drawingml/2006/wordprocessingDrawing" xmlns:wp14="http://schemas.microsoft.com/office/word/2010/wordprocessingDrawing" xmlns:v="urn:schemas-microsoft-com:vml" xmlns:m="http://schemas.openxmlformats.org/officeDocument/2006/math" xmlns:oel="http://schemas.microsoft.com/office/2019/extlst" xmlns:o="urn:schemas-microsoft-com:office:office" xmlns:am3d="http://schemas.microsoft.com/office/drawing/2017/model3d" xmlns:aink="http://schemas.microsoft.com/office/drawing/2016/ink" xmlns:mc="http://schemas.openxmlformats.org/markup-compatibility/2006" xmlns:cx8="http://schemas.microsoft.com/office/drawing/2016/5/14/chartex" xmlns:cx7="http://schemas.microsoft.com/office/drawing/2016/5/13/chartex" xmlns:cx6="http://schemas.microsoft.com/office/drawing/2016/5/12/chartex" xmlns:cx5="http://schemas.microsoft.com/office/drawing/2016/5/11/chartex" xmlns:cx4="http://schemas.microsoft.com/office/drawing/2016/5/10/chartex" xmlns:cx3="http://schemas.microsoft.com/office/drawing/2016/5/9/chartex" xmlns:cx2="http://schemas.microsoft.com/office/drawing/2015/10/21/chartex" xmlns:cx1="http://schemas.microsoft.com/office/drawing/2015/9/8/chartex" xmlns:cx="http://schemas.microsoft.com/office/drawing/2014/chartex" xmlns:wpc="http://schemas.microsoft.com/office/word/2010/wordprocessingCanvas" xmlns="" id="{B779C335-4635-9AC3-C1D9-80B4E75AF8F3}"/>
+                <a16:creationId xmlns:a16="http://schemas.microsoft.com/office/drawing/2014/main" id="{B779C335-4635-9AC3-C1D9-80B4E75AF8F3}"/>
               </a:ext>
             </a:extLst>
           </p:cNvPr>
@@ -19627,7 +22281,7 @@
           <p:cNvPr id="23" name="TextBox 13">
             <a:extLst>
               <a:ext uri="{FF2B5EF4-FFF2-40B4-BE49-F238E27FC236}">
-                <a16:creationId xmlns:lc="http://schemas.openxmlformats.org/drawingml/2006/lockedCanvas" xmlns:a16="http://schemas.microsoft.com/office/drawing/2014/main" xmlns:wps="http://schemas.microsoft.com/office/word/2010/wordprocessingShape" xmlns:wne="http://schemas.microsoft.com/office/word/2006/wordml" xmlns:wpi="http://schemas.microsoft.com/office/word/2010/wordprocessingInk" xmlns:wpg="http://schemas.microsoft.com/office/word/2010/wordprocessingGroup" xmlns:w16se="http://schemas.microsoft.com/office/word/2015/wordml/symex" xmlns:w16sdtfl="http://schemas.microsoft.com/office/word/2024/wordml/sdtformatlock" xmlns:w16sdtdh="http://schemas.microsoft.com/office/word/2020/wordml/sdtdatahash" xmlns:w16du="http://schemas.microsoft.com/office/word/2023/wordml/word16du" xmlns:w16="http://schemas.microsoft.com/office/word/2018/wordml" xmlns:w16cid="http://schemas.microsoft.com/office/word/2016/wordml/cid" xmlns:w16cex="http://schemas.microsoft.com/office/word/2018/wordml/cex" xmlns:w15="http://schemas.microsoft.com/office/word/2012/wordml" xmlns:w14="http://schemas.microsoft.com/office/word/2010/wordml" xmlns:w="http://schemas.openxmlformats.org/wordprocessingml/2006/main" xmlns:w10="urn:schemas-microsoft-com:office:word" xmlns:wp="http://schemas.openxmlformats.org/drawingml/2006/wordprocessingDrawing" xmlns:wp14="http://schemas.microsoft.com/office/word/2010/wordprocessingDrawing" xmlns:v="urn:schemas-microsoft-com:vml" xmlns:m="http://schemas.openxmlformats.org/officeDocument/2006/math" xmlns:oel="http://schemas.microsoft.com/office/2019/extlst" xmlns:o="urn:schemas-microsoft-com:office:office" xmlns:am3d="http://schemas.microsoft.com/office/drawing/2017/model3d" xmlns:aink="http://schemas.microsoft.com/office/drawing/2016/ink" xmlns:mc="http://schemas.openxmlformats.org/markup-compatibility/2006" xmlns:cx8="http://schemas.microsoft.com/office/drawing/2016/5/14/chartex" xmlns:cx7="http://schemas.microsoft.com/office/drawing/2016/5/13/chartex" xmlns:cx6="http://schemas.microsoft.com/office/drawing/2016/5/12/chartex" xmlns:cx5="http://schemas.microsoft.com/office/drawing/2016/5/11/chartex" xmlns:cx4="http://schemas.microsoft.com/office/drawing/2016/5/10/chartex" xmlns:cx3="http://schemas.microsoft.com/office/drawing/2016/5/9/chartex" xmlns:cx2="http://schemas.microsoft.com/office/drawing/2015/10/21/chartex" xmlns:cx1="http://schemas.microsoft.com/office/drawing/2015/9/8/chartex" xmlns:cx="http://schemas.microsoft.com/office/drawing/2014/chartex" xmlns:wpc="http://schemas.microsoft.com/office/word/2010/wordprocessingCanvas" xmlns="" id="{C9838C68-051B-AF68-C866-16F0D59F4032}"/>
+                <a16:creationId xmlns:a16="http://schemas.microsoft.com/office/drawing/2014/main" id="{C9838C68-051B-AF68-C866-16F0D59F4032}"/>
               </a:ext>
             </a:extLst>
           </p:cNvPr>
@@ -19710,7 +22364,7 @@
           <p:cNvPr id="24" name="Straight Arrow Connector 23">
             <a:extLst>
               <a:ext uri="{FF2B5EF4-FFF2-40B4-BE49-F238E27FC236}">
-                <a16:creationId xmlns:lc="http://schemas.openxmlformats.org/drawingml/2006/lockedCanvas" xmlns:a16="http://schemas.microsoft.com/office/drawing/2014/main" xmlns:wps="http://schemas.microsoft.com/office/word/2010/wordprocessingShape" xmlns:wne="http://schemas.microsoft.com/office/word/2006/wordml" xmlns:wpi="http://schemas.microsoft.com/office/word/2010/wordprocessingInk" xmlns:wpg="http://schemas.microsoft.com/office/word/2010/wordprocessingGroup" xmlns:w16se="http://schemas.microsoft.com/office/word/2015/wordml/symex" xmlns:w16sdtfl="http://schemas.microsoft.com/office/word/2024/wordml/sdtformatlock" xmlns:w16sdtdh="http://schemas.microsoft.com/office/word/2020/wordml/sdtdatahash" xmlns:w16du="http://schemas.microsoft.com/office/word/2023/wordml/word16du" xmlns:w16="http://schemas.microsoft.com/office/word/2018/wordml" xmlns:w16cid="http://schemas.microsoft.com/office/word/2016/wordml/cid" xmlns:w16cex="http://schemas.microsoft.com/office/word/2018/wordml/cex" xmlns:w15="http://schemas.microsoft.com/office/word/2012/wordml" xmlns:w14="http://schemas.microsoft.com/office/word/2010/wordml" xmlns:w="http://schemas.openxmlformats.org/wordprocessingml/2006/main" xmlns:w10="urn:schemas-microsoft-com:office:word" xmlns:wp="http://schemas.openxmlformats.org/drawingml/2006/wordprocessingDrawing" xmlns:wp14="http://schemas.microsoft.com/office/word/2010/wordprocessingDrawing" xmlns:v="urn:schemas-microsoft-com:vml" xmlns:m="http://schemas.openxmlformats.org/officeDocument/2006/math" xmlns:oel="http://schemas.microsoft.com/office/2019/extlst" xmlns:o="urn:schemas-microsoft-com:office:office" xmlns:am3d="http://schemas.microsoft.com/office/drawing/2017/model3d" xmlns:aink="http://schemas.microsoft.com/office/drawing/2016/ink" xmlns:mc="http://schemas.openxmlformats.org/markup-compatibility/2006" xmlns:cx8="http://schemas.microsoft.com/office/drawing/2016/5/14/chartex" xmlns:cx7="http://schemas.microsoft.com/office/drawing/2016/5/13/chartex" xmlns:cx6="http://schemas.microsoft.com/office/drawing/2016/5/12/chartex" xmlns:cx5="http://schemas.microsoft.com/office/drawing/2016/5/11/chartex" xmlns:cx4="http://schemas.microsoft.com/office/drawing/2016/5/10/chartex" xmlns:cx3="http://schemas.microsoft.com/office/drawing/2016/5/9/chartex" xmlns:cx2="http://schemas.microsoft.com/office/drawing/2015/10/21/chartex" xmlns:cx1="http://schemas.microsoft.com/office/drawing/2015/9/8/chartex" xmlns:cx="http://schemas.microsoft.com/office/drawing/2014/chartex" xmlns:wpc="http://schemas.microsoft.com/office/word/2010/wordprocessingCanvas" xmlns="" id="{55DC1B61-9240-CB09-EE55-5BD0B0B06BAD}"/>
+                <a16:creationId xmlns:a16="http://schemas.microsoft.com/office/drawing/2014/main" id="{55DC1B61-9240-CB09-EE55-5BD0B0B06BAD}"/>
               </a:ext>
             </a:extLst>
           </p:cNvPr>
@@ -19751,7 +22405,7 @@
           <p:cNvPr id="40" name="Straight Arrow Connector 39">
             <a:extLst>
               <a:ext uri="{FF2B5EF4-FFF2-40B4-BE49-F238E27FC236}">
-                <a16:creationId xmlns:lc="http://schemas.openxmlformats.org/drawingml/2006/lockedCanvas" xmlns:a16="http://schemas.microsoft.com/office/drawing/2014/main" xmlns:wps="http://schemas.microsoft.com/office/word/2010/wordprocessingShape" xmlns:wne="http://schemas.microsoft.com/office/word/2006/wordml" xmlns:wpi="http://schemas.microsoft.com/office/word/2010/wordprocessingInk" xmlns:wpg="http://schemas.microsoft.com/office/word/2010/wordprocessingGroup" xmlns:w16se="http://schemas.microsoft.com/office/word/2015/wordml/symex" xmlns:w16sdtfl="http://schemas.microsoft.com/office/word/2024/wordml/sdtformatlock" xmlns:w16sdtdh="http://schemas.microsoft.com/office/word/2020/wordml/sdtdatahash" xmlns:w16du="http://schemas.microsoft.com/office/word/2023/wordml/word16du" xmlns:w16="http://schemas.microsoft.com/office/word/2018/wordml" xmlns:w16cid="http://schemas.microsoft.com/office/word/2016/wordml/cid" xmlns:w16cex="http://schemas.microsoft.com/office/word/2018/wordml/cex" xmlns:w15="http://schemas.microsoft.com/office/word/2012/wordml" xmlns:w14="http://schemas.microsoft.com/office/word/2010/wordml" xmlns:w="http://schemas.openxmlformats.org/wordprocessingml/2006/main" xmlns:w10="urn:schemas-microsoft-com:office:word" xmlns:wp="http://schemas.openxmlformats.org/drawingml/2006/wordprocessingDrawing" xmlns:wp14="http://schemas.microsoft.com/office/word/2010/wordprocessingDrawing" xmlns:v="urn:schemas-microsoft-com:vml" xmlns:m="http://schemas.openxmlformats.org/officeDocument/2006/math" xmlns:oel="http://schemas.microsoft.com/office/2019/extlst" xmlns:o="urn:schemas-microsoft-com:office:office" xmlns:am3d="http://schemas.microsoft.com/office/drawing/2017/model3d" xmlns:aink="http://schemas.microsoft.com/office/drawing/2016/ink" xmlns:mc="http://schemas.openxmlformats.org/markup-compatibility/2006" xmlns:cx8="http://schemas.microsoft.com/office/drawing/2016/5/14/chartex" xmlns:cx7="http://schemas.microsoft.com/office/drawing/2016/5/13/chartex" xmlns:cx6="http://schemas.microsoft.com/office/drawing/2016/5/12/chartex" xmlns:cx5="http://schemas.microsoft.com/office/drawing/2016/5/11/chartex" xmlns:cx4="http://schemas.microsoft.com/office/drawing/2016/5/10/chartex" xmlns:cx3="http://schemas.microsoft.com/office/drawing/2016/5/9/chartex" xmlns:cx2="http://schemas.microsoft.com/office/drawing/2015/10/21/chartex" xmlns:cx1="http://schemas.microsoft.com/office/drawing/2015/9/8/chartex" xmlns:cx="http://schemas.microsoft.com/office/drawing/2014/chartex" xmlns:wpc="http://schemas.microsoft.com/office/word/2010/wordprocessingCanvas" xmlns="" id="{E1513A41-752C-419A-7662-5071D3FE38C3}"/>
+                <a16:creationId xmlns:a16="http://schemas.microsoft.com/office/drawing/2014/main" id="{E1513A41-752C-419A-7662-5071D3FE38C3}"/>
               </a:ext>
             </a:extLst>
           </p:cNvPr>
@@ -19792,7 +22446,7 @@
           <p:cNvPr id="42" name="Straight Connector 41">
             <a:extLst>
               <a:ext uri="{FF2B5EF4-FFF2-40B4-BE49-F238E27FC236}">
-                <a16:creationId xmlns:lc="http://schemas.openxmlformats.org/drawingml/2006/lockedCanvas" xmlns:a16="http://schemas.microsoft.com/office/drawing/2014/main" xmlns:wps="http://schemas.microsoft.com/office/word/2010/wordprocessingShape" xmlns:wne="http://schemas.microsoft.com/office/word/2006/wordml" xmlns:wpi="http://schemas.microsoft.com/office/word/2010/wordprocessingInk" xmlns:wpg="http://schemas.microsoft.com/office/word/2010/wordprocessingGroup" xmlns:w16se="http://schemas.microsoft.com/office/word/2015/wordml/symex" xmlns:w16sdtfl="http://schemas.microsoft.com/office/word/2024/wordml/sdtformatlock" xmlns:w16sdtdh="http://schemas.microsoft.com/office/word/2020/wordml/sdtdatahash" xmlns:w16du="http://schemas.microsoft.com/office/word/2023/wordml/word16du" xmlns:w16="http://schemas.microsoft.com/office/word/2018/wordml" xmlns:w16cid="http://schemas.microsoft.com/office/word/2016/wordml/cid" xmlns:w16cex="http://schemas.microsoft.com/office/word/2018/wordml/cex" xmlns:w15="http://schemas.microsoft.com/office/word/2012/wordml" xmlns:w14="http://schemas.microsoft.com/office/word/2010/wordml" xmlns:w="http://schemas.openxmlformats.org/wordprocessingml/2006/main" xmlns:w10="urn:schemas-microsoft-com:office:word" xmlns:wp="http://schemas.openxmlformats.org/drawingml/2006/wordprocessingDrawing" xmlns:wp14="http://schemas.microsoft.com/office/word/2010/wordprocessingDrawing" xmlns:v="urn:schemas-microsoft-com:vml" xmlns:m="http://schemas.openxmlformats.org/officeDocument/2006/math" xmlns:oel="http://schemas.microsoft.com/office/2019/extlst" xmlns:o="urn:schemas-microsoft-com:office:office" xmlns:am3d="http://schemas.microsoft.com/office/drawing/2017/model3d" xmlns:aink="http://schemas.microsoft.com/office/drawing/2016/ink" xmlns:mc="http://schemas.openxmlformats.org/markup-compatibility/2006" xmlns:cx8="http://schemas.microsoft.com/office/drawing/2016/5/14/chartex" xmlns:cx7="http://schemas.microsoft.com/office/drawing/2016/5/13/chartex" xmlns:cx6="http://schemas.microsoft.com/office/drawing/2016/5/12/chartex" xmlns:cx5="http://schemas.microsoft.com/office/drawing/2016/5/11/chartex" xmlns:cx4="http://schemas.microsoft.com/office/drawing/2016/5/10/chartex" xmlns:cx3="http://schemas.microsoft.com/office/drawing/2016/5/9/chartex" xmlns:cx2="http://schemas.microsoft.com/office/drawing/2015/10/21/chartex" xmlns:cx1="http://schemas.microsoft.com/office/drawing/2015/9/8/chartex" xmlns:cx="http://schemas.microsoft.com/office/drawing/2014/chartex" xmlns:wpc="http://schemas.microsoft.com/office/word/2010/wordprocessingCanvas" xmlns="" id="{2E8D2C6C-E662-85B3-B077-6AD7F17FE6DC}"/>
+                <a16:creationId xmlns:a16="http://schemas.microsoft.com/office/drawing/2014/main" id="{2E8D2C6C-E662-85B3-B077-6AD7F17FE6DC}"/>
               </a:ext>
             </a:extLst>
           </p:cNvPr>
@@ -19830,7 +22484,7 @@
           <p:cNvPr id="26" name="TextBox 26">
             <a:extLst>
               <a:ext uri="{FF2B5EF4-FFF2-40B4-BE49-F238E27FC236}">
-                <a16:creationId xmlns:lc="http://schemas.openxmlformats.org/drawingml/2006/lockedCanvas" xmlns:a16="http://schemas.microsoft.com/office/drawing/2014/main" xmlns:wps="http://schemas.microsoft.com/office/word/2010/wordprocessingShape" xmlns:wne="http://schemas.microsoft.com/office/word/2006/wordml" xmlns:wpi="http://schemas.microsoft.com/office/word/2010/wordprocessingInk" xmlns:wpg="http://schemas.microsoft.com/office/word/2010/wordprocessingGroup" xmlns:w16se="http://schemas.microsoft.com/office/word/2015/wordml/symex" xmlns:w16sdtfl="http://schemas.microsoft.com/office/word/2024/wordml/sdtformatlock" xmlns:w16sdtdh="http://schemas.microsoft.com/office/word/2020/wordml/sdtdatahash" xmlns:w16du="http://schemas.microsoft.com/office/word/2023/wordml/word16du" xmlns:w16="http://schemas.microsoft.com/office/word/2018/wordml" xmlns:w16cid="http://schemas.microsoft.com/office/word/2016/wordml/cid" xmlns:w16cex="http://schemas.microsoft.com/office/word/2018/wordml/cex" xmlns:w15="http://schemas.microsoft.com/office/word/2012/wordml" xmlns:w14="http://schemas.microsoft.com/office/word/2010/wordml" xmlns:w="http://schemas.openxmlformats.org/wordprocessingml/2006/main" xmlns:w10="urn:schemas-microsoft-com:office:word" xmlns:wp="http://schemas.openxmlformats.org/drawingml/2006/wordprocessingDrawing" xmlns:wp14="http://schemas.microsoft.com/office/word/2010/wordprocessingDrawing" xmlns:v="urn:schemas-microsoft-com:vml" xmlns:m="http://schemas.openxmlformats.org/officeDocument/2006/math" xmlns:oel="http://schemas.microsoft.com/office/2019/extlst" xmlns:o="urn:schemas-microsoft-com:office:office" xmlns:am3d="http://schemas.microsoft.com/office/drawing/2017/model3d" xmlns:aink="http://schemas.microsoft.com/office/drawing/2016/ink" xmlns:mc="http://schemas.openxmlformats.org/markup-compatibility/2006" xmlns:cx8="http://schemas.microsoft.com/office/drawing/2016/5/14/chartex" xmlns:cx7="http://schemas.microsoft.com/office/drawing/2016/5/13/chartex" xmlns:cx6="http://schemas.microsoft.com/office/drawing/2016/5/12/chartex" xmlns:cx5="http://schemas.microsoft.com/office/drawing/2016/5/11/chartex" xmlns:cx4="http://schemas.microsoft.com/office/drawing/2016/5/10/chartex" xmlns:cx3="http://schemas.microsoft.com/office/drawing/2016/5/9/chartex" xmlns:cx2="http://schemas.microsoft.com/office/drawing/2015/10/21/chartex" xmlns:cx1="http://schemas.microsoft.com/office/drawing/2015/9/8/chartex" xmlns:cx="http://schemas.microsoft.com/office/drawing/2014/chartex" xmlns:wpc="http://schemas.microsoft.com/office/word/2010/wordprocessingCanvas" xmlns="" id="{25C0153D-E433-759E-52D5-C249B4D114BA}"/>
+                <a16:creationId xmlns:a16="http://schemas.microsoft.com/office/drawing/2014/main" id="{25C0153D-E433-759E-52D5-C249B4D114BA}"/>
               </a:ext>
             </a:extLst>
           </p:cNvPr>
@@ -19913,7 +22567,7 @@
           <p:cNvPr id="27" name="TextBox 27">
             <a:extLst>
               <a:ext uri="{FF2B5EF4-FFF2-40B4-BE49-F238E27FC236}">
-                <a16:creationId xmlns:lc="http://schemas.openxmlformats.org/drawingml/2006/lockedCanvas" xmlns:a16="http://schemas.microsoft.com/office/drawing/2014/main" xmlns:wps="http://schemas.microsoft.com/office/word/2010/wordprocessingShape" xmlns:wne="http://schemas.microsoft.com/office/word/2006/wordml" xmlns:wpi="http://schemas.microsoft.com/office/word/2010/wordprocessingInk" xmlns:wpg="http://schemas.microsoft.com/office/word/2010/wordprocessingGroup" xmlns:w16se="http://schemas.microsoft.com/office/word/2015/wordml/symex" xmlns:w16sdtfl="http://schemas.microsoft.com/office/word/2024/wordml/sdtformatlock" xmlns:w16sdtdh="http://schemas.microsoft.com/office/word/2020/wordml/sdtdatahash" xmlns:w16du="http://schemas.microsoft.com/office/word/2023/wordml/word16du" xmlns:w16="http://schemas.microsoft.com/office/word/2018/wordml" xmlns:w16cid="http://schemas.microsoft.com/office/word/2016/wordml/cid" xmlns:w16cex="http://schemas.microsoft.com/office/word/2018/wordml/cex" xmlns:w15="http://schemas.microsoft.com/office/word/2012/wordml" xmlns:w14="http://schemas.microsoft.com/office/word/2010/wordml" xmlns:w="http://schemas.openxmlformats.org/wordprocessingml/2006/main" xmlns:w10="urn:schemas-microsoft-com:office:word" xmlns:wp="http://schemas.openxmlformats.org/drawingml/2006/wordprocessingDrawing" xmlns:wp14="http://schemas.microsoft.com/office/word/2010/wordprocessingDrawing" xmlns:v="urn:schemas-microsoft-com:vml" xmlns:m="http://schemas.openxmlformats.org/officeDocument/2006/math" xmlns:oel="http://schemas.microsoft.com/office/2019/extlst" xmlns:o="urn:schemas-microsoft-com:office:office" xmlns:am3d="http://schemas.microsoft.com/office/drawing/2017/model3d" xmlns:aink="http://schemas.microsoft.com/office/drawing/2016/ink" xmlns:mc="http://schemas.openxmlformats.org/markup-compatibility/2006" xmlns:cx8="http://schemas.microsoft.com/office/drawing/2016/5/14/chartex" xmlns:cx7="http://schemas.microsoft.com/office/drawing/2016/5/13/chartex" xmlns:cx6="http://schemas.microsoft.com/office/drawing/2016/5/12/chartex" xmlns:cx5="http://schemas.microsoft.com/office/drawing/2016/5/11/chartex" xmlns:cx4="http://schemas.microsoft.com/office/drawing/2016/5/10/chartex" xmlns:cx3="http://schemas.microsoft.com/office/drawing/2016/5/9/chartex" xmlns:cx2="http://schemas.microsoft.com/office/drawing/2015/10/21/chartex" xmlns:cx1="http://schemas.microsoft.com/office/drawing/2015/9/8/chartex" xmlns:cx="http://schemas.microsoft.com/office/drawing/2014/chartex" xmlns:wpc="http://schemas.microsoft.com/office/word/2010/wordprocessingCanvas" xmlns="" id="{E8520EFC-0FF4-8884-4695-9A04F2120B07}"/>
+                <a16:creationId xmlns:a16="http://schemas.microsoft.com/office/drawing/2014/main" id="{E8520EFC-0FF4-8884-4695-9A04F2120B07}"/>
               </a:ext>
             </a:extLst>
           </p:cNvPr>
@@ -19996,7 +22650,7 @@
           <p:cNvPr id="28" name="TextBox 28">
             <a:extLst>
               <a:ext uri="{FF2B5EF4-FFF2-40B4-BE49-F238E27FC236}">
-                <a16:creationId xmlns:lc="http://schemas.openxmlformats.org/drawingml/2006/lockedCanvas" xmlns:a16="http://schemas.microsoft.com/office/drawing/2014/main" xmlns:wps="http://schemas.microsoft.com/office/word/2010/wordprocessingShape" xmlns:wne="http://schemas.microsoft.com/office/word/2006/wordml" xmlns:wpi="http://schemas.microsoft.com/office/word/2010/wordprocessingInk" xmlns:wpg="http://schemas.microsoft.com/office/word/2010/wordprocessingGroup" xmlns:w16se="http://schemas.microsoft.com/office/word/2015/wordml/symex" xmlns:w16sdtfl="http://schemas.microsoft.com/office/word/2024/wordml/sdtformatlock" xmlns:w16sdtdh="http://schemas.microsoft.com/office/word/2020/wordml/sdtdatahash" xmlns:w16du="http://schemas.microsoft.com/office/word/2023/wordml/word16du" xmlns:w16="http://schemas.microsoft.com/office/word/2018/wordml" xmlns:w16cid="http://schemas.microsoft.com/office/word/2016/wordml/cid" xmlns:w16cex="http://schemas.microsoft.com/office/word/2018/wordml/cex" xmlns:w15="http://schemas.microsoft.com/office/word/2012/wordml" xmlns:w14="http://schemas.microsoft.com/office/word/2010/wordml" xmlns:w="http://schemas.openxmlformats.org/wordprocessingml/2006/main" xmlns:w10="urn:schemas-microsoft-com:office:word" xmlns:wp="http://schemas.openxmlformats.org/drawingml/2006/wordprocessingDrawing" xmlns:wp14="http://schemas.microsoft.com/office/word/2010/wordprocessingDrawing" xmlns:v="urn:schemas-microsoft-com:vml" xmlns:m="http://schemas.openxmlformats.org/officeDocument/2006/math" xmlns:oel="http://schemas.microsoft.com/office/2019/extlst" xmlns:o="urn:schemas-microsoft-com:office:office" xmlns:am3d="http://schemas.microsoft.com/office/drawing/2017/model3d" xmlns:aink="http://schemas.microsoft.com/office/drawing/2016/ink" xmlns:mc="http://schemas.openxmlformats.org/markup-compatibility/2006" xmlns:cx8="http://schemas.microsoft.com/office/drawing/2016/5/14/chartex" xmlns:cx7="http://schemas.microsoft.com/office/drawing/2016/5/13/chartex" xmlns:cx6="http://schemas.microsoft.com/office/drawing/2016/5/12/chartex" xmlns:cx5="http://schemas.microsoft.com/office/drawing/2016/5/11/chartex" xmlns:cx4="http://schemas.microsoft.com/office/drawing/2016/5/10/chartex" xmlns:cx3="http://schemas.microsoft.com/office/drawing/2016/5/9/chartex" xmlns:cx2="http://schemas.microsoft.com/office/drawing/2015/10/21/chartex" xmlns:cx1="http://schemas.microsoft.com/office/drawing/2015/9/8/chartex" xmlns:cx="http://schemas.microsoft.com/office/drawing/2014/chartex" xmlns:wpc="http://schemas.microsoft.com/office/word/2010/wordprocessingCanvas" xmlns="" id="{25C9F8EB-9741-4C4B-A978-B63D06ADCA24}"/>
+                <a16:creationId xmlns:a16="http://schemas.microsoft.com/office/drawing/2014/main" id="{25C9F8EB-9741-4C4B-A978-B63D06ADCA24}"/>
               </a:ext>
             </a:extLst>
           </p:cNvPr>
@@ -20079,7 +22733,7 @@
           <p:cNvPr id="36" name="Straight Arrow Connector 35">
             <a:extLst>
               <a:ext uri="{FF2B5EF4-FFF2-40B4-BE49-F238E27FC236}">
-                <a16:creationId xmlns:lc="http://schemas.openxmlformats.org/drawingml/2006/lockedCanvas" xmlns:a16="http://schemas.microsoft.com/office/drawing/2014/main" xmlns:wps="http://schemas.microsoft.com/office/word/2010/wordprocessingShape" xmlns:wne="http://schemas.microsoft.com/office/word/2006/wordml" xmlns:wpi="http://schemas.microsoft.com/office/word/2010/wordprocessingInk" xmlns:wpg="http://schemas.microsoft.com/office/word/2010/wordprocessingGroup" xmlns:w16se="http://schemas.microsoft.com/office/word/2015/wordml/symex" xmlns:w16sdtfl="http://schemas.microsoft.com/office/word/2024/wordml/sdtformatlock" xmlns:w16sdtdh="http://schemas.microsoft.com/office/word/2020/wordml/sdtdatahash" xmlns:w16du="http://schemas.microsoft.com/office/word/2023/wordml/word16du" xmlns:w16="http://schemas.microsoft.com/office/word/2018/wordml" xmlns:w16cid="http://schemas.microsoft.com/office/word/2016/wordml/cid" xmlns:w16cex="http://schemas.microsoft.com/office/word/2018/wordml/cex" xmlns:w15="http://schemas.microsoft.com/office/word/2012/wordml" xmlns:w14="http://schemas.microsoft.com/office/word/2010/wordml" xmlns:w="http://schemas.openxmlformats.org/wordprocessingml/2006/main" xmlns:w10="urn:schemas-microsoft-com:office:word" xmlns:wp="http://schemas.openxmlformats.org/drawingml/2006/wordprocessingDrawing" xmlns:wp14="http://schemas.microsoft.com/office/word/2010/wordprocessingDrawing" xmlns:v="urn:schemas-microsoft-com:vml" xmlns:m="http://schemas.openxmlformats.org/officeDocument/2006/math" xmlns:oel="http://schemas.microsoft.com/office/2019/extlst" xmlns:o="urn:schemas-microsoft-com:office:office" xmlns:am3d="http://schemas.microsoft.com/office/drawing/2017/model3d" xmlns:aink="http://schemas.microsoft.com/office/drawing/2016/ink" xmlns:mc="http://schemas.openxmlformats.org/markup-compatibility/2006" xmlns:cx8="http://schemas.microsoft.com/office/drawing/2016/5/14/chartex" xmlns:cx7="http://schemas.microsoft.com/office/drawing/2016/5/13/chartex" xmlns:cx6="http://schemas.microsoft.com/office/drawing/2016/5/12/chartex" xmlns:cx5="http://schemas.microsoft.com/office/drawing/2016/5/11/chartex" xmlns:cx4="http://schemas.microsoft.com/office/drawing/2016/5/10/chartex" xmlns:cx3="http://schemas.microsoft.com/office/drawing/2016/5/9/chartex" xmlns:cx2="http://schemas.microsoft.com/office/drawing/2015/10/21/chartex" xmlns:cx1="http://schemas.microsoft.com/office/drawing/2015/9/8/chartex" xmlns:cx="http://schemas.microsoft.com/office/drawing/2014/chartex" xmlns:wpc="http://schemas.microsoft.com/office/word/2010/wordprocessingCanvas" xmlns="" id="{B698201A-64DE-3299-5C9A-7C1926A7FAD2}"/>
+                <a16:creationId xmlns:a16="http://schemas.microsoft.com/office/drawing/2014/main" id="{B698201A-64DE-3299-5C9A-7C1926A7FAD2}"/>
               </a:ext>
             </a:extLst>
           </p:cNvPr>
@@ -20120,7 +22774,7 @@
           <p:cNvPr id="38" name="Straight Connector 37">
             <a:extLst>
               <a:ext uri="{FF2B5EF4-FFF2-40B4-BE49-F238E27FC236}">
-                <a16:creationId xmlns:lc="http://schemas.openxmlformats.org/drawingml/2006/lockedCanvas" xmlns:a16="http://schemas.microsoft.com/office/drawing/2014/main" xmlns:wps="http://schemas.microsoft.com/office/word/2010/wordprocessingShape" xmlns:wne="http://schemas.microsoft.com/office/word/2006/wordml" xmlns:wpi="http://schemas.microsoft.com/office/word/2010/wordprocessingInk" xmlns:wpg="http://schemas.microsoft.com/office/word/2010/wordprocessingGroup" xmlns:w16se="http://schemas.microsoft.com/office/word/2015/wordml/symex" xmlns:w16sdtfl="http://schemas.microsoft.com/office/word/2024/wordml/sdtformatlock" xmlns:w16sdtdh="http://schemas.microsoft.com/office/word/2020/wordml/sdtdatahash" xmlns:w16du="http://schemas.microsoft.com/office/word/2023/wordml/word16du" xmlns:w16="http://schemas.microsoft.com/office/word/2018/wordml" xmlns:w16cid="http://schemas.microsoft.com/office/word/2016/wordml/cid" xmlns:w16cex="http://schemas.microsoft.com/office/word/2018/wordml/cex" xmlns:w15="http://schemas.microsoft.com/office/word/2012/wordml" xmlns:w14="http://schemas.microsoft.com/office/word/2010/wordml" xmlns:w="http://schemas.openxmlformats.org/wordprocessingml/2006/main" xmlns:w10="urn:schemas-microsoft-com:office:word" xmlns:wp="http://schemas.openxmlformats.org/drawingml/2006/wordprocessingDrawing" xmlns:wp14="http://schemas.microsoft.com/office/word/2010/wordprocessingDrawing" xmlns:v="urn:schemas-microsoft-com:vml" xmlns:m="http://schemas.openxmlformats.org/officeDocument/2006/math" xmlns:oel="http://schemas.microsoft.com/office/2019/extlst" xmlns:o="urn:schemas-microsoft-com:office:office" xmlns:am3d="http://schemas.microsoft.com/office/drawing/2017/model3d" xmlns:aink="http://schemas.microsoft.com/office/drawing/2016/ink" xmlns:mc="http://schemas.openxmlformats.org/markup-compatibility/2006" xmlns:cx8="http://schemas.microsoft.com/office/drawing/2016/5/14/chartex" xmlns:cx7="http://schemas.microsoft.com/office/drawing/2016/5/13/chartex" xmlns:cx6="http://schemas.microsoft.com/office/drawing/2016/5/12/chartex" xmlns:cx5="http://schemas.microsoft.com/office/drawing/2016/5/11/chartex" xmlns:cx4="http://schemas.microsoft.com/office/drawing/2016/5/10/chartex" xmlns:cx3="http://schemas.microsoft.com/office/drawing/2016/5/9/chartex" xmlns:cx2="http://schemas.microsoft.com/office/drawing/2015/10/21/chartex" xmlns:cx1="http://schemas.microsoft.com/office/drawing/2015/9/8/chartex" xmlns:cx="http://schemas.microsoft.com/office/drawing/2014/chartex" xmlns:wpc="http://schemas.microsoft.com/office/word/2010/wordprocessingCanvas" xmlns="" id="{E4197C54-B347-679C-40EB-472BA244AC8A}"/>
+                <a16:creationId xmlns:a16="http://schemas.microsoft.com/office/drawing/2014/main" id="{E4197C54-B347-679C-40EB-472BA244AC8A}"/>
               </a:ext>
             </a:extLst>
           </p:cNvPr>
@@ -20158,7 +22812,7 @@
           <p:cNvPr id="39" name="Oval 38">
             <a:extLst>
               <a:ext uri="{FF2B5EF4-FFF2-40B4-BE49-F238E27FC236}">
-                <a16:creationId xmlns:lc="http://schemas.openxmlformats.org/drawingml/2006/lockedCanvas" xmlns:a16="http://schemas.microsoft.com/office/drawing/2014/main" xmlns:wps="http://schemas.microsoft.com/office/word/2010/wordprocessingShape" xmlns:wne="http://schemas.microsoft.com/office/word/2006/wordml" xmlns:wpi="http://schemas.microsoft.com/office/word/2010/wordprocessingInk" xmlns:wpg="http://schemas.microsoft.com/office/word/2010/wordprocessingGroup" xmlns:w16se="http://schemas.microsoft.com/office/word/2015/wordml/symex" xmlns:w16sdtfl="http://schemas.microsoft.com/office/word/2024/wordml/sdtformatlock" xmlns:w16sdtdh="http://schemas.microsoft.com/office/word/2020/wordml/sdtdatahash" xmlns:w16du="http://schemas.microsoft.com/office/word/2023/wordml/word16du" xmlns:w16="http://schemas.microsoft.com/office/word/2018/wordml" xmlns:w16cid="http://schemas.microsoft.com/office/word/2016/wordml/cid" xmlns:w16cex="http://schemas.microsoft.com/office/word/2018/wordml/cex" xmlns:w15="http://schemas.microsoft.com/office/word/2012/wordml" xmlns:w14="http://schemas.microsoft.com/office/word/2010/wordml" xmlns:w="http://schemas.openxmlformats.org/wordprocessingml/2006/main" xmlns:w10="urn:schemas-microsoft-com:office:word" xmlns:wp="http://schemas.openxmlformats.org/drawingml/2006/wordprocessingDrawing" xmlns:wp14="http://schemas.microsoft.com/office/word/2010/wordprocessingDrawing" xmlns:v="urn:schemas-microsoft-com:vml" xmlns:m="http://schemas.openxmlformats.org/officeDocument/2006/math" xmlns:oel="http://schemas.microsoft.com/office/2019/extlst" xmlns:o="urn:schemas-microsoft-com:office:office" xmlns:am3d="http://schemas.microsoft.com/office/drawing/2017/model3d" xmlns:aink="http://schemas.microsoft.com/office/drawing/2016/ink" xmlns:mc="http://schemas.openxmlformats.org/markup-compatibility/2006" xmlns:cx8="http://schemas.microsoft.com/office/drawing/2016/5/14/chartex" xmlns:cx7="http://schemas.microsoft.com/office/drawing/2016/5/13/chartex" xmlns:cx6="http://schemas.microsoft.com/office/drawing/2016/5/12/chartex" xmlns:cx5="http://schemas.microsoft.com/office/drawing/2016/5/11/chartex" xmlns:cx4="http://schemas.microsoft.com/office/drawing/2016/5/10/chartex" xmlns:cx3="http://schemas.microsoft.com/office/drawing/2016/5/9/chartex" xmlns:cx2="http://schemas.microsoft.com/office/drawing/2015/10/21/chartex" xmlns:cx1="http://schemas.microsoft.com/office/drawing/2015/9/8/chartex" xmlns:cx="http://schemas.microsoft.com/office/drawing/2014/chartex" xmlns:wpc="http://schemas.microsoft.com/office/word/2010/wordprocessingCanvas" xmlns="" id="{CD58BD1C-B577-4843-C1E4-69AB2EA79106}"/>
+                <a16:creationId xmlns:a16="http://schemas.microsoft.com/office/drawing/2014/main" id="{CD58BD1C-B577-4843-C1E4-69AB2EA79106}"/>
               </a:ext>
             </a:extLst>
           </p:cNvPr>
@@ -20206,7 +22860,7 @@
           <p:cNvPr id="32" name="Straight Arrow Connector 31">
             <a:extLst>
               <a:ext uri="{FF2B5EF4-FFF2-40B4-BE49-F238E27FC236}">
-                <a16:creationId xmlns:lc="http://schemas.openxmlformats.org/drawingml/2006/lockedCanvas" xmlns:a16="http://schemas.microsoft.com/office/drawing/2014/main" xmlns:wps="http://schemas.microsoft.com/office/word/2010/wordprocessingShape" xmlns:wne="http://schemas.microsoft.com/office/word/2006/wordml" xmlns:wpi="http://schemas.microsoft.com/office/word/2010/wordprocessingInk" xmlns:wpg="http://schemas.microsoft.com/office/word/2010/wordprocessingGroup" xmlns:w16se="http://schemas.microsoft.com/office/word/2015/wordml/symex" xmlns:w16sdtfl="http://schemas.microsoft.com/office/word/2024/wordml/sdtformatlock" xmlns:w16sdtdh="http://schemas.microsoft.com/office/word/2020/wordml/sdtdatahash" xmlns:w16du="http://schemas.microsoft.com/office/word/2023/wordml/word16du" xmlns:w16="http://schemas.microsoft.com/office/word/2018/wordml" xmlns:w16cid="http://schemas.microsoft.com/office/word/2016/wordml/cid" xmlns:w16cex="http://schemas.microsoft.com/office/word/2018/wordml/cex" xmlns:w15="http://schemas.microsoft.com/office/word/2012/wordml" xmlns:w14="http://schemas.microsoft.com/office/word/2010/wordml" xmlns:w="http://schemas.openxmlformats.org/wordprocessingml/2006/main" xmlns:w10="urn:schemas-microsoft-com:office:word" xmlns:wp="http://schemas.openxmlformats.org/drawingml/2006/wordprocessingDrawing" xmlns:wp14="http://schemas.microsoft.com/office/word/2010/wordprocessingDrawing" xmlns:v="urn:schemas-microsoft-com:vml" xmlns:m="http://schemas.openxmlformats.org/officeDocument/2006/math" xmlns:oel="http://schemas.microsoft.com/office/2019/extlst" xmlns:o="urn:schemas-microsoft-com:office:office" xmlns:am3d="http://schemas.microsoft.com/office/drawing/2017/model3d" xmlns:aink="http://schemas.microsoft.com/office/drawing/2016/ink" xmlns:mc="http://schemas.openxmlformats.org/markup-compatibility/2006" xmlns:cx8="http://schemas.microsoft.com/office/drawing/2016/5/14/chartex" xmlns:cx7="http://schemas.microsoft.com/office/drawing/2016/5/13/chartex" xmlns:cx6="http://schemas.microsoft.com/office/drawing/2016/5/12/chartex" xmlns:cx5="http://schemas.microsoft.com/office/drawing/2016/5/11/chartex" xmlns:cx4="http://schemas.microsoft.com/office/drawing/2016/5/10/chartex" xmlns:cx3="http://schemas.microsoft.com/office/drawing/2016/5/9/chartex" xmlns:cx2="http://schemas.microsoft.com/office/drawing/2015/10/21/chartex" xmlns:cx1="http://schemas.microsoft.com/office/drawing/2015/9/8/chartex" xmlns:cx="http://schemas.microsoft.com/office/drawing/2014/chartex" xmlns:wpc="http://schemas.microsoft.com/office/word/2010/wordprocessingCanvas" xmlns="" id="{59115D69-AF70-47B5-FCE0-655CFF435418}"/>
+                <a16:creationId xmlns:a16="http://schemas.microsoft.com/office/drawing/2014/main" id="{59115D69-AF70-47B5-FCE0-655CFF435418}"/>
               </a:ext>
             </a:extLst>
           </p:cNvPr>
@@ -20247,7 +22901,7 @@
           <p:cNvPr id="34" name="Straight Connector 33">
             <a:extLst>
               <a:ext uri="{FF2B5EF4-FFF2-40B4-BE49-F238E27FC236}">
-                <a16:creationId xmlns:lc="http://schemas.openxmlformats.org/drawingml/2006/lockedCanvas" xmlns:a16="http://schemas.microsoft.com/office/drawing/2014/main" xmlns:wps="http://schemas.microsoft.com/office/word/2010/wordprocessingShape" xmlns:wne="http://schemas.microsoft.com/office/word/2006/wordml" xmlns:wpi="http://schemas.microsoft.com/office/word/2010/wordprocessingInk" xmlns:wpg="http://schemas.microsoft.com/office/word/2010/wordprocessingGroup" xmlns:w16se="http://schemas.microsoft.com/office/word/2015/wordml/symex" xmlns:w16sdtfl="http://schemas.microsoft.com/office/word/2024/wordml/sdtformatlock" xmlns:w16sdtdh="http://schemas.microsoft.com/office/word/2020/wordml/sdtdatahash" xmlns:w16du="http://schemas.microsoft.com/office/word/2023/wordml/word16du" xmlns:w16="http://schemas.microsoft.com/office/word/2018/wordml" xmlns:w16cid="http://schemas.microsoft.com/office/word/2016/wordml/cid" xmlns:w16cex="http://schemas.microsoft.com/office/word/2018/wordml/cex" xmlns:w15="http://schemas.microsoft.com/office/word/2012/wordml" xmlns:w14="http://schemas.microsoft.com/office/word/2010/wordml" xmlns:w="http://schemas.openxmlformats.org/wordprocessingml/2006/main" xmlns:w10="urn:schemas-microsoft-com:office:word" xmlns:wp="http://schemas.openxmlformats.org/drawingml/2006/wordprocessingDrawing" xmlns:wp14="http://schemas.microsoft.com/office/word/2010/wordprocessingDrawing" xmlns:v="urn:schemas-microsoft-com:vml" xmlns:m="http://schemas.openxmlformats.org/officeDocument/2006/math" xmlns:oel="http://schemas.microsoft.com/office/2019/extlst" xmlns:o="urn:schemas-microsoft-com:office:office" xmlns:am3d="http://schemas.microsoft.com/office/drawing/2017/model3d" xmlns:aink="http://schemas.microsoft.com/office/drawing/2016/ink" xmlns:mc="http://schemas.openxmlformats.org/markup-compatibility/2006" xmlns:cx8="http://schemas.microsoft.com/office/drawing/2016/5/14/chartex" xmlns:cx7="http://schemas.microsoft.com/office/drawing/2016/5/13/chartex" xmlns:cx6="http://schemas.microsoft.com/office/drawing/2016/5/12/chartex" xmlns:cx5="http://schemas.microsoft.com/office/drawing/2016/5/11/chartex" xmlns:cx4="http://schemas.microsoft.com/office/drawing/2016/5/10/chartex" xmlns:cx3="http://schemas.microsoft.com/office/drawing/2016/5/9/chartex" xmlns:cx2="http://schemas.microsoft.com/office/drawing/2015/10/21/chartex" xmlns:cx1="http://schemas.microsoft.com/office/drawing/2015/9/8/chartex" xmlns:cx="http://schemas.microsoft.com/office/drawing/2014/chartex" xmlns:wpc="http://schemas.microsoft.com/office/word/2010/wordprocessingCanvas" xmlns="" id="{72D33966-1DE9-9893-CE37-C889084D1EE9}"/>
+                <a16:creationId xmlns:a16="http://schemas.microsoft.com/office/drawing/2014/main" id="{72D33966-1DE9-9893-CE37-C889084D1EE9}"/>
               </a:ext>
             </a:extLst>
           </p:cNvPr>
@@ -20285,7 +22939,7 @@
           <p:cNvPr id="31" name="TextBox 49">
             <a:extLst>
               <a:ext uri="{FF2B5EF4-FFF2-40B4-BE49-F238E27FC236}">
-                <a16:creationId xmlns:lc="http://schemas.openxmlformats.org/drawingml/2006/lockedCanvas" xmlns:a16="http://schemas.microsoft.com/office/drawing/2014/main" xmlns:wps="http://schemas.microsoft.com/office/word/2010/wordprocessingShape" xmlns:wne="http://schemas.microsoft.com/office/word/2006/wordml" xmlns:wpi="http://schemas.microsoft.com/office/word/2010/wordprocessingInk" xmlns:wpg="http://schemas.microsoft.com/office/word/2010/wordprocessingGroup" xmlns:w16se="http://schemas.microsoft.com/office/word/2015/wordml/symex" xmlns:w16sdtfl="http://schemas.microsoft.com/office/word/2024/wordml/sdtformatlock" xmlns:w16sdtdh="http://schemas.microsoft.com/office/word/2020/wordml/sdtdatahash" xmlns:w16du="http://schemas.microsoft.com/office/word/2023/wordml/word16du" xmlns:w16="http://schemas.microsoft.com/office/word/2018/wordml" xmlns:w16cid="http://schemas.microsoft.com/office/word/2016/wordml/cid" xmlns:w16cex="http://schemas.microsoft.com/office/word/2018/wordml/cex" xmlns:w15="http://schemas.microsoft.com/office/word/2012/wordml" xmlns:w14="http://schemas.microsoft.com/office/word/2010/wordml" xmlns:w="http://schemas.openxmlformats.org/wordprocessingml/2006/main" xmlns:w10="urn:schemas-microsoft-com:office:word" xmlns:wp="http://schemas.openxmlformats.org/drawingml/2006/wordprocessingDrawing" xmlns:wp14="http://schemas.microsoft.com/office/word/2010/wordprocessingDrawing" xmlns:v="urn:schemas-microsoft-com:vml" xmlns:m="http://schemas.openxmlformats.org/officeDocument/2006/math" xmlns:oel="http://schemas.microsoft.com/office/2019/extlst" xmlns:o="urn:schemas-microsoft-com:office:office" xmlns:am3d="http://schemas.microsoft.com/office/drawing/2017/model3d" xmlns:aink="http://schemas.microsoft.com/office/drawing/2016/ink" xmlns:mc="http://schemas.openxmlformats.org/markup-compatibility/2006" xmlns:cx8="http://schemas.microsoft.com/office/drawing/2016/5/14/chartex" xmlns:cx7="http://schemas.microsoft.com/office/drawing/2016/5/13/chartex" xmlns:cx6="http://schemas.microsoft.com/office/drawing/2016/5/12/chartex" xmlns:cx5="http://schemas.microsoft.com/office/drawing/2016/5/11/chartex" xmlns:cx4="http://schemas.microsoft.com/office/drawing/2016/5/10/chartex" xmlns:cx3="http://schemas.microsoft.com/office/drawing/2016/5/9/chartex" xmlns:cx2="http://schemas.microsoft.com/office/drawing/2015/10/21/chartex" xmlns:cx1="http://schemas.microsoft.com/office/drawing/2015/9/8/chartex" xmlns:cx="http://schemas.microsoft.com/office/drawing/2014/chartex" xmlns:wpc="http://schemas.microsoft.com/office/word/2010/wordprocessingCanvas" xmlns="" id="{2A88F6FB-B647-6B0E-45DC-FB2C0A702D35}"/>
+                <a16:creationId xmlns:a16="http://schemas.microsoft.com/office/drawing/2014/main" id="{2A88F6FB-B647-6B0E-45DC-FB2C0A702D35}"/>
               </a:ext>
             </a:extLst>
           </p:cNvPr>
@@ -20368,7 +23022,7 @@
           <p:cNvPr id="44" name="Oval 43">
             <a:extLst>
               <a:ext uri="{FF2B5EF4-FFF2-40B4-BE49-F238E27FC236}">
-                <a16:creationId xmlns:lc="http://schemas.openxmlformats.org/drawingml/2006/lockedCanvas" xmlns:a16="http://schemas.microsoft.com/office/drawing/2014/main" xmlns:wps="http://schemas.microsoft.com/office/word/2010/wordprocessingShape" xmlns:wne="http://schemas.microsoft.com/office/word/2006/wordml" xmlns:wpi="http://schemas.microsoft.com/office/word/2010/wordprocessingInk" xmlns:wpg="http://schemas.microsoft.com/office/word/2010/wordprocessingGroup" xmlns:w16se="http://schemas.microsoft.com/office/word/2015/wordml/symex" xmlns:w16sdtfl="http://schemas.microsoft.com/office/word/2024/wordml/sdtformatlock" xmlns:w16sdtdh="http://schemas.microsoft.com/office/word/2020/wordml/sdtdatahash" xmlns:w16du="http://schemas.microsoft.com/office/word/2023/wordml/word16du" xmlns:w16="http://schemas.microsoft.com/office/word/2018/wordml" xmlns:w16cid="http://schemas.microsoft.com/office/word/2016/wordml/cid" xmlns:w16cex="http://schemas.microsoft.com/office/word/2018/wordml/cex" xmlns:w15="http://schemas.microsoft.com/office/word/2012/wordml" xmlns:w14="http://schemas.microsoft.com/office/word/2010/wordml" xmlns:w="http://schemas.openxmlformats.org/wordprocessingml/2006/main" xmlns:w10="urn:schemas-microsoft-com:office:word" xmlns:wp="http://schemas.openxmlformats.org/drawingml/2006/wordprocessingDrawing" xmlns:wp14="http://schemas.microsoft.com/office/word/2010/wordprocessingDrawing" xmlns:v="urn:schemas-microsoft-com:vml" xmlns:m="http://schemas.openxmlformats.org/officeDocument/2006/math" xmlns:oel="http://schemas.microsoft.com/office/2019/extlst" xmlns:o="urn:schemas-microsoft-com:office:office" xmlns:am3d="http://schemas.microsoft.com/office/drawing/2017/model3d" xmlns:aink="http://schemas.microsoft.com/office/drawing/2016/ink" xmlns:mc="http://schemas.openxmlformats.org/markup-compatibility/2006" xmlns:cx8="http://schemas.microsoft.com/office/drawing/2016/5/14/chartex" xmlns:cx7="http://schemas.microsoft.com/office/drawing/2016/5/13/chartex" xmlns:cx6="http://schemas.microsoft.com/office/drawing/2016/5/12/chartex" xmlns:cx5="http://schemas.microsoft.com/office/drawing/2016/5/11/chartex" xmlns:cx4="http://schemas.microsoft.com/office/drawing/2016/5/10/chartex" xmlns:cx3="http://schemas.microsoft.com/office/drawing/2016/5/9/chartex" xmlns:cx2="http://schemas.microsoft.com/office/drawing/2015/10/21/chartex" xmlns:cx1="http://schemas.microsoft.com/office/drawing/2015/9/8/chartex" xmlns:cx="http://schemas.microsoft.com/office/drawing/2014/chartex" xmlns:wpc="http://schemas.microsoft.com/office/word/2010/wordprocessingCanvas" xmlns="" id="{CD58BD1C-B577-4843-C1E4-69AB2EA79106}"/>
+                <a16:creationId xmlns:a16="http://schemas.microsoft.com/office/drawing/2014/main" id="{CD58BD1C-B577-4843-C1E4-69AB2EA79106}"/>
               </a:ext>
             </a:extLst>
           </p:cNvPr>
@@ -20416,7 +23070,7 @@
           <p:cNvPr id="45" name="Oval 44">
             <a:extLst>
               <a:ext uri="{FF2B5EF4-FFF2-40B4-BE49-F238E27FC236}">
-                <a16:creationId xmlns:lc="http://schemas.openxmlformats.org/drawingml/2006/lockedCanvas" xmlns:a16="http://schemas.microsoft.com/office/drawing/2014/main" xmlns:wps="http://schemas.microsoft.com/office/word/2010/wordprocessingShape" xmlns:wne="http://schemas.microsoft.com/office/word/2006/wordml" xmlns:wpi="http://schemas.microsoft.com/office/word/2010/wordprocessingInk" xmlns:wpg="http://schemas.microsoft.com/office/word/2010/wordprocessingGroup" xmlns:w16se="http://schemas.microsoft.com/office/word/2015/wordml/symex" xmlns:w16sdtfl="http://schemas.microsoft.com/office/word/2024/wordml/sdtformatlock" xmlns:w16sdtdh="http://schemas.microsoft.com/office/word/2020/wordml/sdtdatahash" xmlns:w16du="http://schemas.microsoft.com/office/word/2023/wordml/word16du" xmlns:w16="http://schemas.microsoft.com/office/word/2018/wordml" xmlns:w16cid="http://schemas.microsoft.com/office/word/2016/wordml/cid" xmlns:w16cex="http://schemas.microsoft.com/office/word/2018/wordml/cex" xmlns:w15="http://schemas.microsoft.com/office/word/2012/wordml" xmlns:w14="http://schemas.microsoft.com/office/word/2010/wordml" xmlns:w="http://schemas.openxmlformats.org/wordprocessingml/2006/main" xmlns:w10="urn:schemas-microsoft-com:office:word" xmlns:wp="http://schemas.openxmlformats.org/drawingml/2006/wordprocessingDrawing" xmlns:wp14="http://schemas.microsoft.com/office/word/2010/wordprocessingDrawing" xmlns:v="urn:schemas-microsoft-com:vml" xmlns:m="http://schemas.openxmlformats.org/officeDocument/2006/math" xmlns:oel="http://schemas.microsoft.com/office/2019/extlst" xmlns:o="urn:schemas-microsoft-com:office:office" xmlns:am3d="http://schemas.microsoft.com/office/drawing/2017/model3d" xmlns:aink="http://schemas.microsoft.com/office/drawing/2016/ink" xmlns:mc="http://schemas.openxmlformats.org/markup-compatibility/2006" xmlns:cx8="http://schemas.microsoft.com/office/drawing/2016/5/14/chartex" xmlns:cx7="http://schemas.microsoft.com/office/drawing/2016/5/13/chartex" xmlns:cx6="http://schemas.microsoft.com/office/drawing/2016/5/12/chartex" xmlns:cx5="http://schemas.microsoft.com/office/drawing/2016/5/11/chartex" xmlns:cx4="http://schemas.microsoft.com/office/drawing/2016/5/10/chartex" xmlns:cx3="http://schemas.microsoft.com/office/drawing/2016/5/9/chartex" xmlns:cx2="http://schemas.microsoft.com/office/drawing/2015/10/21/chartex" xmlns:cx1="http://schemas.microsoft.com/office/drawing/2015/9/8/chartex" xmlns:cx="http://schemas.microsoft.com/office/drawing/2014/chartex" xmlns:wpc="http://schemas.microsoft.com/office/word/2010/wordprocessingCanvas" xmlns="" id="{CD58BD1C-B577-4843-C1E4-69AB2EA79106}"/>
+                <a16:creationId xmlns:a16="http://schemas.microsoft.com/office/drawing/2014/main" id="{CD58BD1C-B577-4843-C1E4-69AB2EA79106}"/>
               </a:ext>
             </a:extLst>
           </p:cNvPr>
@@ -20469,13 +23123,6 @@
   <p:clrMapOvr>
     <a:masterClrMapping/>
   </p:clrMapOvr>
-  <p:timing>
-    <p:tnLst>
-      <p:par>
-        <p:cTn id="1" dur="indefinite" restart="never" nodeType="tmRoot"/>
-      </p:par>
-    </p:tnLst>
-  </p:timing>
 </p:sld>
 </file>
 
@@ -20567,10 +23214,9 @@
           <a:lstStyle/>
           <a:p>
             <a:r>
-              <a:rPr lang="en-IN" sz="3000" b="1" dirty="0" smtClean="0"/>
+              <a:rPr lang="en-IN" sz="3000" b="1" dirty="0"/>
               <a:t>Field Detection Model</a:t>
             </a:r>
-            <a:endParaRPr lang="en-IN" sz="3000" b="1" dirty="0"/>
           </a:p>
         </p:txBody>
       </p:sp>
@@ -20632,7 +23278,7 @@
           <a:lstStyle/>
           <a:p>
             <a:r>
-              <a:rPr lang="en-IN" sz="1200" dirty="0" err="1" smtClean="0">
+              <a:rPr lang="en-IN" sz="1200" dirty="0" err="1">
                 <a:solidFill>
                   <a:schemeClr val="bg1"/>
                 </a:solidFill>
@@ -20641,7 +23287,7 @@
               <a:t>DeHaDo</a:t>
             </a:r>
             <a:r>
-              <a:rPr lang="en-IN" sz="1200" dirty="0" smtClean="0">
+              <a:rPr lang="en-IN" sz="1200" dirty="0">
                 <a:solidFill>
                   <a:schemeClr val="bg1"/>
                 </a:solidFill>
@@ -20649,12 +23295,6 @@
               </a:rPr>
               <a:t>-AI Challenge</a:t>
             </a:r>
-            <a:endParaRPr lang="en-IN" sz="1200" dirty="0">
-              <a:solidFill>
-                <a:schemeClr val="bg1"/>
-              </a:solidFill>
-              <a:cs typeface="Times New Roman" panose="02020603050405020304" pitchFamily="18" charset="0"/>
-            </a:endParaRPr>
           </a:p>
         </p:txBody>
       </p:sp>
@@ -20681,7 +23321,7 @@
           <a:lstStyle/>
           <a:p>
             <a:r>
-              <a:rPr lang="en-IN" sz="1200" dirty="0" smtClean="0">
+              <a:rPr lang="en-IN" sz="1200" dirty="0">
                 <a:solidFill>
                   <a:schemeClr val="bg1"/>
                 </a:solidFill>
@@ -20689,12 +23329,6 @@
               </a:rPr>
               <a:t>NCVPRIPG 2025, IIT Jammu</a:t>
             </a:r>
-            <a:endParaRPr lang="en-IN" sz="1200" dirty="0">
-              <a:solidFill>
-                <a:schemeClr val="bg1"/>
-              </a:solidFill>
-              <a:cs typeface="Times New Roman" panose="02020603050405020304" pitchFamily="18" charset="0"/>
-            </a:endParaRPr>
           </a:p>
         </p:txBody>
       </p:sp>
@@ -20958,10 +23592,9 @@
           <a:p>
             <a:pPr algn="ctr"/>
             <a:r>
-              <a:rPr lang="en-IN" dirty="0" smtClean="0"/>
+              <a:rPr lang="en-IN" dirty="0"/>
               <a:t>YOLO</a:t>
             </a:r>
-            <a:endParaRPr lang="en-IN" dirty="0"/>
           </a:p>
         </p:txBody>
       </p:sp>
@@ -21041,13 +23674,6 @@
   <p:clrMapOvr>
     <a:masterClrMapping/>
   </p:clrMapOvr>
-  <p:timing>
-    <p:tnLst>
-      <p:par>
-        <p:cTn id="1" dur="indefinite" restart="never" nodeType="tmRoot"/>
-      </p:par>
-    </p:tnLst>
-  </p:timing>
 </p:sld>
 </file>
 
@@ -21139,14 +23765,9 @@
           <a:lstStyle/>
           <a:p>
             <a:r>
-              <a:rPr lang="en-IN" sz="3000" b="1" dirty="0" smtClean="0"/>
-              <a:t>Field </a:t>
+              <a:rPr lang="en-IN" sz="3000" b="1" dirty="0"/>
+              <a:t>Field Detection Model: YOLO</a:t>
             </a:r>
-            <a:r>
-              <a:rPr lang="en-IN" sz="3000" b="1" dirty="0"/>
-              <a:t>Detection Model: YOLO</a:t>
-            </a:r>
-            <a:endParaRPr lang="en-IN" sz="3000" b="1" dirty="0"/>
           </a:p>
         </p:txBody>
       </p:sp>
@@ -21208,7 +23829,7 @@
           <a:lstStyle/>
           <a:p>
             <a:r>
-              <a:rPr lang="en-IN" sz="1200" dirty="0" err="1" smtClean="0">
+              <a:rPr lang="en-IN" sz="1200" dirty="0" err="1">
                 <a:solidFill>
                   <a:schemeClr val="bg1"/>
                 </a:solidFill>
@@ -21217,7 +23838,7 @@
               <a:t>DeHaDo</a:t>
             </a:r>
             <a:r>
-              <a:rPr lang="en-IN" sz="1200" dirty="0" smtClean="0">
+              <a:rPr lang="en-IN" sz="1200" dirty="0">
                 <a:solidFill>
                   <a:schemeClr val="bg1"/>
                 </a:solidFill>
@@ -21225,12 +23846,6 @@
               </a:rPr>
               <a:t>-AI Challenge</a:t>
             </a:r>
-            <a:endParaRPr lang="en-IN" sz="1200" dirty="0">
-              <a:solidFill>
-                <a:schemeClr val="bg1"/>
-              </a:solidFill>
-              <a:cs typeface="Times New Roman" panose="02020603050405020304" pitchFamily="18" charset="0"/>
-            </a:endParaRPr>
           </a:p>
         </p:txBody>
       </p:sp>
@@ -21257,7 +23872,7 @@
           <a:lstStyle/>
           <a:p>
             <a:r>
-              <a:rPr lang="en-IN" sz="1200" dirty="0" smtClean="0">
+              <a:rPr lang="en-IN" sz="1200" dirty="0">
                 <a:solidFill>
                   <a:schemeClr val="bg1"/>
                 </a:solidFill>
@@ -21265,12 +23880,6 @@
               </a:rPr>
               <a:t>NCVPRIPG 2025, IIT Jammu</a:t>
             </a:r>
-            <a:endParaRPr lang="en-IN" sz="1200" dirty="0">
-              <a:solidFill>
-                <a:schemeClr val="bg1"/>
-              </a:solidFill>
-              <a:cs typeface="Times New Roman" panose="02020603050405020304" pitchFamily="18" charset="0"/>
-            </a:endParaRPr>
           </a:p>
         </p:txBody>
       </p:sp>
@@ -21531,10 +24140,9 @@
           <a:p>
             <a:pPr algn="ctr"/>
             <a:r>
-              <a:rPr lang="en-IN" dirty="0" smtClean="0"/>
+              <a:rPr lang="en-IN" dirty="0"/>
               <a:t>YOLO</a:t>
             </a:r>
-            <a:endParaRPr lang="en-IN" dirty="0"/>
           </a:p>
         </p:txBody>
       </p:sp>
@@ -21614,13 +24222,6 @@
   <p:clrMapOvr>
     <a:masterClrMapping/>
   </p:clrMapOvr>
-  <p:timing>
-    <p:tnLst>
-      <p:par>
-        <p:cTn id="1" dur="indefinite" restart="never" nodeType="tmRoot"/>
-      </p:par>
-    </p:tnLst>
-  </p:timing>
 </p:sld>
 </file>
 

--- a/submission/Presentation.pptx
+++ b/submission/Presentation.pptx
@@ -1216,6 +1216,730 @@
   <c:chart>
     <c:autoTitleDeleted val="1"/>
     <c:plotArea>
+      <c:layout>
+        <c:manualLayout>
+          <c:layoutTarget val="inner"/>
+          <c:xMode val="edge"/>
+          <c:yMode val="edge"/>
+          <c:x val="6.7788321608384869E-2"/>
+          <c:y val="5.9325330429775287E-2"/>
+          <c:w val="0.901102021192424"/>
+          <c:h val="0.55660621739654803"/>
+        </c:manualLayout>
+      </c:layout>
+      <c:barChart>
+        <c:barDir val="col"/>
+        <c:grouping val="clustered"/>
+        <c:varyColors val="0"/>
+        <c:ser>
+          <c:idx val="0"/>
+          <c:order val="0"/>
+          <c:tx>
+            <c:strRef>
+              <c:f>Sheet2!$B$1</c:f>
+              <c:strCache>
+                <c:ptCount val="1"/>
+                <c:pt idx="0">
+                  <c:v>CER</c:v>
+                </c:pt>
+              </c:strCache>
+            </c:strRef>
+          </c:tx>
+          <c:spPr>
+            <a:solidFill>
+              <a:srgbClr val="1F4E79"/>
+            </a:solidFill>
+            <a:ln>
+              <a:noFill/>
+            </a:ln>
+            <a:effectLst/>
+          </c:spPr>
+          <c:invertIfNegative val="0"/>
+          <c:cat>
+            <c:strRef>
+              <c:f>Sheet2!$A$2:$A$22</c:f>
+              <c:strCache>
+                <c:ptCount val="21"/>
+                <c:pt idx="0">
+                  <c:v>aadhaarcard</c:v>
+                </c:pt>
+                <c:pt idx="1">
+                  <c:v>date</c:v>
+                </c:pt>
+                <c:pt idx="2">
+                  <c:v>Dateofbirth</c:v>
+                </c:pt>
+                <c:pt idx="3">
+                  <c:v>permanentaddress</c:v>
+                </c:pt>
+                <c:pt idx="4">
+                  <c:v>presentaddress</c:v>
+                </c:pt>
+                <c:pt idx="5">
+                  <c:v>pancard</c:v>
+                </c:pt>
+                <c:pt idx="6">
+                  <c:v>bloodgroup</c:v>
+                </c:pt>
+                <c:pt idx="7">
+                  <c:v>experience1</c:v>
+                </c:pt>
+                <c:pt idx="8">
+                  <c:v>experience</c:v>
+                </c:pt>
+                <c:pt idx="9">
+                  <c:v>referencescmob1</c:v>
+                </c:pt>
+                <c:pt idx="10">
+                  <c:v>referencescmob2</c:v>
+                </c:pt>
+                <c:pt idx="11">
+                  <c:v>Fatherhusbandname</c:v>
+                </c:pt>
+                <c:pt idx="12">
+                  <c:v>candidatename</c:v>
+                </c:pt>
+                <c:pt idx="13">
+                  <c:v>contactnumber</c:v>
+                </c:pt>
+                <c:pt idx="14">
+                  <c:v>AlternateNo</c:v>
+                </c:pt>
+                <c:pt idx="15">
+                  <c:v>place</c:v>
+                </c:pt>
+                <c:pt idx="16">
+                  <c:v>qualification</c:v>
+                </c:pt>
+                <c:pt idx="17">
+                  <c:v>nationality</c:v>
+                </c:pt>
+                <c:pt idx="18">
+                  <c:v>languageknown</c:v>
+                </c:pt>
+                <c:pt idx="19">
+                  <c:v>maritalstatus</c:v>
+                </c:pt>
+                <c:pt idx="20">
+                  <c:v>gender</c:v>
+                </c:pt>
+              </c:strCache>
+            </c:strRef>
+          </c:cat>
+          <c:val>
+            <c:numRef>
+              <c:f>Sheet2!$B$2:$B$22</c:f>
+              <c:numCache>
+                <c:formatCode>General</c:formatCode>
+                <c:ptCount val="21"/>
+                <c:pt idx="0">
+                  <c:v>68.130779392338098</c:v>
+                </c:pt>
+                <c:pt idx="1">
+                  <c:v>28.867505551443301</c:v>
+                </c:pt>
+                <c:pt idx="2">
+                  <c:v>28.046421663442899</c:v>
+                </c:pt>
+                <c:pt idx="3">
+                  <c:v>24.747729566094801</c:v>
+                </c:pt>
+                <c:pt idx="4">
+                  <c:v>24.1718946047678</c:v>
+                </c:pt>
+                <c:pt idx="5">
+                  <c:v>16.057692307692299</c:v>
+                </c:pt>
+                <c:pt idx="6">
+                  <c:v>15.9958720330237</c:v>
+                </c:pt>
+                <c:pt idx="7">
+                  <c:v>14.9511831871586</c:v>
+                </c:pt>
+                <c:pt idx="8">
+                  <c:v>14.3938763624261</c:v>
+                </c:pt>
+                <c:pt idx="9">
+                  <c:v>12.272016675351701</c:v>
+                </c:pt>
+                <c:pt idx="10">
+                  <c:v>11.113043478260799</c:v>
+                </c:pt>
+                <c:pt idx="11">
+                  <c:v>10.8283703302652</c:v>
+                </c:pt>
+                <c:pt idx="12">
+                  <c:v>9.6209386281588394</c:v>
+                </c:pt>
+                <c:pt idx="13">
+                  <c:v>8.8888888888888893</c:v>
+                </c:pt>
+                <c:pt idx="14">
+                  <c:v>8.7640449438202204</c:v>
+                </c:pt>
+                <c:pt idx="15">
+                  <c:v>8.6285195277020801</c:v>
+                </c:pt>
+                <c:pt idx="16">
+                  <c:v>5.6635202665186002</c:v>
+                </c:pt>
+                <c:pt idx="17">
+                  <c:v>5.5177626606198</c:v>
+                </c:pt>
+                <c:pt idx="18">
+                  <c:v>4.2248413417951003</c:v>
+                </c:pt>
+                <c:pt idx="19">
+                  <c:v>2.42686170212765</c:v>
+                </c:pt>
+                <c:pt idx="20">
+                  <c:v>1.11806797853309</c:v>
+                </c:pt>
+              </c:numCache>
+            </c:numRef>
+          </c:val>
+          <c:extLst>
+            <c:ext xmlns:c16="http://schemas.microsoft.com/office/drawing/2014/chart" uri="{C3380CC4-5D6E-409C-BE32-E72D297353CC}">
+              <c16:uniqueId val="{00000000-6614-4606-8975-EB0CBE165F4C}"/>
+            </c:ext>
+          </c:extLst>
+        </c:ser>
+        <c:dLbls>
+          <c:showLegendKey val="0"/>
+          <c:showVal val="0"/>
+          <c:showCatName val="0"/>
+          <c:showSerName val="0"/>
+          <c:showPercent val="0"/>
+          <c:showBubbleSize val="0"/>
+        </c:dLbls>
+        <c:gapWidth val="219"/>
+        <c:overlap val="-27"/>
+        <c:axId val="1053890864"/>
+        <c:axId val="1053894784"/>
+      </c:barChart>
+      <c:catAx>
+        <c:axId val="1053890864"/>
+        <c:scaling>
+          <c:orientation val="minMax"/>
+        </c:scaling>
+        <c:delete val="0"/>
+        <c:axPos val="b"/>
+        <c:numFmt formatCode="General" sourceLinked="1"/>
+        <c:majorTickMark val="none"/>
+        <c:minorTickMark val="none"/>
+        <c:tickLblPos val="nextTo"/>
+        <c:spPr>
+          <a:noFill/>
+          <a:ln w="9525" cap="flat" cmpd="sng" algn="ctr">
+            <a:solidFill>
+              <a:schemeClr val="tx1">
+                <a:lumMod val="15000"/>
+                <a:lumOff val="85000"/>
+              </a:schemeClr>
+            </a:solidFill>
+            <a:round/>
+          </a:ln>
+          <a:effectLst/>
+        </c:spPr>
+        <c:txPr>
+          <a:bodyPr rot="-60000000" spcFirstLastPara="1" vertOverflow="ellipsis" vert="horz" wrap="square" anchor="ctr" anchorCtr="1"/>
+          <a:lstStyle/>
+          <a:p>
+            <a:pPr>
+              <a:defRPr sz="900" b="0" i="0" u="none" strike="noStrike" kern="1200" baseline="0">
+                <a:solidFill>
+                  <a:schemeClr val="tx1">
+                    <a:lumMod val="65000"/>
+                    <a:lumOff val="35000"/>
+                  </a:schemeClr>
+                </a:solidFill>
+                <a:latin typeface="+mn-lt"/>
+                <a:ea typeface="+mn-ea"/>
+                <a:cs typeface="+mn-cs"/>
+              </a:defRPr>
+            </a:pPr>
+            <a:endParaRPr lang="en-US"/>
+          </a:p>
+        </c:txPr>
+        <c:crossAx val="1053894784"/>
+        <c:crosses val="autoZero"/>
+        <c:auto val="1"/>
+        <c:lblAlgn val="ctr"/>
+        <c:lblOffset val="100"/>
+        <c:noMultiLvlLbl val="0"/>
+      </c:catAx>
+      <c:valAx>
+        <c:axId val="1053894784"/>
+        <c:scaling>
+          <c:orientation val="minMax"/>
+        </c:scaling>
+        <c:delete val="0"/>
+        <c:axPos val="l"/>
+        <c:majorGridlines>
+          <c:spPr>
+            <a:ln w="9525" cap="flat" cmpd="sng" algn="ctr">
+              <a:solidFill>
+                <a:schemeClr val="tx1">
+                  <a:lumMod val="15000"/>
+                  <a:lumOff val="85000"/>
+                </a:schemeClr>
+              </a:solidFill>
+              <a:round/>
+            </a:ln>
+            <a:effectLst/>
+          </c:spPr>
+        </c:majorGridlines>
+        <c:numFmt formatCode="General" sourceLinked="1"/>
+        <c:majorTickMark val="none"/>
+        <c:minorTickMark val="none"/>
+        <c:tickLblPos val="nextTo"/>
+        <c:spPr>
+          <a:noFill/>
+          <a:ln>
+            <a:noFill/>
+          </a:ln>
+          <a:effectLst/>
+        </c:spPr>
+        <c:txPr>
+          <a:bodyPr rot="-60000000" spcFirstLastPara="1" vertOverflow="ellipsis" vert="horz" wrap="square" anchor="ctr" anchorCtr="1"/>
+          <a:lstStyle/>
+          <a:p>
+            <a:pPr>
+              <a:defRPr sz="900" b="0" i="0" u="none" strike="noStrike" kern="1200" baseline="0">
+                <a:solidFill>
+                  <a:schemeClr val="tx1">
+                    <a:lumMod val="65000"/>
+                    <a:lumOff val="35000"/>
+                  </a:schemeClr>
+                </a:solidFill>
+                <a:latin typeface="+mn-lt"/>
+                <a:ea typeface="+mn-ea"/>
+                <a:cs typeface="+mn-cs"/>
+              </a:defRPr>
+            </a:pPr>
+            <a:endParaRPr lang="en-US"/>
+          </a:p>
+        </c:txPr>
+        <c:crossAx val="1053890864"/>
+        <c:crosses val="autoZero"/>
+        <c:crossBetween val="between"/>
+      </c:valAx>
+      <c:spPr>
+        <a:noFill/>
+        <a:ln>
+          <a:noFill/>
+        </a:ln>
+        <a:effectLst/>
+      </c:spPr>
+    </c:plotArea>
+    <c:plotVisOnly val="1"/>
+    <c:dispBlanksAs val="gap"/>
+    <c:showDLblsOverMax val="0"/>
+  </c:chart>
+  <c:spPr>
+    <a:noFill/>
+    <a:ln>
+      <a:solidFill>
+        <a:schemeClr val="accent1">
+          <a:shade val="15000"/>
+        </a:schemeClr>
+      </a:solidFill>
+    </a:ln>
+    <a:effectLst/>
+  </c:spPr>
+  <c:txPr>
+    <a:bodyPr rot="0" vert="horz"/>
+    <a:lstStyle/>
+    <a:p>
+      <a:pPr>
+        <a:defRPr/>
+      </a:pPr>
+      <a:endParaRPr lang="en-US"/>
+    </a:p>
+  </c:txPr>
+  <c:externalData r:id="rId3">
+    <c:autoUpdate val="0"/>
+  </c:externalData>
+</c:chartSpace>
+</file>
+
+<file path=ppt/charts/chart3.xml><?xml version="1.0" encoding="utf-8"?>
+<c:chartSpace xmlns:c="http://schemas.openxmlformats.org/drawingml/2006/chart" xmlns:a="http://schemas.openxmlformats.org/drawingml/2006/main" xmlns:r="http://schemas.openxmlformats.org/officeDocument/2006/relationships" xmlns:c16r2="http://schemas.microsoft.com/office/drawing/2015/06/chart">
+  <c:date1904 val="0"/>
+  <c:lang val="en-US"/>
+  <c:roundedCorners val="0"/>
+  <mc:AlternateContent xmlns:mc="http://schemas.openxmlformats.org/markup-compatibility/2006">
+    <mc:Choice xmlns:c14="http://schemas.microsoft.com/office/drawing/2007/8/2/chart" Requires="c14">
+      <c14:style val="102"/>
+    </mc:Choice>
+    <mc:Fallback>
+      <c:style val="2"/>
+    </mc:Fallback>
+  </mc:AlternateContent>
+  <c:chart>
+    <c:autoTitleDeleted val="1"/>
+    <c:plotArea>
+      <c:layout>
+        <c:manualLayout>
+          <c:layoutTarget val="inner"/>
+          <c:xMode val="edge"/>
+          <c:yMode val="edge"/>
+          <c:x val="9.3544799852969443E-2"/>
+          <c:y val="5.9325456396214213E-2"/>
+          <c:w val="0.87687546529325222"/>
+          <c:h val="0.52150813208895674"/>
+        </c:manualLayout>
+      </c:layout>
+      <c:barChart>
+        <c:barDir val="col"/>
+        <c:grouping val="clustered"/>
+        <c:varyColors val="0"/>
+        <c:ser>
+          <c:idx val="0"/>
+          <c:order val="0"/>
+          <c:tx>
+            <c:strRef>
+              <c:f>Sheet2!$E$1</c:f>
+              <c:strCache>
+                <c:ptCount val="1"/>
+                <c:pt idx="0">
+                  <c:v>WER</c:v>
+                </c:pt>
+              </c:strCache>
+            </c:strRef>
+          </c:tx>
+          <c:spPr>
+            <a:solidFill>
+              <a:srgbClr val="1F4E79"/>
+            </a:solidFill>
+            <a:ln>
+              <a:noFill/>
+            </a:ln>
+            <a:effectLst/>
+          </c:spPr>
+          <c:invertIfNegative val="0"/>
+          <c:cat>
+            <c:strRef>
+              <c:f>Sheet2!$D$2:$D$22</c:f>
+              <c:strCache>
+                <c:ptCount val="21"/>
+                <c:pt idx="0">
+                  <c:v>aadhaarcard</c:v>
+                </c:pt>
+                <c:pt idx="1">
+                  <c:v>permanentaddress</c:v>
+                </c:pt>
+                <c:pt idx="2">
+                  <c:v>presentaddress</c:v>
+                </c:pt>
+                <c:pt idx="3">
+                  <c:v>date</c:v>
+                </c:pt>
+                <c:pt idx="4">
+                  <c:v>Dateofbirth</c:v>
+                </c:pt>
+                <c:pt idx="5">
+                  <c:v>pancard</c:v>
+                </c:pt>
+                <c:pt idx="6">
+                  <c:v>contactnumber</c:v>
+                </c:pt>
+                <c:pt idx="7">
+                  <c:v>AlternateNo</c:v>
+                </c:pt>
+                <c:pt idx="8">
+                  <c:v>referencescmob1</c:v>
+                </c:pt>
+                <c:pt idx="9">
+                  <c:v>referencescmob2</c:v>
+                </c:pt>
+                <c:pt idx="10">
+                  <c:v>experience1</c:v>
+                </c:pt>
+                <c:pt idx="11">
+                  <c:v>Fatherhusbandname</c:v>
+                </c:pt>
+                <c:pt idx="12">
+                  <c:v>experience</c:v>
+                </c:pt>
+                <c:pt idx="13">
+                  <c:v>bloodgroup</c:v>
+                </c:pt>
+                <c:pt idx="14">
+                  <c:v>candidatename</c:v>
+                </c:pt>
+                <c:pt idx="15">
+                  <c:v>place</c:v>
+                </c:pt>
+                <c:pt idx="16">
+                  <c:v>qualification</c:v>
+                </c:pt>
+                <c:pt idx="17">
+                  <c:v>nationality</c:v>
+                </c:pt>
+                <c:pt idx="18">
+                  <c:v>languageknown</c:v>
+                </c:pt>
+                <c:pt idx="19">
+                  <c:v>maritalstatus</c:v>
+                </c:pt>
+                <c:pt idx="20">
+                  <c:v>gender</c:v>
+                </c:pt>
+              </c:strCache>
+            </c:strRef>
+          </c:cat>
+          <c:val>
+            <c:numRef>
+              <c:f>Sheet2!$E$2:$E$22</c:f>
+              <c:numCache>
+                <c:formatCode>General</c:formatCode>
+                <c:ptCount val="21"/>
+                <c:pt idx="0">
+                  <c:v>102.222222222222</c:v>
+                </c:pt>
+                <c:pt idx="1">
+                  <c:v>75.081206496519698</c:v>
+                </c:pt>
+                <c:pt idx="2">
+                  <c:v>71.925011431184203</c:v>
+                </c:pt>
+                <c:pt idx="3">
+                  <c:v>68.721461187214601</c:v>
+                </c:pt>
+                <c:pt idx="4">
+                  <c:v>67.561521252796396</c:v>
+                </c:pt>
+                <c:pt idx="5">
+                  <c:v>64.423076923076906</c:v>
+                </c:pt>
+                <c:pt idx="6">
+                  <c:v>48.4444444444444</c:v>
+                </c:pt>
+                <c:pt idx="7">
+                  <c:v>46.966292134831399</c:v>
+                </c:pt>
+                <c:pt idx="8">
+                  <c:v>38.9444444444444</c:v>
+                </c:pt>
+                <c:pt idx="9">
+                  <c:v>37.2222222222222</c:v>
+                </c:pt>
+                <c:pt idx="10">
+                  <c:v>35.437881873727001</c:v>
+                </c:pt>
+                <c:pt idx="11">
+                  <c:v>35.267857142857103</c:v>
+                </c:pt>
+                <c:pt idx="12">
+                  <c:v>34.472817133443101</c:v>
+                </c:pt>
+                <c:pt idx="13">
+                  <c:v>33.957845433255201</c:v>
+                </c:pt>
+                <c:pt idx="14">
+                  <c:v>33.2962138084632</c:v>
+                </c:pt>
+                <c:pt idx="15">
+                  <c:v>16.252821670428801</c:v>
+                </c:pt>
+                <c:pt idx="16">
+                  <c:v>12.2895622895622</c:v>
+                </c:pt>
+                <c:pt idx="17">
+                  <c:v>9.2970521541950095</c:v>
+                </c:pt>
+                <c:pt idx="18">
+                  <c:v>8.8430361090641103</c:v>
+                </c:pt>
+                <c:pt idx="19">
+                  <c:v>4.46428571428571</c:v>
+                </c:pt>
+                <c:pt idx="20">
+                  <c:v>2.2471910112359499</c:v>
+                </c:pt>
+              </c:numCache>
+            </c:numRef>
+          </c:val>
+          <c:extLst>
+            <c:ext xmlns:c16="http://schemas.microsoft.com/office/drawing/2014/chart" uri="{C3380CC4-5D6E-409C-BE32-E72D297353CC}">
+              <c16:uniqueId val="{00000000-B098-4E7E-992D-2293085A0719}"/>
+            </c:ext>
+          </c:extLst>
+        </c:ser>
+        <c:dLbls>
+          <c:showLegendKey val="0"/>
+          <c:showVal val="0"/>
+          <c:showCatName val="0"/>
+          <c:showSerName val="0"/>
+          <c:showPercent val="0"/>
+          <c:showBubbleSize val="0"/>
+        </c:dLbls>
+        <c:gapWidth val="219"/>
+        <c:overlap val="-27"/>
+        <c:axId val="1179876016"/>
+        <c:axId val="1179878816"/>
+      </c:barChart>
+      <c:catAx>
+        <c:axId val="1179876016"/>
+        <c:scaling>
+          <c:orientation val="minMax"/>
+        </c:scaling>
+        <c:delete val="0"/>
+        <c:axPos val="b"/>
+        <c:numFmt formatCode="General" sourceLinked="1"/>
+        <c:majorTickMark val="none"/>
+        <c:minorTickMark val="none"/>
+        <c:tickLblPos val="nextTo"/>
+        <c:spPr>
+          <a:noFill/>
+          <a:ln w="9525" cap="flat" cmpd="sng" algn="ctr">
+            <a:solidFill>
+              <a:schemeClr val="tx1">
+                <a:lumMod val="15000"/>
+                <a:lumOff val="85000"/>
+              </a:schemeClr>
+            </a:solidFill>
+            <a:round/>
+          </a:ln>
+          <a:effectLst/>
+        </c:spPr>
+        <c:txPr>
+          <a:bodyPr rot="-60000000" spcFirstLastPara="1" vertOverflow="ellipsis" vert="horz" wrap="square" anchor="ctr" anchorCtr="1"/>
+          <a:lstStyle/>
+          <a:p>
+            <a:pPr>
+              <a:defRPr sz="900" b="0" i="0" u="none" strike="noStrike" kern="1200" baseline="0">
+                <a:solidFill>
+                  <a:schemeClr val="tx1">
+                    <a:lumMod val="65000"/>
+                    <a:lumOff val="35000"/>
+                  </a:schemeClr>
+                </a:solidFill>
+                <a:latin typeface="+mn-lt"/>
+                <a:ea typeface="+mn-ea"/>
+                <a:cs typeface="+mn-cs"/>
+              </a:defRPr>
+            </a:pPr>
+            <a:endParaRPr lang="en-US"/>
+          </a:p>
+        </c:txPr>
+        <c:crossAx val="1179878816"/>
+        <c:crosses val="autoZero"/>
+        <c:auto val="1"/>
+        <c:lblAlgn val="ctr"/>
+        <c:lblOffset val="100"/>
+        <c:noMultiLvlLbl val="0"/>
+      </c:catAx>
+      <c:valAx>
+        <c:axId val="1179878816"/>
+        <c:scaling>
+          <c:orientation val="minMax"/>
+        </c:scaling>
+        <c:delete val="0"/>
+        <c:axPos val="l"/>
+        <c:majorGridlines>
+          <c:spPr>
+            <a:ln w="9525" cap="flat" cmpd="sng" algn="ctr">
+              <a:solidFill>
+                <a:schemeClr val="tx1">
+                  <a:lumMod val="15000"/>
+                  <a:lumOff val="85000"/>
+                </a:schemeClr>
+              </a:solidFill>
+              <a:round/>
+            </a:ln>
+            <a:effectLst/>
+          </c:spPr>
+        </c:majorGridlines>
+        <c:numFmt formatCode="General" sourceLinked="1"/>
+        <c:majorTickMark val="none"/>
+        <c:minorTickMark val="none"/>
+        <c:tickLblPos val="nextTo"/>
+        <c:spPr>
+          <a:noFill/>
+          <a:ln>
+            <a:noFill/>
+          </a:ln>
+          <a:effectLst/>
+        </c:spPr>
+        <c:txPr>
+          <a:bodyPr rot="-60000000" spcFirstLastPara="1" vertOverflow="ellipsis" vert="horz" wrap="square" anchor="ctr" anchorCtr="1"/>
+          <a:lstStyle/>
+          <a:p>
+            <a:pPr>
+              <a:defRPr sz="900" b="0" i="0" u="none" strike="noStrike" kern="1200" baseline="0">
+                <a:solidFill>
+                  <a:schemeClr val="tx1">
+                    <a:lumMod val="65000"/>
+                    <a:lumOff val="35000"/>
+                  </a:schemeClr>
+                </a:solidFill>
+                <a:latin typeface="+mn-lt"/>
+                <a:ea typeface="+mn-ea"/>
+                <a:cs typeface="+mn-cs"/>
+              </a:defRPr>
+            </a:pPr>
+            <a:endParaRPr lang="en-US"/>
+          </a:p>
+        </c:txPr>
+        <c:crossAx val="1179876016"/>
+        <c:crosses val="autoZero"/>
+        <c:crossBetween val="between"/>
+      </c:valAx>
+      <c:spPr>
+        <a:noFill/>
+        <a:ln>
+          <a:noFill/>
+        </a:ln>
+        <a:effectLst/>
+      </c:spPr>
+    </c:plotArea>
+    <c:plotVisOnly val="1"/>
+    <c:dispBlanksAs val="gap"/>
+    <c:showDLblsOverMax val="0"/>
+  </c:chart>
+  <c:spPr>
+    <a:noFill/>
+    <a:ln>
+      <a:solidFill>
+        <a:schemeClr val="tx1"/>
+      </a:solidFill>
+    </a:ln>
+    <a:effectLst/>
+  </c:spPr>
+  <c:txPr>
+    <a:bodyPr/>
+    <a:lstStyle/>
+    <a:p>
+      <a:pPr>
+        <a:defRPr/>
+      </a:pPr>
+      <a:endParaRPr lang="en-US"/>
+    </a:p>
+  </c:txPr>
+  <c:externalData r:id="rId3">
+    <c:autoUpdate val="0"/>
+  </c:externalData>
+</c:chartSpace>
+</file>
+
+<file path=ppt/charts/chart4.xml><?xml version="1.0" encoding="utf-8"?>
+<c:chartSpace xmlns:c="http://schemas.openxmlformats.org/drawingml/2006/chart" xmlns:a="http://schemas.openxmlformats.org/drawingml/2006/main" xmlns:r="http://schemas.openxmlformats.org/officeDocument/2006/relationships" xmlns:c16r2="http://schemas.microsoft.com/office/drawing/2015/06/chart">
+  <c:date1904 val="0"/>
+  <c:lang val="en-US"/>
+  <c:roundedCorners val="0"/>
+  <mc:AlternateContent xmlns:mc="http://schemas.openxmlformats.org/markup-compatibility/2006">
+    <mc:Choice xmlns:c14="http://schemas.microsoft.com/office/drawing/2007/8/2/chart" Requires="c14">
+      <c14:style val="102"/>
+    </mc:Choice>
+    <mc:Fallback>
+      <c:style val="2"/>
+    </mc:Fallback>
+  </mc:AlternateContent>
+  <c:chart>
+    <c:autoTitleDeleted val="1"/>
+    <c:plotArea>
       <c:layout/>
       <c:barChart>
         <c:barDir val="col"/>
@@ -1549,7 +2273,7 @@
 </c:chartSpace>
 </file>
 
-<file path=ppt/charts/chart3.xml><?xml version="1.0" encoding="utf-8"?>
+<file path=ppt/charts/chart5.xml><?xml version="1.0" encoding="utf-8"?>
 <c:chartSpace xmlns:c="http://schemas.openxmlformats.org/drawingml/2006/chart" xmlns:a="http://schemas.openxmlformats.org/drawingml/2006/main" xmlns:r="http://schemas.openxmlformats.org/officeDocument/2006/relationships" xmlns:c16r2="http://schemas.microsoft.com/office/drawing/2015/06/chart">
   <c:date1904 val="0"/>
   <c:lang val="en-US"/>
@@ -1930,7 +2654,7 @@
 </c:chartSpace>
 </file>
 
-<file path=ppt/charts/chart4.xml><?xml version="1.0" encoding="utf-8"?>
+<file path=ppt/charts/chart6.xml><?xml version="1.0" encoding="utf-8"?>
 <c:chartSpace xmlns:c="http://schemas.openxmlformats.org/drawingml/2006/chart" xmlns:a="http://schemas.openxmlformats.org/drawingml/2006/main" xmlns:r="http://schemas.openxmlformats.org/officeDocument/2006/relationships" xmlns:c16r2="http://schemas.microsoft.com/office/drawing/2015/06/chart">
   <c:date1904 val="0"/>
   <c:lang val="en-US"/>
@@ -2432,6 +3156,86 @@
 </file>
 
 <file path=ppt/charts/colors4.xml><?xml version="1.0" encoding="utf-8"?>
+<cs:colorStyle xmlns:cs="http://schemas.microsoft.com/office/drawing/2012/chartStyle" xmlns:a="http://schemas.openxmlformats.org/drawingml/2006/main" meth="cycle" id="10">
+  <a:schemeClr val="accent1"/>
+  <a:schemeClr val="accent2"/>
+  <a:schemeClr val="accent3"/>
+  <a:schemeClr val="accent4"/>
+  <a:schemeClr val="accent5"/>
+  <a:schemeClr val="accent6"/>
+  <cs:variation/>
+  <cs:variation>
+    <a:lumMod val="60000"/>
+  </cs:variation>
+  <cs:variation>
+    <a:lumMod val="80000"/>
+    <a:lumOff val="20000"/>
+  </cs:variation>
+  <cs:variation>
+    <a:lumMod val="80000"/>
+  </cs:variation>
+  <cs:variation>
+    <a:lumMod val="60000"/>
+    <a:lumOff val="40000"/>
+  </cs:variation>
+  <cs:variation>
+    <a:lumMod val="50000"/>
+  </cs:variation>
+  <cs:variation>
+    <a:lumMod val="70000"/>
+    <a:lumOff val="30000"/>
+  </cs:variation>
+  <cs:variation>
+    <a:lumMod val="70000"/>
+  </cs:variation>
+  <cs:variation>
+    <a:lumMod val="50000"/>
+    <a:lumOff val="50000"/>
+  </cs:variation>
+</cs:colorStyle>
+</file>
+
+<file path=ppt/charts/colors5.xml><?xml version="1.0" encoding="utf-8"?>
+<cs:colorStyle xmlns:cs="http://schemas.microsoft.com/office/drawing/2012/chartStyle" xmlns:a="http://schemas.openxmlformats.org/drawingml/2006/main" meth="cycle" id="10">
+  <a:schemeClr val="accent1"/>
+  <a:schemeClr val="accent2"/>
+  <a:schemeClr val="accent3"/>
+  <a:schemeClr val="accent4"/>
+  <a:schemeClr val="accent5"/>
+  <a:schemeClr val="accent6"/>
+  <cs:variation/>
+  <cs:variation>
+    <a:lumMod val="60000"/>
+  </cs:variation>
+  <cs:variation>
+    <a:lumMod val="80000"/>
+    <a:lumOff val="20000"/>
+  </cs:variation>
+  <cs:variation>
+    <a:lumMod val="80000"/>
+  </cs:variation>
+  <cs:variation>
+    <a:lumMod val="60000"/>
+    <a:lumOff val="40000"/>
+  </cs:variation>
+  <cs:variation>
+    <a:lumMod val="50000"/>
+  </cs:variation>
+  <cs:variation>
+    <a:lumMod val="70000"/>
+    <a:lumOff val="30000"/>
+  </cs:variation>
+  <cs:variation>
+    <a:lumMod val="70000"/>
+  </cs:variation>
+  <cs:variation>
+    <a:lumMod val="50000"/>
+    <a:lumOff val="50000"/>
+  </cs:variation>
+</cs:colorStyle>
+</file>
+
+<file path=ppt/charts/colors6.xml><?xml version="1.0" encoding="utf-8"?>
 <cs:colorStyle xmlns:cs="http://schemas.microsoft.com/office/drawing/2012/chartStyle" xmlns:a="http://schemas.openxmlformats.org/drawingml/2006/main" meth="cycle" id="10">
   <a:schemeClr val="accent1"/>
   <a:schemeClr val="accent2"/>
@@ -4496,6 +5300,1012 @@
 </cs:chartStyle>
 </file>
 
+<file path=ppt/charts/style5.xml><?xml version="1.0" encoding="utf-8"?>
+<cs:chartStyle xmlns:cs="http://schemas.microsoft.com/office/drawing/2012/chartStyle" xmlns:a="http://schemas.openxmlformats.org/drawingml/2006/main" id="201">
+  <cs:axisTitle>
+    <cs:lnRef idx="0"/>
+    <cs:fillRef idx="0"/>
+    <cs:effectRef idx="0"/>
+    <cs:fontRef idx="minor">
+      <a:schemeClr val="tx1">
+        <a:lumMod val="65000"/>
+        <a:lumOff val="35000"/>
+      </a:schemeClr>
+    </cs:fontRef>
+    <cs:defRPr sz="1000" kern="1200"/>
+  </cs:axisTitle>
+  <cs:categoryAxis>
+    <cs:lnRef idx="0"/>
+    <cs:fillRef idx="0"/>
+    <cs:effectRef idx="0"/>
+    <cs:fontRef idx="minor">
+      <a:schemeClr val="tx1">
+        <a:lumMod val="65000"/>
+        <a:lumOff val="35000"/>
+      </a:schemeClr>
+    </cs:fontRef>
+    <cs:spPr>
+      <a:ln w="9525" cap="flat" cmpd="sng" algn="ctr">
+        <a:solidFill>
+          <a:schemeClr val="tx1">
+            <a:lumMod val="15000"/>
+            <a:lumOff val="85000"/>
+          </a:schemeClr>
+        </a:solidFill>
+        <a:round/>
+      </a:ln>
+    </cs:spPr>
+    <cs:defRPr sz="900" kern="1200"/>
+  </cs:categoryAxis>
+  <cs:chartArea mods="allowNoFillOverride allowNoLineOverride">
+    <cs:lnRef idx="0"/>
+    <cs:fillRef idx="0"/>
+    <cs:effectRef idx="0"/>
+    <cs:fontRef idx="minor">
+      <a:schemeClr val="tx1"/>
+    </cs:fontRef>
+    <cs:spPr>
+      <a:solidFill>
+        <a:schemeClr val="bg1"/>
+      </a:solidFill>
+      <a:ln w="9525" cap="flat" cmpd="sng" algn="ctr">
+        <a:solidFill>
+          <a:schemeClr val="tx1">
+            <a:lumMod val="15000"/>
+            <a:lumOff val="85000"/>
+          </a:schemeClr>
+        </a:solidFill>
+        <a:round/>
+      </a:ln>
+    </cs:spPr>
+    <cs:defRPr sz="1000" kern="1200"/>
+  </cs:chartArea>
+  <cs:dataLabel>
+    <cs:lnRef idx="0"/>
+    <cs:fillRef idx="0"/>
+    <cs:effectRef idx="0"/>
+    <cs:fontRef idx="minor">
+      <a:schemeClr val="tx1">
+        <a:lumMod val="75000"/>
+        <a:lumOff val="25000"/>
+      </a:schemeClr>
+    </cs:fontRef>
+    <cs:defRPr sz="900" kern="1200"/>
+  </cs:dataLabel>
+  <cs:dataLabelCallout>
+    <cs:lnRef idx="0"/>
+    <cs:fillRef idx="0"/>
+    <cs:effectRef idx="0"/>
+    <cs:fontRef idx="minor">
+      <a:schemeClr val="dk1">
+        <a:lumMod val="65000"/>
+        <a:lumOff val="35000"/>
+      </a:schemeClr>
+    </cs:fontRef>
+    <cs:spPr>
+      <a:solidFill>
+        <a:schemeClr val="lt1"/>
+      </a:solidFill>
+      <a:ln>
+        <a:solidFill>
+          <a:schemeClr val="dk1">
+            <a:lumMod val="25000"/>
+            <a:lumOff val="75000"/>
+          </a:schemeClr>
+        </a:solidFill>
+      </a:ln>
+    </cs:spPr>
+    <cs:defRPr sz="900" kern="1200"/>
+    <cs:bodyPr rot="0" spcFirstLastPara="1" vertOverflow="clip" horzOverflow="clip" vert="horz" wrap="square" lIns="36576" tIns="18288" rIns="36576" bIns="18288" anchor="ctr" anchorCtr="1">
+      <a:spAutoFit/>
+    </cs:bodyPr>
+  </cs:dataLabelCallout>
+  <cs:dataPoint>
+    <cs:lnRef idx="0"/>
+    <cs:fillRef idx="1">
+      <cs:styleClr val="auto"/>
+    </cs:fillRef>
+    <cs:effectRef idx="0"/>
+    <cs:fontRef idx="minor">
+      <a:schemeClr val="tx1"/>
+    </cs:fontRef>
+  </cs:dataPoint>
+  <cs:dataPoint3D>
+    <cs:lnRef idx="0"/>
+    <cs:fillRef idx="1">
+      <cs:styleClr val="auto"/>
+    </cs:fillRef>
+    <cs:effectRef idx="0"/>
+    <cs:fontRef idx="minor">
+      <a:schemeClr val="tx1"/>
+    </cs:fontRef>
+  </cs:dataPoint3D>
+  <cs:dataPointLine>
+    <cs:lnRef idx="0">
+      <cs:styleClr val="auto"/>
+    </cs:lnRef>
+    <cs:fillRef idx="1"/>
+    <cs:effectRef idx="0"/>
+    <cs:fontRef idx="minor">
+      <a:schemeClr val="tx1"/>
+    </cs:fontRef>
+    <cs:spPr>
+      <a:ln w="28575" cap="rnd">
+        <a:solidFill>
+          <a:schemeClr val="phClr"/>
+        </a:solidFill>
+        <a:round/>
+      </a:ln>
+    </cs:spPr>
+  </cs:dataPointLine>
+  <cs:dataPointMarker>
+    <cs:lnRef idx="0">
+      <cs:styleClr val="auto"/>
+    </cs:lnRef>
+    <cs:fillRef idx="1">
+      <cs:styleClr val="auto"/>
+    </cs:fillRef>
+    <cs:effectRef idx="0"/>
+    <cs:fontRef idx="minor">
+      <a:schemeClr val="tx1"/>
+    </cs:fontRef>
+    <cs:spPr>
+      <a:ln w="9525">
+        <a:solidFill>
+          <a:schemeClr val="phClr"/>
+        </a:solidFill>
+      </a:ln>
+    </cs:spPr>
+  </cs:dataPointMarker>
+  <cs:dataPointMarkerLayout symbol="circle" size="5"/>
+  <cs:dataPointWireframe>
+    <cs:lnRef idx="0">
+      <cs:styleClr val="auto"/>
+    </cs:lnRef>
+    <cs:fillRef idx="1"/>
+    <cs:effectRef idx="0"/>
+    <cs:fontRef idx="minor">
+      <a:schemeClr val="tx1"/>
+    </cs:fontRef>
+    <cs:spPr>
+      <a:ln w="9525" cap="rnd">
+        <a:solidFill>
+          <a:schemeClr val="phClr"/>
+        </a:solidFill>
+        <a:round/>
+      </a:ln>
+    </cs:spPr>
+  </cs:dataPointWireframe>
+  <cs:dataTable>
+    <cs:lnRef idx="0"/>
+    <cs:fillRef idx="0"/>
+    <cs:effectRef idx="0"/>
+    <cs:fontRef idx="minor">
+      <a:schemeClr val="tx1">
+        <a:lumMod val="65000"/>
+        <a:lumOff val="35000"/>
+      </a:schemeClr>
+    </cs:fontRef>
+    <cs:spPr>
+      <a:noFill/>
+      <a:ln w="9525" cap="flat" cmpd="sng" algn="ctr">
+        <a:solidFill>
+          <a:schemeClr val="tx1">
+            <a:lumMod val="15000"/>
+            <a:lumOff val="85000"/>
+          </a:schemeClr>
+        </a:solidFill>
+        <a:round/>
+      </a:ln>
+    </cs:spPr>
+    <cs:defRPr sz="900" kern="1200"/>
+  </cs:dataTable>
+  <cs:downBar>
+    <cs:lnRef idx="0"/>
+    <cs:fillRef idx="0"/>
+    <cs:effectRef idx="0"/>
+    <cs:fontRef idx="minor">
+      <a:schemeClr val="dk1"/>
+    </cs:fontRef>
+    <cs:spPr>
+      <a:solidFill>
+        <a:schemeClr val="dk1">
+          <a:lumMod val="65000"/>
+          <a:lumOff val="35000"/>
+        </a:schemeClr>
+      </a:solidFill>
+      <a:ln w="9525">
+        <a:solidFill>
+          <a:schemeClr val="tx1">
+            <a:lumMod val="65000"/>
+            <a:lumOff val="35000"/>
+          </a:schemeClr>
+        </a:solidFill>
+      </a:ln>
+    </cs:spPr>
+  </cs:downBar>
+  <cs:dropLine>
+    <cs:lnRef idx="0"/>
+    <cs:fillRef idx="0"/>
+    <cs:effectRef idx="0"/>
+    <cs:fontRef idx="minor">
+      <a:schemeClr val="tx1"/>
+    </cs:fontRef>
+    <cs:spPr>
+      <a:ln w="9525" cap="flat" cmpd="sng" algn="ctr">
+        <a:solidFill>
+          <a:schemeClr val="tx1">
+            <a:lumMod val="35000"/>
+            <a:lumOff val="65000"/>
+          </a:schemeClr>
+        </a:solidFill>
+        <a:round/>
+      </a:ln>
+    </cs:spPr>
+  </cs:dropLine>
+  <cs:errorBar>
+    <cs:lnRef idx="0"/>
+    <cs:fillRef idx="0"/>
+    <cs:effectRef idx="0"/>
+    <cs:fontRef idx="minor">
+      <a:schemeClr val="tx1"/>
+    </cs:fontRef>
+    <cs:spPr>
+      <a:ln w="9525" cap="flat" cmpd="sng" algn="ctr">
+        <a:solidFill>
+          <a:schemeClr val="tx1">
+            <a:lumMod val="65000"/>
+            <a:lumOff val="35000"/>
+          </a:schemeClr>
+        </a:solidFill>
+        <a:round/>
+      </a:ln>
+    </cs:spPr>
+  </cs:errorBar>
+  <cs:floor>
+    <cs:lnRef idx="0"/>
+    <cs:fillRef idx="0"/>
+    <cs:effectRef idx="0"/>
+    <cs:fontRef idx="minor">
+      <a:schemeClr val="tx1"/>
+    </cs:fontRef>
+    <cs:spPr>
+      <a:noFill/>
+      <a:ln>
+        <a:noFill/>
+      </a:ln>
+    </cs:spPr>
+  </cs:floor>
+  <cs:gridlineMajor>
+    <cs:lnRef idx="0"/>
+    <cs:fillRef idx="0"/>
+    <cs:effectRef idx="0"/>
+    <cs:fontRef idx="minor">
+      <a:schemeClr val="tx1"/>
+    </cs:fontRef>
+    <cs:spPr>
+      <a:ln w="9525" cap="flat" cmpd="sng" algn="ctr">
+        <a:solidFill>
+          <a:schemeClr val="tx1">
+            <a:lumMod val="15000"/>
+            <a:lumOff val="85000"/>
+          </a:schemeClr>
+        </a:solidFill>
+        <a:round/>
+      </a:ln>
+    </cs:spPr>
+  </cs:gridlineMajor>
+  <cs:gridlineMinor>
+    <cs:lnRef idx="0"/>
+    <cs:fillRef idx="0"/>
+    <cs:effectRef idx="0"/>
+    <cs:fontRef idx="minor">
+      <a:schemeClr val="tx1"/>
+    </cs:fontRef>
+    <cs:spPr>
+      <a:ln w="9525" cap="flat" cmpd="sng" algn="ctr">
+        <a:solidFill>
+          <a:schemeClr val="tx1">
+            <a:lumMod val="5000"/>
+            <a:lumOff val="95000"/>
+          </a:schemeClr>
+        </a:solidFill>
+        <a:round/>
+      </a:ln>
+    </cs:spPr>
+  </cs:gridlineMinor>
+  <cs:hiLoLine>
+    <cs:lnRef idx="0"/>
+    <cs:fillRef idx="0"/>
+    <cs:effectRef idx="0"/>
+    <cs:fontRef idx="minor">
+      <a:schemeClr val="tx1"/>
+    </cs:fontRef>
+    <cs:spPr>
+      <a:ln w="9525" cap="flat" cmpd="sng" algn="ctr">
+        <a:solidFill>
+          <a:schemeClr val="tx1">
+            <a:lumMod val="75000"/>
+            <a:lumOff val="25000"/>
+          </a:schemeClr>
+        </a:solidFill>
+        <a:round/>
+      </a:ln>
+    </cs:spPr>
+  </cs:hiLoLine>
+  <cs:leaderLine>
+    <cs:lnRef idx="0"/>
+    <cs:fillRef idx="0"/>
+    <cs:effectRef idx="0"/>
+    <cs:fontRef idx="minor">
+      <a:schemeClr val="tx1"/>
+    </cs:fontRef>
+    <cs:spPr>
+      <a:ln w="9525" cap="flat" cmpd="sng" algn="ctr">
+        <a:solidFill>
+          <a:schemeClr val="tx1">
+            <a:lumMod val="35000"/>
+            <a:lumOff val="65000"/>
+          </a:schemeClr>
+        </a:solidFill>
+        <a:round/>
+      </a:ln>
+    </cs:spPr>
+  </cs:leaderLine>
+  <cs:legend>
+    <cs:lnRef idx="0"/>
+    <cs:fillRef idx="0"/>
+    <cs:effectRef idx="0"/>
+    <cs:fontRef idx="minor">
+      <a:schemeClr val="tx1">
+        <a:lumMod val="65000"/>
+        <a:lumOff val="35000"/>
+      </a:schemeClr>
+    </cs:fontRef>
+    <cs:defRPr sz="900" kern="1200"/>
+  </cs:legend>
+  <cs:plotArea mods="allowNoFillOverride allowNoLineOverride">
+    <cs:lnRef idx="0"/>
+    <cs:fillRef idx="0"/>
+    <cs:effectRef idx="0"/>
+    <cs:fontRef idx="minor">
+      <a:schemeClr val="tx1"/>
+    </cs:fontRef>
+  </cs:plotArea>
+  <cs:plotArea3D mods="allowNoFillOverride allowNoLineOverride">
+    <cs:lnRef idx="0"/>
+    <cs:fillRef idx="0"/>
+    <cs:effectRef idx="0"/>
+    <cs:fontRef idx="minor">
+      <a:schemeClr val="tx1"/>
+    </cs:fontRef>
+  </cs:plotArea3D>
+  <cs:seriesAxis>
+    <cs:lnRef idx="0"/>
+    <cs:fillRef idx="0"/>
+    <cs:effectRef idx="0"/>
+    <cs:fontRef idx="minor">
+      <a:schemeClr val="tx1">
+        <a:lumMod val="65000"/>
+        <a:lumOff val="35000"/>
+      </a:schemeClr>
+    </cs:fontRef>
+    <cs:defRPr sz="900" kern="1200"/>
+  </cs:seriesAxis>
+  <cs:seriesLine>
+    <cs:lnRef idx="0"/>
+    <cs:fillRef idx="0"/>
+    <cs:effectRef idx="0"/>
+    <cs:fontRef idx="minor">
+      <a:schemeClr val="tx1"/>
+    </cs:fontRef>
+    <cs:spPr>
+      <a:ln w="9525" cap="flat" cmpd="sng" algn="ctr">
+        <a:solidFill>
+          <a:schemeClr val="tx1">
+            <a:lumMod val="35000"/>
+            <a:lumOff val="65000"/>
+          </a:schemeClr>
+        </a:solidFill>
+        <a:round/>
+      </a:ln>
+    </cs:spPr>
+  </cs:seriesLine>
+  <cs:title>
+    <cs:lnRef idx="0"/>
+    <cs:fillRef idx="0"/>
+    <cs:effectRef idx="0"/>
+    <cs:fontRef idx="minor">
+      <a:schemeClr val="tx1">
+        <a:lumMod val="65000"/>
+        <a:lumOff val="35000"/>
+      </a:schemeClr>
+    </cs:fontRef>
+    <cs:defRPr sz="1400" b="0" kern="1200" spc="0" baseline="0"/>
+  </cs:title>
+  <cs:trendline>
+    <cs:lnRef idx="0">
+      <cs:styleClr val="auto"/>
+    </cs:lnRef>
+    <cs:fillRef idx="0"/>
+    <cs:effectRef idx="0"/>
+    <cs:fontRef idx="minor">
+      <a:schemeClr val="tx1"/>
+    </cs:fontRef>
+    <cs:spPr>
+      <a:ln w="19050" cap="rnd">
+        <a:solidFill>
+          <a:schemeClr val="phClr"/>
+        </a:solidFill>
+        <a:prstDash val="sysDot"/>
+      </a:ln>
+    </cs:spPr>
+  </cs:trendline>
+  <cs:trendlineLabel>
+    <cs:lnRef idx="0"/>
+    <cs:fillRef idx="0"/>
+    <cs:effectRef idx="0"/>
+    <cs:fontRef idx="minor">
+      <a:schemeClr val="tx1">
+        <a:lumMod val="65000"/>
+        <a:lumOff val="35000"/>
+      </a:schemeClr>
+    </cs:fontRef>
+    <cs:defRPr sz="900" kern="1200"/>
+  </cs:trendlineLabel>
+  <cs:upBar>
+    <cs:lnRef idx="0"/>
+    <cs:fillRef idx="0"/>
+    <cs:effectRef idx="0"/>
+    <cs:fontRef idx="minor">
+      <a:schemeClr val="dk1"/>
+    </cs:fontRef>
+    <cs:spPr>
+      <a:solidFill>
+        <a:schemeClr val="lt1"/>
+      </a:solidFill>
+      <a:ln w="9525">
+        <a:solidFill>
+          <a:schemeClr val="tx1">
+            <a:lumMod val="15000"/>
+            <a:lumOff val="85000"/>
+          </a:schemeClr>
+        </a:solidFill>
+      </a:ln>
+    </cs:spPr>
+  </cs:upBar>
+  <cs:valueAxis>
+    <cs:lnRef idx="0"/>
+    <cs:fillRef idx="0"/>
+    <cs:effectRef idx="0"/>
+    <cs:fontRef idx="minor">
+      <a:schemeClr val="tx1">
+        <a:lumMod val="65000"/>
+        <a:lumOff val="35000"/>
+      </a:schemeClr>
+    </cs:fontRef>
+    <cs:defRPr sz="900" kern="1200"/>
+  </cs:valueAxis>
+  <cs:wall>
+    <cs:lnRef idx="0"/>
+    <cs:fillRef idx="0"/>
+    <cs:effectRef idx="0"/>
+    <cs:fontRef idx="minor">
+      <a:schemeClr val="tx1"/>
+    </cs:fontRef>
+    <cs:spPr>
+      <a:noFill/>
+      <a:ln>
+        <a:noFill/>
+      </a:ln>
+    </cs:spPr>
+  </cs:wall>
+</cs:chartStyle>
+</file>
+
+<file path=ppt/charts/style6.xml><?xml version="1.0" encoding="utf-8"?>
+<cs:chartStyle xmlns:cs="http://schemas.microsoft.com/office/drawing/2012/chartStyle" xmlns:a="http://schemas.openxmlformats.org/drawingml/2006/main" id="201">
+  <cs:axisTitle>
+    <cs:lnRef idx="0"/>
+    <cs:fillRef idx="0"/>
+    <cs:effectRef idx="0"/>
+    <cs:fontRef idx="minor">
+      <a:schemeClr val="tx1">
+        <a:lumMod val="65000"/>
+        <a:lumOff val="35000"/>
+      </a:schemeClr>
+    </cs:fontRef>
+    <cs:defRPr sz="1000" kern="1200"/>
+  </cs:axisTitle>
+  <cs:categoryAxis>
+    <cs:lnRef idx="0"/>
+    <cs:fillRef idx="0"/>
+    <cs:effectRef idx="0"/>
+    <cs:fontRef idx="minor">
+      <a:schemeClr val="tx1">
+        <a:lumMod val="65000"/>
+        <a:lumOff val="35000"/>
+      </a:schemeClr>
+    </cs:fontRef>
+    <cs:spPr>
+      <a:ln w="9525" cap="flat" cmpd="sng" algn="ctr">
+        <a:solidFill>
+          <a:schemeClr val="tx1">
+            <a:lumMod val="15000"/>
+            <a:lumOff val="85000"/>
+          </a:schemeClr>
+        </a:solidFill>
+        <a:round/>
+      </a:ln>
+    </cs:spPr>
+    <cs:defRPr sz="900" kern="1200"/>
+  </cs:categoryAxis>
+  <cs:chartArea mods="allowNoFillOverride allowNoLineOverride">
+    <cs:lnRef idx="0"/>
+    <cs:fillRef idx="0"/>
+    <cs:effectRef idx="0"/>
+    <cs:fontRef idx="minor">
+      <a:schemeClr val="tx1"/>
+    </cs:fontRef>
+    <cs:spPr>
+      <a:solidFill>
+        <a:schemeClr val="bg1"/>
+      </a:solidFill>
+      <a:ln w="9525" cap="flat" cmpd="sng" algn="ctr">
+        <a:solidFill>
+          <a:schemeClr val="tx1">
+            <a:lumMod val="15000"/>
+            <a:lumOff val="85000"/>
+          </a:schemeClr>
+        </a:solidFill>
+        <a:round/>
+      </a:ln>
+    </cs:spPr>
+    <cs:defRPr sz="1000" kern="1200"/>
+  </cs:chartArea>
+  <cs:dataLabel>
+    <cs:lnRef idx="0"/>
+    <cs:fillRef idx="0"/>
+    <cs:effectRef idx="0"/>
+    <cs:fontRef idx="minor">
+      <a:schemeClr val="tx1">
+        <a:lumMod val="75000"/>
+        <a:lumOff val="25000"/>
+      </a:schemeClr>
+    </cs:fontRef>
+    <cs:defRPr sz="900" kern="1200"/>
+  </cs:dataLabel>
+  <cs:dataLabelCallout>
+    <cs:lnRef idx="0"/>
+    <cs:fillRef idx="0"/>
+    <cs:effectRef idx="0"/>
+    <cs:fontRef idx="minor">
+      <a:schemeClr val="dk1">
+        <a:lumMod val="65000"/>
+        <a:lumOff val="35000"/>
+      </a:schemeClr>
+    </cs:fontRef>
+    <cs:spPr>
+      <a:solidFill>
+        <a:schemeClr val="lt1"/>
+      </a:solidFill>
+      <a:ln>
+        <a:solidFill>
+          <a:schemeClr val="dk1">
+            <a:lumMod val="25000"/>
+            <a:lumOff val="75000"/>
+          </a:schemeClr>
+        </a:solidFill>
+      </a:ln>
+    </cs:spPr>
+    <cs:defRPr sz="900" kern="1200"/>
+    <cs:bodyPr rot="0" spcFirstLastPara="1" vertOverflow="clip" horzOverflow="clip" vert="horz" wrap="square" lIns="36576" tIns="18288" rIns="36576" bIns="18288" anchor="ctr" anchorCtr="1">
+      <a:spAutoFit/>
+    </cs:bodyPr>
+  </cs:dataLabelCallout>
+  <cs:dataPoint>
+    <cs:lnRef idx="0"/>
+    <cs:fillRef idx="1">
+      <cs:styleClr val="auto"/>
+    </cs:fillRef>
+    <cs:effectRef idx="0"/>
+    <cs:fontRef idx="minor">
+      <a:schemeClr val="tx1"/>
+    </cs:fontRef>
+  </cs:dataPoint>
+  <cs:dataPoint3D>
+    <cs:lnRef idx="0"/>
+    <cs:fillRef idx="1">
+      <cs:styleClr val="auto"/>
+    </cs:fillRef>
+    <cs:effectRef idx="0"/>
+    <cs:fontRef idx="minor">
+      <a:schemeClr val="tx1"/>
+    </cs:fontRef>
+  </cs:dataPoint3D>
+  <cs:dataPointLine>
+    <cs:lnRef idx="0">
+      <cs:styleClr val="auto"/>
+    </cs:lnRef>
+    <cs:fillRef idx="1"/>
+    <cs:effectRef idx="0"/>
+    <cs:fontRef idx="minor">
+      <a:schemeClr val="tx1"/>
+    </cs:fontRef>
+    <cs:spPr>
+      <a:ln w="28575" cap="rnd">
+        <a:solidFill>
+          <a:schemeClr val="phClr"/>
+        </a:solidFill>
+        <a:round/>
+      </a:ln>
+    </cs:spPr>
+  </cs:dataPointLine>
+  <cs:dataPointMarker>
+    <cs:lnRef idx="0">
+      <cs:styleClr val="auto"/>
+    </cs:lnRef>
+    <cs:fillRef idx="1">
+      <cs:styleClr val="auto"/>
+    </cs:fillRef>
+    <cs:effectRef idx="0"/>
+    <cs:fontRef idx="minor">
+      <a:schemeClr val="tx1"/>
+    </cs:fontRef>
+    <cs:spPr>
+      <a:ln w="9525">
+        <a:solidFill>
+          <a:schemeClr val="phClr"/>
+        </a:solidFill>
+      </a:ln>
+    </cs:spPr>
+  </cs:dataPointMarker>
+  <cs:dataPointMarkerLayout symbol="circle" size="5"/>
+  <cs:dataPointWireframe>
+    <cs:lnRef idx="0">
+      <cs:styleClr val="auto"/>
+    </cs:lnRef>
+    <cs:fillRef idx="1"/>
+    <cs:effectRef idx="0"/>
+    <cs:fontRef idx="minor">
+      <a:schemeClr val="tx1"/>
+    </cs:fontRef>
+    <cs:spPr>
+      <a:ln w="9525" cap="rnd">
+        <a:solidFill>
+          <a:schemeClr val="phClr"/>
+        </a:solidFill>
+        <a:round/>
+      </a:ln>
+    </cs:spPr>
+  </cs:dataPointWireframe>
+  <cs:dataTable>
+    <cs:lnRef idx="0"/>
+    <cs:fillRef idx="0"/>
+    <cs:effectRef idx="0"/>
+    <cs:fontRef idx="minor">
+      <a:schemeClr val="tx1">
+        <a:lumMod val="65000"/>
+        <a:lumOff val="35000"/>
+      </a:schemeClr>
+    </cs:fontRef>
+    <cs:spPr>
+      <a:noFill/>
+      <a:ln w="9525" cap="flat" cmpd="sng" algn="ctr">
+        <a:solidFill>
+          <a:schemeClr val="tx1">
+            <a:lumMod val="15000"/>
+            <a:lumOff val="85000"/>
+          </a:schemeClr>
+        </a:solidFill>
+        <a:round/>
+      </a:ln>
+    </cs:spPr>
+    <cs:defRPr sz="900" kern="1200"/>
+  </cs:dataTable>
+  <cs:downBar>
+    <cs:lnRef idx="0"/>
+    <cs:fillRef idx="0"/>
+    <cs:effectRef idx="0"/>
+    <cs:fontRef idx="minor">
+      <a:schemeClr val="dk1"/>
+    </cs:fontRef>
+    <cs:spPr>
+      <a:solidFill>
+        <a:schemeClr val="dk1">
+          <a:lumMod val="65000"/>
+          <a:lumOff val="35000"/>
+        </a:schemeClr>
+      </a:solidFill>
+      <a:ln w="9525">
+        <a:solidFill>
+          <a:schemeClr val="tx1">
+            <a:lumMod val="65000"/>
+            <a:lumOff val="35000"/>
+          </a:schemeClr>
+        </a:solidFill>
+      </a:ln>
+    </cs:spPr>
+  </cs:downBar>
+  <cs:dropLine>
+    <cs:lnRef idx="0"/>
+    <cs:fillRef idx="0"/>
+    <cs:effectRef idx="0"/>
+    <cs:fontRef idx="minor">
+      <a:schemeClr val="tx1"/>
+    </cs:fontRef>
+    <cs:spPr>
+      <a:ln w="9525" cap="flat" cmpd="sng" algn="ctr">
+        <a:solidFill>
+          <a:schemeClr val="tx1">
+            <a:lumMod val="35000"/>
+            <a:lumOff val="65000"/>
+          </a:schemeClr>
+        </a:solidFill>
+        <a:round/>
+      </a:ln>
+    </cs:spPr>
+  </cs:dropLine>
+  <cs:errorBar>
+    <cs:lnRef idx="0"/>
+    <cs:fillRef idx="0"/>
+    <cs:effectRef idx="0"/>
+    <cs:fontRef idx="minor">
+      <a:schemeClr val="tx1"/>
+    </cs:fontRef>
+    <cs:spPr>
+      <a:ln w="9525" cap="flat" cmpd="sng" algn="ctr">
+        <a:solidFill>
+          <a:schemeClr val="tx1">
+            <a:lumMod val="65000"/>
+            <a:lumOff val="35000"/>
+          </a:schemeClr>
+        </a:solidFill>
+        <a:round/>
+      </a:ln>
+    </cs:spPr>
+  </cs:errorBar>
+  <cs:floor>
+    <cs:lnRef idx="0"/>
+    <cs:fillRef idx="0"/>
+    <cs:effectRef idx="0"/>
+    <cs:fontRef idx="minor">
+      <a:schemeClr val="tx1"/>
+    </cs:fontRef>
+    <cs:spPr>
+      <a:noFill/>
+      <a:ln>
+        <a:noFill/>
+      </a:ln>
+    </cs:spPr>
+  </cs:floor>
+  <cs:gridlineMajor>
+    <cs:lnRef idx="0"/>
+    <cs:fillRef idx="0"/>
+    <cs:effectRef idx="0"/>
+    <cs:fontRef idx="minor">
+      <a:schemeClr val="tx1"/>
+    </cs:fontRef>
+    <cs:spPr>
+      <a:ln w="9525" cap="flat" cmpd="sng" algn="ctr">
+        <a:solidFill>
+          <a:schemeClr val="tx1">
+            <a:lumMod val="15000"/>
+            <a:lumOff val="85000"/>
+          </a:schemeClr>
+        </a:solidFill>
+        <a:round/>
+      </a:ln>
+    </cs:spPr>
+  </cs:gridlineMajor>
+  <cs:gridlineMinor>
+    <cs:lnRef idx="0"/>
+    <cs:fillRef idx="0"/>
+    <cs:effectRef idx="0"/>
+    <cs:fontRef idx="minor">
+      <a:schemeClr val="tx1"/>
+    </cs:fontRef>
+    <cs:spPr>
+      <a:ln w="9525" cap="flat" cmpd="sng" algn="ctr">
+        <a:solidFill>
+          <a:schemeClr val="tx1">
+            <a:lumMod val="5000"/>
+            <a:lumOff val="95000"/>
+          </a:schemeClr>
+        </a:solidFill>
+        <a:round/>
+      </a:ln>
+    </cs:spPr>
+  </cs:gridlineMinor>
+  <cs:hiLoLine>
+    <cs:lnRef idx="0"/>
+    <cs:fillRef idx="0"/>
+    <cs:effectRef idx="0"/>
+    <cs:fontRef idx="minor">
+      <a:schemeClr val="tx1"/>
+    </cs:fontRef>
+    <cs:spPr>
+      <a:ln w="9525" cap="flat" cmpd="sng" algn="ctr">
+        <a:solidFill>
+          <a:schemeClr val="tx1">
+            <a:lumMod val="75000"/>
+            <a:lumOff val="25000"/>
+          </a:schemeClr>
+        </a:solidFill>
+        <a:round/>
+      </a:ln>
+    </cs:spPr>
+  </cs:hiLoLine>
+  <cs:leaderLine>
+    <cs:lnRef idx="0"/>
+    <cs:fillRef idx="0"/>
+    <cs:effectRef idx="0"/>
+    <cs:fontRef idx="minor">
+      <a:schemeClr val="tx1"/>
+    </cs:fontRef>
+    <cs:spPr>
+      <a:ln w="9525" cap="flat" cmpd="sng" algn="ctr">
+        <a:solidFill>
+          <a:schemeClr val="tx1">
+            <a:lumMod val="35000"/>
+            <a:lumOff val="65000"/>
+          </a:schemeClr>
+        </a:solidFill>
+        <a:round/>
+      </a:ln>
+    </cs:spPr>
+  </cs:leaderLine>
+  <cs:legend>
+    <cs:lnRef idx="0"/>
+    <cs:fillRef idx="0"/>
+    <cs:effectRef idx="0"/>
+    <cs:fontRef idx="minor">
+      <a:schemeClr val="tx1">
+        <a:lumMod val="65000"/>
+        <a:lumOff val="35000"/>
+      </a:schemeClr>
+    </cs:fontRef>
+    <cs:defRPr sz="900" kern="1200"/>
+  </cs:legend>
+  <cs:plotArea mods="allowNoFillOverride allowNoLineOverride">
+    <cs:lnRef idx="0"/>
+    <cs:fillRef idx="0"/>
+    <cs:effectRef idx="0"/>
+    <cs:fontRef idx="minor">
+      <a:schemeClr val="tx1"/>
+    </cs:fontRef>
+  </cs:plotArea>
+  <cs:plotArea3D mods="allowNoFillOverride allowNoLineOverride">
+    <cs:lnRef idx="0"/>
+    <cs:fillRef idx="0"/>
+    <cs:effectRef idx="0"/>
+    <cs:fontRef idx="minor">
+      <a:schemeClr val="tx1"/>
+    </cs:fontRef>
+  </cs:plotArea3D>
+  <cs:seriesAxis>
+    <cs:lnRef idx="0"/>
+    <cs:fillRef idx="0"/>
+    <cs:effectRef idx="0"/>
+    <cs:fontRef idx="minor">
+      <a:schemeClr val="tx1">
+        <a:lumMod val="65000"/>
+        <a:lumOff val="35000"/>
+      </a:schemeClr>
+    </cs:fontRef>
+    <cs:defRPr sz="900" kern="1200"/>
+  </cs:seriesAxis>
+  <cs:seriesLine>
+    <cs:lnRef idx="0"/>
+    <cs:fillRef idx="0"/>
+    <cs:effectRef idx="0"/>
+    <cs:fontRef idx="minor">
+      <a:schemeClr val="tx1"/>
+    </cs:fontRef>
+    <cs:spPr>
+      <a:ln w="9525" cap="flat" cmpd="sng" algn="ctr">
+        <a:solidFill>
+          <a:schemeClr val="tx1">
+            <a:lumMod val="35000"/>
+            <a:lumOff val="65000"/>
+          </a:schemeClr>
+        </a:solidFill>
+        <a:round/>
+      </a:ln>
+    </cs:spPr>
+  </cs:seriesLine>
+  <cs:title>
+    <cs:lnRef idx="0"/>
+    <cs:fillRef idx="0"/>
+    <cs:effectRef idx="0"/>
+    <cs:fontRef idx="minor">
+      <a:schemeClr val="tx1">
+        <a:lumMod val="65000"/>
+        <a:lumOff val="35000"/>
+      </a:schemeClr>
+    </cs:fontRef>
+    <cs:defRPr sz="1400" b="0" kern="1200" spc="0" baseline="0"/>
+  </cs:title>
+  <cs:trendline>
+    <cs:lnRef idx="0">
+      <cs:styleClr val="auto"/>
+    </cs:lnRef>
+    <cs:fillRef idx="0"/>
+    <cs:effectRef idx="0"/>
+    <cs:fontRef idx="minor">
+      <a:schemeClr val="tx1"/>
+    </cs:fontRef>
+    <cs:spPr>
+      <a:ln w="19050" cap="rnd">
+        <a:solidFill>
+          <a:schemeClr val="phClr"/>
+        </a:solidFill>
+        <a:prstDash val="sysDot"/>
+      </a:ln>
+    </cs:spPr>
+  </cs:trendline>
+  <cs:trendlineLabel>
+    <cs:lnRef idx="0"/>
+    <cs:fillRef idx="0"/>
+    <cs:effectRef idx="0"/>
+    <cs:fontRef idx="minor">
+      <a:schemeClr val="tx1">
+        <a:lumMod val="65000"/>
+        <a:lumOff val="35000"/>
+      </a:schemeClr>
+    </cs:fontRef>
+    <cs:defRPr sz="900" kern="1200"/>
+  </cs:trendlineLabel>
+  <cs:upBar>
+    <cs:lnRef idx="0"/>
+    <cs:fillRef idx="0"/>
+    <cs:effectRef idx="0"/>
+    <cs:fontRef idx="minor">
+      <a:schemeClr val="dk1"/>
+    </cs:fontRef>
+    <cs:spPr>
+      <a:solidFill>
+        <a:schemeClr val="lt1"/>
+      </a:solidFill>
+      <a:ln w="9525">
+        <a:solidFill>
+          <a:schemeClr val="tx1">
+            <a:lumMod val="15000"/>
+            <a:lumOff val="85000"/>
+          </a:schemeClr>
+        </a:solidFill>
+      </a:ln>
+    </cs:spPr>
+  </cs:upBar>
+  <cs:valueAxis>
+    <cs:lnRef idx="0"/>
+    <cs:fillRef idx="0"/>
+    <cs:effectRef idx="0"/>
+    <cs:fontRef idx="minor">
+      <a:schemeClr val="tx1">
+        <a:lumMod val="65000"/>
+        <a:lumOff val="35000"/>
+      </a:schemeClr>
+    </cs:fontRef>
+    <cs:defRPr sz="900" kern="1200"/>
+  </cs:valueAxis>
+  <cs:wall>
+    <cs:lnRef idx="0"/>
+    <cs:fillRef idx="0"/>
+    <cs:effectRef idx="0"/>
+    <cs:fontRef idx="minor">
+      <a:schemeClr val="tx1"/>
+    </cs:fontRef>
+    <cs:spPr>
+      <a:noFill/>
+      <a:ln>
+        <a:noFill/>
+      </a:ln>
+    </cs:spPr>
+  </cs:wall>
+</cs:chartStyle>
+</file>
+
 <file path=ppt/notesMasters/notesMaster1.xml><?xml version="1.0" encoding="utf-8"?>
 <p:notesMaster xmlns:a="http://schemas.openxmlformats.org/drawingml/2006/main" xmlns:r="http://schemas.openxmlformats.org/officeDocument/2006/relationships" xmlns:p="http://schemas.openxmlformats.org/presentationml/2006/main">
   <p:cSld>
@@ -4578,7 +6388,7 @@
           <a:p>
             <a:fld id="{5EB2940D-9C20-4E88-B6DA-1821C75C2316}" type="datetimeFigureOut">
               <a:rPr lang="en-IN" smtClean="0"/>
-              <a:t>17-07-2025</a:t>
+              <a:t>18-07-2025</a:t>
             </a:fld>
             <a:endParaRPr lang="en-IN"/>
           </a:p>
@@ -6597,7 +8407,7 @@
           <a:p>
             <a:fld id="{D737C1D5-1EA4-4B24-B76E-91AF016E39DE}" type="datetimeFigureOut">
               <a:rPr lang="en-IN" smtClean="0"/>
-              <a:t>17-07-2025</a:t>
+              <a:t>18-07-2025</a:t>
             </a:fld>
             <a:endParaRPr lang="en-IN"/>
           </a:p>
@@ -6767,7 +8577,7 @@
           <a:p>
             <a:fld id="{D737C1D5-1EA4-4B24-B76E-91AF016E39DE}" type="datetimeFigureOut">
               <a:rPr lang="en-IN" smtClean="0"/>
-              <a:t>17-07-2025</a:t>
+              <a:t>18-07-2025</a:t>
             </a:fld>
             <a:endParaRPr lang="en-IN"/>
           </a:p>
@@ -6947,7 +8757,7 @@
           <a:p>
             <a:fld id="{D737C1D5-1EA4-4B24-B76E-91AF016E39DE}" type="datetimeFigureOut">
               <a:rPr lang="en-IN" smtClean="0"/>
-              <a:t>17-07-2025</a:t>
+              <a:t>18-07-2025</a:t>
             </a:fld>
             <a:endParaRPr lang="en-IN"/>
           </a:p>
@@ -7117,7 +8927,7 @@
           <a:p>
             <a:fld id="{D737C1D5-1EA4-4B24-B76E-91AF016E39DE}" type="datetimeFigureOut">
               <a:rPr lang="en-IN" smtClean="0"/>
-              <a:t>17-07-2025</a:t>
+              <a:t>18-07-2025</a:t>
             </a:fld>
             <a:endParaRPr lang="en-IN"/>
           </a:p>
@@ -7363,7 +9173,7 @@
           <a:p>
             <a:fld id="{D737C1D5-1EA4-4B24-B76E-91AF016E39DE}" type="datetimeFigureOut">
               <a:rPr lang="en-IN" smtClean="0"/>
-              <a:t>17-07-2025</a:t>
+              <a:t>18-07-2025</a:t>
             </a:fld>
             <a:endParaRPr lang="en-IN"/>
           </a:p>
@@ -7595,7 +9405,7 @@
           <a:p>
             <a:fld id="{D737C1D5-1EA4-4B24-B76E-91AF016E39DE}" type="datetimeFigureOut">
               <a:rPr lang="en-IN" smtClean="0"/>
-              <a:t>17-07-2025</a:t>
+              <a:t>18-07-2025</a:t>
             </a:fld>
             <a:endParaRPr lang="en-IN"/>
           </a:p>
@@ -7962,7 +9772,7 @@
           <a:p>
             <a:fld id="{D737C1D5-1EA4-4B24-B76E-91AF016E39DE}" type="datetimeFigureOut">
               <a:rPr lang="en-IN" smtClean="0"/>
-              <a:t>17-07-2025</a:t>
+              <a:t>18-07-2025</a:t>
             </a:fld>
             <a:endParaRPr lang="en-IN"/>
           </a:p>
@@ -8080,7 +9890,7 @@
           <a:p>
             <a:fld id="{D737C1D5-1EA4-4B24-B76E-91AF016E39DE}" type="datetimeFigureOut">
               <a:rPr lang="en-IN" smtClean="0"/>
-              <a:t>17-07-2025</a:t>
+              <a:t>18-07-2025</a:t>
             </a:fld>
             <a:endParaRPr lang="en-IN"/>
           </a:p>
@@ -8175,7 +9985,7 @@
           <a:p>
             <a:fld id="{D737C1D5-1EA4-4B24-B76E-91AF016E39DE}" type="datetimeFigureOut">
               <a:rPr lang="en-IN" smtClean="0"/>
-              <a:t>17-07-2025</a:t>
+              <a:t>18-07-2025</a:t>
             </a:fld>
             <a:endParaRPr lang="en-IN"/>
           </a:p>
@@ -8452,7 +10262,7 @@
           <a:p>
             <a:fld id="{D737C1D5-1EA4-4B24-B76E-91AF016E39DE}" type="datetimeFigureOut">
               <a:rPr lang="en-IN" smtClean="0"/>
-              <a:t>17-07-2025</a:t>
+              <a:t>18-07-2025</a:t>
             </a:fld>
             <a:endParaRPr lang="en-IN"/>
           </a:p>
@@ -8705,7 +10515,7 @@
           <a:p>
             <a:fld id="{D737C1D5-1EA4-4B24-B76E-91AF016E39DE}" type="datetimeFigureOut">
               <a:rPr lang="en-IN" smtClean="0"/>
-              <a:t>17-07-2025</a:t>
+              <a:t>18-07-2025</a:t>
             </a:fld>
             <a:endParaRPr lang="en-IN"/>
           </a:p>
@@ -8918,7 +10728,7 @@
           <a:p>
             <a:fld id="{D737C1D5-1EA4-4B24-B76E-91AF016E39DE}" type="datetimeFigureOut">
               <a:rPr lang="en-IN" smtClean="0"/>
-              <a:t>17-07-2025</a:t>
+              <a:t>18-07-2025</a:t>
             </a:fld>
             <a:endParaRPr lang="en-IN"/>
           </a:p>
@@ -10949,8 +12759,8 @@
         </p:blipFill>
         <p:spPr>
           <a:xfrm>
-            <a:off x="508000" y="827101"/>
-            <a:ext cx="4943548" cy="5262661"/>
+            <a:off x="6860302" y="1370703"/>
+            <a:ext cx="5264739" cy="4847531"/>
           </a:xfrm>
           <a:prstGeom prst="rect">
             <a:avLst/>
@@ -10971,8 +12781,8 @@
         </p:nvSpPr>
         <p:spPr>
           <a:xfrm>
-            <a:off x="739302" y="1322961"/>
-            <a:ext cx="4426085" cy="4513627"/>
+            <a:off x="7108207" y="1825275"/>
+            <a:ext cx="4732305" cy="4174698"/>
           </a:xfrm>
           <a:custGeom>
             <a:avLst/>
@@ -11007,6 +12817,36 @@
               <a:gd name="connsiteY3" fmla="*/ 4503899 h 4513627"/>
               <a:gd name="connsiteX4" fmla="*/ 0 w 4426085"/>
               <a:gd name="connsiteY4" fmla="*/ 0 h 4513627"/>
+              <a:gd name="connsiteX0" fmla="*/ 0 w 4426085"/>
+              <a:gd name="connsiteY0" fmla="*/ 0 h 4503899"/>
+              <a:gd name="connsiteX1" fmla="*/ 4396902 w 4426085"/>
+              <a:gd name="connsiteY1" fmla="*/ 0 h 4503899"/>
+              <a:gd name="connsiteX2" fmla="*/ 4426085 w 4426085"/>
+              <a:gd name="connsiteY2" fmla="*/ 4469995 h 4503899"/>
+              <a:gd name="connsiteX3" fmla="*/ 29183 w 4426085"/>
+              <a:gd name="connsiteY3" fmla="*/ 4503899 h 4503899"/>
+              <a:gd name="connsiteX4" fmla="*/ 0 w 4426085"/>
+              <a:gd name="connsiteY4" fmla="*/ 0 h 4503899"/>
+              <a:gd name="connsiteX0" fmla="*/ 0 w 4426085"/>
+              <a:gd name="connsiteY0" fmla="*/ 0 h 4514807"/>
+              <a:gd name="connsiteX1" fmla="*/ 4396902 w 4426085"/>
+              <a:gd name="connsiteY1" fmla="*/ 0 h 4514807"/>
+              <a:gd name="connsiteX2" fmla="*/ 4426085 w 4426085"/>
+              <a:gd name="connsiteY2" fmla="*/ 4469995 h 4514807"/>
+              <a:gd name="connsiteX3" fmla="*/ 10097 w 4426085"/>
+              <a:gd name="connsiteY3" fmla="*/ 4514807 h 4514807"/>
+              <a:gd name="connsiteX4" fmla="*/ 0 w 4426085"/>
+              <a:gd name="connsiteY4" fmla="*/ 0 h 4514807"/>
+              <a:gd name="connsiteX0" fmla="*/ 18841 w 4444926"/>
+              <a:gd name="connsiteY0" fmla="*/ 0 h 4482083"/>
+              <a:gd name="connsiteX1" fmla="*/ 4415743 w 4444926"/>
+              <a:gd name="connsiteY1" fmla="*/ 0 h 4482083"/>
+              <a:gd name="connsiteX2" fmla="*/ 4444926 w 4444926"/>
+              <a:gd name="connsiteY2" fmla="*/ 4469995 h 4482083"/>
+              <a:gd name="connsiteX3" fmla="*/ 309 w 4444926"/>
+              <a:gd name="connsiteY3" fmla="*/ 4482083 h 4482083"/>
+              <a:gd name="connsiteX4" fmla="*/ 18841 w 4444926"/>
+              <a:gd name="connsiteY4" fmla="*/ 0 h 4482083"/>
             </a:gdLst>
             <a:ahLst/>
             <a:cxnLst>
@@ -11028,22 +12868,24 @@
             </a:cxnLst>
             <a:rect l="l" t="t" r="r" b="b"/>
             <a:pathLst>
-              <a:path w="4426085" h="4513627">
+              <a:path w="4444926" h="4482083">
                 <a:moveTo>
-                  <a:pt x="0" y="0"/>
+                  <a:pt x="18841" y="0"/>
                 </a:moveTo>
                 <a:lnTo>
-                  <a:pt x="4396902" y="0"/>
+                  <a:pt x="4415743" y="0"/>
                 </a:lnTo>
                 <a:lnTo>
-                  <a:pt x="4426085" y="4513627"/>
+                  <a:pt x="4444926" y="4469995"/>
                 </a:lnTo>
                 <a:lnTo>
-                  <a:pt x="29183" y="4503899"/>
+                  <a:pt x="309" y="4482083"/>
                 </a:lnTo>
-                <a:lnTo>
-                  <a:pt x="0" y="0"/>
-                </a:lnTo>
+                <a:cubicBezTo>
+                  <a:pt x="-3057" y="2977147"/>
+                  <a:pt x="22207" y="1504936"/>
+                  <a:pt x="18841" y="0"/>
+                </a:cubicBezTo>
                 <a:close/>
               </a:path>
             </a:pathLst>
@@ -11094,14 +12936,14 @@
         </p:nvSpPr>
         <p:spPr>
           <a:xfrm>
-            <a:off x="2295728" y="1478604"/>
-            <a:ext cx="1274323" cy="223736"/>
+            <a:off x="8725333" y="1963622"/>
+            <a:ext cx="1432992" cy="214011"/>
           </a:xfrm>
           <a:prstGeom prst="rect">
             <a:avLst/>
           </a:prstGeom>
           <a:noFill/>
-          <a:ln>
+          <a:ln w="19050">
             <a:solidFill>
               <a:schemeClr val="accent2"/>
             </a:solidFill>
@@ -11132,6 +12974,604 @@
           </a:p>
         </p:txBody>
       </p:sp>
+      <p:sp>
+        <p:nvSpPr>
+          <p:cNvPr id="13" name="Rectangle 12">
+            <a:extLst>
+              <a:ext uri="{FF2B5EF4-FFF2-40B4-BE49-F238E27FC236}">
+                <a16:creationId xmlns:a16="http://schemas.microsoft.com/office/drawing/2014/main" id="{AFFC69F9-F0BB-CC64-2DBE-FF47416894B9}"/>
+              </a:ext>
+            </a:extLst>
+          </p:cNvPr>
+          <p:cNvSpPr/>
+          <p:nvPr/>
+        </p:nvSpPr>
+        <p:spPr>
+          <a:xfrm>
+            <a:off x="646544" y="2233252"/>
+            <a:ext cx="1384570" cy="992214"/>
+          </a:xfrm>
+          <a:prstGeom prst="rect">
+            <a:avLst/>
+          </a:prstGeom>
+          <a:solidFill>
+            <a:srgbClr val="2C466B"/>
+          </a:solidFill>
+        </p:spPr>
+        <p:style>
+          <a:lnRef idx="2">
+            <a:schemeClr val="accent1">
+              <a:shade val="15000"/>
+            </a:schemeClr>
+          </a:lnRef>
+          <a:fillRef idx="1">
+            <a:schemeClr val="accent1"/>
+          </a:fillRef>
+          <a:effectRef idx="0">
+            <a:schemeClr val="accent1"/>
+          </a:effectRef>
+          <a:fontRef idx="minor">
+            <a:schemeClr val="lt1"/>
+          </a:fontRef>
+        </p:style>
+        <p:txBody>
+          <a:bodyPr rtlCol="0" anchor="ctr"/>
+          <a:lstStyle/>
+          <a:p>
+            <a:pPr algn="ctr"/>
+            <a:r>
+              <a:rPr lang="en-US" dirty="0"/>
+              <a:t>Input Form</a:t>
+            </a:r>
+          </a:p>
+          <a:p>
+            <a:pPr algn="ctr"/>
+            <a:r>
+              <a:rPr lang="en-US" dirty="0"/>
+              <a:t>Bounding Boxes</a:t>
+            </a:r>
+            <a:endParaRPr lang="en-IN" dirty="0"/>
+          </a:p>
+        </p:txBody>
+      </p:sp>
+      <p:sp>
+        <p:nvSpPr>
+          <p:cNvPr id="15" name="Rectangle 14">
+            <a:extLst>
+              <a:ext uri="{FF2B5EF4-FFF2-40B4-BE49-F238E27FC236}">
+                <a16:creationId xmlns:a16="http://schemas.microsoft.com/office/drawing/2014/main" id="{94F02554-8A7A-79DA-A1BD-9D72DC9405BD}"/>
+              </a:ext>
+            </a:extLst>
+          </p:cNvPr>
+          <p:cNvSpPr/>
+          <p:nvPr/>
+        </p:nvSpPr>
+        <p:spPr>
+          <a:xfrm>
+            <a:off x="646544" y="3692399"/>
+            <a:ext cx="1384570" cy="992214"/>
+          </a:xfrm>
+          <a:prstGeom prst="rect">
+            <a:avLst/>
+          </a:prstGeom>
+          <a:solidFill>
+            <a:srgbClr val="2C466B"/>
+          </a:solidFill>
+        </p:spPr>
+        <p:style>
+          <a:lnRef idx="2">
+            <a:schemeClr val="accent1">
+              <a:shade val="15000"/>
+            </a:schemeClr>
+          </a:lnRef>
+          <a:fillRef idx="1">
+            <a:schemeClr val="accent1"/>
+          </a:fillRef>
+          <a:effectRef idx="0">
+            <a:schemeClr val="accent1"/>
+          </a:effectRef>
+          <a:fontRef idx="minor">
+            <a:schemeClr val="lt1"/>
+          </a:fontRef>
+        </p:style>
+        <p:txBody>
+          <a:bodyPr rtlCol="0" anchor="ctr"/>
+          <a:lstStyle/>
+          <a:p>
+            <a:pPr algn="ctr"/>
+            <a:r>
+              <a:rPr lang="en-US" dirty="0"/>
+              <a:t>Ref. Form Bounding Boxes</a:t>
+            </a:r>
+            <a:endParaRPr lang="en-IN" dirty="0"/>
+          </a:p>
+        </p:txBody>
+      </p:sp>
+      <p:sp>
+        <p:nvSpPr>
+          <p:cNvPr id="17" name="Rectangle 16">
+            <a:extLst>
+              <a:ext uri="{FF2B5EF4-FFF2-40B4-BE49-F238E27FC236}">
+                <a16:creationId xmlns:a16="http://schemas.microsoft.com/office/drawing/2014/main" id="{F3478FEB-3E54-70CD-2DC7-6BD96FAB88FB}"/>
+              </a:ext>
+            </a:extLst>
+          </p:cNvPr>
+          <p:cNvSpPr/>
+          <p:nvPr/>
+        </p:nvSpPr>
+        <p:spPr>
+          <a:xfrm>
+            <a:off x="2675566" y="2477732"/>
+            <a:ext cx="784698" cy="503253"/>
+          </a:xfrm>
+          <a:prstGeom prst="rect">
+            <a:avLst/>
+          </a:prstGeom>
+          <a:solidFill>
+            <a:srgbClr val="2C466B"/>
+          </a:solidFill>
+        </p:spPr>
+        <p:style>
+          <a:lnRef idx="2">
+            <a:schemeClr val="accent1">
+              <a:shade val="15000"/>
+            </a:schemeClr>
+          </a:lnRef>
+          <a:fillRef idx="1">
+            <a:schemeClr val="accent1"/>
+          </a:fillRef>
+          <a:effectRef idx="0">
+            <a:schemeClr val="accent1"/>
+          </a:effectRef>
+          <a:fontRef idx="minor">
+            <a:schemeClr val="lt1"/>
+          </a:fontRef>
+        </p:style>
+        <p:txBody>
+          <a:bodyPr rtlCol="0" anchor="ctr"/>
+          <a:lstStyle/>
+          <a:p>
+            <a:pPr algn="ctr"/>
+            <a:r>
+              <a:rPr lang="en-US" dirty="0"/>
+              <a:t>Norm</a:t>
+            </a:r>
+            <a:endParaRPr lang="en-IN" dirty="0"/>
+          </a:p>
+        </p:txBody>
+      </p:sp>
+      <p:sp>
+        <p:nvSpPr>
+          <p:cNvPr id="18" name="Rectangle 17">
+            <a:extLst>
+              <a:ext uri="{FF2B5EF4-FFF2-40B4-BE49-F238E27FC236}">
+                <a16:creationId xmlns:a16="http://schemas.microsoft.com/office/drawing/2014/main" id="{861F33F4-59E7-B6F0-2E36-18ADD79DA13B}"/>
+              </a:ext>
+            </a:extLst>
+          </p:cNvPr>
+          <p:cNvSpPr/>
+          <p:nvPr/>
+        </p:nvSpPr>
+        <p:spPr>
+          <a:xfrm>
+            <a:off x="2675566" y="3936880"/>
+            <a:ext cx="784698" cy="503253"/>
+          </a:xfrm>
+          <a:prstGeom prst="rect">
+            <a:avLst/>
+          </a:prstGeom>
+          <a:solidFill>
+            <a:srgbClr val="2C466B"/>
+          </a:solidFill>
+        </p:spPr>
+        <p:style>
+          <a:lnRef idx="2">
+            <a:schemeClr val="accent1">
+              <a:shade val="15000"/>
+            </a:schemeClr>
+          </a:lnRef>
+          <a:fillRef idx="1">
+            <a:schemeClr val="accent1"/>
+          </a:fillRef>
+          <a:effectRef idx="0">
+            <a:schemeClr val="accent1"/>
+          </a:effectRef>
+          <a:fontRef idx="minor">
+            <a:schemeClr val="lt1"/>
+          </a:fontRef>
+        </p:style>
+        <p:txBody>
+          <a:bodyPr rtlCol="0" anchor="ctr"/>
+          <a:lstStyle/>
+          <a:p>
+            <a:pPr algn="ctr"/>
+            <a:r>
+              <a:rPr lang="en-US" dirty="0"/>
+              <a:t>Norm</a:t>
+            </a:r>
+            <a:endParaRPr lang="en-IN" dirty="0"/>
+          </a:p>
+        </p:txBody>
+      </p:sp>
+      <p:sp>
+        <p:nvSpPr>
+          <p:cNvPr id="19" name="Rectangle 18">
+            <a:extLst>
+              <a:ext uri="{FF2B5EF4-FFF2-40B4-BE49-F238E27FC236}">
+                <a16:creationId xmlns:a16="http://schemas.microsoft.com/office/drawing/2014/main" id="{7B9BBC49-9C29-ACCD-CE37-8551C72BED78}"/>
+              </a:ext>
+            </a:extLst>
+          </p:cNvPr>
+          <p:cNvSpPr/>
+          <p:nvPr/>
+        </p:nvSpPr>
+        <p:spPr>
+          <a:xfrm>
+            <a:off x="4180111" y="3219432"/>
+            <a:ext cx="784698" cy="503253"/>
+          </a:xfrm>
+          <a:prstGeom prst="rect">
+            <a:avLst/>
+          </a:prstGeom>
+          <a:solidFill>
+            <a:srgbClr val="2C466B"/>
+          </a:solidFill>
+        </p:spPr>
+        <p:style>
+          <a:lnRef idx="2">
+            <a:schemeClr val="accent1">
+              <a:shade val="15000"/>
+            </a:schemeClr>
+          </a:lnRef>
+          <a:fillRef idx="1">
+            <a:schemeClr val="accent1"/>
+          </a:fillRef>
+          <a:effectRef idx="0">
+            <a:schemeClr val="accent1"/>
+          </a:effectRef>
+          <a:fontRef idx="minor">
+            <a:schemeClr val="lt1"/>
+          </a:fontRef>
+        </p:style>
+        <p:txBody>
+          <a:bodyPr rtlCol="0" anchor="ctr"/>
+          <a:lstStyle/>
+          <a:p>
+            <a:pPr algn="ctr"/>
+            <a:r>
+              <a:rPr lang="en-US" dirty="0"/>
+              <a:t>IOU</a:t>
+            </a:r>
+            <a:endParaRPr lang="en-IN" dirty="0"/>
+          </a:p>
+        </p:txBody>
+      </p:sp>
+      <p:cxnSp>
+        <p:nvCxnSpPr>
+          <p:cNvPr id="21" name="Straight Arrow Connector 20">
+            <a:extLst>
+              <a:ext uri="{FF2B5EF4-FFF2-40B4-BE49-F238E27FC236}">
+                <a16:creationId xmlns:a16="http://schemas.microsoft.com/office/drawing/2014/main" id="{52572F1B-F872-8FC7-1FA4-46CB3803494D}"/>
+              </a:ext>
+            </a:extLst>
+          </p:cNvPr>
+          <p:cNvCxnSpPr>
+            <a:stCxn id="13" idx="3"/>
+            <a:endCxn id="17" idx="1"/>
+          </p:cNvCxnSpPr>
+          <p:nvPr/>
+        </p:nvCxnSpPr>
+        <p:spPr>
+          <a:xfrm>
+            <a:off x="2031114" y="2729359"/>
+            <a:ext cx="644452" cy="0"/>
+          </a:xfrm>
+          <a:prstGeom prst="straightConnector1">
+            <a:avLst/>
+          </a:prstGeom>
+          <a:ln>
+            <a:tailEnd type="triangle"/>
+          </a:ln>
+        </p:spPr>
+        <p:style>
+          <a:lnRef idx="1">
+            <a:schemeClr val="accent1"/>
+          </a:lnRef>
+          <a:fillRef idx="0">
+            <a:schemeClr val="accent1"/>
+          </a:fillRef>
+          <a:effectRef idx="0">
+            <a:schemeClr val="accent1"/>
+          </a:effectRef>
+          <a:fontRef idx="minor">
+            <a:schemeClr val="tx1"/>
+          </a:fontRef>
+        </p:style>
+      </p:cxnSp>
+      <p:cxnSp>
+        <p:nvCxnSpPr>
+          <p:cNvPr id="22" name="Straight Arrow Connector 21">
+            <a:extLst>
+              <a:ext uri="{FF2B5EF4-FFF2-40B4-BE49-F238E27FC236}">
+                <a16:creationId xmlns:a16="http://schemas.microsoft.com/office/drawing/2014/main" id="{650C580A-A36F-ADC7-EA22-E53EFD889718}"/>
+              </a:ext>
+            </a:extLst>
+          </p:cNvPr>
+          <p:cNvCxnSpPr/>
+          <p:nvPr/>
+        </p:nvCxnSpPr>
+        <p:spPr>
+          <a:xfrm>
+            <a:off x="2029084" y="4188506"/>
+            <a:ext cx="644452" cy="0"/>
+          </a:xfrm>
+          <a:prstGeom prst="straightConnector1">
+            <a:avLst/>
+          </a:prstGeom>
+          <a:ln>
+            <a:tailEnd type="triangle"/>
+          </a:ln>
+        </p:spPr>
+        <p:style>
+          <a:lnRef idx="1">
+            <a:schemeClr val="accent1"/>
+          </a:lnRef>
+          <a:fillRef idx="0">
+            <a:schemeClr val="accent1"/>
+          </a:fillRef>
+          <a:effectRef idx="0">
+            <a:schemeClr val="accent1"/>
+          </a:effectRef>
+          <a:fontRef idx="minor">
+            <a:schemeClr val="tx1"/>
+          </a:fontRef>
+        </p:style>
+      </p:cxnSp>
+      <p:cxnSp>
+        <p:nvCxnSpPr>
+          <p:cNvPr id="26" name="Connector: Elbow 25">
+            <a:extLst>
+              <a:ext uri="{FF2B5EF4-FFF2-40B4-BE49-F238E27FC236}">
+                <a16:creationId xmlns:a16="http://schemas.microsoft.com/office/drawing/2014/main" id="{7151A840-E69E-BB50-D3E2-1CC891B7402C}"/>
+              </a:ext>
+            </a:extLst>
+          </p:cNvPr>
+          <p:cNvCxnSpPr>
+            <a:stCxn id="17" idx="3"/>
+            <a:endCxn id="19" idx="0"/>
+          </p:cNvCxnSpPr>
+          <p:nvPr/>
+        </p:nvCxnSpPr>
+        <p:spPr>
+          <a:xfrm>
+            <a:off x="3460264" y="2729359"/>
+            <a:ext cx="1112196" cy="490073"/>
+          </a:xfrm>
+          <a:prstGeom prst="bentConnector2">
+            <a:avLst/>
+          </a:prstGeom>
+          <a:ln>
+            <a:tailEnd type="triangle"/>
+          </a:ln>
+        </p:spPr>
+        <p:style>
+          <a:lnRef idx="1">
+            <a:schemeClr val="accent1"/>
+          </a:lnRef>
+          <a:fillRef idx="0">
+            <a:schemeClr val="accent1"/>
+          </a:fillRef>
+          <a:effectRef idx="0">
+            <a:schemeClr val="accent1"/>
+          </a:effectRef>
+          <a:fontRef idx="minor">
+            <a:schemeClr val="tx1"/>
+          </a:fontRef>
+        </p:style>
+      </p:cxnSp>
+      <p:cxnSp>
+        <p:nvCxnSpPr>
+          <p:cNvPr id="28" name="Connector: Elbow 27">
+            <a:extLst>
+              <a:ext uri="{FF2B5EF4-FFF2-40B4-BE49-F238E27FC236}">
+                <a16:creationId xmlns:a16="http://schemas.microsoft.com/office/drawing/2014/main" id="{08C217E6-A50A-94C6-89F2-18B168F0D09D}"/>
+              </a:ext>
+            </a:extLst>
+          </p:cNvPr>
+          <p:cNvCxnSpPr>
+            <a:stCxn id="18" idx="3"/>
+            <a:endCxn id="19" idx="2"/>
+          </p:cNvCxnSpPr>
+          <p:nvPr/>
+        </p:nvCxnSpPr>
+        <p:spPr>
+          <a:xfrm flipV="1">
+            <a:off x="3460264" y="3722685"/>
+            <a:ext cx="1112196" cy="465822"/>
+          </a:xfrm>
+          <a:prstGeom prst="bentConnector2">
+            <a:avLst/>
+          </a:prstGeom>
+          <a:ln>
+            <a:tailEnd type="triangle"/>
+          </a:ln>
+        </p:spPr>
+        <p:style>
+          <a:lnRef idx="1">
+            <a:schemeClr val="accent1"/>
+          </a:lnRef>
+          <a:fillRef idx="0">
+            <a:schemeClr val="accent1"/>
+          </a:fillRef>
+          <a:effectRef idx="0">
+            <a:schemeClr val="accent1"/>
+          </a:effectRef>
+          <a:fontRef idx="minor">
+            <a:schemeClr val="tx1"/>
+          </a:fontRef>
+        </p:style>
+      </p:cxnSp>
+      <p:cxnSp>
+        <p:nvCxnSpPr>
+          <p:cNvPr id="29" name="Straight Arrow Connector 28">
+            <a:extLst>
+              <a:ext uri="{FF2B5EF4-FFF2-40B4-BE49-F238E27FC236}">
+                <a16:creationId xmlns:a16="http://schemas.microsoft.com/office/drawing/2014/main" id="{53311ED0-01F7-19C1-06FC-7E494398EEC6}"/>
+              </a:ext>
+            </a:extLst>
+          </p:cNvPr>
+          <p:cNvCxnSpPr/>
+          <p:nvPr/>
+        </p:nvCxnSpPr>
+        <p:spPr>
+          <a:xfrm>
+            <a:off x="4964809" y="3471058"/>
+            <a:ext cx="644452" cy="0"/>
+          </a:xfrm>
+          <a:prstGeom prst="straightConnector1">
+            <a:avLst/>
+          </a:prstGeom>
+          <a:ln>
+            <a:tailEnd type="triangle"/>
+          </a:ln>
+        </p:spPr>
+        <p:style>
+          <a:lnRef idx="1">
+            <a:schemeClr val="accent1"/>
+          </a:lnRef>
+          <a:fillRef idx="0">
+            <a:schemeClr val="accent1"/>
+          </a:fillRef>
+          <a:effectRef idx="0">
+            <a:schemeClr val="accent1"/>
+          </a:effectRef>
+          <a:fontRef idx="minor">
+            <a:schemeClr val="tx1"/>
+          </a:fontRef>
+        </p:style>
+      </p:cxnSp>
+      <p:sp>
+        <p:nvSpPr>
+          <p:cNvPr id="30" name="TextBox 29">
+            <a:extLst>
+              <a:ext uri="{FF2B5EF4-FFF2-40B4-BE49-F238E27FC236}">
+                <a16:creationId xmlns:a16="http://schemas.microsoft.com/office/drawing/2014/main" id="{575EB5DC-FE4B-BCB5-D755-CEE0A3E83947}"/>
+              </a:ext>
+            </a:extLst>
+          </p:cNvPr>
+          <p:cNvSpPr txBox="1"/>
+          <p:nvPr/>
+        </p:nvSpPr>
+        <p:spPr>
+          <a:xfrm>
+            <a:off x="5609261" y="3251597"/>
+            <a:ext cx="806631" cy="646331"/>
+          </a:xfrm>
+          <a:prstGeom prst="rect">
+            <a:avLst/>
+          </a:prstGeom>
+          <a:noFill/>
+        </p:spPr>
+        <p:txBody>
+          <a:bodyPr wrap="none" rtlCol="0">
+            <a:spAutoFit/>
+          </a:bodyPr>
+          <a:lstStyle/>
+          <a:p>
+            <a:pPr algn="ctr"/>
+            <a:r>
+              <a:rPr lang="en-US" dirty="0"/>
+              <a:t>Field </a:t>
+            </a:r>
+          </a:p>
+          <a:p>
+            <a:pPr algn="ctr"/>
+            <a:r>
+              <a:rPr lang="en-US" dirty="0"/>
+              <a:t>names</a:t>
+            </a:r>
+            <a:endParaRPr lang="en-IN" dirty="0"/>
+          </a:p>
+        </p:txBody>
+      </p:sp>
+      <p:cxnSp>
+        <p:nvCxnSpPr>
+          <p:cNvPr id="35" name="Straight Connector 34">
+            <a:extLst>
+              <a:ext uri="{FF2B5EF4-FFF2-40B4-BE49-F238E27FC236}">
+                <a16:creationId xmlns:a16="http://schemas.microsoft.com/office/drawing/2014/main" id="{46CBA9E8-ED60-7B4D-5CD8-C3A41A35FCD3}"/>
+              </a:ext>
+            </a:extLst>
+          </p:cNvPr>
+          <p:cNvCxnSpPr/>
+          <p:nvPr/>
+        </p:nvCxnSpPr>
+        <p:spPr>
+          <a:xfrm>
+            <a:off x="6553200" y="1148080"/>
+            <a:ext cx="0" cy="5070154"/>
+          </a:xfrm>
+          <a:prstGeom prst="line">
+            <a:avLst/>
+          </a:prstGeom>
+          <a:ln w="12700">
+            <a:solidFill>
+              <a:schemeClr val="tx1"/>
+            </a:solidFill>
+            <a:prstDash val="lgDash"/>
+          </a:ln>
+        </p:spPr>
+        <p:style>
+          <a:lnRef idx="1">
+            <a:schemeClr val="accent1"/>
+          </a:lnRef>
+          <a:fillRef idx="0">
+            <a:schemeClr val="accent1"/>
+          </a:fillRef>
+          <a:effectRef idx="0">
+            <a:schemeClr val="accent1"/>
+          </a:effectRef>
+          <a:fontRef idx="minor">
+            <a:schemeClr val="tx1"/>
+          </a:fontRef>
+        </p:style>
+      </p:cxnSp>
+      <p:sp>
+        <p:nvSpPr>
+          <p:cNvPr id="37" name="TextBox 36">
+            <a:extLst>
+              <a:ext uri="{FF2B5EF4-FFF2-40B4-BE49-F238E27FC236}">
+                <a16:creationId xmlns:a16="http://schemas.microsoft.com/office/drawing/2014/main" id="{77F51D94-D247-E24C-986B-FCF177C2F182}"/>
+              </a:ext>
+            </a:extLst>
+          </p:cNvPr>
+          <p:cNvSpPr txBox="1"/>
+          <p:nvPr/>
+        </p:nvSpPr>
+        <p:spPr>
+          <a:xfrm>
+            <a:off x="8806613" y="990709"/>
+            <a:ext cx="1538947" cy="369332"/>
+          </a:xfrm>
+          <a:prstGeom prst="rect">
+            <a:avLst/>
+          </a:prstGeom>
+          <a:noFill/>
+        </p:spPr>
+        <p:txBody>
+          <a:bodyPr wrap="none" rtlCol="0">
+            <a:spAutoFit/>
+          </a:bodyPr>
+          <a:lstStyle/>
+          <a:p>
+            <a:r>
+              <a:rPr lang="en-US" b="1" dirty="0"/>
+              <a:t>Normalization</a:t>
+            </a:r>
+            <a:endParaRPr lang="en-IN" b="1" dirty="0"/>
+          </a:p>
+        </p:txBody>
+      </p:sp>
     </p:spTree>
     <p:extLst>
       <p:ext uri="{BB962C8B-B14F-4D97-AF65-F5344CB8AC3E}">
@@ -11142,6 +13582,596 @@
   <p:clrMapOvr>
     <a:masterClrMapping/>
   </p:clrMapOvr>
+  <p:timing>
+    <p:tnLst>
+      <p:par>
+        <p:cTn id="1" dur="indefinite" restart="never" nodeType="tmRoot">
+          <p:childTnLst>
+            <p:seq concurrent="1" nextAc="seek">
+              <p:cTn id="2" dur="indefinite" nodeType="mainSeq">
+                <p:childTnLst>
+                  <p:par>
+                    <p:cTn id="3" fill="hold">
+                      <p:stCondLst>
+                        <p:cond delay="indefinite"/>
+                      </p:stCondLst>
+                      <p:childTnLst>
+                        <p:par>
+                          <p:cTn id="4" fill="hold">
+                            <p:stCondLst>
+                              <p:cond delay="0"/>
+                            </p:stCondLst>
+                            <p:childTnLst>
+                              <p:par>
+                                <p:cTn id="5" presetID="1" presetClass="entr" presetSubtype="0" fill="hold" grpId="0" nodeType="clickEffect">
+                                  <p:stCondLst>
+                                    <p:cond delay="0"/>
+                                  </p:stCondLst>
+                                  <p:childTnLst>
+                                    <p:set>
+                                      <p:cBhvr>
+                                        <p:cTn id="6" dur="1" fill="hold">
+                                          <p:stCondLst>
+                                            <p:cond delay="0"/>
+                                          </p:stCondLst>
+                                        </p:cTn>
+                                        <p:tgtEl>
+                                          <p:spTgt spid="15"/>
+                                        </p:tgtEl>
+                                        <p:attrNameLst>
+                                          <p:attrName>style.visibility</p:attrName>
+                                        </p:attrNameLst>
+                                      </p:cBhvr>
+                                      <p:to>
+                                        <p:strVal val="visible"/>
+                                      </p:to>
+                                    </p:set>
+                                  </p:childTnLst>
+                                </p:cTn>
+                              </p:par>
+                            </p:childTnLst>
+                          </p:cTn>
+                        </p:par>
+                      </p:childTnLst>
+                    </p:cTn>
+                  </p:par>
+                  <p:par>
+                    <p:cTn id="7" fill="hold">
+                      <p:stCondLst>
+                        <p:cond delay="indefinite"/>
+                      </p:stCondLst>
+                      <p:childTnLst>
+                        <p:par>
+                          <p:cTn id="8" fill="hold">
+                            <p:stCondLst>
+                              <p:cond delay="0"/>
+                            </p:stCondLst>
+                            <p:childTnLst>
+                              <p:par>
+                                <p:cTn id="9" presetID="1" presetClass="entr" presetSubtype="0" fill="hold" nodeType="clickEffect">
+                                  <p:stCondLst>
+                                    <p:cond delay="0"/>
+                                  </p:stCondLst>
+                                  <p:childTnLst>
+                                    <p:set>
+                                      <p:cBhvr>
+                                        <p:cTn id="10" dur="1" fill="hold">
+                                          <p:stCondLst>
+                                            <p:cond delay="0"/>
+                                          </p:stCondLst>
+                                        </p:cTn>
+                                        <p:tgtEl>
+                                          <p:spTgt spid="22"/>
+                                        </p:tgtEl>
+                                        <p:attrNameLst>
+                                          <p:attrName>style.visibility</p:attrName>
+                                        </p:attrNameLst>
+                                      </p:cBhvr>
+                                      <p:to>
+                                        <p:strVal val="visible"/>
+                                      </p:to>
+                                    </p:set>
+                                  </p:childTnLst>
+                                </p:cTn>
+                              </p:par>
+                              <p:par>
+                                <p:cTn id="11" presetID="1" presetClass="entr" presetSubtype="0" fill="hold" grpId="0" nodeType="withEffect">
+                                  <p:stCondLst>
+                                    <p:cond delay="0"/>
+                                  </p:stCondLst>
+                                  <p:childTnLst>
+                                    <p:set>
+                                      <p:cBhvr>
+                                        <p:cTn id="12" dur="1" fill="hold">
+                                          <p:stCondLst>
+                                            <p:cond delay="0"/>
+                                          </p:stCondLst>
+                                        </p:cTn>
+                                        <p:tgtEl>
+                                          <p:spTgt spid="18"/>
+                                        </p:tgtEl>
+                                        <p:attrNameLst>
+                                          <p:attrName>style.visibility</p:attrName>
+                                        </p:attrNameLst>
+                                      </p:cBhvr>
+                                      <p:to>
+                                        <p:strVal val="visible"/>
+                                      </p:to>
+                                    </p:set>
+                                  </p:childTnLst>
+                                </p:cTn>
+                              </p:par>
+                            </p:childTnLst>
+                          </p:cTn>
+                        </p:par>
+                      </p:childTnLst>
+                    </p:cTn>
+                  </p:par>
+                  <p:par>
+                    <p:cTn id="13" fill="hold">
+                      <p:stCondLst>
+                        <p:cond delay="indefinite"/>
+                      </p:stCondLst>
+                      <p:childTnLst>
+                        <p:par>
+                          <p:cTn id="14" fill="hold">
+                            <p:stCondLst>
+                              <p:cond delay="0"/>
+                            </p:stCondLst>
+                            <p:childTnLst>
+                              <p:par>
+                                <p:cTn id="15" presetID="1" presetClass="entr" presetSubtype="0" fill="hold" grpId="0" nodeType="clickEffect">
+                                  <p:stCondLst>
+                                    <p:cond delay="0"/>
+                                  </p:stCondLst>
+                                  <p:childTnLst>
+                                    <p:set>
+                                      <p:cBhvr>
+                                        <p:cTn id="16" dur="1" fill="hold">
+                                          <p:stCondLst>
+                                            <p:cond delay="0"/>
+                                          </p:stCondLst>
+                                        </p:cTn>
+                                        <p:tgtEl>
+                                          <p:spTgt spid="13"/>
+                                        </p:tgtEl>
+                                        <p:attrNameLst>
+                                          <p:attrName>style.visibility</p:attrName>
+                                        </p:attrNameLst>
+                                      </p:cBhvr>
+                                      <p:to>
+                                        <p:strVal val="visible"/>
+                                      </p:to>
+                                    </p:set>
+                                  </p:childTnLst>
+                                </p:cTn>
+                              </p:par>
+                              <p:par>
+                                <p:cTn id="17" presetID="1" presetClass="entr" presetSubtype="0" fill="hold" nodeType="withEffect">
+                                  <p:stCondLst>
+                                    <p:cond delay="0"/>
+                                  </p:stCondLst>
+                                  <p:childTnLst>
+                                    <p:set>
+                                      <p:cBhvr>
+                                        <p:cTn id="18" dur="1" fill="hold">
+                                          <p:stCondLst>
+                                            <p:cond delay="0"/>
+                                          </p:stCondLst>
+                                        </p:cTn>
+                                        <p:tgtEl>
+                                          <p:spTgt spid="21"/>
+                                        </p:tgtEl>
+                                        <p:attrNameLst>
+                                          <p:attrName>style.visibility</p:attrName>
+                                        </p:attrNameLst>
+                                      </p:cBhvr>
+                                      <p:to>
+                                        <p:strVal val="visible"/>
+                                      </p:to>
+                                    </p:set>
+                                  </p:childTnLst>
+                                </p:cTn>
+                              </p:par>
+                              <p:par>
+                                <p:cTn id="19" presetID="1" presetClass="entr" presetSubtype="0" fill="hold" grpId="0" nodeType="withEffect">
+                                  <p:stCondLst>
+                                    <p:cond delay="0"/>
+                                  </p:stCondLst>
+                                  <p:childTnLst>
+                                    <p:set>
+                                      <p:cBhvr>
+                                        <p:cTn id="20" dur="1" fill="hold">
+                                          <p:stCondLst>
+                                            <p:cond delay="0"/>
+                                          </p:stCondLst>
+                                        </p:cTn>
+                                        <p:tgtEl>
+                                          <p:spTgt spid="17"/>
+                                        </p:tgtEl>
+                                        <p:attrNameLst>
+                                          <p:attrName>style.visibility</p:attrName>
+                                        </p:attrNameLst>
+                                      </p:cBhvr>
+                                      <p:to>
+                                        <p:strVal val="visible"/>
+                                      </p:to>
+                                    </p:set>
+                                  </p:childTnLst>
+                                </p:cTn>
+                              </p:par>
+                            </p:childTnLst>
+                          </p:cTn>
+                        </p:par>
+                      </p:childTnLst>
+                    </p:cTn>
+                  </p:par>
+                  <p:par>
+                    <p:cTn id="21" fill="hold">
+                      <p:stCondLst>
+                        <p:cond delay="indefinite"/>
+                      </p:stCondLst>
+                      <p:childTnLst>
+                        <p:par>
+                          <p:cTn id="22" fill="hold">
+                            <p:stCondLst>
+                              <p:cond delay="0"/>
+                            </p:stCondLst>
+                            <p:childTnLst>
+                              <p:par>
+                                <p:cTn id="23" presetID="1" presetClass="entr" presetSubtype="0" fill="hold" nodeType="clickEffect">
+                                  <p:stCondLst>
+                                    <p:cond delay="0"/>
+                                  </p:stCondLst>
+                                  <p:childTnLst>
+                                    <p:set>
+                                      <p:cBhvr>
+                                        <p:cTn id="24" dur="1" fill="hold">
+                                          <p:stCondLst>
+                                            <p:cond delay="0"/>
+                                          </p:stCondLst>
+                                        </p:cTn>
+                                        <p:tgtEl>
+                                          <p:spTgt spid="26"/>
+                                        </p:tgtEl>
+                                        <p:attrNameLst>
+                                          <p:attrName>style.visibility</p:attrName>
+                                        </p:attrNameLst>
+                                      </p:cBhvr>
+                                      <p:to>
+                                        <p:strVal val="visible"/>
+                                      </p:to>
+                                    </p:set>
+                                  </p:childTnLst>
+                                </p:cTn>
+                              </p:par>
+                              <p:par>
+                                <p:cTn id="25" presetID="1" presetClass="entr" presetSubtype="0" fill="hold" grpId="0" nodeType="withEffect">
+                                  <p:stCondLst>
+                                    <p:cond delay="0"/>
+                                  </p:stCondLst>
+                                  <p:childTnLst>
+                                    <p:set>
+                                      <p:cBhvr>
+                                        <p:cTn id="26" dur="1" fill="hold">
+                                          <p:stCondLst>
+                                            <p:cond delay="0"/>
+                                          </p:stCondLst>
+                                        </p:cTn>
+                                        <p:tgtEl>
+                                          <p:spTgt spid="19"/>
+                                        </p:tgtEl>
+                                        <p:attrNameLst>
+                                          <p:attrName>style.visibility</p:attrName>
+                                        </p:attrNameLst>
+                                      </p:cBhvr>
+                                      <p:to>
+                                        <p:strVal val="visible"/>
+                                      </p:to>
+                                    </p:set>
+                                  </p:childTnLst>
+                                </p:cTn>
+                              </p:par>
+                              <p:par>
+                                <p:cTn id="27" presetID="1" presetClass="entr" presetSubtype="0" fill="hold" nodeType="withEffect">
+                                  <p:stCondLst>
+                                    <p:cond delay="0"/>
+                                  </p:stCondLst>
+                                  <p:childTnLst>
+                                    <p:set>
+                                      <p:cBhvr>
+                                        <p:cTn id="28" dur="1" fill="hold">
+                                          <p:stCondLst>
+                                            <p:cond delay="0"/>
+                                          </p:stCondLst>
+                                        </p:cTn>
+                                        <p:tgtEl>
+                                          <p:spTgt spid="28"/>
+                                        </p:tgtEl>
+                                        <p:attrNameLst>
+                                          <p:attrName>style.visibility</p:attrName>
+                                        </p:attrNameLst>
+                                      </p:cBhvr>
+                                      <p:to>
+                                        <p:strVal val="visible"/>
+                                      </p:to>
+                                    </p:set>
+                                  </p:childTnLst>
+                                </p:cTn>
+                              </p:par>
+                            </p:childTnLst>
+                          </p:cTn>
+                        </p:par>
+                      </p:childTnLst>
+                    </p:cTn>
+                  </p:par>
+                  <p:par>
+                    <p:cTn id="29" fill="hold">
+                      <p:stCondLst>
+                        <p:cond delay="indefinite"/>
+                      </p:stCondLst>
+                      <p:childTnLst>
+                        <p:par>
+                          <p:cTn id="30" fill="hold">
+                            <p:stCondLst>
+                              <p:cond delay="0"/>
+                            </p:stCondLst>
+                            <p:childTnLst>
+                              <p:par>
+                                <p:cTn id="31" presetID="1" presetClass="entr" presetSubtype="0" fill="hold" nodeType="clickEffect">
+                                  <p:stCondLst>
+                                    <p:cond delay="0"/>
+                                  </p:stCondLst>
+                                  <p:childTnLst>
+                                    <p:set>
+                                      <p:cBhvr>
+                                        <p:cTn id="32" dur="1" fill="hold">
+                                          <p:stCondLst>
+                                            <p:cond delay="0"/>
+                                          </p:stCondLst>
+                                        </p:cTn>
+                                        <p:tgtEl>
+                                          <p:spTgt spid="29"/>
+                                        </p:tgtEl>
+                                        <p:attrNameLst>
+                                          <p:attrName>style.visibility</p:attrName>
+                                        </p:attrNameLst>
+                                      </p:cBhvr>
+                                      <p:to>
+                                        <p:strVal val="visible"/>
+                                      </p:to>
+                                    </p:set>
+                                  </p:childTnLst>
+                                </p:cTn>
+                              </p:par>
+                              <p:par>
+                                <p:cTn id="33" presetID="1" presetClass="entr" presetSubtype="0" fill="hold" grpId="0" nodeType="withEffect">
+                                  <p:stCondLst>
+                                    <p:cond delay="0"/>
+                                  </p:stCondLst>
+                                  <p:childTnLst>
+                                    <p:set>
+                                      <p:cBhvr>
+                                        <p:cTn id="34" dur="1" fill="hold">
+                                          <p:stCondLst>
+                                            <p:cond delay="0"/>
+                                          </p:stCondLst>
+                                        </p:cTn>
+                                        <p:tgtEl>
+                                          <p:spTgt spid="30"/>
+                                        </p:tgtEl>
+                                        <p:attrNameLst>
+                                          <p:attrName>style.visibility</p:attrName>
+                                        </p:attrNameLst>
+                                      </p:cBhvr>
+                                      <p:to>
+                                        <p:strVal val="visible"/>
+                                      </p:to>
+                                    </p:set>
+                                  </p:childTnLst>
+                                </p:cTn>
+                              </p:par>
+                            </p:childTnLst>
+                          </p:cTn>
+                        </p:par>
+                      </p:childTnLst>
+                    </p:cTn>
+                  </p:par>
+                  <p:par>
+                    <p:cTn id="35" fill="hold">
+                      <p:stCondLst>
+                        <p:cond delay="indefinite"/>
+                      </p:stCondLst>
+                      <p:childTnLst>
+                        <p:par>
+                          <p:cTn id="36" fill="hold">
+                            <p:stCondLst>
+                              <p:cond delay="0"/>
+                            </p:stCondLst>
+                            <p:childTnLst>
+                              <p:par>
+                                <p:cTn id="37" presetID="1" presetClass="entr" presetSubtype="0" fill="hold" nodeType="clickEffect">
+                                  <p:stCondLst>
+                                    <p:cond delay="0"/>
+                                  </p:stCondLst>
+                                  <p:childTnLst>
+                                    <p:set>
+                                      <p:cBhvr>
+                                        <p:cTn id="38" dur="1" fill="hold">
+                                          <p:stCondLst>
+                                            <p:cond delay="0"/>
+                                          </p:stCondLst>
+                                        </p:cTn>
+                                        <p:tgtEl>
+                                          <p:spTgt spid="4"/>
+                                        </p:tgtEl>
+                                        <p:attrNameLst>
+                                          <p:attrName>style.visibility</p:attrName>
+                                        </p:attrNameLst>
+                                      </p:cBhvr>
+                                      <p:to>
+                                        <p:strVal val="visible"/>
+                                      </p:to>
+                                    </p:set>
+                                  </p:childTnLst>
+                                </p:cTn>
+                              </p:par>
+                              <p:par>
+                                <p:cTn id="39" presetID="1" presetClass="entr" presetSubtype="0" fill="hold" grpId="0" nodeType="withEffect">
+                                  <p:stCondLst>
+                                    <p:cond delay="0"/>
+                                  </p:stCondLst>
+                                  <p:childTnLst>
+                                    <p:set>
+                                      <p:cBhvr>
+                                        <p:cTn id="40" dur="1" fill="hold">
+                                          <p:stCondLst>
+                                            <p:cond delay="0"/>
+                                          </p:stCondLst>
+                                        </p:cTn>
+                                        <p:tgtEl>
+                                          <p:spTgt spid="37"/>
+                                        </p:tgtEl>
+                                        <p:attrNameLst>
+                                          <p:attrName>style.visibility</p:attrName>
+                                        </p:attrNameLst>
+                                      </p:cBhvr>
+                                      <p:to>
+                                        <p:strVal val="visible"/>
+                                      </p:to>
+                                    </p:set>
+                                  </p:childTnLst>
+                                </p:cTn>
+                              </p:par>
+                            </p:childTnLst>
+                          </p:cTn>
+                        </p:par>
+                      </p:childTnLst>
+                    </p:cTn>
+                  </p:par>
+                  <p:par>
+                    <p:cTn id="41" fill="hold">
+                      <p:stCondLst>
+                        <p:cond delay="indefinite"/>
+                      </p:stCondLst>
+                      <p:childTnLst>
+                        <p:par>
+                          <p:cTn id="42" fill="hold">
+                            <p:stCondLst>
+                              <p:cond delay="0"/>
+                            </p:stCondLst>
+                            <p:childTnLst>
+                              <p:par>
+                                <p:cTn id="43" presetID="1" presetClass="entr" presetSubtype="0" fill="hold" grpId="0" nodeType="clickEffect">
+                                  <p:stCondLst>
+                                    <p:cond delay="0"/>
+                                  </p:stCondLst>
+                                  <p:childTnLst>
+                                    <p:set>
+                                      <p:cBhvr>
+                                        <p:cTn id="44" dur="1" fill="hold">
+                                          <p:stCondLst>
+                                            <p:cond delay="0"/>
+                                          </p:stCondLst>
+                                        </p:cTn>
+                                        <p:tgtEl>
+                                          <p:spTgt spid="11"/>
+                                        </p:tgtEl>
+                                        <p:attrNameLst>
+                                          <p:attrName>style.visibility</p:attrName>
+                                        </p:attrNameLst>
+                                      </p:cBhvr>
+                                      <p:to>
+                                        <p:strVal val="visible"/>
+                                      </p:to>
+                                    </p:set>
+                                  </p:childTnLst>
+                                </p:cTn>
+                              </p:par>
+                            </p:childTnLst>
+                          </p:cTn>
+                        </p:par>
+                      </p:childTnLst>
+                    </p:cTn>
+                  </p:par>
+                  <p:par>
+                    <p:cTn id="45" fill="hold">
+                      <p:stCondLst>
+                        <p:cond delay="indefinite"/>
+                      </p:stCondLst>
+                      <p:childTnLst>
+                        <p:par>
+                          <p:cTn id="46" fill="hold">
+                            <p:stCondLst>
+                              <p:cond delay="0"/>
+                            </p:stCondLst>
+                            <p:childTnLst>
+                              <p:par>
+                                <p:cTn id="47" presetID="1" presetClass="entr" presetSubtype="0" fill="hold" grpId="0" nodeType="clickEffect">
+                                  <p:stCondLst>
+                                    <p:cond delay="0"/>
+                                  </p:stCondLst>
+                                  <p:childTnLst>
+                                    <p:set>
+                                      <p:cBhvr>
+                                        <p:cTn id="48" dur="1" fill="hold">
+                                          <p:stCondLst>
+                                            <p:cond delay="0"/>
+                                          </p:stCondLst>
+                                        </p:cTn>
+                                        <p:tgtEl>
+                                          <p:spTgt spid="12"/>
+                                        </p:tgtEl>
+                                        <p:attrNameLst>
+                                          <p:attrName>style.visibility</p:attrName>
+                                        </p:attrNameLst>
+                                      </p:cBhvr>
+                                      <p:to>
+                                        <p:strVal val="visible"/>
+                                      </p:to>
+                                    </p:set>
+                                  </p:childTnLst>
+                                </p:cTn>
+                              </p:par>
+                            </p:childTnLst>
+                          </p:cTn>
+                        </p:par>
+                      </p:childTnLst>
+                    </p:cTn>
+                  </p:par>
+                </p:childTnLst>
+              </p:cTn>
+              <p:prevCondLst>
+                <p:cond evt="onPrev" delay="0">
+                  <p:tgtEl>
+                    <p:sldTgt/>
+                  </p:tgtEl>
+                </p:cond>
+              </p:prevCondLst>
+              <p:nextCondLst>
+                <p:cond evt="onNext" delay="0">
+                  <p:tgtEl>
+                    <p:sldTgt/>
+                  </p:tgtEl>
+                </p:cond>
+              </p:nextCondLst>
+            </p:seq>
+          </p:childTnLst>
+        </p:cTn>
+      </p:par>
+    </p:tnLst>
+    <p:bldLst>
+      <p:bldP spid="11" grpId="0" animBg="1"/>
+      <p:bldP spid="12" grpId="0" animBg="1"/>
+      <p:bldP spid="13" grpId="0" animBg="1"/>
+      <p:bldP spid="15" grpId="0" animBg="1"/>
+      <p:bldP spid="17" grpId="0" animBg="1"/>
+      <p:bldP spid="18" grpId="0" animBg="1"/>
+      <p:bldP spid="19" grpId="0" animBg="1"/>
+      <p:bldP spid="30" grpId="0"/>
+      <p:bldP spid="37" grpId="0"/>
+    </p:bldLst>
+  </p:timing>
 </p:sld>
 </file>
 
@@ -11513,6 +14543,1003 @@
           </a:p>
         </p:txBody>
       </p:sp>
+      <p:grpSp>
+        <p:nvGrpSpPr>
+          <p:cNvPr id="17" name="Group 16">
+            <a:extLst>
+              <a:ext uri="{FF2B5EF4-FFF2-40B4-BE49-F238E27FC236}">
+                <a16:creationId xmlns:a16="http://schemas.microsoft.com/office/drawing/2014/main" id="{62891BD5-426E-481B-8DF3-CE93FF5E592A}"/>
+              </a:ext>
+            </a:extLst>
+          </p:cNvPr>
+          <p:cNvGrpSpPr/>
+          <p:nvPr/>
+        </p:nvGrpSpPr>
+        <p:grpSpPr>
+          <a:xfrm>
+            <a:off x="3603076" y="1476378"/>
+            <a:ext cx="2679530" cy="618836"/>
+            <a:chOff x="3603076" y="1476378"/>
+            <a:chExt cx="2679530" cy="618836"/>
+          </a:xfrm>
+        </p:grpSpPr>
+        <p:sp>
+          <p:nvSpPr>
+            <p:cNvPr id="21" name="Rectangle 20">
+              <a:extLst>
+                <a:ext uri="{FF2B5EF4-FFF2-40B4-BE49-F238E27FC236}">
+                  <a16:creationId xmlns:a16="http://schemas.microsoft.com/office/drawing/2014/main" id="{8E08879D-02A8-206F-A262-2FEDA1EEF792}"/>
+                </a:ext>
+              </a:extLst>
+            </p:cNvPr>
+            <p:cNvSpPr/>
+            <p:nvPr/>
+          </p:nvSpPr>
+          <p:spPr>
+            <a:xfrm>
+              <a:off x="5229661" y="1476378"/>
+              <a:ext cx="1052945" cy="618836"/>
+            </a:xfrm>
+            <a:prstGeom prst="rect">
+              <a:avLst/>
+            </a:prstGeom>
+            <a:solidFill>
+              <a:srgbClr val="2C466B"/>
+            </a:solidFill>
+          </p:spPr>
+          <p:style>
+            <a:lnRef idx="2">
+              <a:schemeClr val="accent1">
+                <a:shade val="50000"/>
+              </a:schemeClr>
+            </a:lnRef>
+            <a:fillRef idx="1">
+              <a:schemeClr val="accent1"/>
+            </a:fillRef>
+            <a:effectRef idx="0">
+              <a:schemeClr val="accent1"/>
+            </a:effectRef>
+            <a:fontRef idx="minor">
+              <a:schemeClr val="lt1"/>
+            </a:fontRef>
+          </p:style>
+          <p:txBody>
+            <a:bodyPr rtlCol="0" anchor="ctr"/>
+            <a:lstStyle/>
+            <a:p>
+              <a:pPr algn="ctr"/>
+              <a:r>
+                <a:rPr lang="en-IN" dirty="0" err="1"/>
+                <a:t>TrOCR</a:t>
+              </a:r>
+              <a:endParaRPr lang="en-IN" dirty="0"/>
+            </a:p>
+          </p:txBody>
+        </p:sp>
+        <p:cxnSp>
+          <p:nvCxnSpPr>
+            <p:cNvPr id="22" name="Straight Arrow Connector 21">
+              <a:extLst>
+                <a:ext uri="{FF2B5EF4-FFF2-40B4-BE49-F238E27FC236}">
+                  <a16:creationId xmlns:a16="http://schemas.microsoft.com/office/drawing/2014/main" id="{641E486B-4AFE-022E-8043-FF07C9B3C3D9}"/>
+                </a:ext>
+              </a:extLst>
+            </p:cNvPr>
+            <p:cNvCxnSpPr>
+              <a:cxnSpLocks/>
+            </p:cNvCxnSpPr>
+            <p:nvPr/>
+          </p:nvCxnSpPr>
+          <p:spPr>
+            <a:xfrm>
+              <a:off x="3603076" y="1785796"/>
+              <a:ext cx="1501929" cy="0"/>
+            </a:xfrm>
+            <a:prstGeom prst="straightConnector1">
+              <a:avLst/>
+            </a:prstGeom>
+            <a:ln>
+              <a:tailEnd type="triangle"/>
+            </a:ln>
+          </p:spPr>
+          <p:style>
+            <a:lnRef idx="1">
+              <a:schemeClr val="accent1"/>
+            </a:lnRef>
+            <a:fillRef idx="0">
+              <a:schemeClr val="accent1"/>
+            </a:fillRef>
+            <a:effectRef idx="0">
+              <a:schemeClr val="accent1"/>
+            </a:effectRef>
+            <a:fontRef idx="minor">
+              <a:schemeClr val="tx1"/>
+            </a:fontRef>
+          </p:style>
+        </p:cxnSp>
+      </p:grpSp>
+      <p:graphicFrame>
+        <p:nvGraphicFramePr>
+          <p:cNvPr id="24" name="Table 23">
+            <a:extLst>
+              <a:ext uri="{FF2B5EF4-FFF2-40B4-BE49-F238E27FC236}">
+                <a16:creationId xmlns:a16="http://schemas.microsoft.com/office/drawing/2014/main" id="{F009C723-6557-9062-804D-A7B9B79851A9}"/>
+              </a:ext>
+            </a:extLst>
+          </p:cNvPr>
+          <p:cNvGraphicFramePr>
+            <a:graphicFrameLocks noGrp="1"/>
+          </p:cNvGraphicFramePr>
+          <p:nvPr>
+            <p:extLst>
+              <p:ext uri="{D42A27DB-BD31-4B8C-83A1-F6EECF244321}">
+                <p14:modId xmlns:p14="http://schemas.microsoft.com/office/powerpoint/2010/main" val="3751844168"/>
+              </p:ext>
+            </p:extLst>
+          </p:nvPr>
+        </p:nvGraphicFramePr>
+        <p:xfrm>
+          <a:off x="4424239" y="2794143"/>
+          <a:ext cx="2664692" cy="2595880"/>
+        </p:xfrm>
+        <a:graphic>
+          <a:graphicData uri="http://schemas.openxmlformats.org/drawingml/2006/table">
+            <a:tbl>
+              <a:tblPr firstRow="1" bandRow="1">
+                <a:tableStyleId>{5C22544A-7EE6-4342-B048-85BDC9FD1C3A}</a:tableStyleId>
+              </a:tblPr>
+              <a:tblGrid>
+                <a:gridCol w="1332346">
+                  <a:extLst>
+                    <a:ext uri="{9D8B030D-6E8A-4147-A177-3AD203B41FA5}">
+                      <a16:colId xmlns:a16="http://schemas.microsoft.com/office/drawing/2014/main" val="2792863021"/>
+                    </a:ext>
+                  </a:extLst>
+                </a:gridCol>
+                <a:gridCol w="1332346">
+                  <a:extLst>
+                    <a:ext uri="{9D8B030D-6E8A-4147-A177-3AD203B41FA5}">
+                      <a16:colId xmlns:a16="http://schemas.microsoft.com/office/drawing/2014/main" val="2952665996"/>
+                    </a:ext>
+                  </a:extLst>
+                </a:gridCol>
+              </a:tblGrid>
+              <a:tr h="370840">
+                <a:tc>
+                  <a:txBody>
+                    <a:bodyPr/>
+                    <a:lstStyle/>
+                    <a:p>
+                      <a:pPr algn="ctr"/>
+                      <a:r>
+                        <a:rPr lang="en-US" dirty="0"/>
+                        <a:t>Parameters</a:t>
+                      </a:r>
+                      <a:endParaRPr lang="en-IN" dirty="0"/>
+                    </a:p>
+                  </a:txBody>
+                  <a:tcPr/>
+                </a:tc>
+                <a:tc>
+                  <a:txBody>
+                    <a:bodyPr/>
+                    <a:lstStyle/>
+                    <a:p>
+                      <a:pPr algn="ctr"/>
+                      <a:r>
+                        <a:rPr lang="en-US" dirty="0"/>
+                        <a:t>Value</a:t>
+                      </a:r>
+                      <a:endParaRPr lang="en-IN" dirty="0"/>
+                    </a:p>
+                  </a:txBody>
+                  <a:tcPr/>
+                </a:tc>
+                <a:extLst>
+                  <a:ext uri="{0D108BD9-81ED-4DB2-BD59-A6C34878D82A}">
+                    <a16:rowId xmlns:a16="http://schemas.microsoft.com/office/drawing/2014/main" val="1286056942"/>
+                  </a:ext>
+                </a:extLst>
+              </a:tr>
+              <a:tr h="370840">
+                <a:tc>
+                  <a:txBody>
+                    <a:bodyPr/>
+                    <a:lstStyle/>
+                    <a:p>
+                      <a:pPr algn="ctr"/>
+                      <a:r>
+                        <a:rPr lang="en-US" dirty="0"/>
+                        <a:t>Type</a:t>
+                      </a:r>
+                      <a:endParaRPr lang="en-IN" dirty="0"/>
+                    </a:p>
+                  </a:txBody>
+                  <a:tcPr/>
+                </a:tc>
+                <a:tc>
+                  <a:txBody>
+                    <a:bodyPr/>
+                    <a:lstStyle/>
+                    <a:p>
+                      <a:pPr algn="ctr"/>
+                      <a:r>
+                        <a:rPr lang="en-US" dirty="0" err="1"/>
+                        <a:t>ViT</a:t>
+                      </a:r>
+                      <a:endParaRPr lang="en-IN" dirty="0"/>
+                    </a:p>
+                  </a:txBody>
+                  <a:tcPr/>
+                </a:tc>
+                <a:extLst>
+                  <a:ext uri="{0D108BD9-81ED-4DB2-BD59-A6C34878D82A}">
+                    <a16:rowId xmlns:a16="http://schemas.microsoft.com/office/drawing/2014/main" val="3535858163"/>
+                  </a:ext>
+                </a:extLst>
+              </a:tr>
+              <a:tr h="370840">
+                <a:tc>
+                  <a:txBody>
+                    <a:bodyPr/>
+                    <a:lstStyle/>
+                    <a:p>
+                      <a:pPr algn="ctr"/>
+                      <a:r>
+                        <a:rPr lang="en-US" dirty="0"/>
+                        <a:t>Version</a:t>
+                      </a:r>
+                      <a:endParaRPr lang="en-IN" dirty="0"/>
+                    </a:p>
+                  </a:txBody>
+                  <a:tcPr/>
+                </a:tc>
+                <a:tc>
+                  <a:txBody>
+                    <a:bodyPr/>
+                    <a:lstStyle/>
+                    <a:p>
+                      <a:pPr algn="ctr"/>
+                      <a:r>
+                        <a:rPr lang="en-US" dirty="0" err="1"/>
+                        <a:t>TrOCR</a:t>
+                      </a:r>
+                      <a:r>
+                        <a:rPr lang="en-US" dirty="0"/>
+                        <a:t>-Large</a:t>
+                      </a:r>
+                      <a:endParaRPr lang="en-IN" dirty="0"/>
+                    </a:p>
+                  </a:txBody>
+                  <a:tcPr/>
+                </a:tc>
+                <a:extLst>
+                  <a:ext uri="{0D108BD9-81ED-4DB2-BD59-A6C34878D82A}">
+                    <a16:rowId xmlns:a16="http://schemas.microsoft.com/office/drawing/2014/main" val="2683170438"/>
+                  </a:ext>
+                </a:extLst>
+              </a:tr>
+              <a:tr h="370840">
+                <a:tc>
+                  <a:txBody>
+                    <a:bodyPr/>
+                    <a:lstStyle/>
+                    <a:p>
+                      <a:pPr algn="ctr"/>
+                      <a:r>
+                        <a:rPr lang="en-US" dirty="0"/>
+                        <a:t>Pre-Trained</a:t>
+                      </a:r>
+                      <a:endParaRPr lang="en-IN" dirty="0"/>
+                    </a:p>
+                  </a:txBody>
+                  <a:tcPr/>
+                </a:tc>
+                <a:tc>
+                  <a:txBody>
+                    <a:bodyPr/>
+                    <a:lstStyle/>
+                    <a:p>
+                      <a:pPr algn="ctr"/>
+                      <a:r>
+                        <a:rPr lang="en-US" dirty="0"/>
+                        <a:t>IAM Dataset</a:t>
+                      </a:r>
+                      <a:endParaRPr lang="en-IN" dirty="0"/>
+                    </a:p>
+                  </a:txBody>
+                  <a:tcPr/>
+                </a:tc>
+                <a:extLst>
+                  <a:ext uri="{0D108BD9-81ED-4DB2-BD59-A6C34878D82A}">
+                    <a16:rowId xmlns:a16="http://schemas.microsoft.com/office/drawing/2014/main" val="3639362220"/>
+                  </a:ext>
+                </a:extLst>
+              </a:tr>
+              <a:tr h="370840">
+                <a:tc>
+                  <a:txBody>
+                    <a:bodyPr/>
+                    <a:lstStyle/>
+                    <a:p>
+                      <a:pPr algn="ctr"/>
+                      <a:r>
+                        <a:rPr lang="en-US" dirty="0"/>
+                        <a:t>Parameters</a:t>
+                      </a:r>
+                      <a:endParaRPr lang="en-IN" dirty="0"/>
+                    </a:p>
+                  </a:txBody>
+                  <a:tcPr/>
+                </a:tc>
+                <a:tc>
+                  <a:txBody>
+                    <a:bodyPr/>
+                    <a:lstStyle/>
+                    <a:p>
+                      <a:pPr algn="ctr"/>
+                      <a:r>
+                        <a:rPr lang="en-US" dirty="0"/>
+                        <a:t>580M</a:t>
+                      </a:r>
+                      <a:endParaRPr lang="en-IN" dirty="0"/>
+                    </a:p>
+                  </a:txBody>
+                  <a:tcPr/>
+                </a:tc>
+                <a:extLst>
+                  <a:ext uri="{0D108BD9-81ED-4DB2-BD59-A6C34878D82A}">
+                    <a16:rowId xmlns:a16="http://schemas.microsoft.com/office/drawing/2014/main" val="3127248469"/>
+                  </a:ext>
+                </a:extLst>
+              </a:tr>
+              <a:tr h="370840">
+                <a:tc>
+                  <a:txBody>
+                    <a:bodyPr/>
+                    <a:lstStyle/>
+                    <a:p>
+                      <a:pPr algn="ctr"/>
+                      <a:r>
+                        <a:rPr lang="en-US" dirty="0"/>
+                        <a:t>Input Size</a:t>
+                      </a:r>
+                      <a:endParaRPr lang="en-IN" dirty="0"/>
+                    </a:p>
+                  </a:txBody>
+                  <a:tcPr/>
+                </a:tc>
+                <a:tc>
+                  <a:txBody>
+                    <a:bodyPr/>
+                    <a:lstStyle/>
+                    <a:p>
+                      <a:pPr algn="ctr"/>
+                      <a:r>
+                        <a:rPr lang="en-US" dirty="0"/>
+                        <a:t>1000x1000</a:t>
+                      </a:r>
+                      <a:endParaRPr lang="en-IN" dirty="0"/>
+                    </a:p>
+                  </a:txBody>
+                  <a:tcPr/>
+                </a:tc>
+                <a:extLst>
+                  <a:ext uri="{0D108BD9-81ED-4DB2-BD59-A6C34878D82A}">
+                    <a16:rowId xmlns:a16="http://schemas.microsoft.com/office/drawing/2014/main" val="1965356155"/>
+                  </a:ext>
+                </a:extLst>
+              </a:tr>
+              <a:tr h="370840">
+                <a:tc>
+                  <a:txBody>
+                    <a:bodyPr/>
+                    <a:lstStyle/>
+                    <a:p>
+                      <a:pPr algn="ctr"/>
+                      <a:r>
+                        <a:rPr lang="en-US" dirty="0"/>
+                        <a:t>IOU</a:t>
+                      </a:r>
+                      <a:endParaRPr lang="en-IN" dirty="0"/>
+                    </a:p>
+                  </a:txBody>
+                  <a:tcPr/>
+                </a:tc>
+                <a:tc>
+                  <a:txBody>
+                    <a:bodyPr/>
+                    <a:lstStyle/>
+                    <a:p>
+                      <a:pPr algn="ctr"/>
+                      <a:r>
+                        <a:rPr lang="en-US" dirty="0"/>
+                        <a:t>0.4</a:t>
+                      </a:r>
+                      <a:endParaRPr lang="en-IN" dirty="0"/>
+                    </a:p>
+                  </a:txBody>
+                  <a:tcPr/>
+                </a:tc>
+                <a:extLst>
+                  <a:ext uri="{0D108BD9-81ED-4DB2-BD59-A6C34878D82A}">
+                    <a16:rowId xmlns:a16="http://schemas.microsoft.com/office/drawing/2014/main" val="2896575761"/>
+                  </a:ext>
+                </a:extLst>
+              </a:tr>
+            </a:tbl>
+          </a:graphicData>
+        </a:graphic>
+      </p:graphicFrame>
+      <p:grpSp>
+        <p:nvGrpSpPr>
+          <p:cNvPr id="11" name="Group 10">
+            <a:extLst>
+              <a:ext uri="{FF2B5EF4-FFF2-40B4-BE49-F238E27FC236}">
+                <a16:creationId xmlns:a16="http://schemas.microsoft.com/office/drawing/2014/main" id="{6C1EF907-56AF-53A7-CC08-B1D8084FEF9C}"/>
+              </a:ext>
+            </a:extLst>
+          </p:cNvPr>
+          <p:cNvGrpSpPr/>
+          <p:nvPr/>
+        </p:nvGrpSpPr>
+        <p:grpSpPr>
+          <a:xfrm>
+            <a:off x="1301726" y="2787039"/>
+            <a:ext cx="2504706" cy="2602984"/>
+            <a:chOff x="1301726" y="2787039"/>
+            <a:chExt cx="2504706" cy="2602984"/>
+          </a:xfrm>
+        </p:grpSpPr>
+        <p:pic>
+          <p:nvPicPr>
+            <p:cNvPr id="4" name="Picture 3">
+              <a:extLst>
+                <a:ext uri="{FF2B5EF4-FFF2-40B4-BE49-F238E27FC236}">
+                  <a16:creationId xmlns:a16="http://schemas.microsoft.com/office/drawing/2014/main" id="{01421F50-3CCC-8E53-DB3A-519967E06432}"/>
+                </a:ext>
+              </a:extLst>
+            </p:cNvPr>
+            <p:cNvPicPr>
+              <a:picLocks noChangeAspect="1"/>
+            </p:cNvPicPr>
+            <p:nvPr/>
+          </p:nvPicPr>
+          <p:blipFill>
+            <a:blip r:embed="rId3" cstate="print">
+              <a:extLst>
+                <a:ext uri="{28A0092B-C50C-407E-A947-70E740481C1C}">
+                  <a14:useLocalDpi xmlns:a14="http://schemas.microsoft.com/office/drawing/2010/main" val="0"/>
+                </a:ext>
+              </a:extLst>
+            </a:blip>
+            <a:stretch>
+              <a:fillRect/>
+            </a:stretch>
+          </p:blipFill>
+          <p:spPr>
+            <a:xfrm>
+              <a:off x="1440516" y="3044613"/>
+              <a:ext cx="2192341" cy="325501"/>
+            </a:xfrm>
+            <a:prstGeom prst="rect">
+              <a:avLst/>
+            </a:prstGeom>
+          </p:spPr>
+        </p:pic>
+        <p:pic>
+          <p:nvPicPr>
+            <p:cNvPr id="12" name="Picture 11">
+              <a:extLst>
+                <a:ext uri="{FF2B5EF4-FFF2-40B4-BE49-F238E27FC236}">
+                  <a16:creationId xmlns:a16="http://schemas.microsoft.com/office/drawing/2014/main" id="{F9F32D3F-54E2-F6F7-7BB4-4A9BF33B3D1F}"/>
+                </a:ext>
+              </a:extLst>
+            </p:cNvPr>
+            <p:cNvPicPr>
+              <a:picLocks noChangeAspect="1"/>
+            </p:cNvPicPr>
+            <p:nvPr/>
+          </p:nvPicPr>
+          <p:blipFill>
+            <a:blip r:embed="rId4" cstate="print">
+              <a:extLst>
+                <a:ext uri="{28A0092B-C50C-407E-A947-70E740481C1C}">
+                  <a14:useLocalDpi xmlns:a14="http://schemas.microsoft.com/office/drawing/2010/main" val="0"/>
+                </a:ext>
+              </a:extLst>
+            </a:blip>
+            <a:stretch>
+              <a:fillRect/>
+            </a:stretch>
+          </p:blipFill>
+          <p:spPr>
+            <a:xfrm>
+              <a:off x="1410736" y="4070421"/>
+              <a:ext cx="2192340" cy="296984"/>
+            </a:xfrm>
+            <a:prstGeom prst="rect">
+              <a:avLst/>
+            </a:prstGeom>
+          </p:spPr>
+        </p:pic>
+        <p:pic>
+          <p:nvPicPr>
+            <p:cNvPr id="15" name="Picture 14">
+              <a:extLst>
+                <a:ext uri="{FF2B5EF4-FFF2-40B4-BE49-F238E27FC236}">
+                  <a16:creationId xmlns:a16="http://schemas.microsoft.com/office/drawing/2014/main" id="{92B7B175-CCAA-E110-7575-3571C2EC18E6}"/>
+                </a:ext>
+              </a:extLst>
+            </p:cNvPr>
+            <p:cNvPicPr>
+              <a:picLocks noChangeAspect="1"/>
+            </p:cNvPicPr>
+            <p:nvPr/>
+          </p:nvPicPr>
+          <p:blipFill>
+            <a:blip r:embed="rId5">
+              <a:extLst>
+                <a:ext uri="{28A0092B-C50C-407E-A947-70E740481C1C}">
+                  <a14:useLocalDpi xmlns:a14="http://schemas.microsoft.com/office/drawing/2010/main" val="0"/>
+                </a:ext>
+              </a:extLst>
+            </a:blip>
+            <a:stretch>
+              <a:fillRect/>
+            </a:stretch>
+          </p:blipFill>
+          <p:spPr>
+            <a:xfrm>
+              <a:off x="2138224" y="4958003"/>
+              <a:ext cx="796923" cy="424397"/>
+            </a:xfrm>
+            <a:prstGeom prst="rect">
+              <a:avLst/>
+            </a:prstGeom>
+          </p:spPr>
+        </p:pic>
+        <p:pic>
+          <p:nvPicPr>
+            <p:cNvPr id="18" name="Picture 17">
+              <a:extLst>
+                <a:ext uri="{FF2B5EF4-FFF2-40B4-BE49-F238E27FC236}">
+                  <a16:creationId xmlns:a16="http://schemas.microsoft.com/office/drawing/2014/main" id="{982ABFBC-7309-44EB-658E-775F9D38C3D6}"/>
+                </a:ext>
+              </a:extLst>
+            </p:cNvPr>
+            <p:cNvPicPr>
+              <a:picLocks noChangeAspect="1"/>
+            </p:cNvPicPr>
+            <p:nvPr/>
+          </p:nvPicPr>
+          <p:blipFill>
+            <a:blip r:embed="rId6" cstate="print">
+              <a:extLst>
+                <a:ext uri="{28A0092B-C50C-407E-A947-70E740481C1C}">
+                  <a14:useLocalDpi xmlns:a14="http://schemas.microsoft.com/office/drawing/2010/main" val="0"/>
+                </a:ext>
+              </a:extLst>
+            </a:blip>
+            <a:stretch>
+              <a:fillRect/>
+            </a:stretch>
+          </p:blipFill>
+          <p:spPr>
+            <a:xfrm>
+              <a:off x="1378762" y="3586692"/>
+              <a:ext cx="2192340" cy="348155"/>
+            </a:xfrm>
+            <a:prstGeom prst="rect">
+              <a:avLst/>
+            </a:prstGeom>
+          </p:spPr>
+        </p:pic>
+        <p:pic>
+          <p:nvPicPr>
+            <p:cNvPr id="20" name="Picture 19">
+              <a:extLst>
+                <a:ext uri="{FF2B5EF4-FFF2-40B4-BE49-F238E27FC236}">
+                  <a16:creationId xmlns:a16="http://schemas.microsoft.com/office/drawing/2014/main" id="{B914D98B-6A85-E2E7-45B2-B980BD7F48D0}"/>
+                </a:ext>
+              </a:extLst>
+            </p:cNvPr>
+            <p:cNvPicPr>
+              <a:picLocks noChangeAspect="1"/>
+            </p:cNvPicPr>
+            <p:nvPr/>
+          </p:nvPicPr>
+          <p:blipFill>
+            <a:blip r:embed="rId7" cstate="print">
+              <a:extLst>
+                <a:ext uri="{28A0092B-C50C-407E-A947-70E740481C1C}">
+                  <a14:useLocalDpi xmlns:a14="http://schemas.microsoft.com/office/drawing/2010/main" val="0"/>
+                </a:ext>
+              </a:extLst>
+            </a:blip>
+            <a:stretch>
+              <a:fillRect/>
+            </a:stretch>
+          </p:blipFill>
+          <p:spPr>
+            <a:xfrm>
+              <a:off x="1596816" y="4477269"/>
+              <a:ext cx="1914525" cy="394409"/>
+            </a:xfrm>
+            <a:prstGeom prst="rect">
+              <a:avLst/>
+            </a:prstGeom>
+          </p:spPr>
+        </p:pic>
+        <p:sp>
+          <p:nvSpPr>
+            <p:cNvPr id="27" name="Rectangle 26">
+              <a:extLst>
+                <a:ext uri="{FF2B5EF4-FFF2-40B4-BE49-F238E27FC236}">
+                  <a16:creationId xmlns:a16="http://schemas.microsoft.com/office/drawing/2014/main" id="{68A978B2-EB48-2F5F-6BE7-BA884D49AE5C}"/>
+                </a:ext>
+              </a:extLst>
+            </p:cNvPr>
+            <p:cNvSpPr/>
+            <p:nvPr/>
+          </p:nvSpPr>
+          <p:spPr>
+            <a:xfrm>
+              <a:off x="1301726" y="2787039"/>
+              <a:ext cx="2504706" cy="2602984"/>
+            </a:xfrm>
+            <a:prstGeom prst="rect">
+              <a:avLst/>
+            </a:prstGeom>
+            <a:noFill/>
+            <a:ln w="19050">
+              <a:prstDash val="dash"/>
+            </a:ln>
+          </p:spPr>
+          <p:style>
+            <a:lnRef idx="2">
+              <a:schemeClr val="accent1">
+                <a:shade val="15000"/>
+              </a:schemeClr>
+            </a:lnRef>
+            <a:fillRef idx="1">
+              <a:schemeClr val="accent1"/>
+            </a:fillRef>
+            <a:effectRef idx="0">
+              <a:schemeClr val="accent1"/>
+            </a:effectRef>
+            <a:fontRef idx="minor">
+              <a:schemeClr val="lt1"/>
+            </a:fontRef>
+          </p:style>
+          <p:txBody>
+            <a:bodyPr rtlCol="0" anchor="ctr"/>
+            <a:lstStyle/>
+            <a:p>
+              <a:pPr algn="ctr"/>
+              <a:endParaRPr lang="en-IN"/>
+            </a:p>
+          </p:txBody>
+        </p:sp>
+      </p:grpSp>
+      <p:sp>
+        <p:nvSpPr>
+          <p:cNvPr id="29" name="TextBox 28">
+            <a:extLst>
+              <a:ext uri="{FF2B5EF4-FFF2-40B4-BE49-F238E27FC236}">
+                <a16:creationId xmlns:a16="http://schemas.microsoft.com/office/drawing/2014/main" id="{AFE7D7A8-7EB2-DC1B-81B6-DE1D113D23C2}"/>
+              </a:ext>
+            </a:extLst>
+          </p:cNvPr>
+          <p:cNvSpPr txBox="1"/>
+          <p:nvPr/>
+        </p:nvSpPr>
+        <p:spPr>
+          <a:xfrm>
+            <a:off x="1612828" y="1543474"/>
+            <a:ext cx="1882503" cy="430887"/>
+          </a:xfrm>
+          <a:prstGeom prst="rect">
+            <a:avLst/>
+          </a:prstGeom>
+          <a:noFill/>
+        </p:spPr>
+        <p:txBody>
+          <a:bodyPr wrap="none" rtlCol="0">
+            <a:spAutoFit/>
+          </a:bodyPr>
+          <a:lstStyle/>
+          <a:p>
+            <a:r>
+              <a:rPr lang="en-US" sz="2200" dirty="0"/>
+              <a:t>Cropped Fields</a:t>
+            </a:r>
+            <a:endParaRPr lang="en-IN" sz="2200" dirty="0"/>
+          </a:p>
+        </p:txBody>
+      </p:sp>
+      <p:grpSp>
+        <p:nvGrpSpPr>
+          <p:cNvPr id="19" name="Group 18">
+            <a:extLst>
+              <a:ext uri="{FF2B5EF4-FFF2-40B4-BE49-F238E27FC236}">
+                <a16:creationId xmlns:a16="http://schemas.microsoft.com/office/drawing/2014/main" id="{8023934B-17C6-70BA-7296-C8463474A425}"/>
+              </a:ext>
+            </a:extLst>
+          </p:cNvPr>
+          <p:cNvGrpSpPr/>
+          <p:nvPr/>
+        </p:nvGrpSpPr>
+        <p:grpSpPr>
+          <a:xfrm>
+            <a:off x="6411951" y="1543474"/>
+            <a:ext cx="2453600" cy="430887"/>
+            <a:chOff x="6411951" y="1543474"/>
+            <a:chExt cx="2453600" cy="430887"/>
+          </a:xfrm>
+        </p:grpSpPr>
+        <p:cxnSp>
+          <p:nvCxnSpPr>
+            <p:cNvPr id="23" name="Straight Arrow Connector 22">
+              <a:extLst>
+                <a:ext uri="{FF2B5EF4-FFF2-40B4-BE49-F238E27FC236}">
+                  <a16:creationId xmlns:a16="http://schemas.microsoft.com/office/drawing/2014/main" id="{3BB07394-E70E-D2E4-078D-F1DBAB28C32D}"/>
+                </a:ext>
+              </a:extLst>
+            </p:cNvPr>
+            <p:cNvCxnSpPr>
+              <a:cxnSpLocks/>
+            </p:cNvCxnSpPr>
+            <p:nvPr/>
+          </p:nvCxnSpPr>
+          <p:spPr>
+            <a:xfrm>
+              <a:off x="6411951" y="1793078"/>
+              <a:ext cx="1655724" cy="0"/>
+            </a:xfrm>
+            <a:prstGeom prst="straightConnector1">
+              <a:avLst/>
+            </a:prstGeom>
+            <a:ln>
+              <a:tailEnd type="triangle"/>
+            </a:ln>
+          </p:spPr>
+          <p:style>
+            <a:lnRef idx="1">
+              <a:schemeClr val="accent1"/>
+            </a:lnRef>
+            <a:fillRef idx="0">
+              <a:schemeClr val="accent1"/>
+            </a:fillRef>
+            <a:effectRef idx="0">
+              <a:schemeClr val="accent1"/>
+            </a:effectRef>
+            <a:fontRef idx="minor">
+              <a:schemeClr val="tx1"/>
+            </a:fontRef>
+          </p:style>
+        </p:cxnSp>
+        <p:sp>
+          <p:nvSpPr>
+            <p:cNvPr id="32" name="TextBox 31">
+              <a:extLst>
+                <a:ext uri="{FF2B5EF4-FFF2-40B4-BE49-F238E27FC236}">
+                  <a16:creationId xmlns:a16="http://schemas.microsoft.com/office/drawing/2014/main" id="{5E53FE0A-F5D4-0563-167C-F212A60DEFEE}"/>
+                </a:ext>
+              </a:extLst>
+            </p:cNvPr>
+            <p:cNvSpPr txBox="1"/>
+            <p:nvPr/>
+          </p:nvSpPr>
+          <p:spPr>
+            <a:xfrm>
+              <a:off x="8214091" y="1543474"/>
+              <a:ext cx="651460" cy="430887"/>
+            </a:xfrm>
+            <a:prstGeom prst="rect">
+              <a:avLst/>
+            </a:prstGeom>
+            <a:noFill/>
+          </p:spPr>
+          <p:txBody>
+            <a:bodyPr wrap="none" rtlCol="0">
+              <a:spAutoFit/>
+            </a:bodyPr>
+            <a:lstStyle/>
+            <a:p>
+              <a:r>
+                <a:rPr lang="en-US" sz="2200" dirty="0"/>
+                <a:t>Text</a:t>
+              </a:r>
+              <a:endParaRPr lang="en-IN" sz="2200" dirty="0"/>
+            </a:p>
+          </p:txBody>
+        </p:sp>
+      </p:grpSp>
+      <p:grpSp>
+        <p:nvGrpSpPr>
+          <p:cNvPr id="13" name="Group 12">
+            <a:extLst>
+              <a:ext uri="{FF2B5EF4-FFF2-40B4-BE49-F238E27FC236}">
+                <a16:creationId xmlns:a16="http://schemas.microsoft.com/office/drawing/2014/main" id="{0E873474-60F2-B310-4B45-2512638A8492}"/>
+              </a:ext>
+            </a:extLst>
+          </p:cNvPr>
+          <p:cNvGrpSpPr/>
+          <p:nvPr/>
+        </p:nvGrpSpPr>
+        <p:grpSpPr>
+          <a:xfrm>
+            <a:off x="7595980" y="2787039"/>
+            <a:ext cx="3582327" cy="2602984"/>
+            <a:chOff x="7595980" y="2787039"/>
+            <a:chExt cx="3582327" cy="2602984"/>
+          </a:xfrm>
+        </p:grpSpPr>
+        <p:sp>
+          <p:nvSpPr>
+            <p:cNvPr id="26" name="TextBox 25">
+              <a:extLst>
+                <a:ext uri="{FF2B5EF4-FFF2-40B4-BE49-F238E27FC236}">
+                  <a16:creationId xmlns:a16="http://schemas.microsoft.com/office/drawing/2014/main" id="{9B078E73-D8D4-EE10-0D08-E6EFAAB25CF0}"/>
+                </a:ext>
+              </a:extLst>
+            </p:cNvPr>
+            <p:cNvSpPr txBox="1"/>
+            <p:nvPr/>
+          </p:nvSpPr>
+          <p:spPr>
+            <a:xfrm>
+              <a:off x="7595980" y="2787039"/>
+              <a:ext cx="3582327" cy="2506840"/>
+            </a:xfrm>
+            <a:prstGeom prst="rect">
+              <a:avLst/>
+            </a:prstGeom>
+            <a:noFill/>
+          </p:spPr>
+          <p:txBody>
+            <a:bodyPr wrap="none" rtlCol="0">
+              <a:spAutoFit/>
+            </a:bodyPr>
+            <a:lstStyle/>
+            <a:p>
+              <a:pPr algn="ctr">
+                <a:lnSpc>
+                  <a:spcPct val="150000"/>
+                </a:lnSpc>
+                <a:spcAft>
+                  <a:spcPts val="300"/>
+                </a:spcAft>
+              </a:pPr>
+              <a:r>
+                <a:rPr lang="en-US" sz="2000" dirty="0"/>
+                <a:t>HNO 133, Bala </a:t>
+              </a:r>
+              <a:r>
+                <a:rPr lang="en-US" sz="2000" dirty="0" err="1"/>
+                <a:t>Circke</a:t>
+              </a:r>
+              <a:r>
+                <a:rPr lang="en-US" sz="2000" dirty="0"/>
+                <a:t>, </a:t>
+              </a:r>
+              <a:r>
+                <a:rPr lang="en-US" sz="2000" dirty="0" err="1"/>
+                <a:t>Bongaigan</a:t>
+              </a:r>
+              <a:endParaRPr lang="en-US" sz="2000" dirty="0"/>
+            </a:p>
+            <a:p>
+              <a:pPr algn="ctr">
+                <a:lnSpc>
+                  <a:spcPct val="150000"/>
+                </a:lnSpc>
+                <a:spcAft>
+                  <a:spcPts val="300"/>
+                </a:spcAft>
+              </a:pPr>
+              <a:r>
+                <a:rPr lang="en-US" sz="2000" dirty="0"/>
+                <a:t>Dayita Bakshi</a:t>
+              </a:r>
+            </a:p>
+            <a:p>
+              <a:pPr algn="ctr">
+                <a:lnSpc>
+                  <a:spcPct val="150000"/>
+                </a:lnSpc>
+                <a:spcAft>
+                  <a:spcPts val="300"/>
+                </a:spcAft>
+              </a:pPr>
+              <a:r>
+                <a:rPr lang="en-US" sz="2000" dirty="0"/>
+                <a:t>358086000000</a:t>
+              </a:r>
+            </a:p>
+            <a:p>
+              <a:pPr algn="ctr">
+                <a:lnSpc>
+                  <a:spcPct val="150000"/>
+                </a:lnSpc>
+                <a:spcAft>
+                  <a:spcPts val="300"/>
+                </a:spcAft>
+              </a:pPr>
+              <a:r>
+                <a:rPr lang="en-US" sz="2000" dirty="0"/>
+                <a:t>06/07/2023</a:t>
+              </a:r>
+            </a:p>
+            <a:p>
+              <a:pPr algn="ctr">
+                <a:lnSpc>
+                  <a:spcPct val="150000"/>
+                </a:lnSpc>
+                <a:spcAft>
+                  <a:spcPts val="300"/>
+                </a:spcAft>
+              </a:pPr>
+              <a:r>
+                <a:rPr lang="en-US" sz="2000" dirty="0"/>
+                <a:t>A+</a:t>
+              </a:r>
+              <a:endParaRPr lang="en-IN" sz="2000" dirty="0"/>
+            </a:p>
+          </p:txBody>
+        </p:sp>
+        <p:sp>
+          <p:nvSpPr>
+            <p:cNvPr id="3" name="Rectangle 2">
+              <a:extLst>
+                <a:ext uri="{FF2B5EF4-FFF2-40B4-BE49-F238E27FC236}">
+                  <a16:creationId xmlns:a16="http://schemas.microsoft.com/office/drawing/2014/main" id="{3F542FB6-C40D-8B55-0C15-E816E412D491}"/>
+                </a:ext>
+              </a:extLst>
+            </p:cNvPr>
+            <p:cNvSpPr/>
+            <p:nvPr/>
+          </p:nvSpPr>
+          <p:spPr>
+            <a:xfrm>
+              <a:off x="7628263" y="2787039"/>
+              <a:ext cx="3550043" cy="2602984"/>
+            </a:xfrm>
+            <a:prstGeom prst="rect">
+              <a:avLst/>
+            </a:prstGeom>
+            <a:noFill/>
+            <a:ln w="19050">
+              <a:prstDash val="dash"/>
+            </a:ln>
+          </p:spPr>
+          <p:style>
+            <a:lnRef idx="2">
+              <a:schemeClr val="accent1">
+                <a:shade val="15000"/>
+              </a:schemeClr>
+            </a:lnRef>
+            <a:fillRef idx="1">
+              <a:schemeClr val="accent1"/>
+            </a:fillRef>
+            <a:effectRef idx="0">
+              <a:schemeClr val="accent1"/>
+            </a:effectRef>
+            <a:fontRef idx="minor">
+              <a:schemeClr val="lt1"/>
+            </a:fontRef>
+          </p:style>
+          <p:txBody>
+            <a:bodyPr rtlCol="0" anchor="ctr"/>
+            <a:lstStyle/>
+            <a:p>
+              <a:pPr algn="ctr"/>
+              <a:endParaRPr lang="en-IN"/>
+            </a:p>
+          </p:txBody>
+        </p:sp>
+      </p:grpSp>
     </p:spTree>
     <p:extLst>
       <p:ext uri="{BB962C8B-B14F-4D97-AF65-F5344CB8AC3E}">
@@ -11523,6 +15550,309 @@
   <p:clrMapOvr>
     <a:masterClrMapping/>
   </p:clrMapOvr>
+  <p:timing>
+    <p:tnLst>
+      <p:par>
+        <p:cTn id="1" dur="indefinite" restart="never" nodeType="tmRoot">
+          <p:childTnLst>
+            <p:seq concurrent="1" nextAc="seek">
+              <p:cTn id="2" dur="indefinite" nodeType="mainSeq">
+                <p:childTnLst>
+                  <p:par>
+                    <p:cTn id="3" fill="hold">
+                      <p:stCondLst>
+                        <p:cond delay="indefinite"/>
+                      </p:stCondLst>
+                      <p:childTnLst>
+                        <p:par>
+                          <p:cTn id="4" fill="hold">
+                            <p:stCondLst>
+                              <p:cond delay="0"/>
+                            </p:stCondLst>
+                            <p:childTnLst>
+                              <p:par>
+                                <p:cTn id="5" presetID="1" presetClass="entr" presetSubtype="0" fill="hold" grpId="0" nodeType="clickEffect">
+                                  <p:stCondLst>
+                                    <p:cond delay="0"/>
+                                  </p:stCondLst>
+                                  <p:childTnLst>
+                                    <p:set>
+                                      <p:cBhvr>
+                                        <p:cTn id="6" dur="1" fill="hold">
+                                          <p:stCondLst>
+                                            <p:cond delay="0"/>
+                                          </p:stCondLst>
+                                        </p:cTn>
+                                        <p:tgtEl>
+                                          <p:spTgt spid="29"/>
+                                        </p:tgtEl>
+                                        <p:attrNameLst>
+                                          <p:attrName>style.visibility</p:attrName>
+                                        </p:attrNameLst>
+                                      </p:cBhvr>
+                                      <p:to>
+                                        <p:strVal val="visible"/>
+                                      </p:to>
+                                    </p:set>
+                                  </p:childTnLst>
+                                </p:cTn>
+                              </p:par>
+                            </p:childTnLst>
+                          </p:cTn>
+                        </p:par>
+                      </p:childTnLst>
+                    </p:cTn>
+                  </p:par>
+                  <p:par>
+                    <p:cTn id="7" fill="hold">
+                      <p:stCondLst>
+                        <p:cond delay="indefinite"/>
+                      </p:stCondLst>
+                      <p:childTnLst>
+                        <p:par>
+                          <p:cTn id="8" fill="hold">
+                            <p:stCondLst>
+                              <p:cond delay="0"/>
+                            </p:stCondLst>
+                            <p:childTnLst>
+                              <p:par>
+                                <p:cTn id="9" presetID="1" presetClass="entr" presetSubtype="0" fill="hold" nodeType="clickEffect">
+                                  <p:stCondLst>
+                                    <p:cond delay="0"/>
+                                  </p:stCondLst>
+                                  <p:childTnLst>
+                                    <p:set>
+                                      <p:cBhvr>
+                                        <p:cTn id="10" dur="1" fill="hold">
+                                          <p:stCondLst>
+                                            <p:cond delay="0"/>
+                                          </p:stCondLst>
+                                        </p:cTn>
+                                        <p:tgtEl>
+                                          <p:spTgt spid="11"/>
+                                        </p:tgtEl>
+                                        <p:attrNameLst>
+                                          <p:attrName>style.visibility</p:attrName>
+                                        </p:attrNameLst>
+                                      </p:cBhvr>
+                                      <p:to>
+                                        <p:strVal val="visible"/>
+                                      </p:to>
+                                    </p:set>
+                                  </p:childTnLst>
+                                </p:cTn>
+                              </p:par>
+                            </p:childTnLst>
+                          </p:cTn>
+                        </p:par>
+                      </p:childTnLst>
+                    </p:cTn>
+                  </p:par>
+                  <p:par>
+                    <p:cTn id="11" fill="hold">
+                      <p:stCondLst>
+                        <p:cond delay="indefinite"/>
+                      </p:stCondLst>
+                      <p:childTnLst>
+                        <p:par>
+                          <p:cTn id="12" fill="hold">
+                            <p:stCondLst>
+                              <p:cond delay="0"/>
+                            </p:stCondLst>
+                            <p:childTnLst>
+                              <p:par>
+                                <p:cTn id="13" presetID="1" presetClass="entr" presetSubtype="0" fill="hold" nodeType="clickEffect">
+                                  <p:stCondLst>
+                                    <p:cond delay="0"/>
+                                  </p:stCondLst>
+                                  <p:childTnLst>
+                                    <p:set>
+                                      <p:cBhvr>
+                                        <p:cTn id="14" dur="1" fill="hold">
+                                          <p:stCondLst>
+                                            <p:cond delay="0"/>
+                                          </p:stCondLst>
+                                        </p:cTn>
+                                        <p:tgtEl>
+                                          <p:spTgt spid="17"/>
+                                        </p:tgtEl>
+                                        <p:attrNameLst>
+                                          <p:attrName>style.visibility</p:attrName>
+                                        </p:attrNameLst>
+                                      </p:cBhvr>
+                                      <p:to>
+                                        <p:strVal val="visible"/>
+                                      </p:to>
+                                    </p:set>
+                                  </p:childTnLst>
+                                </p:cTn>
+                              </p:par>
+                            </p:childTnLst>
+                          </p:cTn>
+                        </p:par>
+                      </p:childTnLst>
+                    </p:cTn>
+                  </p:par>
+                  <p:par>
+                    <p:cTn id="15" fill="hold">
+                      <p:stCondLst>
+                        <p:cond delay="indefinite"/>
+                      </p:stCondLst>
+                      <p:childTnLst>
+                        <p:par>
+                          <p:cTn id="16" fill="hold">
+                            <p:stCondLst>
+                              <p:cond delay="0"/>
+                            </p:stCondLst>
+                            <p:childTnLst>
+                              <p:par>
+                                <p:cTn id="17" presetID="1" presetClass="entr" presetSubtype="0" fill="hold" nodeType="clickEffect">
+                                  <p:stCondLst>
+                                    <p:cond delay="0"/>
+                                  </p:stCondLst>
+                                  <p:childTnLst>
+                                    <p:set>
+                                      <p:cBhvr>
+                                        <p:cTn id="18" dur="1" fill="hold">
+                                          <p:stCondLst>
+                                            <p:cond delay="0"/>
+                                          </p:stCondLst>
+                                        </p:cTn>
+                                        <p:tgtEl>
+                                          <p:spTgt spid="24"/>
+                                        </p:tgtEl>
+                                        <p:attrNameLst>
+                                          <p:attrName>style.visibility</p:attrName>
+                                        </p:attrNameLst>
+                                      </p:cBhvr>
+                                      <p:to>
+                                        <p:strVal val="visible"/>
+                                      </p:to>
+                                    </p:set>
+                                  </p:childTnLst>
+                                </p:cTn>
+                              </p:par>
+                            </p:childTnLst>
+                          </p:cTn>
+                        </p:par>
+                      </p:childTnLst>
+                    </p:cTn>
+                  </p:par>
+                  <p:par>
+                    <p:cTn id="19" fill="hold">
+                      <p:stCondLst>
+                        <p:cond delay="indefinite"/>
+                      </p:stCondLst>
+                      <p:childTnLst>
+                        <p:par>
+                          <p:cTn id="20" fill="hold">
+                            <p:stCondLst>
+                              <p:cond delay="0"/>
+                            </p:stCondLst>
+                            <p:childTnLst>
+                              <p:par>
+                                <p:cTn id="21" presetID="1" presetClass="entr" presetSubtype="0" fill="hold" nodeType="clickEffect">
+                                  <p:stCondLst>
+                                    <p:cond delay="0"/>
+                                  </p:stCondLst>
+                                  <p:childTnLst>
+                                    <p:set>
+                                      <p:cBhvr>
+                                        <p:cTn id="22" dur="1" fill="hold">
+                                          <p:stCondLst>
+                                            <p:cond delay="0"/>
+                                          </p:stCondLst>
+                                        </p:cTn>
+                                        <p:tgtEl>
+                                          <p:spTgt spid="19"/>
+                                        </p:tgtEl>
+                                        <p:attrNameLst>
+                                          <p:attrName>style.visibility</p:attrName>
+                                        </p:attrNameLst>
+                                      </p:cBhvr>
+                                      <p:to>
+                                        <p:strVal val="visible"/>
+                                      </p:to>
+                                    </p:set>
+                                  </p:childTnLst>
+                                </p:cTn>
+                              </p:par>
+                            </p:childTnLst>
+                          </p:cTn>
+                        </p:par>
+                      </p:childTnLst>
+                    </p:cTn>
+                  </p:par>
+                  <p:par>
+                    <p:cTn id="23" fill="hold">
+                      <p:stCondLst>
+                        <p:cond delay="indefinite"/>
+                      </p:stCondLst>
+                      <p:childTnLst>
+                        <p:par>
+                          <p:cTn id="24" fill="hold">
+                            <p:stCondLst>
+                              <p:cond delay="0"/>
+                            </p:stCondLst>
+                            <p:childTnLst>
+                              <p:par>
+                                <p:cTn id="25" presetID="1" presetClass="entr" presetSubtype="0" fill="hold" nodeType="clickEffect">
+                                  <p:stCondLst>
+                                    <p:cond delay="0"/>
+                                  </p:stCondLst>
+                                  <p:childTnLst>
+                                    <p:set>
+                                      <p:cBhvr>
+                                        <p:cTn id="26" dur="1" fill="hold">
+                                          <p:stCondLst>
+                                            <p:cond delay="0"/>
+                                          </p:stCondLst>
+                                        </p:cTn>
+                                        <p:tgtEl>
+                                          <p:spTgt spid="13"/>
+                                        </p:tgtEl>
+                                        <p:attrNameLst>
+                                          <p:attrName>style.visibility</p:attrName>
+                                        </p:attrNameLst>
+                                      </p:cBhvr>
+                                      <p:to>
+                                        <p:strVal val="visible"/>
+                                      </p:to>
+                                    </p:set>
+                                  </p:childTnLst>
+                                </p:cTn>
+                              </p:par>
+                            </p:childTnLst>
+                          </p:cTn>
+                        </p:par>
+                      </p:childTnLst>
+                    </p:cTn>
+                  </p:par>
+                </p:childTnLst>
+              </p:cTn>
+              <p:prevCondLst>
+                <p:cond evt="onPrev" delay="0">
+                  <p:tgtEl>
+                    <p:sldTgt/>
+                  </p:tgtEl>
+                </p:cond>
+              </p:prevCondLst>
+              <p:nextCondLst>
+                <p:cond evt="onNext" delay="0">
+                  <p:tgtEl>
+                    <p:sldTgt/>
+                  </p:tgtEl>
+                </p:cond>
+              </p:nextCondLst>
+            </p:seq>
+          </p:childTnLst>
+        </p:cTn>
+      </p:par>
+    </p:tnLst>
+    <p:bldLst>
+      <p:bldP spid="29" grpId="0"/>
+    </p:bldLst>
+  </p:timing>
 </p:sld>
 </file>
 
@@ -11891,6 +16221,138 @@
               <a:rPr lang="en-IN" sz="1200" dirty="0"/>
               <a:t>1</a:t>
             </a:r>
+          </a:p>
+        </p:txBody>
+      </p:sp>
+      <p:graphicFrame>
+        <p:nvGraphicFramePr>
+          <p:cNvPr id="3" name="Chart 2">
+            <a:extLst>
+              <a:ext uri="{FF2B5EF4-FFF2-40B4-BE49-F238E27FC236}">
+                <a16:creationId xmlns:a16="http://schemas.microsoft.com/office/drawing/2014/main" id="{ABAB24B8-C22A-2C57-BAC0-034D270E01C0}"/>
+              </a:ext>
+            </a:extLst>
+          </p:cNvPr>
+          <p:cNvGraphicFramePr>
+            <a:graphicFrameLocks/>
+          </p:cNvGraphicFramePr>
+          <p:nvPr>
+            <p:extLst>
+              <p:ext uri="{D42A27DB-BD31-4B8C-83A1-F6EECF244321}">
+                <p14:modId xmlns:p14="http://schemas.microsoft.com/office/powerpoint/2010/main" val="256317875"/>
+              </p:ext>
+            </p:extLst>
+          </p:nvPr>
+        </p:nvGraphicFramePr>
+        <p:xfrm>
+          <a:off x="675322" y="1463039"/>
+          <a:ext cx="4722828" cy="2354812"/>
+        </p:xfrm>
+        <a:graphic>
+          <a:graphicData uri="http://schemas.openxmlformats.org/drawingml/2006/chart">
+            <c:chart xmlns:c="http://schemas.openxmlformats.org/drawingml/2006/chart" xmlns:r="http://schemas.openxmlformats.org/officeDocument/2006/relationships" r:id="rId3"/>
+          </a:graphicData>
+        </a:graphic>
+      </p:graphicFrame>
+      <p:graphicFrame>
+        <p:nvGraphicFramePr>
+          <p:cNvPr id="4" name="Chart 3">
+            <a:extLst>
+              <a:ext uri="{FF2B5EF4-FFF2-40B4-BE49-F238E27FC236}">
+                <a16:creationId xmlns:a16="http://schemas.microsoft.com/office/drawing/2014/main" id="{7A66C130-63A1-07B4-7DC9-21084E8F38B5}"/>
+              </a:ext>
+            </a:extLst>
+          </p:cNvPr>
+          <p:cNvGraphicFramePr>
+            <a:graphicFrameLocks/>
+          </p:cNvGraphicFramePr>
+          <p:nvPr>
+            <p:extLst>
+              <p:ext uri="{D42A27DB-BD31-4B8C-83A1-F6EECF244321}">
+                <p14:modId xmlns:p14="http://schemas.microsoft.com/office/powerpoint/2010/main" val="3636345641"/>
+              </p:ext>
+            </p:extLst>
+          </p:nvPr>
+        </p:nvGraphicFramePr>
+        <p:xfrm>
+          <a:off x="5637230" y="1463039"/>
+          <a:ext cx="4722828" cy="2354807"/>
+        </p:xfrm>
+        <a:graphic>
+          <a:graphicData uri="http://schemas.openxmlformats.org/drawingml/2006/chart">
+            <c:chart xmlns:c="http://schemas.openxmlformats.org/drawingml/2006/chart" xmlns:r="http://schemas.openxmlformats.org/officeDocument/2006/relationships" r:id="rId4"/>
+          </a:graphicData>
+        </a:graphic>
+      </p:graphicFrame>
+      <p:sp>
+        <p:nvSpPr>
+          <p:cNvPr id="11" name="TextBox 10">
+            <a:extLst>
+              <a:ext uri="{FF2B5EF4-FFF2-40B4-BE49-F238E27FC236}">
+                <a16:creationId xmlns:a16="http://schemas.microsoft.com/office/drawing/2014/main" id="{54840932-1902-476F-870B-66640F7DC985}"/>
+              </a:ext>
+            </a:extLst>
+          </p:cNvPr>
+          <p:cNvSpPr txBox="1"/>
+          <p:nvPr/>
+        </p:nvSpPr>
+        <p:spPr>
+          <a:xfrm>
+            <a:off x="2764065" y="1463039"/>
+            <a:ext cx="545342" cy="369332"/>
+          </a:xfrm>
+          <a:prstGeom prst="rect">
+            <a:avLst/>
+          </a:prstGeom>
+          <a:noFill/>
+        </p:spPr>
+        <p:txBody>
+          <a:bodyPr wrap="none" rtlCol="0">
+            <a:spAutoFit/>
+          </a:bodyPr>
+          <a:lstStyle/>
+          <a:p>
+            <a:r>
+              <a:rPr lang="en-US" b="1" dirty="0"/>
+              <a:t>CER</a:t>
+            </a:r>
+            <a:endParaRPr lang="en-IN" b="1" dirty="0"/>
+          </a:p>
+        </p:txBody>
+      </p:sp>
+      <p:sp>
+        <p:nvSpPr>
+          <p:cNvPr id="12" name="TextBox 11">
+            <a:extLst>
+              <a:ext uri="{FF2B5EF4-FFF2-40B4-BE49-F238E27FC236}">
+                <a16:creationId xmlns:a16="http://schemas.microsoft.com/office/drawing/2014/main" id="{A426B400-A8A4-36C5-B8F1-4C2BC109FC08}"/>
+              </a:ext>
+            </a:extLst>
+          </p:cNvPr>
+          <p:cNvSpPr txBox="1"/>
+          <p:nvPr/>
+        </p:nvSpPr>
+        <p:spPr>
+          <a:xfrm>
+            <a:off x="7725973" y="1505081"/>
+            <a:ext cx="636713" cy="369332"/>
+          </a:xfrm>
+          <a:prstGeom prst="rect">
+            <a:avLst/>
+          </a:prstGeom>
+          <a:noFill/>
+        </p:spPr>
+        <p:txBody>
+          <a:bodyPr wrap="none" rtlCol="0">
+            <a:spAutoFit/>
+          </a:bodyPr>
+          <a:lstStyle/>
+          <a:p>
+            <a:r>
+              <a:rPr lang="en-US" b="1" dirty="0"/>
+              <a:t>WER</a:t>
+            </a:r>
+            <a:endParaRPr lang="en-IN" b="1" dirty="0"/>
           </a:p>
         </p:txBody>
       </p:sp>
@@ -16543,422 +21005,13 @@
       </p:sp>
       <p:sp>
         <p:nvSpPr>
-          <p:cNvPr id="18" name="Rounded Rectangle 17"/>
-          <p:cNvSpPr/>
-          <p:nvPr/>
-        </p:nvSpPr>
-        <p:spPr>
-          <a:xfrm>
-            <a:off x="1191491" y="1745673"/>
-            <a:ext cx="1939636" cy="2466109"/>
-          </a:xfrm>
-          <a:prstGeom prst="roundRect">
-            <a:avLst/>
-          </a:prstGeom>
-          <a:solidFill>
-            <a:srgbClr val="1F4E79"/>
-          </a:solidFill>
-          <a:ln>
-            <a:noFill/>
-          </a:ln>
-        </p:spPr>
-        <p:style>
-          <a:lnRef idx="2">
-            <a:schemeClr val="accent1">
-              <a:shade val="50000"/>
-            </a:schemeClr>
-          </a:lnRef>
-          <a:fillRef idx="1">
-            <a:schemeClr val="accent1"/>
-          </a:fillRef>
-          <a:effectRef idx="0">
-            <a:schemeClr val="accent1"/>
-          </a:effectRef>
-          <a:fontRef idx="minor">
-            <a:schemeClr val="lt1"/>
-          </a:fontRef>
-        </p:style>
-        <p:txBody>
-          <a:bodyPr rtlCol="0" anchor="ctr"/>
-          <a:lstStyle/>
-          <a:p>
-            <a:pPr algn="ctr"/>
-            <a:endParaRPr lang="en-IN" dirty="0"/>
-          </a:p>
-        </p:txBody>
-      </p:sp>
-      <p:sp>
-        <p:nvSpPr>
-          <p:cNvPr id="19" name="Rounded Rectangle 18"/>
-          <p:cNvSpPr/>
-          <p:nvPr/>
-        </p:nvSpPr>
-        <p:spPr>
-          <a:xfrm>
-            <a:off x="3717637" y="1745672"/>
-            <a:ext cx="1939636" cy="2466109"/>
-          </a:xfrm>
-          <a:prstGeom prst="roundRect">
-            <a:avLst/>
-          </a:prstGeom>
-          <a:solidFill>
-            <a:srgbClr val="1F4E79"/>
-          </a:solidFill>
-          <a:ln>
-            <a:noFill/>
-          </a:ln>
-        </p:spPr>
-        <p:style>
-          <a:lnRef idx="2">
-            <a:schemeClr val="accent1">
-              <a:shade val="50000"/>
-            </a:schemeClr>
-          </a:lnRef>
-          <a:fillRef idx="1">
-            <a:schemeClr val="accent1"/>
-          </a:fillRef>
-          <a:effectRef idx="0">
-            <a:schemeClr val="accent1"/>
-          </a:effectRef>
-          <a:fontRef idx="minor">
-            <a:schemeClr val="lt1"/>
-          </a:fontRef>
-        </p:style>
-        <p:txBody>
-          <a:bodyPr rtlCol="0" anchor="ctr"/>
-          <a:lstStyle/>
-          <a:p>
-            <a:pPr algn="ctr"/>
-            <a:endParaRPr lang="en-IN"/>
-          </a:p>
-        </p:txBody>
-      </p:sp>
-      <p:sp>
-        <p:nvSpPr>
-          <p:cNvPr id="20" name="Rounded Rectangle 19"/>
-          <p:cNvSpPr/>
-          <p:nvPr/>
-        </p:nvSpPr>
-        <p:spPr>
-          <a:xfrm>
-            <a:off x="6309360" y="1745672"/>
-            <a:ext cx="1939636" cy="2466109"/>
-          </a:xfrm>
-          <a:prstGeom prst="roundRect">
-            <a:avLst/>
-          </a:prstGeom>
-          <a:solidFill>
-            <a:srgbClr val="1F4E79"/>
-          </a:solidFill>
-          <a:ln>
-            <a:noFill/>
-          </a:ln>
-        </p:spPr>
-        <p:style>
-          <a:lnRef idx="2">
-            <a:schemeClr val="accent1">
-              <a:shade val="50000"/>
-            </a:schemeClr>
-          </a:lnRef>
-          <a:fillRef idx="1">
-            <a:schemeClr val="accent1"/>
-          </a:fillRef>
-          <a:effectRef idx="0">
-            <a:schemeClr val="accent1"/>
-          </a:effectRef>
-          <a:fontRef idx="minor">
-            <a:schemeClr val="lt1"/>
-          </a:fontRef>
-        </p:style>
-        <p:txBody>
-          <a:bodyPr rtlCol="0" anchor="ctr"/>
-          <a:lstStyle/>
-          <a:p>
-            <a:pPr algn="ctr"/>
-            <a:endParaRPr lang="en-IN"/>
-          </a:p>
-        </p:txBody>
-      </p:sp>
-      <p:sp>
-        <p:nvSpPr>
-          <p:cNvPr id="21" name="Rounded Rectangle 20"/>
-          <p:cNvSpPr/>
-          <p:nvPr/>
-        </p:nvSpPr>
-        <p:spPr>
-          <a:xfrm>
-            <a:off x="8732982" y="1745672"/>
-            <a:ext cx="1939636" cy="2466109"/>
-          </a:xfrm>
-          <a:prstGeom prst="roundRect">
-            <a:avLst/>
-          </a:prstGeom>
-          <a:solidFill>
-            <a:srgbClr val="1F4E79"/>
-          </a:solidFill>
-          <a:ln>
-            <a:noFill/>
-          </a:ln>
-        </p:spPr>
-        <p:style>
-          <a:lnRef idx="2">
-            <a:schemeClr val="accent1">
-              <a:shade val="50000"/>
-            </a:schemeClr>
-          </a:lnRef>
-          <a:fillRef idx="1">
-            <a:schemeClr val="accent1"/>
-          </a:fillRef>
-          <a:effectRef idx="0">
-            <a:schemeClr val="accent1"/>
-          </a:effectRef>
-          <a:fontRef idx="minor">
-            <a:schemeClr val="lt1"/>
-          </a:fontRef>
-        </p:style>
-        <p:txBody>
-          <a:bodyPr rtlCol="0" anchor="ctr"/>
-          <a:lstStyle/>
-          <a:p>
-            <a:pPr algn="ctr"/>
-            <a:endParaRPr lang="en-IN"/>
-          </a:p>
-        </p:txBody>
-      </p:sp>
-      <p:sp>
-        <p:nvSpPr>
-          <p:cNvPr id="22" name="TextBox 21"/>
-          <p:cNvSpPr txBox="1"/>
-          <p:nvPr/>
-        </p:nvSpPr>
-        <p:spPr>
-          <a:xfrm>
-            <a:off x="8993908" y="3373726"/>
-            <a:ext cx="2295237" cy="369332"/>
-          </a:xfrm>
-          <a:prstGeom prst="rect">
-            <a:avLst/>
-          </a:prstGeom>
-          <a:noFill/>
-        </p:spPr>
-        <p:txBody>
-          <a:bodyPr wrap="square" rtlCol="0">
-            <a:spAutoFit/>
-          </a:bodyPr>
-          <a:lstStyle/>
-          <a:p>
-            <a:r>
-              <a:rPr lang="en-IN" dirty="0">
-                <a:solidFill>
-                  <a:schemeClr val="bg1"/>
-                </a:solidFill>
-              </a:rPr>
-              <a:t>Muthukumar </a:t>
-            </a:r>
-          </a:p>
-        </p:txBody>
-      </p:sp>
-      <p:sp>
-        <p:nvSpPr>
-          <p:cNvPr id="23" name="TextBox 22"/>
-          <p:cNvSpPr txBox="1"/>
-          <p:nvPr/>
-        </p:nvSpPr>
-        <p:spPr>
-          <a:xfrm>
-            <a:off x="9058563" y="3666345"/>
-            <a:ext cx="2295237" cy="307777"/>
-          </a:xfrm>
-          <a:prstGeom prst="rect">
-            <a:avLst/>
-          </a:prstGeom>
-          <a:noFill/>
-        </p:spPr>
-        <p:txBody>
-          <a:bodyPr wrap="square" rtlCol="0">
-            <a:spAutoFit/>
-          </a:bodyPr>
-          <a:lstStyle/>
-          <a:p>
-            <a:r>
-              <a:rPr lang="en-IN" sz="1400" dirty="0">
-                <a:solidFill>
-                  <a:schemeClr val="bg1"/>
-                </a:solidFill>
-              </a:rPr>
-              <a:t>Scientist, IGCAR</a:t>
-            </a:r>
-          </a:p>
-        </p:txBody>
-      </p:sp>
-      <p:sp>
-        <p:nvSpPr>
-          <p:cNvPr id="24" name="TextBox 23"/>
-          <p:cNvSpPr txBox="1"/>
-          <p:nvPr/>
-        </p:nvSpPr>
-        <p:spPr>
-          <a:xfrm>
-            <a:off x="6904181" y="3353614"/>
-            <a:ext cx="2295237" cy="369332"/>
-          </a:xfrm>
-          <a:prstGeom prst="rect">
-            <a:avLst/>
-          </a:prstGeom>
-          <a:noFill/>
-        </p:spPr>
-        <p:txBody>
-          <a:bodyPr wrap="square" rtlCol="0">
-            <a:spAutoFit/>
-          </a:bodyPr>
-          <a:lstStyle/>
-          <a:p>
-            <a:r>
-              <a:rPr lang="en-IN" dirty="0" err="1">
-                <a:solidFill>
-                  <a:schemeClr val="bg1"/>
-                </a:solidFill>
-              </a:rPr>
-              <a:t>Iniya</a:t>
-            </a:r>
-            <a:endParaRPr lang="en-IN" dirty="0">
-              <a:solidFill>
-                <a:schemeClr val="bg1"/>
-              </a:solidFill>
-            </a:endParaRPr>
-          </a:p>
-        </p:txBody>
-      </p:sp>
-      <p:sp>
-        <p:nvSpPr>
-          <p:cNvPr id="25" name="TextBox 24"/>
-          <p:cNvSpPr txBox="1"/>
-          <p:nvPr/>
-        </p:nvSpPr>
-        <p:spPr>
-          <a:xfrm>
-            <a:off x="6611850" y="3649377"/>
-            <a:ext cx="1334656" cy="523220"/>
-          </a:xfrm>
-          <a:prstGeom prst="rect">
-            <a:avLst/>
-          </a:prstGeom>
-          <a:noFill/>
-        </p:spPr>
-        <p:txBody>
-          <a:bodyPr wrap="square" rtlCol="0">
-            <a:spAutoFit/>
-          </a:bodyPr>
-          <a:lstStyle/>
-          <a:p>
-            <a:pPr algn="ctr"/>
-            <a:r>
-              <a:rPr lang="en-IN" sz="1400" dirty="0">
-                <a:solidFill>
-                  <a:schemeClr val="bg1"/>
-                </a:solidFill>
-              </a:rPr>
-              <a:t>Data Scientist</a:t>
-            </a:r>
-          </a:p>
-          <a:p>
-            <a:pPr algn="ctr"/>
-            <a:r>
-              <a:rPr lang="en-IN" sz="1400" dirty="0">
-                <a:solidFill>
-                  <a:schemeClr val="bg1"/>
-                </a:solidFill>
-              </a:rPr>
-              <a:t>Secure Traces</a:t>
-            </a:r>
-            <a:endParaRPr lang="en-IN" sz="1400" dirty="0">
-              <a:solidFill>
-                <a:srgbClr val="FF0000"/>
-              </a:solidFill>
-            </a:endParaRPr>
-          </a:p>
-        </p:txBody>
-      </p:sp>
-      <p:sp>
-        <p:nvSpPr>
-          <p:cNvPr id="26" name="TextBox 25"/>
-          <p:cNvSpPr txBox="1"/>
-          <p:nvPr/>
-        </p:nvSpPr>
-        <p:spPr>
-          <a:xfrm>
-            <a:off x="4244340" y="3376118"/>
-            <a:ext cx="2295237" cy="369332"/>
-          </a:xfrm>
-          <a:prstGeom prst="rect">
-            <a:avLst/>
-          </a:prstGeom>
-          <a:noFill/>
-        </p:spPr>
-        <p:txBody>
-          <a:bodyPr wrap="square" rtlCol="0">
-            <a:spAutoFit/>
-          </a:bodyPr>
-          <a:lstStyle/>
-          <a:p>
-            <a:r>
-              <a:rPr lang="en-IN" dirty="0" err="1">
-                <a:solidFill>
-                  <a:schemeClr val="bg1"/>
-                </a:solidFill>
-              </a:rPr>
-              <a:t>Anand</a:t>
-            </a:r>
-            <a:endParaRPr lang="en-IN" dirty="0">
-              <a:solidFill>
-                <a:schemeClr val="bg1"/>
-              </a:solidFill>
-            </a:endParaRPr>
-          </a:p>
-        </p:txBody>
-      </p:sp>
-      <p:sp>
-        <p:nvSpPr>
-          <p:cNvPr id="27" name="TextBox 26"/>
-          <p:cNvSpPr txBox="1"/>
-          <p:nvPr/>
-        </p:nvSpPr>
-        <p:spPr>
-          <a:xfrm>
-            <a:off x="4085245" y="3677972"/>
-            <a:ext cx="1204420" cy="307777"/>
-          </a:xfrm>
-          <a:prstGeom prst="rect">
-            <a:avLst/>
-          </a:prstGeom>
-          <a:noFill/>
-        </p:spPr>
-        <p:txBody>
-          <a:bodyPr wrap="square" rtlCol="0">
-            <a:spAutoFit/>
-          </a:bodyPr>
-          <a:lstStyle/>
-          <a:p>
-            <a:r>
-              <a:rPr lang="en-IN" sz="1400" dirty="0">
-                <a:solidFill>
-                  <a:schemeClr val="bg1"/>
-                </a:solidFill>
-              </a:rPr>
-              <a:t>Sr. Consultant</a:t>
-            </a:r>
-          </a:p>
-        </p:txBody>
-      </p:sp>
-      <p:sp>
-        <p:nvSpPr>
           <p:cNvPr id="28" name="TextBox 27"/>
           <p:cNvSpPr txBox="1"/>
           <p:nvPr/>
         </p:nvSpPr>
         <p:spPr>
           <a:xfrm>
-            <a:off x="1459113" y="3376118"/>
+            <a:off x="1459113" y="3826391"/>
             <a:ext cx="2295237" cy="369332"/>
           </a:xfrm>
           <a:prstGeom prst="rect">
@@ -16988,16 +21041,709 @@
           </a:p>
         </p:txBody>
       </p:sp>
+      <p:grpSp>
+        <p:nvGrpSpPr>
+          <p:cNvPr id="12" name="Group 11">
+            <a:extLst>
+              <a:ext uri="{FF2B5EF4-FFF2-40B4-BE49-F238E27FC236}">
+                <a16:creationId xmlns:a16="http://schemas.microsoft.com/office/drawing/2014/main" id="{33E4E3E8-5698-16CD-5231-E064A9919CCE}"/>
+              </a:ext>
+            </a:extLst>
+          </p:cNvPr>
+          <p:cNvGrpSpPr/>
+          <p:nvPr/>
+        </p:nvGrpSpPr>
+        <p:grpSpPr>
+          <a:xfrm>
+            <a:off x="3717637" y="2195945"/>
+            <a:ext cx="2821940" cy="2466109"/>
+            <a:chOff x="3717637" y="2195945"/>
+            <a:chExt cx="2821940" cy="2466109"/>
+          </a:xfrm>
+        </p:grpSpPr>
+        <p:sp>
+          <p:nvSpPr>
+            <p:cNvPr id="19" name="Rounded Rectangle 18"/>
+            <p:cNvSpPr/>
+            <p:nvPr/>
+          </p:nvSpPr>
+          <p:spPr>
+            <a:xfrm>
+              <a:off x="3717637" y="2195945"/>
+              <a:ext cx="1939636" cy="2466109"/>
+            </a:xfrm>
+            <a:prstGeom prst="roundRect">
+              <a:avLst/>
+            </a:prstGeom>
+            <a:solidFill>
+              <a:srgbClr val="2C466B"/>
+            </a:solidFill>
+            <a:ln>
+              <a:noFill/>
+            </a:ln>
+          </p:spPr>
+          <p:style>
+            <a:lnRef idx="2">
+              <a:schemeClr val="accent1">
+                <a:shade val="50000"/>
+              </a:schemeClr>
+            </a:lnRef>
+            <a:fillRef idx="1">
+              <a:schemeClr val="accent1"/>
+            </a:fillRef>
+            <a:effectRef idx="0">
+              <a:schemeClr val="accent1"/>
+            </a:effectRef>
+            <a:fontRef idx="minor">
+              <a:schemeClr val="lt1"/>
+            </a:fontRef>
+          </p:style>
+          <p:txBody>
+            <a:bodyPr rtlCol="0" anchor="ctr"/>
+            <a:lstStyle/>
+            <a:p>
+              <a:pPr algn="ctr"/>
+              <a:endParaRPr lang="en-IN"/>
+            </a:p>
+          </p:txBody>
+        </p:sp>
+        <p:sp>
+          <p:nvSpPr>
+            <p:cNvPr id="26" name="TextBox 25"/>
+            <p:cNvSpPr txBox="1"/>
+            <p:nvPr/>
+          </p:nvSpPr>
+          <p:spPr>
+            <a:xfrm>
+              <a:off x="4244340" y="3826391"/>
+              <a:ext cx="2295237" cy="369332"/>
+            </a:xfrm>
+            <a:prstGeom prst="rect">
+              <a:avLst/>
+            </a:prstGeom>
+            <a:noFill/>
+          </p:spPr>
+          <p:txBody>
+            <a:bodyPr wrap="square" rtlCol="0">
+              <a:spAutoFit/>
+            </a:bodyPr>
+            <a:lstStyle/>
+            <a:p>
+              <a:r>
+                <a:rPr lang="en-IN" dirty="0" err="1">
+                  <a:solidFill>
+                    <a:schemeClr val="bg1"/>
+                  </a:solidFill>
+                </a:rPr>
+                <a:t>Anand</a:t>
+              </a:r>
+              <a:endParaRPr lang="en-IN" dirty="0">
+                <a:solidFill>
+                  <a:schemeClr val="bg1"/>
+                </a:solidFill>
+              </a:endParaRPr>
+            </a:p>
+          </p:txBody>
+        </p:sp>
+        <p:sp>
+          <p:nvSpPr>
+            <p:cNvPr id="27" name="TextBox 26"/>
+            <p:cNvSpPr txBox="1"/>
+            <p:nvPr/>
+          </p:nvSpPr>
+          <p:spPr>
+            <a:xfrm>
+              <a:off x="4085245" y="4128245"/>
+              <a:ext cx="1204420" cy="307777"/>
+            </a:xfrm>
+            <a:prstGeom prst="rect">
+              <a:avLst/>
+            </a:prstGeom>
+            <a:noFill/>
+          </p:spPr>
+          <p:txBody>
+            <a:bodyPr wrap="square" rtlCol="0">
+              <a:spAutoFit/>
+            </a:bodyPr>
+            <a:lstStyle/>
+            <a:p>
+              <a:r>
+                <a:rPr lang="en-IN" sz="1400" dirty="0">
+                  <a:solidFill>
+                    <a:schemeClr val="bg1"/>
+                  </a:solidFill>
+                </a:rPr>
+                <a:t>Sr. Consultant</a:t>
+              </a:r>
+            </a:p>
+          </p:txBody>
+        </p:sp>
+        <p:pic>
+          <p:nvPicPr>
+            <p:cNvPr id="32" name="Picture 31"/>
+            <p:cNvPicPr>
+              <a:picLocks noChangeAspect="1"/>
+            </p:cNvPicPr>
+            <p:nvPr/>
+          </p:nvPicPr>
+          <p:blipFill>
+            <a:blip r:embed="rId3" cstate="print">
+              <a:extLst>
+                <a:ext uri="{28A0092B-C50C-407E-A947-70E740481C1C}">
+                  <a14:useLocalDpi xmlns:a14="http://schemas.microsoft.com/office/drawing/2010/main" val="0"/>
+                </a:ext>
+              </a:extLst>
+            </a:blip>
+            <a:stretch>
+              <a:fillRect/>
+            </a:stretch>
+          </p:blipFill>
+          <p:spPr>
+            <a:xfrm>
+              <a:off x="3954635" y="2340810"/>
+              <a:ext cx="1440000" cy="1440000"/>
+            </a:xfrm>
+            <a:prstGeom prst="rect">
+              <a:avLst/>
+            </a:prstGeom>
+          </p:spPr>
+        </p:pic>
+      </p:grpSp>
+      <p:grpSp>
+        <p:nvGrpSpPr>
+          <p:cNvPr id="13" name="Group 12">
+            <a:extLst>
+              <a:ext uri="{FF2B5EF4-FFF2-40B4-BE49-F238E27FC236}">
+                <a16:creationId xmlns:a16="http://schemas.microsoft.com/office/drawing/2014/main" id="{292FD0A2-FB3D-56F4-423E-582E08BB910C}"/>
+              </a:ext>
+            </a:extLst>
+          </p:cNvPr>
+          <p:cNvGrpSpPr/>
+          <p:nvPr/>
+        </p:nvGrpSpPr>
+        <p:grpSpPr>
+          <a:xfrm>
+            <a:off x="6309360" y="2195945"/>
+            <a:ext cx="2890058" cy="2466109"/>
+            <a:chOff x="6309360" y="2195945"/>
+            <a:chExt cx="2890058" cy="2466109"/>
+          </a:xfrm>
+        </p:grpSpPr>
+        <p:sp>
+          <p:nvSpPr>
+            <p:cNvPr id="20" name="Rounded Rectangle 19"/>
+            <p:cNvSpPr/>
+            <p:nvPr/>
+          </p:nvSpPr>
+          <p:spPr>
+            <a:xfrm>
+              <a:off x="6309360" y="2195945"/>
+              <a:ext cx="1939636" cy="2466109"/>
+            </a:xfrm>
+            <a:prstGeom prst="roundRect">
+              <a:avLst/>
+            </a:prstGeom>
+            <a:solidFill>
+              <a:srgbClr val="2C466B"/>
+            </a:solidFill>
+            <a:ln>
+              <a:noFill/>
+            </a:ln>
+          </p:spPr>
+          <p:style>
+            <a:lnRef idx="2">
+              <a:schemeClr val="accent1">
+                <a:shade val="50000"/>
+              </a:schemeClr>
+            </a:lnRef>
+            <a:fillRef idx="1">
+              <a:schemeClr val="accent1"/>
+            </a:fillRef>
+            <a:effectRef idx="0">
+              <a:schemeClr val="accent1"/>
+            </a:effectRef>
+            <a:fontRef idx="minor">
+              <a:schemeClr val="lt1"/>
+            </a:fontRef>
+          </p:style>
+          <p:txBody>
+            <a:bodyPr rtlCol="0" anchor="ctr"/>
+            <a:lstStyle/>
+            <a:p>
+              <a:pPr algn="ctr"/>
+              <a:endParaRPr lang="en-IN"/>
+            </a:p>
+          </p:txBody>
+        </p:sp>
+        <p:sp>
+          <p:nvSpPr>
+            <p:cNvPr id="24" name="TextBox 23"/>
+            <p:cNvSpPr txBox="1"/>
+            <p:nvPr/>
+          </p:nvSpPr>
+          <p:spPr>
+            <a:xfrm>
+              <a:off x="6904181" y="3803887"/>
+              <a:ext cx="2295237" cy="369332"/>
+            </a:xfrm>
+            <a:prstGeom prst="rect">
+              <a:avLst/>
+            </a:prstGeom>
+            <a:noFill/>
+          </p:spPr>
+          <p:txBody>
+            <a:bodyPr wrap="square" rtlCol="0">
+              <a:spAutoFit/>
+            </a:bodyPr>
+            <a:lstStyle/>
+            <a:p>
+              <a:r>
+                <a:rPr lang="en-IN" dirty="0" err="1">
+                  <a:solidFill>
+                    <a:schemeClr val="bg1"/>
+                  </a:solidFill>
+                </a:rPr>
+                <a:t>Iniya</a:t>
+              </a:r>
+              <a:endParaRPr lang="en-IN" dirty="0">
+                <a:solidFill>
+                  <a:schemeClr val="bg1"/>
+                </a:solidFill>
+              </a:endParaRPr>
+            </a:p>
+          </p:txBody>
+        </p:sp>
+        <p:sp>
+          <p:nvSpPr>
+            <p:cNvPr id="25" name="TextBox 24"/>
+            <p:cNvSpPr txBox="1"/>
+            <p:nvPr/>
+          </p:nvSpPr>
+          <p:spPr>
+            <a:xfrm>
+              <a:off x="6611850" y="4099650"/>
+              <a:ext cx="1334656" cy="523220"/>
+            </a:xfrm>
+            <a:prstGeom prst="rect">
+              <a:avLst/>
+            </a:prstGeom>
+            <a:noFill/>
+          </p:spPr>
+          <p:txBody>
+            <a:bodyPr wrap="square" rtlCol="0">
+              <a:spAutoFit/>
+            </a:bodyPr>
+            <a:lstStyle/>
+            <a:p>
+              <a:pPr algn="ctr"/>
+              <a:r>
+                <a:rPr lang="en-IN" sz="1400" dirty="0">
+                  <a:solidFill>
+                    <a:schemeClr val="bg1"/>
+                  </a:solidFill>
+                </a:rPr>
+                <a:t>Data Scientist</a:t>
+              </a:r>
+            </a:p>
+            <a:p>
+              <a:pPr algn="ctr"/>
+              <a:r>
+                <a:rPr lang="en-IN" sz="1400" dirty="0">
+                  <a:solidFill>
+                    <a:schemeClr val="bg1"/>
+                  </a:solidFill>
+                </a:rPr>
+                <a:t>Secure Traces</a:t>
+              </a:r>
+              <a:endParaRPr lang="en-IN" sz="1400" dirty="0">
+                <a:solidFill>
+                  <a:srgbClr val="FF0000"/>
+                </a:solidFill>
+              </a:endParaRPr>
+            </a:p>
+          </p:txBody>
+        </p:sp>
+        <p:pic>
+          <p:nvPicPr>
+            <p:cNvPr id="35" name="Picture 34"/>
+            <p:cNvPicPr>
+              <a:picLocks noChangeAspect="1"/>
+            </p:cNvPicPr>
+            <p:nvPr/>
+          </p:nvPicPr>
+          <p:blipFill>
+            <a:blip r:embed="rId4" cstate="print">
+              <a:extLst>
+                <a:ext uri="{28A0092B-C50C-407E-A947-70E740481C1C}">
+                  <a14:useLocalDpi xmlns:a14="http://schemas.microsoft.com/office/drawing/2010/main" val="0"/>
+                </a:ext>
+              </a:extLst>
+            </a:blip>
+            <a:stretch>
+              <a:fillRect/>
+            </a:stretch>
+          </p:blipFill>
+          <p:spPr>
+            <a:xfrm>
+              <a:off x="6559178" y="2330709"/>
+              <a:ext cx="1440000" cy="1440000"/>
+            </a:xfrm>
+            <a:prstGeom prst="rect">
+              <a:avLst/>
+            </a:prstGeom>
+          </p:spPr>
+        </p:pic>
+      </p:grpSp>
+      <p:grpSp>
+        <p:nvGrpSpPr>
+          <p:cNvPr id="15" name="Group 14">
+            <a:extLst>
+              <a:ext uri="{FF2B5EF4-FFF2-40B4-BE49-F238E27FC236}">
+                <a16:creationId xmlns:a16="http://schemas.microsoft.com/office/drawing/2014/main" id="{E4ECCCB8-3C93-6E1D-48CE-B885E75C3F96}"/>
+              </a:ext>
+            </a:extLst>
+          </p:cNvPr>
+          <p:cNvGrpSpPr/>
+          <p:nvPr/>
+        </p:nvGrpSpPr>
+        <p:grpSpPr>
+          <a:xfrm>
+            <a:off x="8732982" y="2195945"/>
+            <a:ext cx="2620818" cy="2466109"/>
+            <a:chOff x="8732982" y="2195945"/>
+            <a:chExt cx="2620818" cy="2466109"/>
+          </a:xfrm>
+        </p:grpSpPr>
+        <p:sp>
+          <p:nvSpPr>
+            <p:cNvPr id="21" name="Rounded Rectangle 20"/>
+            <p:cNvSpPr/>
+            <p:nvPr/>
+          </p:nvSpPr>
+          <p:spPr>
+            <a:xfrm>
+              <a:off x="8732982" y="2195945"/>
+              <a:ext cx="1939636" cy="2466109"/>
+            </a:xfrm>
+            <a:prstGeom prst="roundRect">
+              <a:avLst/>
+            </a:prstGeom>
+            <a:solidFill>
+              <a:srgbClr val="2C466B"/>
+            </a:solidFill>
+            <a:ln>
+              <a:noFill/>
+            </a:ln>
+          </p:spPr>
+          <p:style>
+            <a:lnRef idx="2">
+              <a:schemeClr val="accent1">
+                <a:shade val="50000"/>
+              </a:schemeClr>
+            </a:lnRef>
+            <a:fillRef idx="1">
+              <a:schemeClr val="accent1"/>
+            </a:fillRef>
+            <a:effectRef idx="0">
+              <a:schemeClr val="accent1"/>
+            </a:effectRef>
+            <a:fontRef idx="minor">
+              <a:schemeClr val="lt1"/>
+            </a:fontRef>
+          </p:style>
+          <p:txBody>
+            <a:bodyPr rtlCol="0" anchor="ctr"/>
+            <a:lstStyle/>
+            <a:p>
+              <a:pPr algn="ctr"/>
+              <a:endParaRPr lang="en-IN"/>
+            </a:p>
+          </p:txBody>
+        </p:sp>
+        <p:sp>
+          <p:nvSpPr>
+            <p:cNvPr id="22" name="TextBox 21"/>
+            <p:cNvSpPr txBox="1"/>
+            <p:nvPr/>
+          </p:nvSpPr>
+          <p:spPr>
+            <a:xfrm>
+              <a:off x="8993908" y="3823999"/>
+              <a:ext cx="2295237" cy="369332"/>
+            </a:xfrm>
+            <a:prstGeom prst="rect">
+              <a:avLst/>
+            </a:prstGeom>
+            <a:noFill/>
+          </p:spPr>
+          <p:txBody>
+            <a:bodyPr wrap="square" rtlCol="0">
+              <a:spAutoFit/>
+            </a:bodyPr>
+            <a:lstStyle/>
+            <a:p>
+              <a:r>
+                <a:rPr lang="en-IN" dirty="0">
+                  <a:solidFill>
+                    <a:schemeClr val="bg1"/>
+                  </a:solidFill>
+                </a:rPr>
+                <a:t>Muthukumar </a:t>
+              </a:r>
+            </a:p>
+          </p:txBody>
+        </p:sp>
+        <p:sp>
+          <p:nvSpPr>
+            <p:cNvPr id="23" name="TextBox 22"/>
+            <p:cNvSpPr txBox="1"/>
+            <p:nvPr/>
+          </p:nvSpPr>
+          <p:spPr>
+            <a:xfrm>
+              <a:off x="9058563" y="4116618"/>
+              <a:ext cx="2295237" cy="307777"/>
+            </a:xfrm>
+            <a:prstGeom prst="rect">
+              <a:avLst/>
+            </a:prstGeom>
+            <a:noFill/>
+          </p:spPr>
+          <p:txBody>
+            <a:bodyPr wrap="square" rtlCol="0">
+              <a:spAutoFit/>
+            </a:bodyPr>
+            <a:lstStyle/>
+            <a:p>
+              <a:r>
+                <a:rPr lang="en-IN" sz="1400" dirty="0">
+                  <a:solidFill>
+                    <a:schemeClr val="bg1"/>
+                  </a:solidFill>
+                </a:rPr>
+                <a:t>Scientist, IGCAR</a:t>
+              </a:r>
+            </a:p>
+          </p:txBody>
+        </p:sp>
+        <p:pic>
+          <p:nvPicPr>
+            <p:cNvPr id="36" name="Picture 35"/>
+            <p:cNvPicPr>
+              <a:picLocks noChangeAspect="1"/>
+            </p:cNvPicPr>
+            <p:nvPr/>
+          </p:nvPicPr>
+          <p:blipFill>
+            <a:blip r:embed="rId5" cstate="print">
+              <a:extLst>
+                <a:ext uri="{28A0092B-C50C-407E-A947-70E740481C1C}">
+                  <a14:useLocalDpi xmlns:a14="http://schemas.microsoft.com/office/drawing/2010/main" val="0"/>
+                </a:ext>
+              </a:extLst>
+            </a:blip>
+            <a:stretch>
+              <a:fillRect/>
+            </a:stretch>
+          </p:blipFill>
+          <p:spPr>
+            <a:xfrm>
+              <a:off x="8982800" y="2340794"/>
+              <a:ext cx="1440000" cy="1440000"/>
+            </a:xfrm>
+            <a:prstGeom prst="rect">
+              <a:avLst/>
+            </a:prstGeom>
+          </p:spPr>
+        </p:pic>
+      </p:grpSp>
+      <p:grpSp>
+        <p:nvGrpSpPr>
+          <p:cNvPr id="11" name="Group 10">
+            <a:extLst>
+              <a:ext uri="{FF2B5EF4-FFF2-40B4-BE49-F238E27FC236}">
+                <a16:creationId xmlns:a16="http://schemas.microsoft.com/office/drawing/2014/main" id="{DA2B171E-96BC-80F1-2676-F2393D3D018C}"/>
+              </a:ext>
+            </a:extLst>
+          </p:cNvPr>
+          <p:cNvGrpSpPr/>
+          <p:nvPr/>
+        </p:nvGrpSpPr>
+        <p:grpSpPr>
+          <a:xfrm>
+            <a:off x="1191491" y="2195946"/>
+            <a:ext cx="1939636" cy="2466109"/>
+            <a:chOff x="1191491" y="2195946"/>
+            <a:chExt cx="1939636" cy="2466109"/>
+          </a:xfrm>
+        </p:grpSpPr>
+        <p:sp>
+          <p:nvSpPr>
+            <p:cNvPr id="18" name="Rounded Rectangle 17"/>
+            <p:cNvSpPr/>
+            <p:nvPr/>
+          </p:nvSpPr>
+          <p:spPr>
+            <a:xfrm>
+              <a:off x="1191491" y="2195946"/>
+              <a:ext cx="1939636" cy="2466109"/>
+            </a:xfrm>
+            <a:prstGeom prst="roundRect">
+              <a:avLst/>
+            </a:prstGeom>
+            <a:solidFill>
+              <a:srgbClr val="2C466B"/>
+            </a:solidFill>
+            <a:ln>
+              <a:noFill/>
+            </a:ln>
+          </p:spPr>
+          <p:style>
+            <a:lnRef idx="2">
+              <a:schemeClr val="accent1">
+                <a:shade val="50000"/>
+              </a:schemeClr>
+            </a:lnRef>
+            <a:fillRef idx="1">
+              <a:schemeClr val="accent1"/>
+            </a:fillRef>
+            <a:effectRef idx="0">
+              <a:schemeClr val="accent1"/>
+            </a:effectRef>
+            <a:fontRef idx="minor">
+              <a:schemeClr val="lt1"/>
+            </a:fontRef>
+          </p:style>
+          <p:txBody>
+            <a:bodyPr rtlCol="0" anchor="ctr"/>
+            <a:lstStyle/>
+            <a:p>
+              <a:pPr algn="ctr"/>
+              <a:endParaRPr lang="en-IN" dirty="0"/>
+            </a:p>
+          </p:txBody>
+        </p:sp>
+        <p:sp>
+          <p:nvSpPr>
+            <p:cNvPr id="29" name="TextBox 28"/>
+            <p:cNvSpPr txBox="1"/>
+            <p:nvPr/>
+          </p:nvSpPr>
+          <p:spPr>
+            <a:xfrm>
+              <a:off x="1649167" y="4092618"/>
+              <a:ext cx="1019942" cy="307777"/>
+            </a:xfrm>
+            <a:prstGeom prst="rect">
+              <a:avLst/>
+            </a:prstGeom>
+            <a:noFill/>
+          </p:spPr>
+          <p:txBody>
+            <a:bodyPr wrap="square" rtlCol="0">
+              <a:spAutoFit/>
+            </a:bodyPr>
+            <a:lstStyle/>
+            <a:p>
+              <a:pPr algn="ctr"/>
+              <a:r>
+                <a:rPr lang="en-IN" sz="1400" dirty="0">
+                  <a:solidFill>
+                    <a:schemeClr val="bg1"/>
+                  </a:solidFill>
+                </a:rPr>
+                <a:t>Sr. Scientist</a:t>
+              </a:r>
+            </a:p>
+          </p:txBody>
+        </p:sp>
+        <p:pic>
+          <p:nvPicPr>
+            <p:cNvPr id="34" name="Picture 33"/>
+            <p:cNvPicPr>
+              <a:picLocks noChangeAspect="1"/>
+            </p:cNvPicPr>
+            <p:nvPr/>
+          </p:nvPicPr>
+          <p:blipFill>
+            <a:blip r:embed="rId6" cstate="print">
+              <a:extLst>
+                <a:ext uri="{28A0092B-C50C-407E-A947-70E740481C1C}">
+                  <a14:useLocalDpi xmlns:a14="http://schemas.microsoft.com/office/drawing/2010/main" val="0"/>
+                </a:ext>
+              </a:extLst>
+            </a:blip>
+            <a:stretch>
+              <a:fillRect/>
+            </a:stretch>
+          </p:blipFill>
+          <p:spPr>
+            <a:xfrm>
+              <a:off x="1439138" y="2335607"/>
+              <a:ext cx="1440000" cy="1440000"/>
+            </a:xfrm>
+            <a:prstGeom prst="rect">
+              <a:avLst/>
+            </a:prstGeom>
+          </p:spPr>
+        </p:pic>
+        <p:sp>
+          <p:nvSpPr>
+            <p:cNvPr id="3" name="TextBox 2">
+              <a:extLst>
+                <a:ext uri="{FF2B5EF4-FFF2-40B4-BE49-F238E27FC236}">
+                  <a16:creationId xmlns:a16="http://schemas.microsoft.com/office/drawing/2014/main" id="{B13A8581-63FD-D68F-716D-219CF6189B9B}"/>
+                </a:ext>
+              </a:extLst>
+            </p:cNvPr>
+            <p:cNvSpPr txBox="1"/>
+            <p:nvPr/>
+          </p:nvSpPr>
+          <p:spPr>
+            <a:xfrm>
+              <a:off x="1733418" y="4317124"/>
+              <a:ext cx="851440" cy="307777"/>
+            </a:xfrm>
+            <a:prstGeom prst="rect">
+              <a:avLst/>
+            </a:prstGeom>
+            <a:noFill/>
+          </p:spPr>
+          <p:txBody>
+            <a:bodyPr wrap="square" rtlCol="0">
+              <a:spAutoFit/>
+            </a:bodyPr>
+            <a:lstStyle/>
+            <a:p>
+              <a:pPr algn="ctr"/>
+              <a:r>
+                <a:rPr lang="en-IN" sz="1400" dirty="0">
+                  <a:solidFill>
+                    <a:schemeClr val="bg1"/>
+                  </a:solidFill>
+                </a:rPr>
+                <a:t>IGCAR</a:t>
+              </a:r>
+            </a:p>
+          </p:txBody>
+        </p:sp>
+      </p:grpSp>
       <p:sp>
         <p:nvSpPr>
-          <p:cNvPr id="29" name="TextBox 28"/>
+          <p:cNvPr id="17" name="TextBox 16">
+            <a:extLst>
+              <a:ext uri="{FF2B5EF4-FFF2-40B4-BE49-F238E27FC236}">
+                <a16:creationId xmlns:a16="http://schemas.microsoft.com/office/drawing/2014/main" id="{9B528FC9-437F-49C7-CF72-C8C94DB4A260}"/>
+              </a:ext>
+            </a:extLst>
+          </p:cNvPr>
           <p:cNvSpPr txBox="1"/>
           <p:nvPr/>
         </p:nvSpPr>
         <p:spPr>
           <a:xfrm>
-            <a:off x="1649167" y="3642345"/>
-            <a:ext cx="1019942" cy="307777"/>
+            <a:off x="1360479" y="3793308"/>
+            <a:ext cx="1597317" cy="369332"/>
           </a:xfrm>
           <a:prstGeom prst="rect">
             <a:avLst/>
@@ -17012,172 +21758,12 @@
           <a:p>
             <a:pPr algn="ctr"/>
             <a:r>
-              <a:rPr lang="en-IN" sz="1400" dirty="0">
+              <a:rPr lang="en-IN" dirty="0">
                 <a:solidFill>
                   <a:schemeClr val="bg1"/>
                 </a:solidFill>
               </a:rPr>
-              <a:t>Sr. Scientist</a:t>
-            </a:r>
-          </a:p>
-        </p:txBody>
-      </p:sp>
-      <p:pic>
-        <p:nvPicPr>
-          <p:cNvPr id="32" name="Picture 31"/>
-          <p:cNvPicPr>
-            <a:picLocks noChangeAspect="1"/>
-          </p:cNvPicPr>
-          <p:nvPr/>
-        </p:nvPicPr>
-        <p:blipFill>
-          <a:blip r:embed="rId3" cstate="print">
-            <a:extLst>
-              <a:ext uri="{28A0092B-C50C-407E-A947-70E740481C1C}">
-                <a14:useLocalDpi xmlns:a14="http://schemas.microsoft.com/office/drawing/2010/main" val="0"/>
-              </a:ext>
-            </a:extLst>
-          </a:blip>
-          <a:stretch>
-            <a:fillRect/>
-          </a:stretch>
-        </p:blipFill>
-        <p:spPr>
-          <a:xfrm>
-            <a:off x="3954635" y="1890537"/>
-            <a:ext cx="1440000" cy="1440000"/>
-          </a:xfrm>
-          <a:prstGeom prst="rect">
-            <a:avLst/>
-          </a:prstGeom>
-        </p:spPr>
-      </p:pic>
-      <p:pic>
-        <p:nvPicPr>
-          <p:cNvPr id="34" name="Picture 33"/>
-          <p:cNvPicPr>
-            <a:picLocks noChangeAspect="1"/>
-          </p:cNvPicPr>
-          <p:nvPr/>
-        </p:nvPicPr>
-        <p:blipFill>
-          <a:blip r:embed="rId4" cstate="print">
-            <a:extLst>
-              <a:ext uri="{28A0092B-C50C-407E-A947-70E740481C1C}">
-                <a14:useLocalDpi xmlns:a14="http://schemas.microsoft.com/office/drawing/2010/main" val="0"/>
-              </a:ext>
-            </a:extLst>
-          </a:blip>
-          <a:stretch>
-            <a:fillRect/>
-          </a:stretch>
-        </p:blipFill>
-        <p:spPr>
-          <a:xfrm>
-            <a:off x="1439138" y="1885334"/>
-            <a:ext cx="1440000" cy="1440000"/>
-          </a:xfrm>
-          <a:prstGeom prst="rect">
-            <a:avLst/>
-          </a:prstGeom>
-        </p:spPr>
-      </p:pic>
-      <p:pic>
-        <p:nvPicPr>
-          <p:cNvPr id="35" name="Picture 34"/>
-          <p:cNvPicPr>
-            <a:picLocks noChangeAspect="1"/>
-          </p:cNvPicPr>
-          <p:nvPr/>
-        </p:nvPicPr>
-        <p:blipFill>
-          <a:blip r:embed="rId5" cstate="print">
-            <a:extLst>
-              <a:ext uri="{28A0092B-C50C-407E-A947-70E740481C1C}">
-                <a14:useLocalDpi xmlns:a14="http://schemas.microsoft.com/office/drawing/2010/main" val="0"/>
-              </a:ext>
-            </a:extLst>
-          </a:blip>
-          <a:stretch>
-            <a:fillRect/>
-          </a:stretch>
-        </p:blipFill>
-        <p:spPr>
-          <a:xfrm>
-            <a:off x="6559178" y="1880436"/>
-            <a:ext cx="1440000" cy="1440000"/>
-          </a:xfrm>
-          <a:prstGeom prst="rect">
-            <a:avLst/>
-          </a:prstGeom>
-        </p:spPr>
-      </p:pic>
-      <p:pic>
-        <p:nvPicPr>
-          <p:cNvPr id="36" name="Picture 35"/>
-          <p:cNvPicPr>
-            <a:picLocks noChangeAspect="1"/>
-          </p:cNvPicPr>
-          <p:nvPr/>
-        </p:nvPicPr>
-        <p:blipFill>
-          <a:blip r:embed="rId6" cstate="print">
-            <a:extLst>
-              <a:ext uri="{28A0092B-C50C-407E-A947-70E740481C1C}">
-                <a14:useLocalDpi xmlns:a14="http://schemas.microsoft.com/office/drawing/2010/main" val="0"/>
-              </a:ext>
-            </a:extLst>
-          </a:blip>
-          <a:stretch>
-            <a:fillRect/>
-          </a:stretch>
-        </p:blipFill>
-        <p:spPr>
-          <a:xfrm>
-            <a:off x="8982800" y="1890521"/>
-            <a:ext cx="1440000" cy="1440000"/>
-          </a:xfrm>
-          <a:prstGeom prst="rect">
-            <a:avLst/>
-          </a:prstGeom>
-        </p:spPr>
-      </p:pic>
-      <p:sp>
-        <p:nvSpPr>
-          <p:cNvPr id="3" name="TextBox 2">
-            <a:extLst>
-              <a:ext uri="{FF2B5EF4-FFF2-40B4-BE49-F238E27FC236}">
-                <a16:creationId xmlns:a16="http://schemas.microsoft.com/office/drawing/2014/main" id="{B13A8581-63FD-D68F-716D-219CF6189B9B}"/>
-              </a:ext>
-            </a:extLst>
-          </p:cNvPr>
-          <p:cNvSpPr txBox="1"/>
-          <p:nvPr/>
-        </p:nvSpPr>
-        <p:spPr>
-          <a:xfrm>
-            <a:off x="1733418" y="3866851"/>
-            <a:ext cx="851440" cy="307777"/>
-          </a:xfrm>
-          <a:prstGeom prst="rect">
-            <a:avLst/>
-          </a:prstGeom>
-          <a:noFill/>
-        </p:spPr>
-        <p:txBody>
-          <a:bodyPr wrap="square" rtlCol="0">
-            <a:spAutoFit/>
-          </a:bodyPr>
-          <a:lstStyle/>
-          <a:p>
-            <a:pPr algn="ctr"/>
-            <a:r>
-              <a:rPr lang="en-IN" sz="1400" dirty="0">
-                <a:solidFill>
-                  <a:schemeClr val="bg1"/>
-                </a:solidFill>
-              </a:rPr>
-              <a:t>IGCAR</a:t>
+              <a:t>Sathishkumar</a:t>
             </a:r>
           </a:p>
         </p:txBody>
@@ -17192,6 +21778,264 @@
   <p:clrMapOvr>
     <a:masterClrMapping/>
   </p:clrMapOvr>
+  <p:timing>
+    <p:tnLst>
+      <p:par>
+        <p:cTn id="1" dur="indefinite" restart="never" nodeType="tmRoot">
+          <p:childTnLst>
+            <p:seq concurrent="1" nextAc="seek">
+              <p:cTn id="2" dur="indefinite" nodeType="mainSeq">
+                <p:childTnLst>
+                  <p:par>
+                    <p:cTn id="3" fill="hold">
+                      <p:stCondLst>
+                        <p:cond delay="indefinite"/>
+                      </p:stCondLst>
+                      <p:childTnLst>
+                        <p:par>
+                          <p:cTn id="4" fill="hold">
+                            <p:stCondLst>
+                              <p:cond delay="0"/>
+                            </p:stCondLst>
+                            <p:childTnLst>
+                              <p:par>
+                                <p:cTn id="5" presetID="1" presetClass="entr" presetSubtype="0" fill="hold" nodeType="clickEffect">
+                                  <p:stCondLst>
+                                    <p:cond delay="0"/>
+                                  </p:stCondLst>
+                                  <p:childTnLst>
+                                    <p:set>
+                                      <p:cBhvr>
+                                        <p:cTn id="6" dur="1" fill="hold">
+                                          <p:stCondLst>
+                                            <p:cond delay="0"/>
+                                          </p:stCondLst>
+                                        </p:cTn>
+                                        <p:tgtEl>
+                                          <p:spTgt spid="11"/>
+                                        </p:tgtEl>
+                                        <p:attrNameLst>
+                                          <p:attrName>style.visibility</p:attrName>
+                                        </p:attrNameLst>
+                                      </p:cBhvr>
+                                      <p:to>
+                                        <p:strVal val="visible"/>
+                                      </p:to>
+                                    </p:set>
+                                  </p:childTnLst>
+                                </p:cTn>
+                              </p:par>
+                            </p:childTnLst>
+                          </p:cTn>
+                        </p:par>
+                      </p:childTnLst>
+                    </p:cTn>
+                  </p:par>
+                  <p:par>
+                    <p:cTn id="7" fill="hold">
+                      <p:stCondLst>
+                        <p:cond delay="indefinite"/>
+                      </p:stCondLst>
+                      <p:childTnLst>
+                        <p:par>
+                          <p:cTn id="8" fill="hold">
+                            <p:stCondLst>
+                              <p:cond delay="0"/>
+                            </p:stCondLst>
+                            <p:childTnLst>
+                              <p:par>
+                                <p:cTn id="9" presetID="1" presetClass="entr" presetSubtype="0" fill="hold" grpId="0" nodeType="clickEffect">
+                                  <p:stCondLst>
+                                    <p:cond delay="0"/>
+                                  </p:stCondLst>
+                                  <p:childTnLst>
+                                    <p:set>
+                                      <p:cBhvr>
+                                        <p:cTn id="10" dur="1" fill="hold">
+                                          <p:stCondLst>
+                                            <p:cond delay="0"/>
+                                          </p:stCondLst>
+                                        </p:cTn>
+                                        <p:tgtEl>
+                                          <p:spTgt spid="17"/>
+                                        </p:tgtEl>
+                                        <p:attrNameLst>
+                                          <p:attrName>style.visibility</p:attrName>
+                                        </p:attrNameLst>
+                                      </p:cBhvr>
+                                      <p:to>
+                                        <p:strVal val="visible"/>
+                                      </p:to>
+                                    </p:set>
+                                  </p:childTnLst>
+                                </p:cTn>
+                              </p:par>
+                            </p:childTnLst>
+                          </p:cTn>
+                        </p:par>
+                      </p:childTnLst>
+                    </p:cTn>
+                  </p:par>
+                  <p:par>
+                    <p:cTn id="11" fill="hold">
+                      <p:stCondLst>
+                        <p:cond delay="indefinite"/>
+                      </p:stCondLst>
+                      <p:childTnLst>
+                        <p:par>
+                          <p:cTn id="12" fill="hold">
+                            <p:stCondLst>
+                              <p:cond delay="0"/>
+                            </p:stCondLst>
+                            <p:childTnLst>
+                              <p:par>
+                                <p:cTn id="13" presetID="1" presetClass="entr" presetSubtype="0" fill="hold" nodeType="clickEffect">
+                                  <p:stCondLst>
+                                    <p:cond delay="0"/>
+                                  </p:stCondLst>
+                                  <p:childTnLst>
+                                    <p:set>
+                                      <p:cBhvr>
+                                        <p:cTn id="14" dur="1" fill="hold">
+                                          <p:stCondLst>
+                                            <p:cond delay="0"/>
+                                          </p:stCondLst>
+                                        </p:cTn>
+                                        <p:tgtEl>
+                                          <p:spTgt spid="12"/>
+                                        </p:tgtEl>
+                                        <p:attrNameLst>
+                                          <p:attrName>style.visibility</p:attrName>
+                                        </p:attrNameLst>
+                                      </p:cBhvr>
+                                      <p:to>
+                                        <p:strVal val="visible"/>
+                                      </p:to>
+                                    </p:set>
+                                  </p:childTnLst>
+                                </p:cTn>
+                              </p:par>
+                            </p:childTnLst>
+                          </p:cTn>
+                        </p:par>
+                      </p:childTnLst>
+                    </p:cTn>
+                  </p:par>
+                  <p:par>
+                    <p:cTn id="15" fill="hold">
+                      <p:stCondLst>
+                        <p:cond delay="indefinite"/>
+                      </p:stCondLst>
+                      <p:childTnLst>
+                        <p:par>
+                          <p:cTn id="16" fill="hold">
+                            <p:stCondLst>
+                              <p:cond delay="0"/>
+                            </p:stCondLst>
+                            <p:childTnLst>
+                              <p:par>
+                                <p:cTn id="17" presetID="1" presetClass="entr" presetSubtype="0" fill="hold" nodeType="clickEffect">
+                                  <p:stCondLst>
+                                    <p:cond delay="0"/>
+                                  </p:stCondLst>
+                                  <p:childTnLst>
+                                    <p:set>
+                                      <p:cBhvr>
+                                        <p:cTn id="18" dur="1" fill="hold">
+                                          <p:stCondLst>
+                                            <p:cond delay="0"/>
+                                          </p:stCondLst>
+                                        </p:cTn>
+                                        <p:tgtEl>
+                                          <p:spTgt spid="13"/>
+                                        </p:tgtEl>
+                                        <p:attrNameLst>
+                                          <p:attrName>style.visibility</p:attrName>
+                                        </p:attrNameLst>
+                                      </p:cBhvr>
+                                      <p:to>
+                                        <p:strVal val="visible"/>
+                                      </p:to>
+                                    </p:set>
+                                  </p:childTnLst>
+                                </p:cTn>
+                              </p:par>
+                            </p:childTnLst>
+                          </p:cTn>
+                        </p:par>
+                      </p:childTnLst>
+                    </p:cTn>
+                  </p:par>
+                  <p:par>
+                    <p:cTn id="19" fill="hold">
+                      <p:stCondLst>
+                        <p:cond delay="indefinite"/>
+                      </p:stCondLst>
+                      <p:childTnLst>
+                        <p:par>
+                          <p:cTn id="20" fill="hold">
+                            <p:stCondLst>
+                              <p:cond delay="0"/>
+                            </p:stCondLst>
+                            <p:childTnLst>
+                              <p:par>
+                                <p:cTn id="21" presetID="1" presetClass="entr" presetSubtype="0" fill="hold" nodeType="clickEffect">
+                                  <p:stCondLst>
+                                    <p:cond delay="0"/>
+                                  </p:stCondLst>
+                                  <p:childTnLst>
+                                    <p:set>
+                                      <p:cBhvr>
+                                        <p:cTn id="22" dur="1" fill="hold">
+                                          <p:stCondLst>
+                                            <p:cond delay="0"/>
+                                          </p:stCondLst>
+                                        </p:cTn>
+                                        <p:tgtEl>
+                                          <p:spTgt spid="15"/>
+                                        </p:tgtEl>
+                                        <p:attrNameLst>
+                                          <p:attrName>style.visibility</p:attrName>
+                                        </p:attrNameLst>
+                                      </p:cBhvr>
+                                      <p:to>
+                                        <p:strVal val="visible"/>
+                                      </p:to>
+                                    </p:set>
+                                  </p:childTnLst>
+                                </p:cTn>
+                              </p:par>
+                            </p:childTnLst>
+                          </p:cTn>
+                        </p:par>
+                      </p:childTnLst>
+                    </p:cTn>
+                  </p:par>
+                </p:childTnLst>
+              </p:cTn>
+              <p:prevCondLst>
+                <p:cond evt="onPrev" delay="0">
+                  <p:tgtEl>
+                    <p:sldTgt/>
+                  </p:tgtEl>
+                </p:cond>
+              </p:prevCondLst>
+              <p:nextCondLst>
+                <p:cond evt="onNext" delay="0">
+                  <p:tgtEl>
+                    <p:sldTgt/>
+                  </p:tgtEl>
+                </p:cond>
+              </p:nextCondLst>
+            </p:seq>
+          </p:childTnLst>
+        </p:cTn>
+      </p:par>
+    </p:tnLst>
+    <p:bldLst>
+      <p:bldP spid="17" grpId="0"/>
+    </p:bldLst>
+  </p:timing>
 </p:sld>
 </file>
 
@@ -23664,6 +28508,278 @@
           </a:fontRef>
         </p:style>
       </p:cxnSp>
+      <p:graphicFrame>
+        <p:nvGraphicFramePr>
+          <p:cNvPr id="3" name="Table 2">
+            <a:extLst>
+              <a:ext uri="{FF2B5EF4-FFF2-40B4-BE49-F238E27FC236}">
+                <a16:creationId xmlns:a16="http://schemas.microsoft.com/office/drawing/2014/main" id="{1C2312B4-9B64-411A-9C08-E26E4D8C7324}"/>
+              </a:ext>
+            </a:extLst>
+          </p:cNvPr>
+          <p:cNvGraphicFramePr>
+            <a:graphicFrameLocks noGrp="1"/>
+          </p:cNvGraphicFramePr>
+          <p:nvPr>
+            <p:extLst>
+              <p:ext uri="{D42A27DB-BD31-4B8C-83A1-F6EECF244321}">
+                <p14:modId xmlns:p14="http://schemas.microsoft.com/office/powerpoint/2010/main" val="3730526780"/>
+              </p:ext>
+            </p:extLst>
+          </p:nvPr>
+        </p:nvGraphicFramePr>
+        <p:xfrm>
+          <a:off x="4876799" y="3631341"/>
+          <a:ext cx="2664692" cy="2225040"/>
+        </p:xfrm>
+        <a:graphic>
+          <a:graphicData uri="http://schemas.openxmlformats.org/drawingml/2006/table">
+            <a:tbl>
+              <a:tblPr firstRow="1" bandRow="1">
+                <a:tableStyleId>{5C22544A-7EE6-4342-B048-85BDC9FD1C3A}</a:tableStyleId>
+              </a:tblPr>
+              <a:tblGrid>
+                <a:gridCol w="1332346">
+                  <a:extLst>
+                    <a:ext uri="{9D8B030D-6E8A-4147-A177-3AD203B41FA5}">
+                      <a16:colId xmlns:a16="http://schemas.microsoft.com/office/drawing/2014/main" val="2792863021"/>
+                    </a:ext>
+                  </a:extLst>
+                </a:gridCol>
+                <a:gridCol w="1332346">
+                  <a:extLst>
+                    <a:ext uri="{9D8B030D-6E8A-4147-A177-3AD203B41FA5}">
+                      <a16:colId xmlns:a16="http://schemas.microsoft.com/office/drawing/2014/main" val="2952665996"/>
+                    </a:ext>
+                  </a:extLst>
+                </a:gridCol>
+              </a:tblGrid>
+              <a:tr h="370840">
+                <a:tc>
+                  <a:txBody>
+                    <a:bodyPr/>
+                    <a:lstStyle/>
+                    <a:p>
+                      <a:pPr algn="ctr"/>
+                      <a:r>
+                        <a:rPr lang="en-US" dirty="0"/>
+                        <a:t>Parameters</a:t>
+                      </a:r>
+                      <a:endParaRPr lang="en-IN" dirty="0"/>
+                    </a:p>
+                  </a:txBody>
+                  <a:tcPr/>
+                </a:tc>
+                <a:tc>
+                  <a:txBody>
+                    <a:bodyPr/>
+                    <a:lstStyle/>
+                    <a:p>
+                      <a:pPr algn="ctr"/>
+                      <a:r>
+                        <a:rPr lang="en-US" dirty="0"/>
+                        <a:t>Value</a:t>
+                      </a:r>
+                      <a:endParaRPr lang="en-IN" dirty="0"/>
+                    </a:p>
+                  </a:txBody>
+                  <a:tcPr/>
+                </a:tc>
+                <a:extLst>
+                  <a:ext uri="{0D108BD9-81ED-4DB2-BD59-A6C34878D82A}">
+                    <a16:rowId xmlns:a16="http://schemas.microsoft.com/office/drawing/2014/main" val="1286056942"/>
+                  </a:ext>
+                </a:extLst>
+              </a:tr>
+              <a:tr h="370840">
+                <a:tc>
+                  <a:txBody>
+                    <a:bodyPr/>
+                    <a:lstStyle/>
+                    <a:p>
+                      <a:pPr algn="ctr"/>
+                      <a:r>
+                        <a:rPr lang="en-US" dirty="0"/>
+                        <a:t>Version</a:t>
+                      </a:r>
+                      <a:endParaRPr lang="en-IN" dirty="0"/>
+                    </a:p>
+                  </a:txBody>
+                  <a:tcPr/>
+                </a:tc>
+                <a:tc>
+                  <a:txBody>
+                    <a:bodyPr/>
+                    <a:lstStyle/>
+                    <a:p>
+                      <a:pPr algn="ctr"/>
+                      <a:r>
+                        <a:rPr lang="en-US" dirty="0"/>
+                        <a:t>v8 medium</a:t>
+                      </a:r>
+                      <a:endParaRPr lang="en-IN" dirty="0"/>
+                    </a:p>
+                  </a:txBody>
+                  <a:tcPr/>
+                </a:tc>
+                <a:extLst>
+                  <a:ext uri="{0D108BD9-81ED-4DB2-BD59-A6C34878D82A}">
+                    <a16:rowId xmlns:a16="http://schemas.microsoft.com/office/drawing/2014/main" val="757616855"/>
+                  </a:ext>
+                </a:extLst>
+              </a:tr>
+              <a:tr h="370840">
+                <a:tc>
+                  <a:txBody>
+                    <a:bodyPr/>
+                    <a:lstStyle/>
+                    <a:p>
+                      <a:pPr algn="ctr"/>
+                      <a:r>
+                        <a:rPr lang="en-US" dirty="0"/>
+                        <a:t>Parameters</a:t>
+                      </a:r>
+                      <a:endParaRPr lang="en-IN" dirty="0"/>
+                    </a:p>
+                  </a:txBody>
+                  <a:tcPr/>
+                </a:tc>
+                <a:tc>
+                  <a:txBody>
+                    <a:bodyPr/>
+                    <a:lstStyle/>
+                    <a:p>
+                      <a:pPr algn="ctr"/>
+                      <a:r>
+                        <a:rPr lang="en-US" dirty="0"/>
+                        <a:t>25M</a:t>
+                      </a:r>
+                      <a:endParaRPr lang="en-IN" dirty="0"/>
+                    </a:p>
+                  </a:txBody>
+                  <a:tcPr/>
+                </a:tc>
+                <a:extLst>
+                  <a:ext uri="{0D108BD9-81ED-4DB2-BD59-A6C34878D82A}">
+                    <a16:rowId xmlns:a16="http://schemas.microsoft.com/office/drawing/2014/main" val="3639362220"/>
+                  </a:ext>
+                </a:extLst>
+              </a:tr>
+              <a:tr h="370840">
+                <a:tc>
+                  <a:txBody>
+                    <a:bodyPr/>
+                    <a:lstStyle/>
+                    <a:p>
+                      <a:pPr algn="ctr"/>
+                      <a:r>
+                        <a:rPr lang="en-US" dirty="0"/>
+                        <a:t>Input Size</a:t>
+                      </a:r>
+                      <a:endParaRPr lang="en-IN" dirty="0"/>
+                    </a:p>
+                  </a:txBody>
+                  <a:tcPr/>
+                </a:tc>
+                <a:tc>
+                  <a:txBody>
+                    <a:bodyPr/>
+                    <a:lstStyle/>
+                    <a:p>
+                      <a:pPr algn="ctr"/>
+                      <a:r>
+                        <a:rPr lang="en-US" dirty="0"/>
+                        <a:t>640 X 640</a:t>
+                      </a:r>
+                      <a:endParaRPr lang="en-IN" dirty="0"/>
+                    </a:p>
+                  </a:txBody>
+                  <a:tcPr/>
+                </a:tc>
+                <a:extLst>
+                  <a:ext uri="{0D108BD9-81ED-4DB2-BD59-A6C34878D82A}">
+                    <a16:rowId xmlns:a16="http://schemas.microsoft.com/office/drawing/2014/main" val="3127248469"/>
+                  </a:ext>
+                </a:extLst>
+              </a:tr>
+              <a:tr h="370840">
+                <a:tc>
+                  <a:txBody>
+                    <a:bodyPr/>
+                    <a:lstStyle/>
+                    <a:p>
+                      <a:pPr algn="ctr"/>
+                      <a:r>
+                        <a:rPr lang="en-US" dirty="0"/>
+                        <a:t>Conf</a:t>
+                      </a:r>
+                      <a:endParaRPr lang="en-IN" dirty="0"/>
+                    </a:p>
+                  </a:txBody>
+                  <a:tcPr/>
+                </a:tc>
+                <a:tc>
+                  <a:txBody>
+                    <a:bodyPr/>
+                    <a:lstStyle/>
+                    <a:p>
+                      <a:pPr algn="ctr"/>
+                      <a:r>
+                        <a:rPr lang="en-US" dirty="0"/>
+                        <a:t>0.25</a:t>
+                      </a:r>
+                      <a:endParaRPr lang="en-IN" dirty="0"/>
+                    </a:p>
+                  </a:txBody>
+                  <a:tcPr/>
+                </a:tc>
+                <a:extLst>
+                  <a:ext uri="{0D108BD9-81ED-4DB2-BD59-A6C34878D82A}">
+                    <a16:rowId xmlns:a16="http://schemas.microsoft.com/office/drawing/2014/main" val="1965356155"/>
+                  </a:ext>
+                </a:extLst>
+              </a:tr>
+              <a:tr h="370840">
+                <a:tc>
+                  <a:txBody>
+                    <a:bodyPr/>
+                    <a:lstStyle/>
+                    <a:p>
+                      <a:pPr algn="ctr"/>
+                      <a:r>
+                        <a:rPr lang="en-US" dirty="0"/>
+                        <a:t>IOU</a:t>
+                      </a:r>
+                      <a:endParaRPr lang="en-IN" dirty="0"/>
+                    </a:p>
+                  </a:txBody>
+                  <a:tcPr/>
+                </a:tc>
+                <a:tc>
+                  <a:txBody>
+                    <a:bodyPr/>
+                    <a:lstStyle/>
+                    <a:p>
+                      <a:pPr algn="ctr"/>
+                      <a:r>
+                        <a:rPr lang="en-US" dirty="0"/>
+                        <a:t>0.4</a:t>
+                      </a:r>
+                      <a:endParaRPr lang="en-IN" dirty="0"/>
+                    </a:p>
+                  </a:txBody>
+                  <a:tcPr/>
+                </a:tc>
+                <a:extLst>
+                  <a:ext uri="{0D108BD9-81ED-4DB2-BD59-A6C34878D82A}">
+                    <a16:rowId xmlns:a16="http://schemas.microsoft.com/office/drawing/2014/main" val="2896575761"/>
+                  </a:ext>
+                </a:extLst>
+              </a:tr>
+            </a:tbl>
+          </a:graphicData>
+        </a:graphic>
+      </p:graphicFrame>
     </p:spTree>
     <p:extLst>
       <p:ext uri="{BB962C8B-B14F-4D97-AF65-F5344CB8AC3E}">
@@ -23674,6 +28790,273 @@
   <p:clrMapOvr>
     <a:masterClrMapping/>
   </p:clrMapOvr>
+  <p:timing>
+    <p:tnLst>
+      <p:par>
+        <p:cTn id="1" dur="indefinite" restart="never" nodeType="tmRoot">
+          <p:childTnLst>
+            <p:seq concurrent="1" nextAc="seek">
+              <p:cTn id="2" dur="indefinite" nodeType="mainSeq">
+                <p:childTnLst>
+                  <p:par>
+                    <p:cTn id="3" fill="hold">
+                      <p:stCondLst>
+                        <p:cond delay="indefinite"/>
+                      </p:stCondLst>
+                      <p:childTnLst>
+                        <p:par>
+                          <p:cTn id="4" fill="hold">
+                            <p:stCondLst>
+                              <p:cond delay="0"/>
+                            </p:stCondLst>
+                            <p:childTnLst>
+                              <p:par>
+                                <p:cTn id="5" presetID="1" presetClass="entr" presetSubtype="0" fill="hold" nodeType="clickEffect">
+                                  <p:stCondLst>
+                                    <p:cond delay="0"/>
+                                  </p:stCondLst>
+                                  <p:childTnLst>
+                                    <p:set>
+                                      <p:cBhvr>
+                                        <p:cTn id="6" dur="1" fill="hold">
+                                          <p:stCondLst>
+                                            <p:cond delay="0"/>
+                                          </p:stCondLst>
+                                        </p:cTn>
+                                        <p:tgtEl>
+                                          <p:spTgt spid="11"/>
+                                        </p:tgtEl>
+                                        <p:attrNameLst>
+                                          <p:attrName>style.visibility</p:attrName>
+                                        </p:attrNameLst>
+                                      </p:cBhvr>
+                                      <p:to>
+                                        <p:strVal val="visible"/>
+                                      </p:to>
+                                    </p:set>
+                                  </p:childTnLst>
+                                </p:cTn>
+                              </p:par>
+                            </p:childTnLst>
+                          </p:cTn>
+                        </p:par>
+                      </p:childTnLst>
+                    </p:cTn>
+                  </p:par>
+                  <p:par>
+                    <p:cTn id="7" fill="hold">
+                      <p:stCondLst>
+                        <p:cond delay="indefinite"/>
+                      </p:stCondLst>
+                      <p:childTnLst>
+                        <p:par>
+                          <p:cTn id="8" fill="hold">
+                            <p:stCondLst>
+                              <p:cond delay="0"/>
+                            </p:stCondLst>
+                            <p:childTnLst>
+                              <p:par>
+                                <p:cTn id="9" presetID="1" presetClass="entr" presetSubtype="0" fill="hold" nodeType="clickEffect">
+                                  <p:stCondLst>
+                                    <p:cond delay="0"/>
+                                  </p:stCondLst>
+                                  <p:childTnLst>
+                                    <p:set>
+                                      <p:cBhvr>
+                                        <p:cTn id="10" dur="1" fill="hold">
+                                          <p:stCondLst>
+                                            <p:cond delay="0"/>
+                                          </p:stCondLst>
+                                        </p:cTn>
+                                        <p:tgtEl>
+                                          <p:spTgt spid="17"/>
+                                        </p:tgtEl>
+                                        <p:attrNameLst>
+                                          <p:attrName>style.visibility</p:attrName>
+                                        </p:attrNameLst>
+                                      </p:cBhvr>
+                                      <p:to>
+                                        <p:strVal val="visible"/>
+                                      </p:to>
+                                    </p:set>
+                                  </p:childTnLst>
+                                </p:cTn>
+                              </p:par>
+                              <p:par>
+                                <p:cTn id="11" presetID="1" presetClass="entr" presetSubtype="0" fill="hold" grpId="0" nodeType="withEffect">
+                                  <p:stCondLst>
+                                    <p:cond delay="0"/>
+                                  </p:stCondLst>
+                                  <p:childTnLst>
+                                    <p:set>
+                                      <p:cBhvr>
+                                        <p:cTn id="12" dur="1" fill="hold">
+                                          <p:stCondLst>
+                                            <p:cond delay="0"/>
+                                          </p:stCondLst>
+                                        </p:cTn>
+                                        <p:tgtEl>
+                                          <p:spTgt spid="13"/>
+                                        </p:tgtEl>
+                                        <p:attrNameLst>
+                                          <p:attrName>style.visibility</p:attrName>
+                                        </p:attrNameLst>
+                                      </p:cBhvr>
+                                      <p:to>
+                                        <p:strVal val="visible"/>
+                                      </p:to>
+                                    </p:set>
+                                  </p:childTnLst>
+                                </p:cTn>
+                              </p:par>
+                            </p:childTnLst>
+                          </p:cTn>
+                        </p:par>
+                      </p:childTnLst>
+                    </p:cTn>
+                  </p:par>
+                  <p:par>
+                    <p:cTn id="13" fill="hold">
+                      <p:stCondLst>
+                        <p:cond delay="indefinite"/>
+                      </p:stCondLst>
+                      <p:childTnLst>
+                        <p:par>
+                          <p:cTn id="14" fill="hold">
+                            <p:stCondLst>
+                              <p:cond delay="0"/>
+                            </p:stCondLst>
+                            <p:childTnLst>
+                              <p:par>
+                                <p:cTn id="15" presetID="1" presetClass="entr" presetSubtype="0" fill="hold" nodeType="clickEffect">
+                                  <p:stCondLst>
+                                    <p:cond delay="0"/>
+                                  </p:stCondLst>
+                                  <p:childTnLst>
+                                    <p:set>
+                                      <p:cBhvr>
+                                        <p:cTn id="16" dur="1" fill="hold">
+                                          <p:stCondLst>
+                                            <p:cond delay="0"/>
+                                          </p:stCondLst>
+                                        </p:cTn>
+                                        <p:tgtEl>
+                                          <p:spTgt spid="18"/>
+                                        </p:tgtEl>
+                                        <p:attrNameLst>
+                                          <p:attrName>style.visibility</p:attrName>
+                                        </p:attrNameLst>
+                                      </p:cBhvr>
+                                      <p:to>
+                                        <p:strVal val="visible"/>
+                                      </p:to>
+                                    </p:set>
+                                  </p:childTnLst>
+                                </p:cTn>
+                              </p:par>
+                              <p:par>
+                                <p:cTn id="17" presetID="1" presetClass="entr" presetSubtype="0" fill="hold" nodeType="withEffect">
+                                  <p:stCondLst>
+                                    <p:cond delay="0"/>
+                                  </p:stCondLst>
+                                  <p:childTnLst>
+                                    <p:set>
+                                      <p:cBhvr>
+                                        <p:cTn id="18" dur="1" fill="hold">
+                                          <p:stCondLst>
+                                            <p:cond delay="0"/>
+                                          </p:stCondLst>
+                                        </p:cTn>
+                                        <p:tgtEl>
+                                          <p:spTgt spid="12"/>
+                                        </p:tgtEl>
+                                        <p:attrNameLst>
+                                          <p:attrName>style.visibility</p:attrName>
+                                        </p:attrNameLst>
+                                      </p:cBhvr>
+                                      <p:to>
+                                        <p:strVal val="visible"/>
+                                      </p:to>
+                                    </p:set>
+                                  </p:childTnLst>
+                                </p:cTn>
+                              </p:par>
+                            </p:childTnLst>
+                          </p:cTn>
+                        </p:par>
+                      </p:childTnLst>
+                    </p:cTn>
+                  </p:par>
+                  <p:par>
+                    <p:cTn id="19" fill="hold">
+                      <p:stCondLst>
+                        <p:cond delay="indefinite"/>
+                      </p:stCondLst>
+                      <p:childTnLst>
+                        <p:par>
+                          <p:cTn id="20" fill="hold">
+                            <p:stCondLst>
+                              <p:cond delay="0"/>
+                            </p:stCondLst>
+                            <p:childTnLst>
+                              <p:par>
+                                <p:cTn id="21" presetID="1" presetClass="entr" presetSubtype="0" fill="hold" nodeType="clickEffect">
+                                  <p:stCondLst>
+                                    <p:cond delay="0"/>
+                                  </p:stCondLst>
+                                  <p:childTnLst>
+                                    <p:set>
+                                      <p:cBhvr>
+                                        <p:cTn id="22" dur="1" fill="hold">
+                                          <p:stCondLst>
+                                            <p:cond delay="0"/>
+                                          </p:stCondLst>
+                                        </p:cTn>
+                                        <p:tgtEl>
+                                          <p:spTgt spid="3"/>
+                                        </p:tgtEl>
+                                        <p:attrNameLst>
+                                          <p:attrName>style.visibility</p:attrName>
+                                        </p:attrNameLst>
+                                      </p:cBhvr>
+                                      <p:to>
+                                        <p:strVal val="visible"/>
+                                      </p:to>
+                                    </p:set>
+                                  </p:childTnLst>
+                                </p:cTn>
+                              </p:par>
+                            </p:childTnLst>
+                          </p:cTn>
+                        </p:par>
+                      </p:childTnLst>
+                    </p:cTn>
+                  </p:par>
+                </p:childTnLst>
+              </p:cTn>
+              <p:prevCondLst>
+                <p:cond evt="onPrev" delay="0">
+                  <p:tgtEl>
+                    <p:sldTgt/>
+                  </p:tgtEl>
+                </p:cond>
+              </p:prevCondLst>
+              <p:nextCondLst>
+                <p:cond evt="onNext" delay="0">
+                  <p:tgtEl>
+                    <p:sldTgt/>
+                  </p:tgtEl>
+                </p:cond>
+              </p:nextCondLst>
+            </p:seq>
+          </p:childTnLst>
+        </p:cTn>
+      </p:par>
+    </p:tnLst>
+    <p:bldLst>
+      <p:bldP spid="13" grpId="0" animBg="1"/>
+    </p:bldLst>
+  </p:timing>
 </p:sld>
 </file>
 
